--- a/dokumentumok/Prezentáció_NagyLevedSamuel_TothTamas.pptx
+++ b/dokumentumok/Prezentáció_NagyLevedSamuel_TothTamas.pptx
@@ -270,8 +270,11 @@
     </a:lvl9pPr>
   </p:defaultTextStyle>
   <p:extLst>
+    <p:ext uri="{EFAFB233-063F-42B5-8137-9DF3F51BA10A}">
+      <p15:sldGuideLst xmlns:p15="http://schemas.microsoft.com/office/powerpoint/2012/main"/>
+    </p:ext>
     <p:ext uri="GoogleSlidesCustomDataVersion2">
-      <go:slidesCustomData xmlns:go="http://customooxmlschemas.google.com/" xmlns:ahyp="http://schemas.microsoft.com/office/drawing/2018/hyperlinkcolor" xmlns:p15="http://schemas.microsoft.com/office/powerpoint/2012/main" xmlns:p14="http://schemas.microsoft.com/office/powerpoint/2010/main" xmlns:com="http://schemas.openxmlformats.org/drawingml/2006/compatibility" xmlns:pvml="urn:schemas-microsoft-com:office:powerpoint" xmlns:v="urn:schemas-microsoft-com:vml" xmlns:o="urn:schemas-microsoft-com:office:office" xmlns:dgm="http://schemas.openxmlformats.org/drawingml/2006/diagram" xmlns:c="http://schemas.openxmlformats.org/drawingml/2006/chart" xmlns:mv="urn:schemas-microsoft-com:mac:vml" xmlns:mc="http://schemas.openxmlformats.org/markup-compatibility/2006" xmlns="" r:id="rId24" roundtripDataSignature="AMtx7mj67VHAuCHlscAUacmt/Mbt/wFFlA=="/>
+      <go:slidesCustomData xmlns="" xmlns:mc="http://schemas.openxmlformats.org/markup-compatibility/2006" xmlns:mv="urn:schemas-microsoft-com:mac:vml" xmlns:c="http://schemas.openxmlformats.org/drawingml/2006/chart" xmlns:dgm="http://schemas.openxmlformats.org/drawingml/2006/diagram" xmlns:o="urn:schemas-microsoft-com:office:office" xmlns:v="urn:schemas-microsoft-com:vml" xmlns:pvml="urn:schemas-microsoft-com:office:powerpoint" xmlns:com="http://schemas.openxmlformats.org/drawingml/2006/compatibility" xmlns:p14="http://schemas.microsoft.com/office/powerpoint/2010/main" xmlns:p15="http://schemas.microsoft.com/office/powerpoint/2012/main" xmlns:ahyp="http://schemas.microsoft.com/office/drawing/2018/hyperlinkcolor" xmlns:go="http://customooxmlschemas.google.com/" r:id="rId24" roundtripDataSignature="AMtx7mj67VHAuCHlscAUacmt/Mbt/wFFlA=="/>
     </p:ext>
   </p:extLst>
 </p:presentation>
@@ -1305,8 +1308,8 @@
         </p:nvSpPr>
         <p:spPr>
           <a:xfrm>
-            <a:off x="1143225" y="685800"/>
-            <a:ext cx="4572225" cy="3429000"/>
+            <a:off x="381000" y="685800"/>
+            <a:ext cx="6096000" cy="3429000"/>
           </a:xfrm>
           <a:custGeom>
             <a:avLst/>
@@ -1617,8 +1620,8 @@
         </p:nvSpPr>
         <p:spPr>
           <a:xfrm>
-            <a:off x="1143225" y="685800"/>
-            <a:ext cx="4572225" cy="3429000"/>
+            <a:off x="381000" y="685800"/>
+            <a:ext cx="6096000" cy="3429000"/>
           </a:xfrm>
           <a:custGeom>
             <a:avLst/>
@@ -13018,13 +13021,13 @@
   <p:clrMapOvr>
     <a:masterClrMapping/>
   </p:clrMapOvr>
-  <mc:AlternateContent xmlns:mc="http://schemas.openxmlformats.org/markup-compatibility/2006">
-    <mc:Choice xmlns:p159="http://schemas.microsoft.com/office/powerpoint/2015/09/main" Requires="p159">
+  <mc:AlternateContent xmlns:mc="http://schemas.openxmlformats.org/markup-compatibility/2006" xmlns:p159="http://schemas.microsoft.com/office/powerpoint/2015/09/main">
+    <mc:Choice Requires="p159">
       <p:transition xmlns:p14="http://schemas.microsoft.com/office/powerpoint/2010/main" spd="slow" p14:dur="2000">
         <p159:morph option="byObject"/>
       </p:transition>
     </mc:Choice>
-    <mc:Fallback>
+    <mc:Fallback xmlns="">
       <p:transition spd="slow">
         <p:fade/>
       </p:transition>
@@ -13399,13 +13402,13 @@
   <p:clrMapOvr>
     <a:masterClrMapping/>
   </p:clrMapOvr>
-  <mc:AlternateContent xmlns:mc="http://schemas.openxmlformats.org/markup-compatibility/2006">
-    <mc:Choice xmlns:p159="http://schemas.microsoft.com/office/powerpoint/2015/09/main" Requires="p159">
+  <mc:AlternateContent xmlns:mc="http://schemas.openxmlformats.org/markup-compatibility/2006" xmlns:p159="http://schemas.microsoft.com/office/powerpoint/2015/09/main">
+    <mc:Choice Requires="p159">
       <p:transition xmlns:p14="http://schemas.microsoft.com/office/powerpoint/2010/main" spd="slow" p14:dur="2000">
         <p159:morph option="byObject"/>
       </p:transition>
     </mc:Choice>
-    <mc:Fallback>
+    <mc:Fallback xmlns="">
       <p:transition spd="slow">
         <p:fade/>
       </p:transition>
@@ -13795,13 +13798,13 @@
   <p:clrMapOvr>
     <a:masterClrMapping/>
   </p:clrMapOvr>
-  <mc:AlternateContent xmlns:mc="http://schemas.openxmlformats.org/markup-compatibility/2006">
-    <mc:Choice xmlns:p159="http://schemas.microsoft.com/office/powerpoint/2015/09/main" Requires="p159">
+  <mc:AlternateContent xmlns:mc="http://schemas.openxmlformats.org/markup-compatibility/2006" xmlns:p159="http://schemas.microsoft.com/office/powerpoint/2015/09/main">
+    <mc:Choice Requires="p159">
       <p:transition xmlns:p14="http://schemas.microsoft.com/office/powerpoint/2010/main" spd="slow" p14:dur="2000">
         <p159:morph option="byObject"/>
       </p:transition>
     </mc:Choice>
-    <mc:Fallback>
+    <mc:Fallback xmlns="">
       <p:transition spd="slow">
         <p:fade/>
       </p:transition>
@@ -13913,13 +13916,13 @@
   <p:clrMapOvr>
     <a:masterClrMapping/>
   </p:clrMapOvr>
-  <mc:AlternateContent xmlns:mc="http://schemas.openxmlformats.org/markup-compatibility/2006">
-    <mc:Choice xmlns:p159="http://schemas.microsoft.com/office/powerpoint/2015/09/main" Requires="p159">
+  <mc:AlternateContent xmlns:mc="http://schemas.openxmlformats.org/markup-compatibility/2006" xmlns:p159="http://schemas.microsoft.com/office/powerpoint/2015/09/main">
+    <mc:Choice Requires="p159">
       <p:transition xmlns:p14="http://schemas.microsoft.com/office/powerpoint/2010/main" spd="slow" p14:dur="2000">
         <p159:morph option="byObject"/>
       </p:transition>
     </mc:Choice>
-    <mc:Fallback>
+    <mc:Fallback xmlns="">
       <p:transition spd="slow">
         <p:fade/>
       </p:transition>
@@ -14031,13 +14034,13 @@
   <p:clrMapOvr>
     <a:masterClrMapping/>
   </p:clrMapOvr>
-  <mc:AlternateContent xmlns:mc="http://schemas.openxmlformats.org/markup-compatibility/2006">
-    <mc:Choice xmlns:p159="http://schemas.microsoft.com/office/powerpoint/2015/09/main" Requires="p159">
+  <mc:AlternateContent xmlns:mc="http://schemas.openxmlformats.org/markup-compatibility/2006" xmlns:p159="http://schemas.microsoft.com/office/powerpoint/2015/09/main">
+    <mc:Choice Requires="p159">
       <p:transition xmlns:p14="http://schemas.microsoft.com/office/powerpoint/2010/main" spd="slow" p14:dur="2000">
         <p159:morph option="byObject"/>
       </p:transition>
     </mc:Choice>
-    <mc:Fallback>
+    <mc:Fallback xmlns="">
       <p:transition spd="slow">
         <p:fade/>
       </p:transition>
@@ -14152,8 +14155,8 @@
         </p:nvSpPr>
         <p:spPr>
           <a:xfrm>
-            <a:off x="801385" y="2065106"/>
-            <a:ext cx="4336235" cy="369332"/>
+            <a:off x="1038208" y="2091420"/>
+            <a:ext cx="4336235" cy="1292621"/>
           </a:xfrm>
           <a:prstGeom prst="rect">
             <a:avLst/>
@@ -14179,7 +14182,7 @@
               <a:buNone/>
             </a:pPr>
             <a:r>
-              <a:rPr lang="hu-HU" sz="1800">
+              <a:rPr lang="hu-HU" sz="1600" dirty="0">
                 <a:solidFill>
                   <a:schemeClr val="dk1"/>
                 </a:solidFill>
@@ -14187,10 +14190,47 @@
                 <a:ea typeface="Arial"/>
                 <a:cs typeface="Arial"/>
                 <a:sym typeface="Arial"/>
+                <a:hlinkClick r:id="rId3"/>
               </a:rPr>
               <a:t>www.chatgpt.com</a:t>
             </a:r>
-            <a:endParaRPr/>
+            <a:endParaRPr lang="hu-HU" sz="1600" dirty="0">
+              <a:solidFill>
+                <a:schemeClr val="dk1"/>
+              </a:solidFill>
+              <a:latin typeface="Arial"/>
+              <a:ea typeface="Arial"/>
+              <a:cs typeface="Arial"/>
+              <a:sym typeface="Arial"/>
+            </a:endParaRPr>
+          </a:p>
+          <a:p>
+            <a:pPr lvl="0"/>
+            <a:r>
+              <a:rPr lang="hu-HU" sz="1600" dirty="0">
+                <a:hlinkClick r:id="rId4"/>
+              </a:rPr>
+              <a:t>https://vueframework.com</a:t>
+            </a:r>
+            <a:endParaRPr lang="hu-HU" sz="1600" dirty="0"/>
+          </a:p>
+          <a:p>
+            <a:pPr lvl="0"/>
+            <a:r>
+              <a:rPr lang="hu-HU" sz="1600" dirty="0">
+                <a:hlinkClick r:id="rId5"/>
+              </a:rPr>
+              <a:t>https://laravel.com/docs/12.x</a:t>
+            </a:r>
+            <a:endParaRPr lang="hu-HU" sz="1600" dirty="0"/>
+          </a:p>
+          <a:p>
+            <a:pPr lvl="0"/>
+            <a:endParaRPr lang="hu-HU" sz="1600" dirty="0"/>
+          </a:p>
+          <a:p>
+            <a:pPr lvl="0"/>
+            <a:endParaRPr dirty="0"/>
           </a:p>
         </p:txBody>
       </p:sp>
@@ -14199,13 +14239,13 @@
   <p:clrMapOvr>
     <a:masterClrMapping/>
   </p:clrMapOvr>
-  <mc:AlternateContent xmlns:mc="http://schemas.openxmlformats.org/markup-compatibility/2006">
-    <mc:Choice xmlns:p159="http://schemas.microsoft.com/office/powerpoint/2015/09/main" Requires="p159">
+  <mc:AlternateContent xmlns:mc="http://schemas.openxmlformats.org/markup-compatibility/2006" xmlns:p159="http://schemas.microsoft.com/office/powerpoint/2015/09/main">
+    <mc:Choice Requires="p159">
       <p:transition xmlns:p14="http://schemas.microsoft.com/office/powerpoint/2010/main" spd="slow" p14:dur="2000">
         <p159:morph option="byObject"/>
       </p:transition>
     </mc:Choice>
-    <mc:Fallback>
+    <mc:Fallback xmlns="">
       <p:transition spd="slow">
         <p:fade/>
       </p:transition>
@@ -14317,13 +14357,13 @@
   <p:clrMapOvr>
     <a:masterClrMapping/>
   </p:clrMapOvr>
-  <mc:AlternateContent xmlns:mc="http://schemas.openxmlformats.org/markup-compatibility/2006">
-    <mc:Choice xmlns:p159="http://schemas.microsoft.com/office/powerpoint/2015/09/main" Requires="p159">
+  <mc:AlternateContent xmlns:mc="http://schemas.openxmlformats.org/markup-compatibility/2006" xmlns:p159="http://schemas.microsoft.com/office/powerpoint/2015/09/main">
+    <mc:Choice Requires="p159">
       <p:transition xmlns:p14="http://schemas.microsoft.com/office/powerpoint/2010/main" spd="slow" p14:dur="2000">
         <p159:morph option="byObject"/>
       </p:transition>
     </mc:Choice>
-    <mc:Fallback>
+    <mc:Fallback xmlns="">
       <p:transition spd="slow">
         <p:fade/>
       </p:transition>
@@ -14845,13 +14885,13 @@
   <p:clrMapOvr>
     <a:masterClrMapping/>
   </p:clrMapOvr>
-  <mc:AlternateContent xmlns:mc="http://schemas.openxmlformats.org/markup-compatibility/2006">
-    <mc:Choice xmlns:p159="http://schemas.microsoft.com/office/powerpoint/2015/09/main" Requires="p159">
+  <mc:AlternateContent xmlns:mc="http://schemas.openxmlformats.org/markup-compatibility/2006" xmlns:p159="http://schemas.microsoft.com/office/powerpoint/2015/09/main">
+    <mc:Choice Requires="p159">
       <p:transition xmlns:p14="http://schemas.microsoft.com/office/powerpoint/2010/main" spd="slow" p14:dur="2000">
         <p159:morph option="byObject"/>
       </p:transition>
     </mc:Choice>
-    <mc:Fallback>
+    <mc:Fallback xmlns="">
       <p:transition spd="slow">
         <p:fade/>
       </p:transition>
@@ -15054,15 +15094,15 @@
               <a:buNone/>
             </a:pPr>
             <a:r>
-              <a:rPr lang="hu-HU" sz="4400">
+              <a:rPr lang="hu-HU" sz="4400" dirty="0">
                 <a:latin typeface="Cambria"/>
                 <a:ea typeface="Cambria"/>
                 <a:cs typeface="Cambria"/>
                 <a:sym typeface="Cambria"/>
               </a:rPr>
-              <a:t>A program fő funkciói</a:t>
+              <a:t>A projekt fő funkciói</a:t>
             </a:r>
-            <a:endParaRPr/>
+            <a:endParaRPr dirty="0"/>
           </a:p>
         </p:txBody>
       </p:sp>
@@ -15409,13 +15449,13 @@
   <p:clrMapOvr>
     <a:masterClrMapping/>
   </p:clrMapOvr>
-  <mc:AlternateContent xmlns:mc="http://schemas.openxmlformats.org/markup-compatibility/2006">
-    <mc:Choice xmlns:p159="http://schemas.microsoft.com/office/powerpoint/2015/09/main" Requires="p159">
+  <mc:AlternateContent xmlns:mc="http://schemas.openxmlformats.org/markup-compatibility/2006" xmlns:p159="http://schemas.microsoft.com/office/powerpoint/2015/09/main">
+    <mc:Choice Requires="p159">
       <p:transition xmlns:p14="http://schemas.microsoft.com/office/powerpoint/2010/main" spd="slow" p14:dur="2000">
         <p159:morph option="byObject"/>
       </p:transition>
     </mc:Choice>
-    <mc:Fallback>
+    <mc:Fallback xmlns="">
       <p:transition spd="slow">
         <p:fade/>
       </p:transition>
@@ -15878,13 +15918,13 @@
   <p:clrMapOvr>
     <a:masterClrMapping/>
   </p:clrMapOvr>
-  <mc:AlternateContent xmlns:mc="http://schemas.openxmlformats.org/markup-compatibility/2006">
-    <mc:Choice xmlns:p159="http://schemas.microsoft.com/office/powerpoint/2015/09/main" Requires="p159">
+  <mc:AlternateContent xmlns:mc="http://schemas.openxmlformats.org/markup-compatibility/2006" xmlns:p159="http://schemas.microsoft.com/office/powerpoint/2015/09/main">
+    <mc:Choice Requires="p159">
       <p:transition xmlns:p14="http://schemas.microsoft.com/office/powerpoint/2010/main" spd="slow" p14:dur="2000">
         <p159:morph option="byObject"/>
       </p:transition>
     </mc:Choice>
-    <mc:Fallback>
+    <mc:Fallback xmlns="">
       <p:transition spd="slow">
         <p:fade/>
       </p:transition>
@@ -16071,7 +16111,7 @@
               <a:buNone/>
             </a:pPr>
             <a:r>
-              <a:rPr lang="hu-HU" sz="4400">
+              <a:rPr lang="hu-HU" sz="4400" dirty="0">
                 <a:latin typeface="Cambria"/>
                 <a:ea typeface="Cambria"/>
                 <a:cs typeface="Cambria"/>
@@ -16079,7 +16119,7 @@
               </a:rPr>
               <a:t>Backend architektúra és API</a:t>
             </a:r>
-            <a:endParaRPr/>
+            <a:endParaRPr dirty="0"/>
           </a:p>
         </p:txBody>
       </p:sp>
@@ -16426,7 +16466,7 @@
                 <a:buNone/>
               </a:pPr>
               <a:r>
-                <a:rPr lang="hu-HU" sz="1800" b="1">
+                <a:rPr lang="hu-HU" sz="1800" b="1" dirty="0">
                   <a:solidFill>
                     <a:schemeClr val="dk1"/>
                   </a:solidFill>
@@ -16438,7 +16478,7 @@
                 <a:t>Fő API modulok:</a:t>
               </a:r>
               <a:r>
-                <a:rPr lang="hu-HU" sz="1800">
+                <a:rPr lang="hu-HU" sz="1800" dirty="0">
                   <a:solidFill>
                     <a:schemeClr val="dk1"/>
                   </a:solidFill>
@@ -16449,7 +16489,7 @@
                 </a:rPr>
                 <a:t> Auth, Események, Intézmények, Osztályok, Kérelmek</a:t>
               </a:r>
-              <a:endParaRPr/>
+              <a:endParaRPr dirty="0"/>
             </a:p>
           </p:txBody>
         </p:sp>
@@ -16488,7 +16528,7 @@
                 <a:buNone/>
               </a:pPr>
               <a:r>
-                <a:rPr lang="hu-HU" sz="1800" b="1">
+                <a:rPr lang="hu-HU" sz="1800" b="1" dirty="0">
                   <a:solidFill>
                     <a:schemeClr val="dk1"/>
                   </a:solidFill>
@@ -16500,7 +16540,7 @@
                 <a:t>Hibakezelés:</a:t>
               </a:r>
               <a:r>
-                <a:rPr lang="hu-HU" sz="1800">
+                <a:rPr lang="hu-HU" sz="1800" dirty="0">
                   <a:solidFill>
                     <a:schemeClr val="dk1"/>
                   </a:solidFill>
@@ -16511,7 +16551,7 @@
                 </a:rPr>
                 <a:t> egységes válaszkódok (siker, validációs hiba, jogosultsági hiba)</a:t>
               </a:r>
-              <a:endParaRPr/>
+              <a:endParaRPr dirty="0"/>
             </a:p>
           </p:txBody>
         </p:sp>
@@ -16550,7 +16590,7 @@
                 <a:buNone/>
               </a:pPr>
               <a:r>
-                <a:rPr lang="hu-HU" sz="1800" b="1">
+                <a:rPr lang="hu-HU" sz="1800" b="1" dirty="0">
                   <a:solidFill>
                     <a:schemeClr val="dk1"/>
                   </a:solidFill>
@@ -16562,7 +16602,7 @@
                 <a:t>Központi logika:</a:t>
               </a:r>
               <a:r>
-                <a:rPr lang="hu-HU" sz="1800">
+                <a:rPr lang="hu-HU" sz="1800" dirty="0">
                   <a:solidFill>
                     <a:schemeClr val="dk1"/>
                   </a:solidFill>
@@ -16573,7 +16613,7 @@
                 </a:rPr>
                 <a:t> validáció és üzleti szabályok a backendben</a:t>
               </a:r>
-              <a:endParaRPr/>
+              <a:endParaRPr dirty="0"/>
             </a:p>
           </p:txBody>
         </p:sp>
@@ -16612,7 +16652,7 @@
                 <a:buNone/>
               </a:pPr>
               <a:r>
-                <a:rPr lang="hu-HU" sz="1800" b="1">
+                <a:rPr lang="hu-HU" sz="1800" b="1" dirty="0">
                   <a:solidFill>
                     <a:schemeClr val="dk1"/>
                   </a:solidFill>
@@ -16624,7 +16664,7 @@
                 <a:t>Eredmény:</a:t>
               </a:r>
               <a:r>
-                <a:rPr lang="hu-HU" sz="1800">
+                <a:rPr lang="hu-HU" sz="1800" dirty="0">
                   <a:solidFill>
                     <a:schemeClr val="dk1"/>
                   </a:solidFill>
@@ -16635,7 +16675,7 @@
                 </a:rPr>
                 <a:t> stabil, átlátható, könnyen karbantartható rendszer</a:t>
               </a:r>
-              <a:endParaRPr/>
+              <a:endParaRPr dirty="0"/>
             </a:p>
           </p:txBody>
         </p:sp>
@@ -16645,13 +16685,13 @@
   <p:clrMapOvr>
     <a:masterClrMapping/>
   </p:clrMapOvr>
-  <mc:AlternateContent xmlns:mc="http://schemas.openxmlformats.org/markup-compatibility/2006">
-    <mc:Choice xmlns:p159="http://schemas.microsoft.com/office/powerpoint/2015/09/main" Requires="p159">
+  <mc:AlternateContent xmlns:mc="http://schemas.openxmlformats.org/markup-compatibility/2006" xmlns:p159="http://schemas.microsoft.com/office/powerpoint/2015/09/main">
+    <mc:Choice Requires="p159">
       <p:transition xmlns:p14="http://schemas.microsoft.com/office/powerpoint/2010/main" spd="slow" p14:dur="2000">
         <p159:morph option="byObject"/>
       </p:transition>
     </mc:Choice>
-    <mc:Fallback>
+    <mc:Fallback xmlns="">
       <p:transition spd="slow">
         <p:fade/>
       </p:transition>
@@ -17281,13 +17321,13 @@
   <p:clrMapOvr>
     <a:masterClrMapping/>
   </p:clrMapOvr>
-  <mc:AlternateContent xmlns:mc="http://schemas.openxmlformats.org/markup-compatibility/2006">
-    <mc:Choice xmlns:p159="http://schemas.microsoft.com/office/powerpoint/2015/09/main" Requires="p159">
+  <mc:AlternateContent xmlns:mc="http://schemas.openxmlformats.org/markup-compatibility/2006" xmlns:p159="http://schemas.microsoft.com/office/powerpoint/2015/09/main">
+    <mc:Choice Requires="p159">
       <p:transition xmlns:p14="http://schemas.microsoft.com/office/powerpoint/2010/main" spd="slow" p14:dur="2000">
         <p159:morph option="byObject"/>
       </p:transition>
     </mc:Choice>
-    <mc:Fallback>
+    <mc:Fallback xmlns="">
       <p:transition spd="slow">
         <p:fade/>
       </p:transition>
@@ -17839,13 +17879,13 @@
   <p:clrMapOvr>
     <a:masterClrMapping/>
   </p:clrMapOvr>
-  <mc:AlternateContent xmlns:mc="http://schemas.openxmlformats.org/markup-compatibility/2006">
-    <mc:Choice xmlns:p159="http://schemas.microsoft.com/office/powerpoint/2015/09/main" Requires="p159">
+  <mc:AlternateContent xmlns:mc="http://schemas.openxmlformats.org/markup-compatibility/2006" xmlns:p159="http://schemas.microsoft.com/office/powerpoint/2015/09/main">
+    <mc:Choice Requires="p159">
       <p:transition xmlns:p14="http://schemas.microsoft.com/office/powerpoint/2010/main" spd="slow" p14:dur="2000">
         <p159:morph option="byObject"/>
       </p:transition>
     </mc:Choice>
-    <mc:Fallback>
+    <mc:Fallback xmlns="">
       <p:transition spd="slow">
         <p:fade/>
       </p:transition>
@@ -18273,13 +18313,13 @@
   <p:clrMapOvr>
     <a:masterClrMapping/>
   </p:clrMapOvr>
-  <mc:AlternateContent xmlns:mc="http://schemas.openxmlformats.org/markup-compatibility/2006">
-    <mc:Choice xmlns:p159="http://schemas.microsoft.com/office/powerpoint/2015/09/main" Requires="p159">
+  <mc:AlternateContent xmlns:mc="http://schemas.openxmlformats.org/markup-compatibility/2006" xmlns:p159="http://schemas.microsoft.com/office/powerpoint/2015/09/main">
+    <mc:Choice Requires="p159">
       <p:transition xmlns:p14="http://schemas.microsoft.com/office/powerpoint/2010/main" spd="slow" p14:dur="2000">
         <p159:morph option="byObject"/>
       </p:transition>
     </mc:Choice>
-    <mc:Fallback>
+    <mc:Fallback xmlns="">
       <p:transition spd="slow">
         <p:fade/>
       </p:transition>
@@ -18733,13 +18773,13 @@
   <p:clrMapOvr>
     <a:masterClrMapping/>
   </p:clrMapOvr>
-  <mc:AlternateContent xmlns:mc="http://schemas.openxmlformats.org/markup-compatibility/2006">
-    <mc:Choice xmlns:p159="http://schemas.microsoft.com/office/powerpoint/2015/09/main" Requires="p159">
+  <mc:AlternateContent xmlns:mc="http://schemas.openxmlformats.org/markup-compatibility/2006" xmlns:p159="http://schemas.microsoft.com/office/powerpoint/2015/09/main">
+    <mc:Choice Requires="p159">
       <p:transition xmlns:p14="http://schemas.microsoft.com/office/powerpoint/2010/main" spd="slow" p14:dur="2000">
         <p159:morph option="byObject"/>
       </p:transition>
     </mc:Choice>
-    <mc:Fallback>
+    <mc:Fallback xmlns="">
       <p:transition spd="slow">
         <p:fade/>
       </p:transition>

--- a/dokumentumok/Prezentáció_NagyLevedSamuel_TothTamas.pptx
+++ b/dokumentumok/Prezentáció_NagyLevedSamuel_TothTamas.pptx
@@ -274,7 +274,7 @@
       <p15:sldGuideLst xmlns:p15="http://schemas.microsoft.com/office/powerpoint/2012/main"/>
     </p:ext>
     <p:ext uri="GoogleSlidesCustomDataVersion2">
-      <go:slidesCustomData xmlns="" xmlns:mc="http://schemas.openxmlformats.org/markup-compatibility/2006" xmlns:mv="urn:schemas-microsoft-com:mac:vml" xmlns:c="http://schemas.openxmlformats.org/drawingml/2006/chart" xmlns:dgm="http://schemas.openxmlformats.org/drawingml/2006/diagram" xmlns:o="urn:schemas-microsoft-com:office:office" xmlns:v="urn:schemas-microsoft-com:vml" xmlns:pvml="urn:schemas-microsoft-com:office:powerpoint" xmlns:com="http://schemas.openxmlformats.org/drawingml/2006/compatibility" xmlns:p14="http://schemas.microsoft.com/office/powerpoint/2010/main" xmlns:p15="http://schemas.microsoft.com/office/powerpoint/2012/main" xmlns:ahyp="http://schemas.microsoft.com/office/drawing/2018/hyperlinkcolor" xmlns:go="http://customooxmlschemas.google.com/" r:id="rId24" roundtripDataSignature="AMtx7mj67VHAuCHlscAUacmt/Mbt/wFFlA=="/>
+      <go:slidesCustomData xmlns:go="http://customooxmlschemas.google.com/" xmlns:ahyp="http://schemas.microsoft.com/office/drawing/2018/hyperlinkcolor" xmlns:p15="http://schemas.microsoft.com/office/powerpoint/2012/main" xmlns:p14="http://schemas.microsoft.com/office/powerpoint/2010/main" xmlns:com="http://schemas.openxmlformats.org/drawingml/2006/compatibility" xmlns:pvml="urn:schemas-microsoft-com:office:powerpoint" xmlns:v="urn:schemas-microsoft-com:vml" xmlns:o="urn:schemas-microsoft-com:office:office" xmlns:dgm="http://schemas.openxmlformats.org/drawingml/2006/diagram" xmlns:c="http://schemas.openxmlformats.org/drawingml/2006/chart" xmlns:mv="urn:schemas-microsoft-com:mac:vml" xmlns:mc="http://schemas.openxmlformats.org/markup-compatibility/2006" xmlns="" r:id="rId24" roundtripDataSignature="AMtx7mj67VHAuCHlscAUacmt/Mbt/wFFlA=="/>
     </p:ext>
   </p:extLst>
 </p:presentation>
@@ -892,8 +892,8 @@
         </p:nvSpPr>
         <p:spPr>
           <a:xfrm>
-            <a:off x="1143225" y="685800"/>
-            <a:ext cx="4572225" cy="3429000"/>
+            <a:off x="381000" y="685800"/>
+            <a:ext cx="6096000" cy="3429000"/>
           </a:xfrm>
           <a:custGeom>
             <a:avLst/>
@@ -996,8 +996,8 @@
         </p:nvSpPr>
         <p:spPr>
           <a:xfrm>
-            <a:off x="1143225" y="685800"/>
-            <a:ext cx="4572225" cy="3429000"/>
+            <a:off x="381000" y="685800"/>
+            <a:ext cx="6096000" cy="3429000"/>
           </a:xfrm>
           <a:custGeom>
             <a:avLst/>
@@ -1724,8 +1724,8 @@
         </p:nvSpPr>
         <p:spPr>
           <a:xfrm>
-            <a:off x="1143225" y="685800"/>
-            <a:ext cx="4572225" cy="3429000"/>
+            <a:off x="381000" y="685800"/>
+            <a:ext cx="6096000" cy="3429000"/>
           </a:xfrm>
           <a:custGeom>
             <a:avLst/>
@@ -1828,8 +1828,8 @@
         </p:nvSpPr>
         <p:spPr>
           <a:xfrm>
-            <a:off x="1143225" y="685800"/>
-            <a:ext cx="4572225" cy="3429000"/>
+            <a:off x="381000" y="685800"/>
+            <a:ext cx="6096000" cy="3429000"/>
           </a:xfrm>
           <a:custGeom>
             <a:avLst/>
@@ -1932,8 +1932,8 @@
         </p:nvSpPr>
         <p:spPr>
           <a:xfrm>
-            <a:off x="1143225" y="685800"/>
-            <a:ext cx="4572225" cy="3429000"/>
+            <a:off x="381000" y="685800"/>
+            <a:ext cx="6096000" cy="3429000"/>
           </a:xfrm>
           <a:custGeom>
             <a:avLst/>
@@ -2140,8 +2140,8 @@
         </p:nvSpPr>
         <p:spPr>
           <a:xfrm>
-            <a:off x="1143225" y="685800"/>
-            <a:ext cx="4572225" cy="3429000"/>
+            <a:off x="381000" y="685800"/>
+            <a:ext cx="6096000" cy="3429000"/>
           </a:xfrm>
           <a:custGeom>
             <a:avLst/>
@@ -12697,275 +12697,12 @@
       </p:sp>
       <p:pic>
         <p:nvPicPr>
-          <p:cNvPr id="86" name="Google Shape;86;p1"/>
+          <p:cNvPr id="89" name="Google Shape;89;p1"/>
           <p:cNvPicPr preferRelativeResize="0"/>
           <p:nvPr/>
         </p:nvPicPr>
         <p:blipFill rotWithShape="1">
           <a:blip r:embed="rId3">
-            <a:alphaModFix/>
-          </a:blip>
-          <a:srcRect/>
-          <a:stretch/>
-        </p:blipFill>
-        <p:spPr>
-          <a:xfrm>
-            <a:off x="5272059" y="367248"/>
-            <a:ext cx="1647875" cy="1647875"/>
-          </a:xfrm>
-          <a:prstGeom prst="rect">
-            <a:avLst/>
-          </a:prstGeom>
-          <a:noFill/>
-          <a:ln>
-            <a:noFill/>
-          </a:ln>
-        </p:spPr>
-      </p:pic>
-      <p:sp>
-        <p:nvSpPr>
-          <p:cNvPr id="87" name="Google Shape;87;p1"/>
-          <p:cNvSpPr txBox="1"/>
-          <p:nvPr/>
-        </p:nvSpPr>
-        <p:spPr>
-          <a:xfrm>
-            <a:off x="836749" y="868021"/>
-            <a:ext cx="3996965" cy="646331"/>
-          </a:xfrm>
-          <a:prstGeom prst="rect">
-            <a:avLst/>
-          </a:prstGeom>
-          <a:noFill/>
-          <a:ln>
-            <a:noFill/>
-          </a:ln>
-        </p:spPr>
-        <p:txBody>
-          <a:bodyPr spcFirstLastPara="1" wrap="square" lIns="91425" tIns="45700" rIns="91425" bIns="45700" anchor="t" anchorCtr="0">
-            <a:spAutoFit/>
-          </a:bodyPr>
-          <a:lstStyle/>
-          <a:p>
-            <a:pPr marL="0" marR="0" lvl="0" indent="0" algn="l" rtl="0">
-              <a:spcBef>
-                <a:spcPts val="0"/>
-              </a:spcBef>
-              <a:spcAft>
-                <a:spcPts val="0"/>
-              </a:spcAft>
-              <a:buNone/>
-            </a:pPr>
-            <a:r>
-              <a:rPr lang="hu-HU" sz="1800" b="0" i="0" u="none" strike="noStrike" cap="none">
-                <a:solidFill>
-                  <a:schemeClr val="dk1"/>
-                </a:solidFill>
-                <a:latin typeface="Times New Roman"/>
-                <a:ea typeface="Times New Roman"/>
-                <a:cs typeface="Times New Roman"/>
-                <a:sym typeface="Times New Roman"/>
-              </a:rPr>
-              <a:t>Kiskunfélegyházi Szent Benedek PG Két Tanítási Nyelvű Technikum és Kollégium</a:t>
-            </a:r>
-            <a:endParaRPr/>
-          </a:p>
-        </p:txBody>
-      </p:sp>
-      <p:sp>
-        <p:nvSpPr>
-          <p:cNvPr id="88" name="Google Shape;88;p1"/>
-          <p:cNvSpPr txBox="1"/>
-          <p:nvPr/>
-        </p:nvSpPr>
-        <p:spPr>
-          <a:xfrm>
-            <a:off x="7796627" y="498690"/>
-            <a:ext cx="2789674" cy="1384995"/>
-          </a:xfrm>
-          <a:prstGeom prst="rect">
-            <a:avLst/>
-          </a:prstGeom>
-          <a:noFill/>
-          <a:ln>
-            <a:noFill/>
-          </a:ln>
-        </p:spPr>
-        <p:txBody>
-          <a:bodyPr spcFirstLastPara="1" wrap="square" lIns="91425" tIns="45700" rIns="91425" bIns="45700" anchor="t" anchorCtr="0">
-            <a:spAutoFit/>
-          </a:bodyPr>
-          <a:lstStyle/>
-          <a:p>
-            <a:pPr marL="0" marR="0" lvl="0" indent="0" algn="l" rtl="0">
-              <a:spcBef>
-                <a:spcPts val="0"/>
-              </a:spcBef>
-              <a:spcAft>
-                <a:spcPts val="0"/>
-              </a:spcAft>
-              <a:buNone/>
-            </a:pPr>
-            <a:r>
-              <a:rPr lang="hu-HU" sz="1400">
-                <a:solidFill>
-                  <a:schemeClr val="dk1"/>
-                </a:solidFill>
-                <a:latin typeface="Times New Roman"/>
-                <a:ea typeface="Times New Roman"/>
-                <a:cs typeface="Times New Roman"/>
-                <a:sym typeface="Times New Roman"/>
-              </a:rPr>
-              <a:t>𖡡  Kiskunfélegyháza, Kossuth u. 24.</a:t>
-            </a:r>
-            <a:endParaRPr/>
-          </a:p>
-          <a:p>
-            <a:pPr marL="0" marR="0" lvl="0" indent="0" algn="l" rtl="0">
-              <a:spcBef>
-                <a:spcPts val="0"/>
-              </a:spcBef>
-              <a:spcAft>
-                <a:spcPts val="0"/>
-              </a:spcAft>
-              <a:buNone/>
-            </a:pPr>
-            <a:r>
-              <a:rPr lang="hu-HU" sz="1400">
-                <a:solidFill>
-                  <a:schemeClr val="dk1"/>
-                </a:solidFill>
-                <a:latin typeface="Times New Roman"/>
-                <a:ea typeface="Times New Roman"/>
-                <a:cs typeface="Times New Roman"/>
-                <a:sym typeface="Times New Roman"/>
-              </a:rPr>
-              <a:t>☏  </a:t>
-            </a:r>
-            <a:r>
-              <a:rPr lang="hu-HU" sz="1400" b="0" i="0" u="none" strike="noStrike" cap="none">
-                <a:solidFill>
-                  <a:schemeClr val="dk1"/>
-                </a:solidFill>
-                <a:latin typeface="Times New Roman"/>
-                <a:ea typeface="Times New Roman"/>
-                <a:cs typeface="Times New Roman"/>
-                <a:sym typeface="Times New Roman"/>
-              </a:rPr>
-              <a:t>+36 76 462 332</a:t>
-            </a:r>
-            <a:endParaRPr sz="1400">
-              <a:solidFill>
-                <a:schemeClr val="dk1"/>
-              </a:solidFill>
-              <a:latin typeface="Times New Roman"/>
-              <a:ea typeface="Times New Roman"/>
-              <a:cs typeface="Times New Roman"/>
-              <a:sym typeface="Times New Roman"/>
-            </a:endParaRPr>
-          </a:p>
-          <a:p>
-            <a:pPr marL="0" marR="0" lvl="0" indent="0" algn="l" rtl="0">
-              <a:spcBef>
-                <a:spcPts val="0"/>
-              </a:spcBef>
-              <a:spcAft>
-                <a:spcPts val="0"/>
-              </a:spcAft>
-              <a:buNone/>
-            </a:pPr>
-            <a:endParaRPr sz="1400">
-              <a:solidFill>
-                <a:schemeClr val="dk1"/>
-              </a:solidFill>
-              <a:latin typeface="Times New Roman"/>
-              <a:ea typeface="Times New Roman"/>
-              <a:cs typeface="Times New Roman"/>
-              <a:sym typeface="Times New Roman"/>
-            </a:endParaRPr>
-          </a:p>
-          <a:p>
-            <a:pPr marL="0" marR="0" lvl="0" indent="0" algn="l" rtl="0">
-              <a:spcBef>
-                <a:spcPts val="0"/>
-              </a:spcBef>
-              <a:spcAft>
-                <a:spcPts val="0"/>
-              </a:spcAft>
-              <a:buNone/>
-            </a:pPr>
-            <a:r>
-              <a:rPr lang="hu-HU" sz="1400">
-                <a:solidFill>
-                  <a:schemeClr val="dk1"/>
-                </a:solidFill>
-                <a:latin typeface="Times New Roman"/>
-                <a:ea typeface="Times New Roman"/>
-                <a:cs typeface="Times New Roman"/>
-                <a:sym typeface="Times New Roman"/>
-              </a:rPr>
-              <a:t>OM:  203365</a:t>
-            </a:r>
-            <a:endParaRPr/>
-          </a:p>
-          <a:p>
-            <a:pPr marL="0" marR="0" lvl="0" indent="0" algn="l" rtl="0">
-              <a:spcBef>
-                <a:spcPts val="0"/>
-              </a:spcBef>
-              <a:spcAft>
-                <a:spcPts val="0"/>
-              </a:spcAft>
-              <a:buNone/>
-            </a:pPr>
-            <a:r>
-              <a:rPr lang="hu-HU" sz="1400">
-                <a:solidFill>
-                  <a:schemeClr val="dk1"/>
-                </a:solidFill>
-                <a:latin typeface="Times New Roman"/>
-                <a:ea typeface="Times New Roman"/>
-                <a:cs typeface="Times New Roman"/>
-                <a:sym typeface="Times New Roman"/>
-              </a:rPr>
-              <a:t>✉ titkarsag@szbi-pg.hu</a:t>
-            </a:r>
-            <a:endParaRPr/>
-          </a:p>
-          <a:p>
-            <a:pPr marL="0" marR="0" lvl="0" indent="0" algn="l" rtl="0">
-              <a:spcBef>
-                <a:spcPts val="0"/>
-              </a:spcBef>
-              <a:spcAft>
-                <a:spcPts val="0"/>
-              </a:spcAft>
-              <a:buNone/>
-            </a:pPr>
-            <a:r>
-              <a:rPr lang="hu-HU" sz="1400">
-                <a:solidFill>
-                  <a:schemeClr val="dk1"/>
-                </a:solidFill>
-                <a:latin typeface="Times New Roman"/>
-                <a:ea typeface="Times New Roman"/>
-                <a:cs typeface="Times New Roman"/>
-                <a:sym typeface="Times New Roman"/>
-              </a:rPr>
-              <a:t>⌕ http://www.szbi-pg.hu/</a:t>
-            </a:r>
-            <a:endParaRPr/>
-          </a:p>
-        </p:txBody>
-      </p:sp>
-      <p:pic>
-        <p:nvPicPr>
-          <p:cNvPr id="89" name="Google Shape;89;p1"/>
-          <p:cNvPicPr preferRelativeResize="0"/>
-          <p:nvPr/>
-        </p:nvPicPr>
-        <p:blipFill rotWithShape="1">
-          <a:blip r:embed="rId4">
             <a:alphaModFix/>
           </a:blip>
           <a:srcRect/>
@@ -12994,7 +12731,7 @@
           <p:nvPr/>
         </p:nvPicPr>
         <p:blipFill rotWithShape="1">
-          <a:blip r:embed="rId5">
+          <a:blip r:embed="rId4">
             <a:alphaModFix/>
           </a:blip>
           <a:srcRect/>
@@ -13021,18 +12758,6 @@
   <p:clrMapOvr>
     <a:masterClrMapping/>
   </p:clrMapOvr>
-  <mc:AlternateContent xmlns:mc="http://schemas.openxmlformats.org/markup-compatibility/2006" xmlns:p159="http://schemas.microsoft.com/office/powerpoint/2015/09/main">
-    <mc:Choice Requires="p159">
-      <p:transition xmlns:p14="http://schemas.microsoft.com/office/powerpoint/2010/main" spd="slow" p14:dur="2000">
-        <p159:morph option="byObject"/>
-      </p:transition>
-    </mc:Choice>
-    <mc:Fallback xmlns="">
-      <p:transition spd="slow">
-        <p:fade/>
-      </p:transition>
-    </mc:Fallback>
-  </mc:AlternateContent>
 </p:sld>
 </file>
 
@@ -13180,33 +12905,6 @@
           </a:p>
         </p:txBody>
       </p:sp>
-      <p:pic>
-        <p:nvPicPr>
-          <p:cNvPr id="174" name="Google Shape;174;p10"/>
-          <p:cNvPicPr preferRelativeResize="0"/>
-          <p:nvPr/>
-        </p:nvPicPr>
-        <p:blipFill rotWithShape="1">
-          <a:blip r:embed="rId3">
-            <a:alphaModFix/>
-          </a:blip>
-          <a:srcRect/>
-          <a:stretch/>
-        </p:blipFill>
-        <p:spPr>
-          <a:xfrm>
-            <a:off x="257000" y="301261"/>
-            <a:ext cx="1034472" cy="1034472"/>
-          </a:xfrm>
-          <a:prstGeom prst="rect">
-            <a:avLst/>
-          </a:prstGeom>
-          <a:noFill/>
-          <a:ln>
-            <a:noFill/>
-          </a:ln>
-        </p:spPr>
-      </p:pic>
       <p:sp>
         <p:nvSpPr>
           <p:cNvPr id="175" name="Google Shape;175;p10"/>
@@ -13402,18 +13100,6 @@
   <p:clrMapOvr>
     <a:masterClrMapping/>
   </p:clrMapOvr>
-  <mc:AlternateContent xmlns:mc="http://schemas.openxmlformats.org/markup-compatibility/2006" xmlns:p159="http://schemas.microsoft.com/office/powerpoint/2015/09/main">
-    <mc:Choice Requires="p159">
-      <p:transition xmlns:p14="http://schemas.microsoft.com/office/powerpoint/2010/main" spd="slow" p14:dur="2000">
-        <p159:morph option="byObject"/>
-      </p:transition>
-    </mc:Choice>
-    <mc:Fallback xmlns="">
-      <p:transition spd="slow">
-        <p:fade/>
-      </p:transition>
-    </mc:Fallback>
-  </mc:AlternateContent>
 </p:sld>
 </file>
 
@@ -13617,90 +13303,6 @@
           </a:p>
         </p:txBody>
       </p:sp>
-      <p:pic>
-        <p:nvPicPr>
-          <p:cNvPr id="182" name="Google Shape;182;p11"/>
-          <p:cNvPicPr preferRelativeResize="0"/>
-          <p:nvPr/>
-        </p:nvPicPr>
-        <p:blipFill>
-          <a:blip r:embed="rId3">
-            <a:alphaModFix/>
-          </a:blip>
-          <a:stretch>
-            <a:fillRect/>
-          </a:stretch>
-        </p:blipFill>
-        <p:spPr>
-          <a:xfrm>
-            <a:off x="6844500" y="330275"/>
-            <a:ext cx="2466175" cy="2466175"/>
-          </a:xfrm>
-          <a:prstGeom prst="rect">
-            <a:avLst/>
-          </a:prstGeom>
-          <a:noFill/>
-          <a:ln>
-            <a:noFill/>
-          </a:ln>
-        </p:spPr>
-      </p:pic>
-      <p:pic>
-        <p:nvPicPr>
-          <p:cNvPr id="183" name="Google Shape;183;p11"/>
-          <p:cNvPicPr preferRelativeResize="0"/>
-          <p:nvPr/>
-        </p:nvPicPr>
-        <p:blipFill>
-          <a:blip r:embed="rId4">
-            <a:alphaModFix/>
-          </a:blip>
-          <a:stretch>
-            <a:fillRect/>
-          </a:stretch>
-        </p:blipFill>
-        <p:spPr>
-          <a:xfrm>
-            <a:off x="9310675" y="3169775"/>
-            <a:ext cx="2143450" cy="2143450"/>
-          </a:xfrm>
-          <a:prstGeom prst="rect">
-            <a:avLst/>
-          </a:prstGeom>
-          <a:noFill/>
-          <a:ln>
-            <a:noFill/>
-          </a:ln>
-        </p:spPr>
-      </p:pic>
-      <p:pic>
-        <p:nvPicPr>
-          <p:cNvPr id="184" name="Google Shape;184;p11"/>
-          <p:cNvPicPr preferRelativeResize="0"/>
-          <p:nvPr/>
-        </p:nvPicPr>
-        <p:blipFill>
-          <a:blip r:embed="rId5">
-            <a:alphaModFix/>
-          </a:blip>
-          <a:stretch>
-            <a:fillRect/>
-          </a:stretch>
-        </p:blipFill>
-        <p:spPr>
-          <a:xfrm>
-            <a:off x="5365487" y="3524625"/>
-            <a:ext cx="3398815" cy="3037027"/>
-          </a:xfrm>
-          <a:prstGeom prst="rect">
-            <a:avLst/>
-          </a:prstGeom>
-          <a:noFill/>
-          <a:ln>
-            <a:noFill/>
-          </a:ln>
-        </p:spPr>
-      </p:pic>
       <p:sp>
         <p:nvSpPr>
           <p:cNvPr id="185" name="Google Shape;185;p11"/>
@@ -13798,18 +13400,6 @@
   <p:clrMapOvr>
     <a:masterClrMapping/>
   </p:clrMapOvr>
-  <mc:AlternateContent xmlns:mc="http://schemas.openxmlformats.org/markup-compatibility/2006" xmlns:p159="http://schemas.microsoft.com/office/powerpoint/2015/09/main">
-    <mc:Choice Requires="p159">
-      <p:transition xmlns:p14="http://schemas.microsoft.com/office/powerpoint/2010/main" spd="slow" p14:dur="2000">
-        <p159:morph option="byObject"/>
-      </p:transition>
-    </mc:Choice>
-    <mc:Fallback xmlns="">
-      <p:transition spd="slow">
-        <p:fade/>
-      </p:transition>
-    </mc:Fallback>
-  </mc:AlternateContent>
 </p:sld>
 </file>
 
@@ -13916,18 +13506,6 @@
   <p:clrMapOvr>
     <a:masterClrMapping/>
   </p:clrMapOvr>
-  <mc:AlternateContent xmlns:mc="http://schemas.openxmlformats.org/markup-compatibility/2006" xmlns:p159="http://schemas.microsoft.com/office/powerpoint/2015/09/main">
-    <mc:Choice Requires="p159">
-      <p:transition xmlns:p14="http://schemas.microsoft.com/office/powerpoint/2010/main" spd="slow" p14:dur="2000">
-        <p159:morph option="byObject"/>
-      </p:transition>
-    </mc:Choice>
-    <mc:Fallback xmlns="">
-      <p:transition spd="slow">
-        <p:fade/>
-      </p:transition>
-    </mc:Fallback>
-  </mc:AlternateContent>
 </p:sld>
 </file>
 
@@ -14034,18 +13612,6 @@
   <p:clrMapOvr>
     <a:masterClrMapping/>
   </p:clrMapOvr>
-  <mc:AlternateContent xmlns:mc="http://schemas.openxmlformats.org/markup-compatibility/2006" xmlns:p159="http://schemas.microsoft.com/office/powerpoint/2015/09/main">
-    <mc:Choice Requires="p159">
-      <p:transition xmlns:p14="http://schemas.microsoft.com/office/powerpoint/2010/main" spd="slow" p14:dur="2000">
-        <p159:morph option="byObject"/>
-      </p:transition>
-    </mc:Choice>
-    <mc:Fallback xmlns="">
-      <p:transition spd="slow">
-        <p:fade/>
-      </p:transition>
-    </mc:Fallback>
-  </mc:AlternateContent>
 </p:sld>
 </file>
 
@@ -14135,15 +13701,15 @@
               <a:buNone/>
             </a:pPr>
             <a:r>
-              <a:rPr lang="hu-HU" sz="4400">
+              <a:rPr lang="hu-HU" sz="4400" dirty="0">
                 <a:latin typeface="Cambria"/>
                 <a:ea typeface="Cambria"/>
                 <a:cs typeface="Cambria"/>
                 <a:sym typeface="Cambria"/>
               </a:rPr>
-              <a:t>Taralomjegyzék</a:t>
+              <a:t>Forrás</a:t>
             </a:r>
-            <a:endParaRPr/>
+            <a:endParaRPr dirty="0"/>
           </a:p>
         </p:txBody>
       </p:sp>
@@ -14239,18 +13805,6 @@
   <p:clrMapOvr>
     <a:masterClrMapping/>
   </p:clrMapOvr>
-  <mc:AlternateContent xmlns:mc="http://schemas.openxmlformats.org/markup-compatibility/2006" xmlns:p159="http://schemas.microsoft.com/office/powerpoint/2015/09/main">
-    <mc:Choice Requires="p159">
-      <p:transition xmlns:p14="http://schemas.microsoft.com/office/powerpoint/2010/main" spd="slow" p14:dur="2000">
-        <p159:morph option="byObject"/>
-      </p:transition>
-    </mc:Choice>
-    <mc:Fallback xmlns="">
-      <p:transition spd="slow">
-        <p:fade/>
-      </p:transition>
-    </mc:Fallback>
-  </mc:AlternateContent>
 </p:sld>
 </file>
 
@@ -14357,18 +13911,6 @@
   <p:clrMapOvr>
     <a:masterClrMapping/>
   </p:clrMapOvr>
-  <mc:AlternateContent xmlns:mc="http://schemas.openxmlformats.org/markup-compatibility/2006" xmlns:p159="http://schemas.microsoft.com/office/powerpoint/2015/09/main">
-    <mc:Choice Requires="p159">
-      <p:transition xmlns:p14="http://schemas.microsoft.com/office/powerpoint/2010/main" spd="slow" p14:dur="2000">
-        <p159:morph option="byObject"/>
-      </p:transition>
-    </mc:Choice>
-    <mc:Fallback xmlns="">
-      <p:transition spd="slow">
-        <p:fade/>
-      </p:transition>
-    </mc:Fallback>
-  </mc:AlternateContent>
 </p:sld>
 </file>
 
@@ -14413,6 +13955,162 @@
       </p:grpSpPr>
       <p:sp>
         <p:nvSpPr>
+          <p:cNvPr id="7" name="Google Shape;125;p5">
+            <a:extLst>
+              <a:ext uri="{FF2B5EF4-FFF2-40B4-BE49-F238E27FC236}">
+                <a16:creationId xmlns:a16="http://schemas.microsoft.com/office/drawing/2014/main" id="{6F45A2C4-DC8B-0FF2-B751-05BC7B478441}"/>
+              </a:ext>
+            </a:extLst>
+          </p:cNvPr>
+          <p:cNvSpPr/>
+          <p:nvPr/>
+        </p:nvSpPr>
+        <p:spPr>
+          <a:xfrm>
+            <a:off x="7667808" y="3632669"/>
+            <a:ext cx="3651427" cy="2488998"/>
+          </a:xfrm>
+          <a:prstGeom prst="ellipse">
+            <a:avLst/>
+          </a:prstGeom>
+          <a:solidFill>
+            <a:srgbClr val="4A86E8"/>
+          </a:solidFill>
+          <a:ln w="9525" cap="flat" cmpd="sng">
+            <a:solidFill>
+              <a:srgbClr val="CFE2F3"/>
+            </a:solidFill>
+            <a:prstDash val="solid"/>
+            <a:round/>
+            <a:headEnd type="none" w="sm" len="sm"/>
+            <a:tailEnd type="none" w="sm" len="sm"/>
+          </a:ln>
+        </p:spPr>
+        <p:txBody>
+          <a:bodyPr spcFirstLastPara="1" wrap="square" lIns="91425" tIns="91425" rIns="91425" bIns="91425" anchor="ctr" anchorCtr="0">
+            <a:noAutofit/>
+          </a:bodyPr>
+          <a:lstStyle/>
+          <a:p>
+            <a:pPr marL="0" lvl="0" indent="0" algn="ctr" rtl="0">
+              <a:spcBef>
+                <a:spcPts val="0"/>
+              </a:spcBef>
+              <a:spcAft>
+                <a:spcPts val="0"/>
+              </a:spcAft>
+              <a:buNone/>
+            </a:pPr>
+            <a:endParaRPr/>
+          </a:p>
+        </p:txBody>
+      </p:sp>
+      <p:sp>
+        <p:nvSpPr>
+          <p:cNvPr id="6" name="Google Shape;125;p5">
+            <a:extLst>
+              <a:ext uri="{FF2B5EF4-FFF2-40B4-BE49-F238E27FC236}">
+                <a16:creationId xmlns:a16="http://schemas.microsoft.com/office/drawing/2014/main" id="{728FC3E7-18EE-112C-88DD-42D924B448DE}"/>
+              </a:ext>
+            </a:extLst>
+          </p:cNvPr>
+          <p:cNvSpPr/>
+          <p:nvPr/>
+        </p:nvSpPr>
+        <p:spPr>
+          <a:xfrm>
+            <a:off x="708817" y="3632669"/>
+            <a:ext cx="3651427" cy="2488998"/>
+          </a:xfrm>
+          <a:prstGeom prst="ellipse">
+            <a:avLst/>
+          </a:prstGeom>
+          <a:solidFill>
+            <a:srgbClr val="4A86E8"/>
+          </a:solidFill>
+          <a:ln w="9525" cap="flat" cmpd="sng">
+            <a:solidFill>
+              <a:srgbClr val="CFE2F3"/>
+            </a:solidFill>
+            <a:prstDash val="solid"/>
+            <a:round/>
+            <a:headEnd type="none" w="sm" len="sm"/>
+            <a:tailEnd type="none" w="sm" len="sm"/>
+          </a:ln>
+        </p:spPr>
+        <p:txBody>
+          <a:bodyPr spcFirstLastPara="1" wrap="square" lIns="91425" tIns="91425" rIns="91425" bIns="91425" anchor="ctr" anchorCtr="0">
+            <a:noAutofit/>
+          </a:bodyPr>
+          <a:lstStyle/>
+          <a:p>
+            <a:pPr marL="0" lvl="0" indent="0" algn="ctr" rtl="0">
+              <a:spcBef>
+                <a:spcPts val="0"/>
+              </a:spcBef>
+              <a:spcAft>
+                <a:spcPts val="0"/>
+              </a:spcAft>
+              <a:buNone/>
+            </a:pPr>
+            <a:endParaRPr/>
+          </a:p>
+        </p:txBody>
+      </p:sp>
+      <p:sp>
+        <p:nvSpPr>
+          <p:cNvPr id="5" name="Google Shape;138;p6">
+            <a:extLst>
+              <a:ext uri="{FF2B5EF4-FFF2-40B4-BE49-F238E27FC236}">
+                <a16:creationId xmlns:a16="http://schemas.microsoft.com/office/drawing/2014/main" id="{C4526191-E079-ECAD-7FB7-CB581B5F7FFD}"/>
+              </a:ext>
+            </a:extLst>
+          </p:cNvPr>
+          <p:cNvSpPr/>
+          <p:nvPr/>
+        </p:nvSpPr>
+        <p:spPr>
+          <a:xfrm>
+            <a:off x="1626101" y="1576108"/>
+            <a:ext cx="8939798" cy="1723077"/>
+          </a:xfrm>
+          <a:prstGeom prst="ellipse">
+            <a:avLst/>
+          </a:prstGeom>
+          <a:solidFill>
+            <a:srgbClr val="4A86E8"/>
+          </a:solidFill>
+          <a:ln w="9525" cap="flat" cmpd="sng">
+            <a:solidFill>
+              <a:srgbClr val="CFE2F3"/>
+            </a:solidFill>
+            <a:prstDash val="solid"/>
+            <a:round/>
+            <a:headEnd type="none" w="sm" len="sm"/>
+            <a:tailEnd type="none" w="sm" len="sm"/>
+          </a:ln>
+        </p:spPr>
+        <p:txBody>
+          <a:bodyPr spcFirstLastPara="1" wrap="square" lIns="91425" tIns="91425" rIns="91425" bIns="91425" anchor="ctr" anchorCtr="0">
+            <a:noAutofit/>
+          </a:bodyPr>
+          <a:lstStyle/>
+          <a:p>
+            <a:pPr marL="0" lvl="0" indent="0" algn="ctr" rtl="0">
+              <a:spcBef>
+                <a:spcPts val="0"/>
+              </a:spcBef>
+              <a:spcAft>
+                <a:spcPts val="0"/>
+              </a:spcAft>
+              <a:buNone/>
+            </a:pPr>
+            <a:endParaRPr/>
+          </a:p>
+        </p:txBody>
+      </p:sp>
+      <p:sp>
+        <p:nvSpPr>
           <p:cNvPr id="95" name="Google Shape;95;p2"/>
           <p:cNvSpPr txBox="1">
             <a:spLocks noGrp="1"/>
@@ -14458,445 +14156,307 @@
               <a:buNone/>
             </a:pPr>
             <a:r>
-              <a:rPr lang="hu-HU" sz="4400">
+              <a:rPr lang="hu-HU" sz="4400" dirty="0">
                 <a:latin typeface="Cambria"/>
                 <a:ea typeface="Cambria"/>
                 <a:cs typeface="Cambria"/>
                 <a:sym typeface="Cambria"/>
               </a:rPr>
-              <a:t>Bevezetés: Probléma és Megoldás</a:t>
+              <a:t>Probléma és Megoldás</a:t>
             </a:r>
-            <a:endParaRPr/>
+            <a:endParaRPr dirty="0"/>
           </a:p>
         </p:txBody>
       </p:sp>
-      <p:pic>
-        <p:nvPicPr>
-          <p:cNvPr id="96" name="Google Shape;96;p2"/>
-          <p:cNvPicPr preferRelativeResize="0"/>
+      <p:sp>
+        <p:nvSpPr>
+          <p:cNvPr id="2" name="Szövegdoboz 1">
+            <a:extLst>
+              <a:ext uri="{FF2B5EF4-FFF2-40B4-BE49-F238E27FC236}">
+                <a16:creationId xmlns:a16="http://schemas.microsoft.com/office/drawing/2014/main" id="{B9244666-2797-0A92-D938-9CAC12D9EB31}"/>
+              </a:ext>
+            </a:extLst>
+          </p:cNvPr>
+          <p:cNvSpPr txBox="1"/>
           <p:nvPr/>
-        </p:nvPicPr>
-        <p:blipFill rotWithShape="1">
-          <a:blip r:embed="rId3">
-            <a:alphaModFix/>
-          </a:blip>
-          <a:srcRect/>
-          <a:stretch/>
-        </p:blipFill>
+        </p:nvSpPr>
         <p:spPr>
           <a:xfrm>
-            <a:off x="257000" y="301261"/>
-            <a:ext cx="1034472" cy="1034472"/>
+            <a:off x="867791" y="3695963"/>
+            <a:ext cx="3333478" cy="1938992"/>
           </a:xfrm>
           <a:prstGeom prst="rect">
             <a:avLst/>
           </a:prstGeom>
           <a:noFill/>
-          <a:ln>
-            <a:noFill/>
-          </a:ln>
         </p:spPr>
-      </p:pic>
-      <p:graphicFrame>
-        <p:nvGraphicFramePr>
-          <p:cNvPr id="97" name="Google Shape;97;p2"/>
-          <p:cNvGraphicFramePr/>
+        <p:txBody>
+          <a:bodyPr wrap="square" rtlCol="0">
+            <a:spAutoFit/>
+          </a:bodyPr>
+          <a:lstStyle/>
+          <a:p>
+            <a:pPr lvl="0" algn="ctr">
+              <a:lnSpc>
+                <a:spcPct val="200000"/>
+              </a:lnSpc>
+            </a:pPr>
+            <a:r>
+              <a:rPr lang="hu-HU" sz="2000" b="1" dirty="0">
+                <a:latin typeface="Times New Roman"/>
+                <a:ea typeface="Times New Roman"/>
+                <a:cs typeface="Times New Roman"/>
+                <a:sym typeface="Times New Roman"/>
+              </a:rPr>
+              <a:t>Probléma</a:t>
+            </a:r>
+            <a:endParaRPr lang="hu-HU" sz="2000" dirty="0"/>
+          </a:p>
+          <a:p>
+            <a:pPr lvl="0" algn="ctr">
+              <a:buClr>
+                <a:schemeClr val="dk1"/>
+              </a:buClr>
+              <a:buSzPts val="1800"/>
+            </a:pPr>
+            <a:r>
+              <a:rPr lang="hu-HU" sz="2000" dirty="0">
+                <a:latin typeface="Times New Roman"/>
+                <a:ea typeface="Times New Roman"/>
+                <a:cs typeface="Times New Roman"/>
+                <a:sym typeface="Times New Roman"/>
+              </a:rPr>
+              <a:t>széttagolt kommunikáció</a:t>
+            </a:r>
+            <a:endParaRPr lang="hu-HU" sz="2000" dirty="0"/>
+          </a:p>
+          <a:p>
+            <a:pPr lvl="0" algn="ctr">
+              <a:buClr>
+                <a:schemeClr val="dk1"/>
+              </a:buClr>
+              <a:buSzPts val="1800"/>
+            </a:pPr>
+            <a:r>
+              <a:rPr lang="hu-HU" sz="2000" dirty="0">
+                <a:latin typeface="Times New Roman"/>
+                <a:ea typeface="Times New Roman"/>
+                <a:cs typeface="Times New Roman"/>
+                <a:sym typeface="Times New Roman"/>
+              </a:rPr>
+              <a:t>több külön platform</a:t>
+            </a:r>
+            <a:endParaRPr lang="hu-HU" sz="2000" dirty="0"/>
+          </a:p>
+          <a:p>
+            <a:pPr lvl="0" algn="ctr">
+              <a:buClr>
+                <a:schemeClr val="dk1"/>
+              </a:buClr>
+              <a:buSzPts val="1800"/>
+            </a:pPr>
+            <a:r>
+              <a:rPr lang="hu-HU" sz="2000" dirty="0">
+                <a:latin typeface="Times New Roman"/>
+                <a:ea typeface="Times New Roman"/>
+                <a:cs typeface="Times New Roman"/>
+                <a:sym typeface="Times New Roman"/>
+              </a:rPr>
+              <a:t>nehézkes eseménykezelés</a:t>
+            </a:r>
+            <a:endParaRPr lang="hu-HU" sz="2000" dirty="0"/>
+          </a:p>
+          <a:p>
+            <a:pPr lvl="0" algn="ctr">
+              <a:buClr>
+                <a:schemeClr val="dk1"/>
+              </a:buClr>
+              <a:buSzPts val="1800"/>
+            </a:pPr>
+            <a:r>
+              <a:rPr lang="hu-HU" sz="2000" dirty="0">
+                <a:latin typeface="Times New Roman"/>
+                <a:ea typeface="Times New Roman"/>
+                <a:cs typeface="Times New Roman"/>
+                <a:sym typeface="Times New Roman"/>
+              </a:rPr>
+              <a:t>információk nehéz követése</a:t>
+            </a:r>
+            <a:endParaRPr lang="hu-HU" sz="2000" dirty="0"/>
+          </a:p>
+        </p:txBody>
+      </p:sp>
+      <p:sp>
+        <p:nvSpPr>
+          <p:cNvPr id="3" name="Szövegdoboz 2">
+            <a:extLst>
+              <a:ext uri="{FF2B5EF4-FFF2-40B4-BE49-F238E27FC236}">
+                <a16:creationId xmlns:a16="http://schemas.microsoft.com/office/drawing/2014/main" id="{478AAD97-7AA0-25DC-DE15-591AEFA381D6}"/>
+              </a:ext>
+            </a:extLst>
+          </p:cNvPr>
+          <p:cNvSpPr txBox="1"/>
           <p:nvPr/>
-        </p:nvGraphicFramePr>
-        <p:xfrm>
-          <a:off x="1387309" y="1941922"/>
-          <a:ext cx="9417400" cy="4391150"/>
-        </p:xfrm>
-        <a:graphic>
-          <a:graphicData uri="http://schemas.openxmlformats.org/drawingml/2006/table">
-            <a:tbl>
-              <a:tblPr firstRow="1" bandRow="1">
-                <a:noFill/>
-                <a:tableStyleId>{A36AE613-179F-4F3B-B0BF-9CF6581B68B4}</a:tableStyleId>
-              </a:tblPr>
-              <a:tblGrid>
-                <a:gridCol w="4708700">
-                  <a:extLst>
-                    <a:ext uri="{9D8B030D-6E8A-4147-A177-3AD203B41FA5}">
-                      <a16:colId xmlns:a16="http://schemas.microsoft.com/office/drawing/2014/main" val="20000"/>
-                    </a:ext>
-                  </a:extLst>
-                </a:gridCol>
-                <a:gridCol w="4708700">
-                  <a:extLst>
-                    <a:ext uri="{9D8B030D-6E8A-4147-A177-3AD203B41FA5}">
-                      <a16:colId xmlns:a16="http://schemas.microsoft.com/office/drawing/2014/main" val="20001"/>
-                    </a:ext>
-                  </a:extLst>
-                </a:gridCol>
-              </a:tblGrid>
-              <a:tr h="1145800">
-                <a:tc gridSpan="2">
-                  <a:txBody>
-                    <a:bodyPr/>
-                    <a:lstStyle/>
-                    <a:p>
-                      <a:pPr marL="0" marR="0" lvl="0" indent="0" algn="ctr" rtl="0">
-                        <a:spcBef>
-                          <a:spcPts val="0"/>
-                        </a:spcBef>
-                        <a:spcAft>
-                          <a:spcPts val="0"/>
-                        </a:spcAft>
-                        <a:buNone/>
-                      </a:pPr>
-                      <a:r>
-                        <a:rPr lang="hu-HU" sz="1800" u="none" strike="noStrike" cap="none">
-                          <a:latin typeface="Times New Roman"/>
-                          <a:ea typeface="Times New Roman"/>
-                          <a:cs typeface="Times New Roman"/>
-                          <a:sym typeface="Times New Roman"/>
-                        </a:rPr>
-                        <a:t>Projekt neve: </a:t>
-                      </a:r>
-                      <a:r>
-                        <a:rPr lang="hu-HU" sz="1800" b="0" u="none" strike="noStrike" cap="none">
-                          <a:latin typeface="Times New Roman"/>
-                          <a:ea typeface="Times New Roman"/>
-                          <a:cs typeface="Times New Roman"/>
-                          <a:sym typeface="Times New Roman"/>
-                        </a:rPr>
-                        <a:t>EseményTér</a:t>
-                      </a:r>
-                      <a:endParaRPr sz="1800" b="0" u="none" strike="noStrike" cap="none">
-                        <a:latin typeface="Times New Roman"/>
-                        <a:ea typeface="Times New Roman"/>
-                        <a:cs typeface="Times New Roman"/>
-                        <a:sym typeface="Times New Roman"/>
-                      </a:endParaRPr>
-                    </a:p>
-                    <a:p>
-                      <a:pPr marL="0" marR="0" lvl="0" indent="0" algn="ctr" rtl="0">
-                        <a:spcBef>
-                          <a:spcPts val="0"/>
-                        </a:spcBef>
-                        <a:spcAft>
-                          <a:spcPts val="0"/>
-                        </a:spcAft>
-                        <a:buNone/>
-                      </a:pPr>
-                      <a:r>
-                        <a:rPr lang="hu-HU" sz="1800" u="none" strike="noStrike" cap="none">
-                          <a:latin typeface="Times New Roman"/>
-                          <a:ea typeface="Times New Roman"/>
-                          <a:cs typeface="Times New Roman"/>
-                          <a:sym typeface="Times New Roman"/>
-                        </a:rPr>
-                        <a:t>Cél: </a:t>
-                      </a:r>
-                      <a:r>
-                        <a:rPr lang="hu-HU" sz="1800" b="0" u="none" strike="noStrike" cap="none">
-                          <a:latin typeface="Cambria"/>
-                          <a:ea typeface="Cambria"/>
-                          <a:cs typeface="Cambria"/>
-                          <a:sym typeface="Cambria"/>
-                        </a:rPr>
-                        <a:t>A tanárok és diákok közötti kommunikáció egyszerűsítése, valamint az iskolai események központi és átlátható kezelése egy rendszerben.</a:t>
-                      </a:r>
-                      <a:endParaRPr/>
-                    </a:p>
-                  </a:txBody>
-                  <a:tcPr marL="91450" marR="91450" marT="45725" marB="45725"/>
-                </a:tc>
-                <a:tc hMerge="1">
-                  <a:txBody>
-                    <a:bodyPr/>
-                    <a:lstStyle/>
-                    <a:p>
-                      <a:endParaRPr lang="hu-HU"/>
-                    </a:p>
-                  </a:txBody>
-                  <a:tcPr/>
-                </a:tc>
-                <a:extLst>
-                  <a:ext uri="{0D108BD9-81ED-4DB2-BD59-A6C34878D82A}">
-                    <a16:rowId xmlns:a16="http://schemas.microsoft.com/office/drawing/2014/main" val="10000"/>
-                  </a:ext>
-                </a:extLst>
-              </a:tr>
-              <a:tr h="3245350">
-                <a:tc>
-                  <a:txBody>
-                    <a:bodyPr/>
-                    <a:lstStyle/>
-                    <a:p>
-                      <a:pPr marL="0" marR="0" lvl="0" indent="0" algn="ctr" rtl="0">
-                        <a:lnSpc>
-                          <a:spcPct val="200000"/>
-                        </a:lnSpc>
-                        <a:spcBef>
-                          <a:spcPts val="0"/>
-                        </a:spcBef>
-                        <a:spcAft>
-                          <a:spcPts val="0"/>
-                        </a:spcAft>
-                        <a:buNone/>
-                      </a:pPr>
-                      <a:r>
-                        <a:rPr lang="hu-HU" sz="1800" b="1" u="none" strike="noStrike" cap="none">
-                          <a:latin typeface="Times New Roman"/>
-                          <a:ea typeface="Times New Roman"/>
-                          <a:cs typeface="Times New Roman"/>
-                          <a:sym typeface="Times New Roman"/>
-                        </a:rPr>
-                        <a:t>Probléma</a:t>
-                      </a:r>
-                      <a:endParaRPr/>
-                    </a:p>
-                    <a:p>
-                      <a:pPr marL="0" marR="0" lvl="0" indent="0" algn="ctr" rtl="0">
-                        <a:spcBef>
-                          <a:spcPts val="0"/>
-                        </a:spcBef>
-                        <a:spcAft>
-                          <a:spcPts val="0"/>
-                        </a:spcAft>
-                        <a:buClr>
-                          <a:schemeClr val="dk1"/>
-                        </a:buClr>
-                        <a:buSzPts val="1800"/>
-                        <a:buFont typeface="Arial"/>
-                        <a:buNone/>
-                      </a:pPr>
-                      <a:r>
-                        <a:rPr lang="hu-HU" sz="1800" u="none" strike="noStrike" cap="none">
-                          <a:latin typeface="Times New Roman"/>
-                          <a:ea typeface="Times New Roman"/>
-                          <a:cs typeface="Times New Roman"/>
-                          <a:sym typeface="Times New Roman"/>
-                        </a:rPr>
-                        <a:t>széttagolt kommunikáció</a:t>
-                      </a:r>
-                      <a:endParaRPr/>
-                    </a:p>
-                    <a:p>
-                      <a:pPr marL="0" marR="0" lvl="0" indent="0" algn="ctr" rtl="0">
-                        <a:spcBef>
-                          <a:spcPts val="0"/>
-                        </a:spcBef>
-                        <a:spcAft>
-                          <a:spcPts val="0"/>
-                        </a:spcAft>
-                        <a:buClr>
-                          <a:schemeClr val="dk1"/>
-                        </a:buClr>
-                        <a:buSzPts val="1800"/>
-                        <a:buFont typeface="Arial"/>
-                        <a:buNone/>
-                      </a:pPr>
-                      <a:r>
-                        <a:rPr lang="hu-HU" sz="1800" u="none" strike="noStrike" cap="none">
-                          <a:latin typeface="Times New Roman"/>
-                          <a:ea typeface="Times New Roman"/>
-                          <a:cs typeface="Times New Roman"/>
-                          <a:sym typeface="Times New Roman"/>
-                        </a:rPr>
-                        <a:t>több külön platform</a:t>
-                      </a:r>
-                      <a:endParaRPr/>
-                    </a:p>
-                    <a:p>
-                      <a:pPr marL="0" marR="0" lvl="0" indent="0" algn="ctr" rtl="0">
-                        <a:spcBef>
-                          <a:spcPts val="0"/>
-                        </a:spcBef>
-                        <a:spcAft>
-                          <a:spcPts val="0"/>
-                        </a:spcAft>
-                        <a:buClr>
-                          <a:schemeClr val="dk1"/>
-                        </a:buClr>
-                        <a:buSzPts val="1800"/>
-                        <a:buFont typeface="Arial"/>
-                        <a:buNone/>
-                      </a:pPr>
-                      <a:r>
-                        <a:rPr lang="hu-HU" sz="1800" u="none" strike="noStrike" cap="none">
-                          <a:latin typeface="Times New Roman"/>
-                          <a:ea typeface="Times New Roman"/>
-                          <a:cs typeface="Times New Roman"/>
-                          <a:sym typeface="Times New Roman"/>
-                        </a:rPr>
-                        <a:t>nehézkes eseménykezelés</a:t>
-                      </a:r>
-                      <a:endParaRPr/>
-                    </a:p>
-                    <a:p>
-                      <a:pPr marL="0" marR="0" lvl="0" indent="0" algn="ctr" rtl="0">
-                        <a:spcBef>
-                          <a:spcPts val="0"/>
-                        </a:spcBef>
-                        <a:spcAft>
-                          <a:spcPts val="0"/>
-                        </a:spcAft>
-                        <a:buClr>
-                          <a:schemeClr val="dk1"/>
-                        </a:buClr>
-                        <a:buSzPts val="1800"/>
-                        <a:buFont typeface="Arial"/>
-                        <a:buNone/>
-                      </a:pPr>
-                      <a:r>
-                        <a:rPr lang="hu-HU" sz="1800" u="none" strike="noStrike" cap="none">
-                          <a:latin typeface="Times New Roman"/>
-                          <a:ea typeface="Times New Roman"/>
-                          <a:cs typeface="Times New Roman"/>
-                          <a:sym typeface="Times New Roman"/>
-                        </a:rPr>
-                        <a:t>információk nehéz követése</a:t>
-                      </a:r>
-                      <a:endParaRPr/>
-                    </a:p>
-                  </a:txBody>
-                  <a:tcPr marL="91450" marR="91450" marT="45725" marB="45725" anchor="ctr"/>
-                </a:tc>
-                <a:tc>
-                  <a:txBody>
-                    <a:bodyPr/>
-                    <a:lstStyle/>
-                    <a:p>
-                      <a:pPr marL="0" marR="0" lvl="0" indent="0" algn="ctr" rtl="0">
-                        <a:lnSpc>
-                          <a:spcPct val="200000"/>
-                        </a:lnSpc>
-                        <a:spcBef>
-                          <a:spcPts val="0"/>
-                        </a:spcBef>
-                        <a:spcAft>
-                          <a:spcPts val="0"/>
-                        </a:spcAft>
-                        <a:buNone/>
-                      </a:pPr>
-                      <a:r>
-                        <a:rPr lang="hu-HU" sz="1800" b="1" u="none" strike="noStrike" cap="none">
-                          <a:latin typeface="Times New Roman"/>
-                          <a:ea typeface="Times New Roman"/>
-                          <a:cs typeface="Times New Roman"/>
-                          <a:sym typeface="Times New Roman"/>
-                        </a:rPr>
-                        <a:t>Megoldás</a:t>
-                      </a:r>
-                      <a:endParaRPr/>
-                    </a:p>
-                    <a:p>
-                      <a:pPr marL="0" marR="0" lvl="0" indent="0" algn="ctr" rtl="0">
-                        <a:spcBef>
-                          <a:spcPts val="0"/>
-                        </a:spcBef>
-                        <a:spcAft>
-                          <a:spcPts val="0"/>
-                        </a:spcAft>
-                        <a:buNone/>
-                      </a:pPr>
-                      <a:r>
-                        <a:rPr lang="hu-HU" sz="1800" u="none" strike="noStrike" cap="none">
-                          <a:latin typeface="Times New Roman"/>
-                          <a:ea typeface="Times New Roman"/>
-                          <a:cs typeface="Times New Roman"/>
-                          <a:sym typeface="Times New Roman"/>
-                        </a:rPr>
-                        <a:t>egységes webes rendszer</a:t>
-                      </a:r>
-                      <a:endParaRPr/>
-                    </a:p>
-                    <a:p>
-                      <a:pPr marL="0" marR="0" lvl="0" indent="0" algn="ctr" rtl="0">
-                        <a:spcBef>
-                          <a:spcPts val="0"/>
-                        </a:spcBef>
-                        <a:spcAft>
-                          <a:spcPts val="0"/>
-                        </a:spcAft>
-                        <a:buNone/>
-                      </a:pPr>
-                      <a:r>
-                        <a:rPr lang="hu-HU" sz="1800" u="none" strike="noStrike" cap="none">
-                          <a:latin typeface="Times New Roman"/>
-                          <a:ea typeface="Times New Roman"/>
-                          <a:cs typeface="Times New Roman"/>
-                          <a:sym typeface="Times New Roman"/>
-                        </a:rPr>
-                        <a:t>központi eseménykezelés</a:t>
-                      </a:r>
-                      <a:endParaRPr/>
-                    </a:p>
-                    <a:p>
-                      <a:pPr marL="0" marR="0" lvl="0" indent="0" algn="ctr" rtl="0">
-                        <a:spcBef>
-                          <a:spcPts val="0"/>
-                        </a:spcBef>
-                        <a:spcAft>
-                          <a:spcPts val="0"/>
-                        </a:spcAft>
-                        <a:buNone/>
-                      </a:pPr>
-                      <a:r>
-                        <a:rPr lang="hu-HU" sz="1800" u="none" strike="noStrike" cap="none">
-                          <a:latin typeface="Times New Roman"/>
-                          <a:ea typeface="Times New Roman"/>
-                          <a:cs typeface="Times New Roman"/>
-                          <a:sym typeface="Times New Roman"/>
-                        </a:rPr>
-                        <a:t>egyszerűbb kommunikáció</a:t>
-                      </a:r>
-                      <a:endParaRPr/>
-                    </a:p>
-                    <a:p>
-                      <a:pPr marL="0" marR="0" lvl="0" indent="0" algn="ctr" rtl="0">
-                        <a:spcBef>
-                          <a:spcPts val="0"/>
-                        </a:spcBef>
-                        <a:spcAft>
-                          <a:spcPts val="0"/>
-                        </a:spcAft>
-                        <a:buNone/>
-                      </a:pPr>
-                      <a:r>
-                        <a:rPr lang="hu-HU" sz="1800" u="none" strike="noStrike" cap="none">
-                          <a:latin typeface="Times New Roman"/>
-                          <a:ea typeface="Times New Roman"/>
-                          <a:cs typeface="Times New Roman"/>
-                          <a:sym typeface="Times New Roman"/>
-                        </a:rPr>
-                        <a:t>átlátható információk</a:t>
-                      </a:r>
-                      <a:endParaRPr/>
-                    </a:p>
-                  </a:txBody>
-                  <a:tcPr marL="91450" marR="91450" marT="45725" marB="45725" anchor="ctr"/>
-                </a:tc>
-                <a:extLst>
-                  <a:ext uri="{0D108BD9-81ED-4DB2-BD59-A6C34878D82A}">
-                    <a16:rowId xmlns:a16="http://schemas.microsoft.com/office/drawing/2014/main" val="10001"/>
-                  </a:ext>
-                </a:extLst>
-              </a:tr>
-            </a:tbl>
-          </a:graphicData>
-        </a:graphic>
-      </p:graphicFrame>
+        </p:nvSpPr>
+        <p:spPr>
+          <a:xfrm>
+            <a:off x="7385588" y="3758079"/>
+            <a:ext cx="4215865" cy="2246769"/>
+          </a:xfrm>
+          <a:prstGeom prst="rect">
+            <a:avLst/>
+          </a:prstGeom>
+          <a:noFill/>
+        </p:spPr>
+        <p:txBody>
+          <a:bodyPr wrap="square" rtlCol="0">
+            <a:spAutoFit/>
+          </a:bodyPr>
+          <a:lstStyle/>
+          <a:p>
+            <a:pPr lvl="0" algn="ctr">
+              <a:lnSpc>
+                <a:spcPct val="200000"/>
+              </a:lnSpc>
+            </a:pPr>
+            <a:r>
+              <a:rPr lang="hu-HU" sz="2000" b="1" dirty="0">
+                <a:latin typeface="Times New Roman"/>
+                <a:ea typeface="Times New Roman"/>
+                <a:cs typeface="Times New Roman"/>
+                <a:sym typeface="Times New Roman"/>
+              </a:rPr>
+              <a:t>Megoldás</a:t>
+            </a:r>
+            <a:endParaRPr lang="hu-HU" sz="2000" dirty="0"/>
+          </a:p>
+          <a:p>
+            <a:pPr lvl="0" algn="ctr"/>
+            <a:r>
+              <a:rPr lang="hu-HU" sz="2000" dirty="0">
+                <a:latin typeface="Times New Roman"/>
+                <a:ea typeface="Times New Roman"/>
+                <a:cs typeface="Times New Roman"/>
+                <a:sym typeface="Times New Roman"/>
+              </a:rPr>
+              <a:t>egységes webes rendszer</a:t>
+            </a:r>
+            <a:endParaRPr lang="hu-HU" sz="2000" dirty="0"/>
+          </a:p>
+          <a:p>
+            <a:pPr lvl="0" algn="ctr"/>
+            <a:r>
+              <a:rPr lang="hu-HU" sz="2000" dirty="0">
+                <a:latin typeface="Times New Roman"/>
+                <a:ea typeface="Times New Roman"/>
+                <a:cs typeface="Times New Roman"/>
+                <a:sym typeface="Times New Roman"/>
+              </a:rPr>
+              <a:t>központi eseménykezelés</a:t>
+            </a:r>
+            <a:endParaRPr lang="hu-HU" sz="2000" dirty="0"/>
+          </a:p>
+          <a:p>
+            <a:pPr lvl="0" algn="ctr"/>
+            <a:r>
+              <a:rPr lang="hu-HU" sz="2000" dirty="0">
+                <a:latin typeface="Times New Roman"/>
+                <a:ea typeface="Times New Roman"/>
+                <a:cs typeface="Times New Roman"/>
+                <a:sym typeface="Times New Roman"/>
+              </a:rPr>
+              <a:t>egyszerűbb kommunikáció</a:t>
+            </a:r>
+            <a:endParaRPr lang="hu-HU" sz="2000" dirty="0"/>
+          </a:p>
+          <a:p>
+            <a:pPr lvl="0" algn="ctr"/>
+            <a:r>
+              <a:rPr lang="hu-HU" sz="2000" dirty="0">
+                <a:latin typeface="Times New Roman"/>
+                <a:ea typeface="Times New Roman"/>
+                <a:cs typeface="Times New Roman"/>
+                <a:sym typeface="Times New Roman"/>
+              </a:rPr>
+              <a:t>átlátható információk</a:t>
+            </a:r>
+            <a:endParaRPr lang="hu-HU" sz="2000" dirty="0"/>
+          </a:p>
+          <a:p>
+            <a:endParaRPr lang="hu-HU" sz="2000" dirty="0"/>
+          </a:p>
+        </p:txBody>
+      </p:sp>
+      <p:sp>
+        <p:nvSpPr>
+          <p:cNvPr id="4" name="Szövegdoboz 3">
+            <a:extLst>
+              <a:ext uri="{FF2B5EF4-FFF2-40B4-BE49-F238E27FC236}">
+                <a16:creationId xmlns:a16="http://schemas.microsoft.com/office/drawing/2014/main" id="{E2F355FB-4B84-7D47-6AF2-8FD42995F575}"/>
+              </a:ext>
+            </a:extLst>
+          </p:cNvPr>
+          <p:cNvSpPr txBox="1"/>
+          <p:nvPr/>
+        </p:nvSpPr>
+        <p:spPr>
+          <a:xfrm>
+            <a:off x="1963825" y="2035002"/>
+            <a:ext cx="9008975" cy="923330"/>
+          </a:xfrm>
+          <a:prstGeom prst="rect">
+            <a:avLst/>
+          </a:prstGeom>
+          <a:noFill/>
+        </p:spPr>
+        <p:txBody>
+          <a:bodyPr wrap="square" rtlCol="0">
+            <a:spAutoFit/>
+          </a:bodyPr>
+          <a:lstStyle/>
+          <a:p>
+            <a:r>
+              <a:rPr lang="hu-HU" sz="2000" b="1" dirty="0">
+                <a:latin typeface="Cambria" panose="02040503050406030204" pitchFamily="18" charset="0"/>
+                <a:ea typeface="Cambria" panose="02040503050406030204" pitchFamily="18" charset="0"/>
+                <a:cs typeface="Times New Roman"/>
+                <a:sym typeface="Times New Roman"/>
+              </a:rPr>
+              <a:t>Cél:</a:t>
+            </a:r>
+            <a:r>
+              <a:rPr lang="hu-HU" sz="2000" dirty="0">
+                <a:latin typeface="Cambria" panose="02040503050406030204" pitchFamily="18" charset="0"/>
+                <a:ea typeface="Cambria" panose="02040503050406030204" pitchFamily="18" charset="0"/>
+                <a:cs typeface="Times New Roman"/>
+                <a:sym typeface="Times New Roman"/>
+              </a:rPr>
+              <a:t> </a:t>
+            </a:r>
+            <a:r>
+              <a:rPr lang="hu-HU" sz="2000" dirty="0">
+                <a:latin typeface="Cambria" panose="02040503050406030204" pitchFamily="18" charset="0"/>
+                <a:ea typeface="Cambria" panose="02040503050406030204" pitchFamily="18" charset="0"/>
+                <a:cs typeface="Cambria"/>
+                <a:sym typeface="Cambria"/>
+              </a:rPr>
+              <a:t>A tanárok és diákok közötti kommunikáció egyszerűsítése, valamint az iskolai események központi és átlátható kezelése egy rendszerben.</a:t>
+            </a:r>
+            <a:endParaRPr lang="hu-HU" sz="2000" dirty="0">
+              <a:latin typeface="Cambria" panose="02040503050406030204" pitchFamily="18" charset="0"/>
+              <a:ea typeface="Cambria" panose="02040503050406030204" pitchFamily="18" charset="0"/>
+            </a:endParaRPr>
+          </a:p>
+          <a:p>
+            <a:endParaRPr lang="hu-HU" dirty="0"/>
+          </a:p>
+        </p:txBody>
+      </p:sp>
     </p:spTree>
   </p:cSld>
   <p:clrMapOvr>
     <a:masterClrMapping/>
   </p:clrMapOvr>
-  <mc:AlternateContent xmlns:mc="http://schemas.openxmlformats.org/markup-compatibility/2006" xmlns:p159="http://schemas.microsoft.com/office/powerpoint/2015/09/main">
-    <mc:Choice Requires="p159">
-      <p:transition xmlns:p14="http://schemas.microsoft.com/office/powerpoint/2010/main" spd="slow" p14:dur="2000">
-        <p159:morph option="byObject"/>
-      </p:transition>
-    </mc:Choice>
-    <mc:Fallback xmlns="">
-      <p:transition spd="slow">
-        <p:fade/>
-      </p:transition>
-    </mc:Fallback>
-  </mc:AlternateContent>
 </p:sld>
 </file>
 
@@ -14941,6 +14501,110 @@
       </p:grpSpPr>
       <p:sp>
         <p:nvSpPr>
+          <p:cNvPr id="3" name="Google Shape;167;p9">
+            <a:extLst>
+              <a:ext uri="{FF2B5EF4-FFF2-40B4-BE49-F238E27FC236}">
+                <a16:creationId xmlns:a16="http://schemas.microsoft.com/office/drawing/2014/main" id="{57801444-2324-3ADF-5DCA-2533CC8DF37E}"/>
+              </a:ext>
+            </a:extLst>
+          </p:cNvPr>
+          <p:cNvSpPr/>
+          <p:nvPr/>
+        </p:nvSpPr>
+        <p:spPr>
+          <a:xfrm>
+            <a:off x="9993075" y="-339150"/>
+            <a:ext cx="3492600" cy="7536300"/>
+          </a:xfrm>
+          <a:prstGeom prst="ellipse">
+            <a:avLst/>
+          </a:prstGeom>
+          <a:solidFill>
+            <a:srgbClr val="4A86E8"/>
+          </a:solidFill>
+          <a:ln w="9525" cap="flat" cmpd="sng">
+            <a:solidFill>
+              <a:srgbClr val="CFE2F3"/>
+            </a:solidFill>
+            <a:prstDash val="solid"/>
+            <a:round/>
+            <a:headEnd type="none" w="sm" len="sm"/>
+            <a:tailEnd type="none" w="sm" len="sm"/>
+          </a:ln>
+        </p:spPr>
+        <p:txBody>
+          <a:bodyPr spcFirstLastPara="1" wrap="square" lIns="91425" tIns="91425" rIns="91425" bIns="91425" anchor="ctr" anchorCtr="0">
+            <a:noAutofit/>
+          </a:bodyPr>
+          <a:lstStyle/>
+          <a:p>
+            <a:pPr marL="0" lvl="0" indent="0" algn="ctr" rtl="0">
+              <a:spcBef>
+                <a:spcPts val="0"/>
+              </a:spcBef>
+              <a:spcAft>
+                <a:spcPts val="0"/>
+              </a:spcAft>
+              <a:buNone/>
+            </a:pPr>
+            <a:endParaRPr/>
+          </a:p>
+        </p:txBody>
+      </p:sp>
+      <p:sp>
+        <p:nvSpPr>
+          <p:cNvPr id="4" name="Google Shape;167;p9">
+            <a:extLst>
+              <a:ext uri="{FF2B5EF4-FFF2-40B4-BE49-F238E27FC236}">
+                <a16:creationId xmlns:a16="http://schemas.microsoft.com/office/drawing/2014/main" id="{163E3D33-F746-2664-41C5-8B2E84F2837E}"/>
+              </a:ext>
+            </a:extLst>
+          </p:cNvPr>
+          <p:cNvSpPr/>
+          <p:nvPr/>
+        </p:nvSpPr>
+        <p:spPr>
+          <a:xfrm>
+            <a:off x="-1113506" y="-339150"/>
+            <a:ext cx="3492600" cy="7536300"/>
+          </a:xfrm>
+          <a:prstGeom prst="ellipse">
+            <a:avLst/>
+          </a:prstGeom>
+          <a:solidFill>
+            <a:srgbClr val="4A86E8"/>
+          </a:solidFill>
+          <a:ln w="9525" cap="flat" cmpd="sng">
+            <a:solidFill>
+              <a:srgbClr val="CFE2F3"/>
+            </a:solidFill>
+            <a:prstDash val="solid"/>
+            <a:round/>
+            <a:headEnd type="none" w="sm" len="sm"/>
+            <a:tailEnd type="none" w="sm" len="sm"/>
+          </a:ln>
+        </p:spPr>
+        <p:txBody>
+          <a:bodyPr spcFirstLastPara="1" wrap="square" lIns="91425" tIns="91425" rIns="91425" bIns="91425" anchor="ctr" anchorCtr="0">
+            <a:noAutofit/>
+          </a:bodyPr>
+          <a:lstStyle/>
+          <a:p>
+            <a:pPr marL="0" lvl="0" indent="0" algn="ctr" rtl="0">
+              <a:spcBef>
+                <a:spcPts val="0"/>
+              </a:spcBef>
+              <a:spcAft>
+                <a:spcPts val="0"/>
+              </a:spcAft>
+              <a:buNone/>
+            </a:pPr>
+            <a:endParaRPr/>
+          </a:p>
+        </p:txBody>
+      </p:sp>
+      <p:sp>
+        <p:nvSpPr>
           <p:cNvPr id="102" name="Google Shape;102;p3"/>
           <p:cNvSpPr/>
           <p:nvPr/>
@@ -15106,33 +14770,6 @@
           </a:p>
         </p:txBody>
       </p:sp>
-      <p:pic>
-        <p:nvPicPr>
-          <p:cNvPr id="105" name="Google Shape;105;p3"/>
-          <p:cNvPicPr preferRelativeResize="0"/>
-          <p:nvPr/>
-        </p:nvPicPr>
-        <p:blipFill rotWithShape="1">
-          <a:blip r:embed="rId3">
-            <a:alphaModFix/>
-          </a:blip>
-          <a:srcRect/>
-          <a:stretch/>
-        </p:blipFill>
-        <p:spPr>
-          <a:xfrm>
-            <a:off x="10801999" y="301261"/>
-            <a:ext cx="1034472" cy="1034472"/>
-          </a:xfrm>
-          <a:prstGeom prst="rect">
-            <a:avLst/>
-          </a:prstGeom>
-          <a:noFill/>
-          <a:ln>
-            <a:noFill/>
-          </a:ln>
-        </p:spPr>
-      </p:pic>
       <p:sp>
         <p:nvSpPr>
           <p:cNvPr id="106" name="Google Shape;106;p3"/>
@@ -15361,106 +14998,11 @@
           </a:p>
         </p:txBody>
       </p:sp>
-      <p:sp>
-        <p:nvSpPr>
-          <p:cNvPr id="108" name="Google Shape;108;p3"/>
-          <p:cNvSpPr/>
-          <p:nvPr/>
-        </p:nvSpPr>
-        <p:spPr>
-          <a:xfrm>
-            <a:off x="593889" y="0"/>
-            <a:ext cx="13059824" cy="6183984"/>
-          </a:xfrm>
-          <a:custGeom>
-            <a:avLst/>
-            <a:gdLst/>
-            <a:ahLst/>
-            <a:cxnLst/>
-            <a:rect l="l" t="t" r="r" b="b"/>
-            <a:pathLst>
-              <a:path w="12946702" h="5944121" extrusionOk="0">
-                <a:moveTo>
-                  <a:pt x="0" y="0"/>
-                </a:moveTo>
-                <a:cubicBezTo>
-                  <a:pt x="1600200" y="835843"/>
-                  <a:pt x="3200400" y="1671687"/>
-                  <a:pt x="4138367" y="2658359"/>
-                </a:cubicBezTo>
-                <a:cubicBezTo>
-                  <a:pt x="5076334" y="3645031"/>
-                  <a:pt x="4268771" y="5668652"/>
-                  <a:pt x="5627802" y="5920033"/>
-                </a:cubicBezTo>
-                <a:cubicBezTo>
-                  <a:pt x="6986833" y="6171414"/>
-                  <a:pt x="11082779" y="4377180"/>
-                  <a:pt x="12292552" y="4166648"/>
-                </a:cubicBezTo>
-                <a:cubicBezTo>
-                  <a:pt x="13502325" y="3956116"/>
-                  <a:pt x="12608350" y="4490301"/>
-                  <a:pt x="12886441" y="4656841"/>
-                </a:cubicBezTo>
-              </a:path>
-            </a:pathLst>
-          </a:custGeom>
-          <a:noFill/>
-          <a:ln w="19050" cap="flat" cmpd="sng">
-            <a:solidFill>
-              <a:srgbClr val="082836"/>
-            </a:solidFill>
-            <a:prstDash val="solid"/>
-            <a:miter lim="800000"/>
-            <a:headEnd type="none" w="sm" len="sm"/>
-            <a:tailEnd type="none" w="sm" len="sm"/>
-          </a:ln>
-        </p:spPr>
-        <p:txBody>
-          <a:bodyPr spcFirstLastPara="1" wrap="square" lIns="91425" tIns="45700" rIns="91425" bIns="45700" anchor="ctr" anchorCtr="0">
-            <a:noAutofit/>
-          </a:bodyPr>
-          <a:lstStyle/>
-          <a:p>
-            <a:pPr marL="0" marR="0" lvl="0" indent="0" algn="ctr" rtl="0">
-              <a:spcBef>
-                <a:spcPts val="0"/>
-              </a:spcBef>
-              <a:spcAft>
-                <a:spcPts val="0"/>
-              </a:spcAft>
-              <a:buNone/>
-            </a:pPr>
-            <a:endParaRPr sz="1800">
-              <a:solidFill>
-                <a:schemeClr val="lt1"/>
-              </a:solidFill>
-              <a:latin typeface="Arial"/>
-              <a:ea typeface="Arial"/>
-              <a:cs typeface="Arial"/>
-              <a:sym typeface="Arial"/>
-            </a:endParaRPr>
-          </a:p>
-        </p:txBody>
-      </p:sp>
     </p:spTree>
   </p:cSld>
   <p:clrMapOvr>
     <a:masterClrMapping/>
   </p:clrMapOvr>
-  <mc:AlternateContent xmlns:mc="http://schemas.openxmlformats.org/markup-compatibility/2006" xmlns:p159="http://schemas.microsoft.com/office/powerpoint/2015/09/main">
-    <mc:Choice Requires="p159">
-      <p:transition xmlns:p14="http://schemas.microsoft.com/office/powerpoint/2010/main" spd="slow" p14:dur="2000">
-        <p159:morph option="byObject"/>
-      </p:transition>
-    </mc:Choice>
-    <mc:Fallback xmlns="">
-      <p:transition spd="slow">
-        <p:fade/>
-      </p:transition>
-    </mc:Fallback>
-  </mc:AlternateContent>
 </p:sld>
 </file>
 
@@ -15608,33 +15150,6 @@
           </a:p>
         </p:txBody>
       </p:sp>
-      <p:pic>
-        <p:nvPicPr>
-          <p:cNvPr id="115" name="Google Shape;115;p4"/>
-          <p:cNvPicPr preferRelativeResize="0"/>
-          <p:nvPr/>
-        </p:nvPicPr>
-        <p:blipFill rotWithShape="1">
-          <a:blip r:embed="rId3">
-            <a:alphaModFix/>
-          </a:blip>
-          <a:srcRect/>
-          <a:stretch/>
-        </p:blipFill>
-        <p:spPr>
-          <a:xfrm>
-            <a:off x="257000" y="301261"/>
-            <a:ext cx="1034472" cy="1034472"/>
-          </a:xfrm>
-          <a:prstGeom prst="rect">
-            <a:avLst/>
-          </a:prstGeom>
-          <a:noFill/>
-          <a:ln>
-            <a:noFill/>
-          </a:ln>
-        </p:spPr>
-      </p:pic>
       <p:sp>
         <p:nvSpPr>
           <p:cNvPr id="116" name="Google Shape;116;p4"/>
@@ -15836,7 +15351,7 @@
           <p:nvPr/>
         </p:nvPicPr>
         <p:blipFill>
-          <a:blip r:embed="rId4">
+          <a:blip r:embed="rId3">
             <a:alphaModFix/>
           </a:blip>
           <a:stretch>
@@ -15864,7 +15379,7 @@
           <p:nvPr/>
         </p:nvPicPr>
         <p:blipFill>
-          <a:blip r:embed="rId5">
+          <a:blip r:embed="rId4">
             <a:alphaModFix/>
           </a:blip>
           <a:stretch>
@@ -15892,7 +15407,7 @@
           <p:nvPr/>
         </p:nvPicPr>
         <p:blipFill>
-          <a:blip r:embed="rId6">
+          <a:blip r:embed="rId5">
             <a:alphaModFix/>
           </a:blip>
           <a:stretch>
@@ -15918,18 +15433,6 @@
   <p:clrMapOvr>
     <a:masterClrMapping/>
   </p:clrMapOvr>
-  <mc:AlternateContent xmlns:mc="http://schemas.openxmlformats.org/markup-compatibility/2006" xmlns:p159="http://schemas.microsoft.com/office/powerpoint/2015/09/main">
-    <mc:Choice Requires="p159">
-      <p:transition xmlns:p14="http://schemas.microsoft.com/office/powerpoint/2010/main" spd="slow" p14:dur="2000">
-        <p159:morph option="byObject"/>
-      </p:transition>
-    </mc:Choice>
-    <mc:Fallback xmlns="">
-      <p:transition spd="slow">
-        <p:fade/>
-      </p:transition>
-    </mc:Fallback>
-  </mc:AlternateContent>
 </p:sld>
 </file>
 
@@ -16123,33 +15626,6 @@
           </a:p>
         </p:txBody>
       </p:sp>
-      <p:pic>
-        <p:nvPicPr>
-          <p:cNvPr id="127" name="Google Shape;127;p5"/>
-          <p:cNvPicPr preferRelativeResize="0"/>
-          <p:nvPr/>
-        </p:nvPicPr>
-        <p:blipFill rotWithShape="1">
-          <a:blip r:embed="rId3">
-            <a:alphaModFix/>
-          </a:blip>
-          <a:srcRect/>
-          <a:stretch/>
-        </p:blipFill>
-        <p:spPr>
-          <a:xfrm>
-            <a:off x="10801999" y="301261"/>
-            <a:ext cx="1034472" cy="1034472"/>
-          </a:xfrm>
-          <a:prstGeom prst="rect">
-            <a:avLst/>
-          </a:prstGeom>
-          <a:noFill/>
-          <a:ln>
-            <a:noFill/>
-          </a:ln>
-        </p:spPr>
-      </p:pic>
       <p:sp>
         <p:nvSpPr>
           <p:cNvPr id="128" name="Google Shape;128;p5"/>
@@ -16190,7 +15666,7 @@
               <a:buChar char="•"/>
             </a:pPr>
             <a:r>
-              <a:rPr lang="hu-HU" sz="1800">
+              <a:rPr lang="hu-HU" sz="1800" dirty="0">
                 <a:solidFill>
                   <a:schemeClr val="dk1"/>
                 </a:solidFill>
@@ -16201,7 +15677,7 @@
               </a:rPr>
               <a:t>Rétegelt backend felépítés</a:t>
             </a:r>
-            <a:endParaRPr sz="1800">
+            <a:endParaRPr sz="1800" dirty="0">
               <a:solidFill>
                 <a:schemeClr val="dk1"/>
               </a:solidFill>
@@ -16221,7 +15697,7 @@
               </a:spcAft>
               <a:buNone/>
             </a:pPr>
-            <a:endParaRPr sz="1800">
+            <a:endParaRPr sz="1800" dirty="0">
               <a:solidFill>
                 <a:schemeClr val="dk1"/>
               </a:solidFill>
@@ -16243,7 +15719,7 @@
               <a:buChar char="•"/>
             </a:pPr>
             <a:r>
-              <a:rPr lang="hu-HU" sz="1800">
+              <a:rPr lang="hu-HU" sz="1800" dirty="0">
                 <a:solidFill>
                   <a:schemeClr val="dk1"/>
                 </a:solidFill>
@@ -16254,7 +15730,7 @@
               </a:rPr>
               <a:t>API modulonként szervezve</a:t>
             </a:r>
-            <a:endParaRPr sz="1800">
+            <a:endParaRPr sz="1800" dirty="0">
               <a:solidFill>
                 <a:schemeClr val="dk1"/>
               </a:solidFill>
@@ -16274,7 +15750,7 @@
               </a:spcAft>
               <a:buNone/>
             </a:pPr>
-            <a:endParaRPr sz="1800">
+            <a:endParaRPr sz="1800" dirty="0">
               <a:solidFill>
                 <a:schemeClr val="dk1"/>
               </a:solidFill>
@@ -16296,7 +15772,7 @@
               <a:buChar char="•"/>
             </a:pPr>
             <a:r>
-              <a:rPr lang="hu-HU" sz="1800">
+              <a:rPr lang="hu-HU" sz="1800" dirty="0">
                 <a:solidFill>
                   <a:schemeClr val="dk1"/>
                 </a:solidFill>
@@ -16307,7 +15783,7 @@
               </a:rPr>
               <a:t>Egységes hibakezelés</a:t>
             </a:r>
-            <a:endParaRPr sz="1800">
+            <a:endParaRPr sz="1800" dirty="0">
               <a:solidFill>
                 <a:schemeClr val="dk1"/>
               </a:solidFill>
@@ -16327,7 +15803,7 @@
               </a:spcAft>
               <a:buNone/>
             </a:pPr>
-            <a:endParaRPr sz="1800">
+            <a:endParaRPr sz="1800" dirty="0">
               <a:solidFill>
                 <a:schemeClr val="dk1"/>
               </a:solidFill>
@@ -16349,7 +15825,7 @@
               <a:buChar char="•"/>
             </a:pPr>
             <a:r>
-              <a:rPr lang="hu-HU" sz="1800">
+              <a:rPr lang="hu-HU" sz="1800" dirty="0">
                 <a:solidFill>
                   <a:schemeClr val="dk1"/>
                 </a:solidFill>
@@ -16360,7 +15836,7 @@
               </a:rPr>
               <a:t>Központi validáció és üzleti logika</a:t>
             </a:r>
-            <a:endParaRPr sz="1800">
+            <a:endParaRPr sz="1800" dirty="0">
               <a:solidFill>
                 <a:schemeClr val="dk1"/>
               </a:solidFill>
@@ -16380,7 +15856,7 @@
               </a:spcAft>
               <a:buNone/>
             </a:pPr>
-            <a:endParaRPr sz="1800">
+            <a:endParaRPr sz="1800" dirty="0">
               <a:solidFill>
                 <a:schemeClr val="dk1"/>
               </a:solidFill>
@@ -16402,7 +15878,7 @@
               <a:buChar char="•"/>
             </a:pPr>
             <a:r>
-              <a:rPr lang="hu-HU" sz="1800">
+              <a:rPr lang="hu-HU" sz="1800" dirty="0">
                 <a:solidFill>
                   <a:schemeClr val="dk1"/>
                 </a:solidFill>
@@ -16413,7 +15889,7 @@
               </a:rPr>
               <a:t>Stabil, bővíthető működés</a:t>
             </a:r>
-            <a:endParaRPr/>
+            <a:endParaRPr dirty="0"/>
           </a:p>
         </p:txBody>
       </p:sp>
@@ -16685,18 +16161,6 @@
   <p:clrMapOvr>
     <a:masterClrMapping/>
   </p:clrMapOvr>
-  <mc:AlternateContent xmlns:mc="http://schemas.openxmlformats.org/markup-compatibility/2006" xmlns:p159="http://schemas.microsoft.com/office/powerpoint/2015/09/main">
-    <mc:Choice Requires="p159">
-      <p:transition xmlns:p14="http://schemas.microsoft.com/office/powerpoint/2010/main" spd="slow" p14:dur="2000">
-        <p159:morph option="byObject"/>
-      </p:transition>
-    </mc:Choice>
-    <mc:Fallback xmlns="">
-      <p:transition spd="slow">
-        <p:fade/>
-      </p:transition>
-    </mc:Fallback>
-  </mc:AlternateContent>
 </p:sld>
 </file>
 
@@ -16844,33 +16308,6 @@
           </a:p>
         </p:txBody>
       </p:sp>
-      <p:pic>
-        <p:nvPicPr>
-          <p:cNvPr id="140" name="Google Shape;140;p6"/>
-          <p:cNvPicPr preferRelativeResize="0"/>
-          <p:nvPr/>
-        </p:nvPicPr>
-        <p:blipFill rotWithShape="1">
-          <a:blip r:embed="rId3">
-            <a:alphaModFix/>
-          </a:blip>
-          <a:srcRect/>
-          <a:stretch/>
-        </p:blipFill>
-        <p:spPr>
-          <a:xfrm>
-            <a:off x="257000" y="301261"/>
-            <a:ext cx="1034472" cy="1034472"/>
-          </a:xfrm>
-          <a:prstGeom prst="rect">
-            <a:avLst/>
-          </a:prstGeom>
-          <a:noFill/>
-          <a:ln>
-            <a:noFill/>
-          </a:ln>
-        </p:spPr>
-      </p:pic>
       <p:sp>
         <p:nvSpPr>
           <p:cNvPr id="141" name="Google Shape;141;p6"/>
@@ -17321,18 +16758,6 @@
   <p:clrMapOvr>
     <a:masterClrMapping/>
   </p:clrMapOvr>
-  <mc:AlternateContent xmlns:mc="http://schemas.openxmlformats.org/markup-compatibility/2006" xmlns:p159="http://schemas.microsoft.com/office/powerpoint/2015/09/main">
-    <mc:Choice Requires="p159">
-      <p:transition xmlns:p14="http://schemas.microsoft.com/office/powerpoint/2010/main" spd="slow" p14:dur="2000">
-        <p159:morph option="byObject"/>
-      </p:transition>
-    </mc:Choice>
-    <mc:Fallback xmlns="">
-      <p:transition spd="slow">
-        <p:fade/>
-      </p:transition>
-    </mc:Fallback>
-  </mc:AlternateContent>
 </p:sld>
 </file>
 
@@ -17434,33 +16859,6 @@
           </a:p>
         </p:txBody>
       </p:sp>
-      <p:pic>
-        <p:nvPicPr>
-          <p:cNvPr id="148" name="Google Shape;148;p7"/>
-          <p:cNvPicPr preferRelativeResize="0"/>
-          <p:nvPr/>
-        </p:nvPicPr>
-        <p:blipFill rotWithShape="1">
-          <a:blip r:embed="rId3">
-            <a:alphaModFix/>
-          </a:blip>
-          <a:srcRect/>
-          <a:stretch/>
-        </p:blipFill>
-        <p:spPr>
-          <a:xfrm>
-            <a:off x="10801999" y="301261"/>
-            <a:ext cx="1034472" cy="1034472"/>
-          </a:xfrm>
-          <a:prstGeom prst="rect">
-            <a:avLst/>
-          </a:prstGeom>
-          <a:noFill/>
-          <a:ln>
-            <a:noFill/>
-          </a:ln>
-        </p:spPr>
-      </p:pic>
       <p:sp>
         <p:nvSpPr>
           <p:cNvPr id="149" name="Google Shape;149;p7"/>
@@ -17847,7 +17245,7 @@
           <p:nvPr/>
         </p:nvPicPr>
         <p:blipFill>
-          <a:blip r:embed="rId4">
+          <a:blip r:embed="rId3">
             <a:alphaModFix/>
           </a:blip>
           <a:stretch>
@@ -17879,18 +17277,6 @@
   <p:clrMapOvr>
     <a:masterClrMapping/>
   </p:clrMapOvr>
-  <mc:AlternateContent xmlns:mc="http://schemas.openxmlformats.org/markup-compatibility/2006" xmlns:p159="http://schemas.microsoft.com/office/powerpoint/2015/09/main">
-    <mc:Choice Requires="p159">
-      <p:transition xmlns:p14="http://schemas.microsoft.com/office/powerpoint/2010/main" spd="slow" p14:dur="2000">
-        <p159:morph option="byObject"/>
-      </p:transition>
-    </mc:Choice>
-    <mc:Fallback xmlns="">
-      <p:transition spd="slow">
-        <p:fade/>
-      </p:transition>
-    </mc:Fallback>
-  </mc:AlternateContent>
 </p:sld>
 </file>
 
@@ -18038,33 +17424,6 @@
           </a:p>
         </p:txBody>
       </p:sp>
-      <p:pic>
-        <p:nvPicPr>
-          <p:cNvPr id="158" name="Google Shape;158;p8"/>
-          <p:cNvPicPr preferRelativeResize="0"/>
-          <p:nvPr/>
-        </p:nvPicPr>
-        <p:blipFill rotWithShape="1">
-          <a:blip r:embed="rId3">
-            <a:alphaModFix/>
-          </a:blip>
-          <a:srcRect/>
-          <a:stretch/>
-        </p:blipFill>
-        <p:spPr>
-          <a:xfrm>
-            <a:off x="257000" y="301261"/>
-            <a:ext cx="1034472" cy="1034472"/>
-          </a:xfrm>
-          <a:prstGeom prst="rect">
-            <a:avLst/>
-          </a:prstGeom>
-          <a:noFill/>
-          <a:ln>
-            <a:noFill/>
-          </a:ln>
-        </p:spPr>
-      </p:pic>
       <p:sp>
         <p:nvSpPr>
           <p:cNvPr id="159" name="Google Shape;159;p8"/>
@@ -18313,18 +17672,6 @@
   <p:clrMapOvr>
     <a:masterClrMapping/>
   </p:clrMapOvr>
-  <mc:AlternateContent xmlns:mc="http://schemas.openxmlformats.org/markup-compatibility/2006" xmlns:p159="http://schemas.microsoft.com/office/powerpoint/2015/09/main">
-    <mc:Choice Requires="p159">
-      <p:transition xmlns:p14="http://schemas.microsoft.com/office/powerpoint/2010/main" spd="slow" p14:dur="2000">
-        <p159:morph option="byObject"/>
-      </p:transition>
-    </mc:Choice>
-    <mc:Fallback xmlns="">
-      <p:transition spd="slow">
-        <p:fade/>
-      </p:transition>
-    </mc:Fallback>
-  </mc:AlternateContent>
 </p:sld>
 </file>
 
@@ -18472,33 +17819,6 @@
           </a:p>
         </p:txBody>
       </p:sp>
-      <p:pic>
-        <p:nvPicPr>
-          <p:cNvPr id="165" name="Google Shape;165;p9"/>
-          <p:cNvPicPr preferRelativeResize="0"/>
-          <p:nvPr/>
-        </p:nvPicPr>
-        <p:blipFill rotWithShape="1">
-          <a:blip r:embed="rId3">
-            <a:alphaModFix/>
-          </a:blip>
-          <a:srcRect/>
-          <a:stretch/>
-        </p:blipFill>
-        <p:spPr>
-          <a:xfrm>
-            <a:off x="10801999" y="301261"/>
-            <a:ext cx="1034472" cy="1034472"/>
-          </a:xfrm>
-          <a:prstGeom prst="rect">
-            <a:avLst/>
-          </a:prstGeom>
-          <a:noFill/>
-          <a:ln>
-            <a:noFill/>
-          </a:ln>
-        </p:spPr>
-      </p:pic>
       <p:sp>
         <p:nvSpPr>
           <p:cNvPr id="166" name="Google Shape;166;p9"/>
@@ -18773,18 +18093,6 @@
   <p:clrMapOvr>
     <a:masterClrMapping/>
   </p:clrMapOvr>
-  <mc:AlternateContent xmlns:mc="http://schemas.openxmlformats.org/markup-compatibility/2006" xmlns:p159="http://schemas.microsoft.com/office/powerpoint/2015/09/main">
-    <mc:Choice Requires="p159">
-      <p:transition xmlns:p14="http://schemas.microsoft.com/office/powerpoint/2010/main" spd="slow" p14:dur="2000">
-        <p159:morph option="byObject"/>
-      </p:transition>
-    </mc:Choice>
-    <mc:Fallback xmlns="">
-      <p:transition spd="slow">
-        <p:fade/>
-      </p:transition>
-    </mc:Fallback>
-  </mc:AlternateContent>
 </p:sld>
 </file>
 

--- a/dokumentumok/Prezentáció_NagyLevedSamuel_TothTamas.pptx
+++ b/dokumentumok/Prezentáció_NagyLevedSamuel_TothTamas.pptx
@@ -5,7 +5,7 @@
     <p:sldMasterId id="2147483648" r:id="rId1"/>
   </p:sldMasterIdLst>
   <p:notesMasterIdLst>
-    <p:notesMasterId r:id="rId17"/>
+    <p:notesMasterId r:id="rId16"/>
   </p:notesMasterIdLst>
   <p:sldIdLst>
     <p:sldId id="256" r:id="rId2"/>
@@ -21,23 +21,22 @@
     <p:sldId id="266" r:id="rId12"/>
     <p:sldId id="267" r:id="rId13"/>
     <p:sldId id="268" r:id="rId14"/>
-    <p:sldId id="269" r:id="rId15"/>
-    <p:sldId id="270" r:id="rId16"/>
+    <p:sldId id="270" r:id="rId15"/>
   </p:sldIdLst>
   <p:sldSz cx="12192000" cy="6858000"/>
   <p:notesSz cx="6858000" cy="9144000"/>
   <p:embeddedFontLst>
     <p:embeddedFont>
       <p:font typeface="Cambria" panose="02040503050406030204" pitchFamily="18" charset="0"/>
-      <p:regular r:id="rId18"/>
-      <p:bold r:id="rId19"/>
-      <p:italic r:id="rId20"/>
-      <p:boldItalic r:id="rId21"/>
+      <p:regular r:id="rId17"/>
+      <p:bold r:id="rId18"/>
+      <p:italic r:id="rId19"/>
+      <p:boldItalic r:id="rId20"/>
     </p:embeddedFont>
     <p:embeddedFont>
       <p:font typeface="Play" panose="020B0604020202020204" charset="0"/>
-      <p:regular r:id="rId22"/>
-      <p:bold r:id="rId23"/>
+      <p:regular r:id="rId21"/>
+      <p:bold r:id="rId22"/>
     </p:embeddedFont>
   </p:embeddedFontLst>
   <p:defaultTextStyle>
@@ -274,7 +273,7 @@
       <p15:sldGuideLst xmlns:p15="http://schemas.microsoft.com/office/powerpoint/2012/main"/>
     </p:ext>
     <p:ext uri="GoogleSlidesCustomDataVersion2">
-      <go:slidesCustomData xmlns:go="http://customooxmlschemas.google.com/" xmlns:ahyp="http://schemas.microsoft.com/office/drawing/2018/hyperlinkcolor" xmlns:p15="http://schemas.microsoft.com/office/powerpoint/2012/main" xmlns:p14="http://schemas.microsoft.com/office/powerpoint/2010/main" xmlns:com="http://schemas.openxmlformats.org/drawingml/2006/compatibility" xmlns:pvml="urn:schemas-microsoft-com:office:powerpoint" xmlns:v="urn:schemas-microsoft-com:vml" xmlns:o="urn:schemas-microsoft-com:office:office" xmlns:dgm="http://schemas.openxmlformats.org/drawingml/2006/diagram" xmlns:c="http://schemas.openxmlformats.org/drawingml/2006/chart" xmlns:mv="urn:schemas-microsoft-com:mac:vml" xmlns:mc="http://schemas.openxmlformats.org/markup-compatibility/2006" xmlns="" r:id="rId24" roundtripDataSignature="AMtx7mj67VHAuCHlscAUacmt/Mbt/wFFlA=="/>
+      <go:slidesCustomData xmlns="" xmlns:mc="http://schemas.openxmlformats.org/markup-compatibility/2006" xmlns:mv="urn:schemas-microsoft-com:mac:vml" xmlns:c="http://schemas.openxmlformats.org/drawingml/2006/chart" xmlns:dgm="http://schemas.openxmlformats.org/drawingml/2006/diagram" xmlns:o="urn:schemas-microsoft-com:office:office" xmlns:v="urn:schemas-microsoft-com:vml" xmlns:pvml="urn:schemas-microsoft-com:office:powerpoint" xmlns:com="http://schemas.openxmlformats.org/drawingml/2006/compatibility" xmlns:p14="http://schemas.microsoft.com/office/powerpoint/2010/main" xmlns:p15="http://schemas.microsoft.com/office/powerpoint/2012/main" xmlns:ahyp="http://schemas.microsoft.com/office/drawing/2018/hyperlinkcolor" xmlns:go="http://customooxmlschemas.google.com/" r:id="rId24" roundtripDataSignature="AMtx7mj67VHAuCHlscAUacmt/Mbt/wFFlA=="/>
     </p:ext>
   </p:extLst>
 </p:presentation>
@@ -1204,110 +1203,6 @@
         </p:nvSpPr>
         <p:spPr>
           <a:xfrm>
-            <a:off x="1143225" y="685800"/>
-            <a:ext cx="4572225" cy="3429000"/>
-          </a:xfrm>
-          <a:custGeom>
-            <a:avLst/>
-            <a:gdLst/>
-            <a:ahLst/>
-            <a:cxnLst/>
-            <a:rect l="l" t="t" r="r" b="b"/>
-            <a:pathLst>
-              <a:path w="120000" h="120000" extrusionOk="0">
-                <a:moveTo>
-                  <a:pt x="0" y="0"/>
-                </a:moveTo>
-                <a:lnTo>
-                  <a:pt x="120000" y="0"/>
-                </a:lnTo>
-                <a:lnTo>
-                  <a:pt x="120000" y="120000"/>
-                </a:lnTo>
-                <a:lnTo>
-                  <a:pt x="0" y="120000"/>
-                </a:lnTo>
-                <a:close/>
-              </a:path>
-            </a:pathLst>
-          </a:custGeom>
-        </p:spPr>
-      </p:sp>
-    </p:spTree>
-  </p:cSld>
-  <p:clrMapOvr>
-    <a:masterClrMapping/>
-  </p:clrMapOvr>
-</p:notes>
-</file>
-
-<file path=ppt/notesSlides/notesSlide14.xml><?xml version="1.0" encoding="utf-8"?>
-<p:notes xmlns:a="http://schemas.openxmlformats.org/drawingml/2006/main" xmlns:r="http://schemas.openxmlformats.org/officeDocument/2006/relationships" xmlns:p="http://schemas.openxmlformats.org/presentationml/2006/main" showMasterSp="0" showMasterPhAnim="0">
-  <p:cSld>
-    <p:spTree>
-      <p:nvGrpSpPr>
-        <p:cNvPr id="1" name="Shape 197"/>
-        <p:cNvGrpSpPr/>
-        <p:nvPr/>
-      </p:nvGrpSpPr>
-      <p:grpSpPr>
-        <a:xfrm>
-          <a:off x="0" y="0"/>
-          <a:ext cx="0" cy="0"/>
-          <a:chOff x="0" y="0"/>
-          <a:chExt cx="0" cy="0"/>
-        </a:xfrm>
-      </p:grpSpPr>
-      <p:sp>
-        <p:nvSpPr>
-          <p:cNvPr id="198" name="Google Shape;198;p14:notes"/>
-          <p:cNvSpPr txBox="1">
-            <a:spLocks noGrp="1"/>
-          </p:cNvSpPr>
-          <p:nvPr>
-            <p:ph type="body" idx="1"/>
-          </p:nvPr>
-        </p:nvSpPr>
-        <p:spPr>
-          <a:xfrm>
-            <a:off x="685800" y="4343400"/>
-            <a:ext cx="5486400" cy="4114800"/>
-          </a:xfrm>
-          <a:prstGeom prst="rect">
-            <a:avLst/>
-          </a:prstGeom>
-        </p:spPr>
-        <p:txBody>
-          <a:bodyPr spcFirstLastPara="1" wrap="square" lIns="91425" tIns="91425" rIns="91425" bIns="91425" anchor="t" anchorCtr="0">
-            <a:noAutofit/>
-          </a:bodyPr>
-          <a:lstStyle/>
-          <a:p>
-            <a:pPr marL="0" lvl="0" indent="0" algn="l" rtl="0">
-              <a:spcBef>
-                <a:spcPts val="0"/>
-              </a:spcBef>
-              <a:spcAft>
-                <a:spcPts val="0"/>
-              </a:spcAft>
-              <a:buNone/>
-            </a:pPr>
-            <a:endParaRPr/>
-          </a:p>
-        </p:txBody>
-      </p:sp>
-      <p:sp>
-        <p:nvSpPr>
-          <p:cNvPr id="199" name="Google Shape;199;p14:notes"/>
-          <p:cNvSpPr>
-            <a:spLocks noGrp="1" noRot="1" noChangeAspect="1"/>
-          </p:cNvSpPr>
-          <p:nvPr>
-            <p:ph type="sldImg" idx="2"/>
-          </p:nvPr>
-        </p:nvSpPr>
-        <p:spPr>
-          <a:xfrm>
             <a:off x="381000" y="685800"/>
             <a:ext cx="6096000" cy="3429000"/>
           </a:xfrm>
@@ -1345,7 +1240,7 @@
 </p:notes>
 </file>
 
-<file path=ppt/notesSlides/notesSlide15.xml><?xml version="1.0" encoding="utf-8"?>
+<file path=ppt/notesSlides/notesSlide14.xml><?xml version="1.0" encoding="utf-8"?>
 <p:notes xmlns:a="http://schemas.openxmlformats.org/drawingml/2006/main" xmlns:r="http://schemas.openxmlformats.org/officeDocument/2006/relationships" xmlns:p="http://schemas.openxmlformats.org/presentationml/2006/main" showMasterSp="0" showMasterPhAnim="0">
   <p:cSld>
     <p:spTree>
@@ -12753,11 +12648,52 @@
           </a:effectLst>
         </p:spPr>
       </p:pic>
+      <p:pic>
+        <p:nvPicPr>
+          <p:cNvPr id="5" name="Kép 4">
+            <a:extLst>
+              <a:ext uri="{FF2B5EF4-FFF2-40B4-BE49-F238E27FC236}">
+                <a16:creationId xmlns:a16="http://schemas.microsoft.com/office/drawing/2014/main" id="{5328DACF-C190-D603-12FE-F12ED351F0C6}"/>
+              </a:ext>
+            </a:extLst>
+          </p:cNvPr>
+          <p:cNvPicPr>
+            <a:picLocks noChangeAspect="1"/>
+          </p:cNvPicPr>
+          <p:nvPr/>
+        </p:nvPicPr>
+        <p:blipFill>
+          <a:blip r:embed="rId5"/>
+          <a:srcRect t="55" b="55"/>
+          <a:stretch/>
+        </p:blipFill>
+        <p:spPr>
+          <a:xfrm>
+            <a:off x="4669781" y="-105728"/>
+            <a:ext cx="2852432" cy="2621626"/>
+          </a:xfrm>
+          <a:prstGeom prst="rect">
+            <a:avLst/>
+          </a:prstGeom>
+        </p:spPr>
+      </p:pic>
     </p:spTree>
   </p:cSld>
   <p:clrMapOvr>
     <a:masterClrMapping/>
   </p:clrMapOvr>
+  <mc:AlternateContent xmlns:mc="http://schemas.openxmlformats.org/markup-compatibility/2006">
+    <mc:Choice xmlns:p159="http://schemas.microsoft.com/office/powerpoint/2015/09/main" Requires="p159">
+      <p:transition xmlns:p14="http://schemas.microsoft.com/office/powerpoint/2010/main" spd="slow" p14:dur="2000">
+        <p159:morph option="byObject"/>
+      </p:transition>
+    </mc:Choice>
+    <mc:Fallback>
+      <p:transition spd="slow">
+        <p:fade/>
+      </p:transition>
+    </mc:Fallback>
+  </mc:AlternateContent>
 </p:sld>
 </file>
 
@@ -13100,6 +13036,18 @@
   <p:clrMapOvr>
     <a:masterClrMapping/>
   </p:clrMapOvr>
+  <mc:AlternateContent xmlns:mc="http://schemas.openxmlformats.org/markup-compatibility/2006">
+    <mc:Choice xmlns:p159="http://schemas.microsoft.com/office/powerpoint/2015/09/main" Requires="p159">
+      <p:transition xmlns:p14="http://schemas.microsoft.com/office/powerpoint/2010/main" spd="slow" p14:dur="2000">
+        <p159:morph option="byObject"/>
+      </p:transition>
+    </mc:Choice>
+    <mc:Fallback>
+      <p:transition spd="slow">
+        <p:fade/>
+      </p:transition>
+    </mc:Fallback>
+  </mc:AlternateContent>
 </p:sld>
 </file>
 
@@ -13210,7 +13158,7 @@
         <p:spPr>
           <a:xfrm>
             <a:off x="1235026" y="2149950"/>
-            <a:ext cx="4963200" cy="646500"/>
+            <a:ext cx="5394374" cy="646290"/>
           </a:xfrm>
           <a:prstGeom prst="rect">
             <a:avLst/>
@@ -13236,7 +13184,7 @@
               <a:buNone/>
             </a:pPr>
             <a:r>
-              <a:rPr lang="hu-HU" sz="1800">
+              <a:rPr lang="hu-HU" sz="1800" dirty="0">
                 <a:solidFill>
                   <a:schemeClr val="dk1"/>
                 </a:solidFill>
@@ -13245,9 +13193,21 @@
                 <a:cs typeface="Arial"/>
                 <a:sym typeface="Arial"/>
               </a:rPr>
-              <a:t>Kommunikáció: Discord</a:t>
+              <a:t>Kommunikáció: </a:t>
             </a:r>
-            <a:endParaRPr sz="1800">
+            <a:r>
+              <a:rPr lang="hu-HU" sz="1800" dirty="0" err="1">
+                <a:solidFill>
+                  <a:schemeClr val="dk1"/>
+                </a:solidFill>
+                <a:latin typeface="Arial"/>
+                <a:ea typeface="Arial"/>
+                <a:cs typeface="Arial"/>
+                <a:sym typeface="Arial"/>
+              </a:rPr>
+              <a:t>Discord</a:t>
+            </a:r>
+            <a:endParaRPr sz="1800" dirty="0">
               <a:solidFill>
                 <a:schemeClr val="dk1"/>
               </a:solidFill>
@@ -13268,7 +13228,7 @@
               <a:buNone/>
             </a:pPr>
             <a:r>
-              <a:rPr lang="hu-HU" sz="1800">
+              <a:rPr lang="hu-HU" sz="1800" dirty="0">
                 <a:solidFill>
                   <a:schemeClr val="dk1"/>
                 </a:solidFill>
@@ -13280,7 +13240,7 @@
               <a:t>Megosztott munka: GitHub, Google</a:t>
             </a:r>
             <a:r>
-              <a:rPr lang="hu-HU" sz="1800">
+              <a:rPr lang="hu-HU" sz="1800" dirty="0">
                 <a:solidFill>
                   <a:schemeClr val="dk1"/>
                 </a:solidFill>
@@ -13288,7 +13248,7 @@
               <a:t> </a:t>
             </a:r>
             <a:r>
-              <a:rPr lang="hu-HU" sz="1800">
+              <a:rPr lang="hu-HU" sz="1800" dirty="0">
                 <a:solidFill>
                   <a:schemeClr val="dk1"/>
                 </a:solidFill>
@@ -13297,9 +13257,21 @@
                 <a:cs typeface="Arial"/>
                 <a:sym typeface="Arial"/>
               </a:rPr>
-              <a:t>Drive</a:t>
+              <a:t>Drive, </a:t>
             </a:r>
-            <a:endParaRPr/>
+            <a:r>
+              <a:rPr lang="hu-HU" sz="1800" dirty="0" err="1">
+                <a:solidFill>
+                  <a:schemeClr val="dk1"/>
+                </a:solidFill>
+                <a:latin typeface="Arial"/>
+                <a:ea typeface="Arial"/>
+                <a:cs typeface="Arial"/>
+                <a:sym typeface="Arial"/>
+              </a:rPr>
+              <a:t>Figma</a:t>
+            </a:r>
+            <a:endParaRPr dirty="0"/>
           </a:p>
         </p:txBody>
       </p:sp>
@@ -13400,6 +13372,18 @@
   <p:clrMapOvr>
     <a:masterClrMapping/>
   </p:clrMapOvr>
+  <mc:AlternateContent xmlns:mc="http://schemas.openxmlformats.org/markup-compatibility/2006">
+    <mc:Choice xmlns:p159="http://schemas.microsoft.com/office/powerpoint/2015/09/main" Requires="p159">
+      <p:transition xmlns:p14="http://schemas.microsoft.com/office/powerpoint/2010/main" spd="slow" p14:dur="2000">
+        <p159:morph option="byObject"/>
+      </p:transition>
+    </mc:Choice>
+    <mc:Fallback>
+      <p:transition spd="slow">
+        <p:fade/>
+      </p:transition>
+    </mc:Fallback>
+  </mc:AlternateContent>
 </p:sld>
 </file>
 
@@ -13616,199 +13600,6 @@
 </file>
 
 <file path=ppt/slides/slide14.xml><?xml version="1.0" encoding="utf-8"?>
-<p:sld xmlns:a="http://schemas.openxmlformats.org/drawingml/2006/main" xmlns:r="http://schemas.openxmlformats.org/officeDocument/2006/relationships" xmlns:p="http://schemas.openxmlformats.org/presentationml/2006/main">
-  <p:cSld>
-    <p:bg>
-      <p:bgPr>
-        <a:gradFill>
-          <a:gsLst>
-            <a:gs pos="0">
-              <a:srgbClr val="A3C5ED"/>
-            </a:gs>
-            <a:gs pos="74000">
-              <a:srgbClr val="72C4E9"/>
-            </a:gs>
-            <a:gs pos="83000">
-              <a:srgbClr val="72C4E9"/>
-            </a:gs>
-            <a:gs pos="100000">
-              <a:srgbClr val="A1D6F0"/>
-            </a:gs>
-          </a:gsLst>
-          <a:lin ang="5400000" scaled="0"/>
-        </a:gradFill>
-        <a:effectLst/>
-      </p:bgPr>
-    </p:bg>
-    <p:spTree>
-      <p:nvGrpSpPr>
-        <p:cNvPr id="1" name="Shape 200"/>
-        <p:cNvGrpSpPr/>
-        <p:nvPr/>
-      </p:nvGrpSpPr>
-      <p:grpSpPr>
-        <a:xfrm>
-          <a:off x="0" y="0"/>
-          <a:ext cx="0" cy="0"/>
-          <a:chOff x="0" y="0"/>
-          <a:chExt cx="0" cy="0"/>
-        </a:xfrm>
-      </p:grpSpPr>
-      <p:sp>
-        <p:nvSpPr>
-          <p:cNvPr id="201" name="Google Shape;201;p14"/>
-          <p:cNvSpPr txBox="1">
-            <a:spLocks noGrp="1"/>
-          </p:cNvSpPr>
-          <p:nvPr>
-            <p:ph type="ctrTitle"/>
-          </p:nvPr>
-        </p:nvSpPr>
-        <p:spPr>
-          <a:xfrm>
-            <a:off x="430974" y="504378"/>
-            <a:ext cx="4336235" cy="810807"/>
-          </a:xfrm>
-          <a:prstGeom prst="rect">
-            <a:avLst/>
-          </a:prstGeom>
-          <a:noFill/>
-          <a:ln>
-            <a:noFill/>
-          </a:ln>
-        </p:spPr>
-        <p:txBody>
-          <a:bodyPr spcFirstLastPara="1" wrap="square" lIns="91425" tIns="45700" rIns="91425" bIns="45700" anchor="b" anchorCtr="0">
-            <a:normAutofit/>
-          </a:bodyPr>
-          <a:lstStyle/>
-          <a:p>
-            <a:pPr marL="0" lvl="0" indent="0" algn="ctr" rtl="0">
-              <a:lnSpc>
-                <a:spcPct val="90000"/>
-              </a:lnSpc>
-              <a:spcBef>
-                <a:spcPts val="0"/>
-              </a:spcBef>
-              <a:spcAft>
-                <a:spcPts val="0"/>
-              </a:spcAft>
-              <a:buClr>
-                <a:schemeClr val="dk1"/>
-              </a:buClr>
-              <a:buSzPts val="4400"/>
-              <a:buFont typeface="Cambria"/>
-              <a:buNone/>
-            </a:pPr>
-            <a:r>
-              <a:rPr lang="hu-HU" sz="4400" dirty="0">
-                <a:latin typeface="Cambria"/>
-                <a:ea typeface="Cambria"/>
-                <a:cs typeface="Cambria"/>
-                <a:sym typeface="Cambria"/>
-              </a:rPr>
-              <a:t>Forrás</a:t>
-            </a:r>
-            <a:endParaRPr dirty="0"/>
-          </a:p>
-        </p:txBody>
-      </p:sp>
-      <p:sp>
-        <p:nvSpPr>
-          <p:cNvPr id="202" name="Google Shape;202;p14"/>
-          <p:cNvSpPr txBox="1"/>
-          <p:nvPr/>
-        </p:nvSpPr>
-        <p:spPr>
-          <a:xfrm>
-            <a:off x="1038208" y="2091420"/>
-            <a:ext cx="4336235" cy="1292621"/>
-          </a:xfrm>
-          <a:prstGeom prst="rect">
-            <a:avLst/>
-          </a:prstGeom>
-          <a:noFill/>
-          <a:ln>
-            <a:noFill/>
-          </a:ln>
-        </p:spPr>
-        <p:txBody>
-          <a:bodyPr spcFirstLastPara="1" wrap="square" lIns="91425" tIns="45700" rIns="91425" bIns="45700" anchor="t" anchorCtr="0">
-            <a:spAutoFit/>
-          </a:bodyPr>
-          <a:lstStyle/>
-          <a:p>
-            <a:pPr marL="0" marR="0" lvl="0" indent="0" algn="l" rtl="0">
-              <a:spcBef>
-                <a:spcPts val="0"/>
-              </a:spcBef>
-              <a:spcAft>
-                <a:spcPts val="0"/>
-              </a:spcAft>
-              <a:buNone/>
-            </a:pPr>
-            <a:r>
-              <a:rPr lang="hu-HU" sz="1600" dirty="0">
-                <a:solidFill>
-                  <a:schemeClr val="dk1"/>
-                </a:solidFill>
-                <a:latin typeface="Arial"/>
-                <a:ea typeface="Arial"/>
-                <a:cs typeface="Arial"/>
-                <a:sym typeface="Arial"/>
-                <a:hlinkClick r:id="rId3"/>
-              </a:rPr>
-              <a:t>www.chatgpt.com</a:t>
-            </a:r>
-            <a:endParaRPr lang="hu-HU" sz="1600" dirty="0">
-              <a:solidFill>
-                <a:schemeClr val="dk1"/>
-              </a:solidFill>
-              <a:latin typeface="Arial"/>
-              <a:ea typeface="Arial"/>
-              <a:cs typeface="Arial"/>
-              <a:sym typeface="Arial"/>
-            </a:endParaRPr>
-          </a:p>
-          <a:p>
-            <a:pPr lvl="0"/>
-            <a:r>
-              <a:rPr lang="hu-HU" sz="1600" dirty="0">
-                <a:hlinkClick r:id="rId4"/>
-              </a:rPr>
-              <a:t>https://vueframework.com</a:t>
-            </a:r>
-            <a:endParaRPr lang="hu-HU" sz="1600" dirty="0"/>
-          </a:p>
-          <a:p>
-            <a:pPr lvl="0"/>
-            <a:r>
-              <a:rPr lang="hu-HU" sz="1600" dirty="0">
-                <a:hlinkClick r:id="rId5"/>
-              </a:rPr>
-              <a:t>https://laravel.com/docs/12.x</a:t>
-            </a:r>
-            <a:endParaRPr lang="hu-HU" sz="1600" dirty="0"/>
-          </a:p>
-          <a:p>
-            <a:pPr lvl="0"/>
-            <a:endParaRPr lang="hu-HU" sz="1600" dirty="0"/>
-          </a:p>
-          <a:p>
-            <a:pPr lvl="0"/>
-            <a:endParaRPr dirty="0"/>
-          </a:p>
-        </p:txBody>
-      </p:sp>
-    </p:spTree>
-  </p:cSld>
-  <p:clrMapOvr>
-    <a:masterClrMapping/>
-  </p:clrMapOvr>
-</p:sld>
-</file>
-
-<file path=ppt/slides/slide15.xml><?xml version="1.0" encoding="utf-8"?>
 <p:sld xmlns:a="http://schemas.openxmlformats.org/drawingml/2006/main" xmlns:r="http://schemas.openxmlformats.org/officeDocument/2006/relationships" xmlns:p="http://schemas.openxmlformats.org/presentationml/2006/main">
   <p:cSld>
     <p:bg>
@@ -14457,6 +14248,18 @@
   <p:clrMapOvr>
     <a:masterClrMapping/>
   </p:clrMapOvr>
+  <mc:AlternateContent xmlns:mc="http://schemas.openxmlformats.org/markup-compatibility/2006">
+    <mc:Choice xmlns:p159="http://schemas.microsoft.com/office/powerpoint/2015/09/main" Requires="p159">
+      <p:transition xmlns:p14="http://schemas.microsoft.com/office/powerpoint/2010/main" spd="slow" p14:dur="2000">
+        <p159:morph option="byObject"/>
+      </p:transition>
+    </mc:Choice>
+    <mc:Fallback>
+      <p:transition spd="slow">
+        <p:fade/>
+      </p:transition>
+    </mc:Fallback>
+  </mc:AlternateContent>
 </p:sld>
 </file>
 
@@ -15003,6 +14806,18 @@
   <p:clrMapOvr>
     <a:masterClrMapping/>
   </p:clrMapOvr>
+  <mc:AlternateContent xmlns:mc="http://schemas.openxmlformats.org/markup-compatibility/2006">
+    <mc:Choice xmlns:p159="http://schemas.microsoft.com/office/powerpoint/2015/09/main" Requires="p159">
+      <p:transition xmlns:p14="http://schemas.microsoft.com/office/powerpoint/2010/main" spd="slow" p14:dur="2000">
+        <p159:morph option="byObject"/>
+      </p:transition>
+    </mc:Choice>
+    <mc:Fallback>
+      <p:transition spd="slow">
+        <p:fade/>
+      </p:transition>
+    </mc:Fallback>
+  </mc:AlternateContent>
 </p:sld>
 </file>
 
@@ -15433,6 +15248,18 @@
   <p:clrMapOvr>
     <a:masterClrMapping/>
   </p:clrMapOvr>
+  <mc:AlternateContent xmlns:mc="http://schemas.openxmlformats.org/markup-compatibility/2006">
+    <mc:Choice xmlns:p159="http://schemas.microsoft.com/office/powerpoint/2015/09/main" Requires="p159">
+      <p:transition xmlns:p14="http://schemas.microsoft.com/office/powerpoint/2010/main" spd="slow" p14:dur="2000">
+        <p159:morph option="byObject"/>
+      </p:transition>
+    </mc:Choice>
+    <mc:Fallback>
+      <p:transition spd="slow">
+        <p:fade/>
+      </p:transition>
+    </mc:Fallback>
+  </mc:AlternateContent>
 </p:sld>
 </file>
 
@@ -16161,6 +15988,18 @@
   <p:clrMapOvr>
     <a:masterClrMapping/>
   </p:clrMapOvr>
+  <mc:AlternateContent xmlns:mc="http://schemas.openxmlformats.org/markup-compatibility/2006">
+    <mc:Choice xmlns:p159="http://schemas.microsoft.com/office/powerpoint/2015/09/main" Requires="p159">
+      <p:transition xmlns:p14="http://schemas.microsoft.com/office/powerpoint/2010/main" spd="slow" p14:dur="2000">
+        <p159:morph option="byObject"/>
+      </p:transition>
+    </mc:Choice>
+    <mc:Fallback>
+      <p:transition spd="slow">
+        <p:fade/>
+      </p:transition>
+    </mc:Fallback>
+  </mc:AlternateContent>
 </p:sld>
 </file>
 
@@ -16758,6 +16597,18 @@
   <p:clrMapOvr>
     <a:masterClrMapping/>
   </p:clrMapOvr>
+  <mc:AlternateContent xmlns:mc="http://schemas.openxmlformats.org/markup-compatibility/2006">
+    <mc:Choice xmlns:p159="http://schemas.microsoft.com/office/powerpoint/2015/09/main" Requires="p159">
+      <p:transition xmlns:p14="http://schemas.microsoft.com/office/powerpoint/2010/main" spd="slow" p14:dur="2000">
+        <p159:morph option="byObject"/>
+      </p:transition>
+    </mc:Choice>
+    <mc:Fallback>
+      <p:transition spd="slow">
+        <p:fade/>
+      </p:transition>
+    </mc:Fallback>
+  </mc:AlternateContent>
 </p:sld>
 </file>
 
@@ -17277,6 +17128,18 @@
   <p:clrMapOvr>
     <a:masterClrMapping/>
   </p:clrMapOvr>
+  <mc:AlternateContent xmlns:mc="http://schemas.openxmlformats.org/markup-compatibility/2006">
+    <mc:Choice xmlns:p159="http://schemas.microsoft.com/office/powerpoint/2015/09/main" Requires="p159">
+      <p:transition xmlns:p14="http://schemas.microsoft.com/office/powerpoint/2010/main" spd="slow" p14:dur="2000">
+        <p159:morph option="byObject"/>
+      </p:transition>
+    </mc:Choice>
+    <mc:Fallback>
+      <p:transition spd="slow">
+        <p:fade/>
+      </p:transition>
+    </mc:Fallback>
+  </mc:AlternateContent>
 </p:sld>
 </file>
 
@@ -17672,6 +17535,18 @@
   <p:clrMapOvr>
     <a:masterClrMapping/>
   </p:clrMapOvr>
+  <mc:AlternateContent xmlns:mc="http://schemas.openxmlformats.org/markup-compatibility/2006">
+    <mc:Choice xmlns:p159="http://schemas.microsoft.com/office/powerpoint/2015/09/main" Requires="p159">
+      <p:transition xmlns:p14="http://schemas.microsoft.com/office/powerpoint/2010/main" spd="slow" p14:dur="2000">
+        <p159:morph option="byObject"/>
+      </p:transition>
+    </mc:Choice>
+    <mc:Fallback>
+      <p:transition spd="slow">
+        <p:fade/>
+      </p:transition>
+    </mc:Fallback>
+  </mc:AlternateContent>
 </p:sld>
 </file>
 
@@ -18093,6 +17968,18 @@
   <p:clrMapOvr>
     <a:masterClrMapping/>
   </p:clrMapOvr>
+  <mc:AlternateContent xmlns:mc="http://schemas.openxmlformats.org/markup-compatibility/2006">
+    <mc:Choice xmlns:p159="http://schemas.microsoft.com/office/powerpoint/2015/09/main" Requires="p159">
+      <p:transition xmlns:p14="http://schemas.microsoft.com/office/powerpoint/2010/main" spd="slow" p14:dur="2000">
+        <p159:morph option="byObject"/>
+      </p:transition>
+    </mc:Choice>
+    <mc:Fallback>
+      <p:transition spd="slow">
+        <p:fade/>
+      </p:transition>
+    </mc:Fallback>
+  </mc:AlternateContent>
 </p:sld>
 </file>
 

--- a/dokumentumok/Prezentáció_NagyLevedSamuel_TothTamas.pptx
+++ b/dokumentumok/Prezentáció_NagyLevedSamuel_TothTamas.pptx
@@ -771,7 +771,99 @@
               </a:spcAft>
               <a:buNone/>
             </a:pPr>
-            <a:endParaRPr/>
+            <a:r>
+              <a:rPr lang="hu-HU" dirty="0"/>
+              <a:t>Samu: Jónapot kívánunk!</a:t>
+            </a:r>
+          </a:p>
+          <a:p>
+            <a:pPr marL="0" lvl="0" indent="0" algn="l" rtl="0">
+              <a:spcBef>
+                <a:spcPts val="0"/>
+              </a:spcBef>
+              <a:spcAft>
+                <a:spcPts val="0"/>
+              </a:spcAft>
+              <a:buNone/>
+            </a:pPr>
+            <a:r>
+              <a:rPr lang="hu-HU" dirty="0"/>
+              <a:t>Samu: Engem Nagy </a:t>
+            </a:r>
+            <a:r>
+              <a:rPr lang="hu-HU" dirty="0" err="1"/>
+              <a:t>Levéd</a:t>
+            </a:r>
+            <a:r>
+              <a:rPr lang="hu-HU" dirty="0"/>
+              <a:t> Sámuel-</a:t>
+            </a:r>
+            <a:r>
+              <a:rPr lang="hu-HU" dirty="0" err="1"/>
+              <a:t>nek</a:t>
+            </a:r>
+            <a:r>
+              <a:rPr lang="hu-HU" dirty="0"/>
+              <a:t> hívnak.</a:t>
+            </a:r>
+          </a:p>
+          <a:p>
+            <a:pPr marL="0" lvl="0" indent="0" algn="l" rtl="0">
+              <a:spcBef>
+                <a:spcPts val="0"/>
+              </a:spcBef>
+              <a:spcAft>
+                <a:spcPts val="0"/>
+              </a:spcAft>
+              <a:buNone/>
+            </a:pPr>
+            <a:r>
+              <a:rPr lang="hu-HU" dirty="0"/>
+              <a:t>Tomi: Engem Tóth Tamás-</a:t>
+            </a:r>
+            <a:r>
+              <a:rPr lang="hu-HU" dirty="0" err="1"/>
+              <a:t>nak</a:t>
+            </a:r>
+            <a:r>
+              <a:rPr lang="hu-HU" dirty="0"/>
+              <a:t>.</a:t>
+            </a:r>
+          </a:p>
+          <a:p>
+            <a:pPr marL="0" lvl="0" indent="0" algn="l" rtl="0">
+              <a:spcBef>
+                <a:spcPts val="0"/>
+              </a:spcBef>
+              <a:spcAft>
+                <a:spcPts val="0"/>
+              </a:spcAft>
+              <a:buNone/>
+            </a:pPr>
+            <a:r>
+              <a:rPr lang="hu-HU" dirty="0"/>
+              <a:t>Samu: Ebben az előadásban közösen mutatjuk be a vizsgaremek projektünket.</a:t>
+            </a:r>
+          </a:p>
+          <a:p>
+            <a:pPr marL="0" lvl="0" indent="0" algn="l" rtl="0">
+              <a:spcBef>
+                <a:spcPts val="0"/>
+              </a:spcBef>
+              <a:spcAft>
+                <a:spcPts val="0"/>
+              </a:spcAft>
+              <a:buNone/>
+            </a:pPr>
+            <a:r>
+              <a:rPr lang="hu-HU" dirty="0"/>
+              <a:t>Tomi: A projektünk címe: </a:t>
+            </a:r>
+            <a:r>
+              <a:rPr lang="hu-HU" dirty="0" err="1"/>
+              <a:t>EseményTér</a:t>
+            </a:r>
+            <a:endParaRPr dirty="0"/>
           </a:p>
         </p:txBody>
       </p:sp>
@@ -1099,8 +1191,8 @@
         </p:nvSpPr>
         <p:spPr>
           <a:xfrm>
-            <a:off x="1143225" y="685800"/>
-            <a:ext cx="4572225" cy="3429000"/>
+            <a:off x="381000" y="685800"/>
+            <a:ext cx="6096000" cy="3429000"/>
           </a:xfrm>
           <a:custGeom>
             <a:avLst/>
@@ -1307,8 +1399,8 @@
         </p:nvSpPr>
         <p:spPr>
           <a:xfrm>
-            <a:off x="1143225" y="685800"/>
-            <a:ext cx="4572225" cy="3429000"/>
+            <a:off x="381000" y="685800"/>
+            <a:ext cx="6096000" cy="3429000"/>
           </a:xfrm>
           <a:custGeom>
             <a:avLst/>
@@ -1395,7 +1487,106 @@
               </a:spcAft>
               <a:buNone/>
             </a:pPr>
-            <a:endParaRPr/>
+            <a:r>
+              <a:rPr lang="hu-HU" dirty="0"/>
+              <a:t>Samu:</a:t>
+            </a:r>
+          </a:p>
+          <a:p>
+            <a:pPr marL="0" lvl="0" indent="0" algn="l" rtl="0">
+              <a:spcBef>
+                <a:spcPts val="0"/>
+              </a:spcBef>
+              <a:spcAft>
+                <a:spcPts val="0"/>
+              </a:spcAft>
+              <a:buNone/>
+            </a:pPr>
+            <a:r>
+              <a:rPr lang="hu-HU" dirty="0"/>
+              <a:t>A projekt témaválasztásának oka egy valós, mindennapi probléma volt az iskolai működésben.</a:t>
+            </a:r>
+          </a:p>
+          <a:p>
+            <a:pPr marL="0" lvl="0" indent="0" algn="l" rtl="0">
+              <a:spcBef>
+                <a:spcPts val="0"/>
+              </a:spcBef>
+              <a:spcAft>
+                <a:spcPts val="0"/>
+              </a:spcAft>
+              <a:buNone/>
+            </a:pPr>
+            <a:r>
+              <a:rPr lang="hu-HU" dirty="0"/>
+              <a:t>A kommunikáció és az események kezelése több külön felületen történt, ami nehezen átláthatóvá tette a folyamatokat.</a:t>
+            </a:r>
+          </a:p>
+          <a:p>
+            <a:pPr marL="0" lvl="0" indent="0" algn="l" rtl="0">
+              <a:spcBef>
+                <a:spcPts val="0"/>
+              </a:spcBef>
+              <a:spcAft>
+                <a:spcPts val="0"/>
+              </a:spcAft>
+              <a:buNone/>
+            </a:pPr>
+            <a:endParaRPr lang="hu-HU" dirty="0"/>
+          </a:p>
+          <a:p>
+            <a:pPr marL="0" lvl="0" indent="0" algn="l" rtl="0">
+              <a:spcBef>
+                <a:spcPts val="0"/>
+              </a:spcBef>
+              <a:spcAft>
+                <a:spcPts val="0"/>
+              </a:spcAft>
+              <a:buNone/>
+            </a:pPr>
+            <a:r>
+              <a:rPr lang="hu-HU" dirty="0"/>
+              <a:t>Tomi:</a:t>
+            </a:r>
+          </a:p>
+          <a:p>
+            <a:pPr marL="0" lvl="0" indent="0" algn="l" rtl="0">
+              <a:spcBef>
+                <a:spcPts val="0"/>
+              </a:spcBef>
+              <a:spcAft>
+                <a:spcPts val="0"/>
+              </a:spcAft>
+              <a:buNone/>
+            </a:pPr>
+            <a:r>
+              <a:rPr lang="hu-HU" dirty="0"/>
+              <a:t>Erre ad választ az </a:t>
+            </a:r>
+            <a:r>
+              <a:rPr lang="hu-HU" dirty="0" err="1"/>
+              <a:t>EseményTér</a:t>
+            </a:r>
+            <a:r>
+              <a:rPr lang="hu-HU" dirty="0"/>
+              <a:t>: egy egységes webes rendszer, ahol központilag kezelhetők az események és a kapcsolódó információk.</a:t>
+            </a:r>
+          </a:p>
+          <a:p>
+            <a:pPr marL="0" lvl="0" indent="0" algn="l" rtl="0">
+              <a:spcBef>
+                <a:spcPts val="0"/>
+              </a:spcBef>
+              <a:spcAft>
+                <a:spcPts val="0"/>
+              </a:spcAft>
+              <a:buNone/>
+            </a:pPr>
+            <a:r>
+              <a:rPr lang="hu-HU" dirty="0"/>
+              <a:t>Így a kommunikáció gyorsabb, a folyamatok követhetőbbek, és minden szereplő ugyanazon rendszerben dolgozik.</a:t>
+            </a:r>
+            <a:endParaRPr dirty="0"/>
           </a:p>
         </p:txBody>
       </p:sp>
@@ -1499,7 +1690,90 @@
               </a:spcAft>
               <a:buNone/>
             </a:pPr>
-            <a:endParaRPr/>
+            <a:r>
+              <a:rPr lang="hu-HU" dirty="0"/>
+              <a:t>Tomi:</a:t>
+            </a:r>
+            <a:br>
+              <a:rPr lang="hu-HU" dirty="0"/>
+            </a:br>
+            <a:r>
+              <a:rPr lang="hu-HU" dirty="0"/>
+              <a:t>A rendszer alapját a felhasználói belépési és profilfunkciók adják, vagyis a regisztráció, a bejelentkezés és a szerepkör kezelés.</a:t>
+            </a:r>
+          </a:p>
+          <a:p>
+            <a:pPr marL="0" lvl="0" indent="0" algn="l" rtl="0">
+              <a:spcBef>
+                <a:spcPts val="0"/>
+              </a:spcBef>
+              <a:spcAft>
+                <a:spcPts val="0"/>
+              </a:spcAft>
+              <a:buNone/>
+            </a:pPr>
+            <a:r>
+              <a:rPr lang="hu-HU" dirty="0"/>
+              <a:t>Erre épülnek rá a mindennapi használathoz szükséges funkciók.</a:t>
+            </a:r>
+          </a:p>
+          <a:p>
+            <a:pPr marL="0" lvl="0" indent="0" algn="l" rtl="0">
+              <a:spcBef>
+                <a:spcPts val="0"/>
+              </a:spcBef>
+              <a:spcAft>
+                <a:spcPts val="0"/>
+              </a:spcAft>
+              <a:buNone/>
+            </a:pPr>
+            <a:endParaRPr lang="hu-HU" dirty="0"/>
+          </a:p>
+          <a:p>
+            <a:pPr marL="0" lvl="0" indent="0" algn="l" rtl="0">
+              <a:spcBef>
+                <a:spcPts val="0"/>
+              </a:spcBef>
+              <a:spcAft>
+                <a:spcPts val="0"/>
+              </a:spcAft>
+              <a:buNone/>
+            </a:pPr>
+            <a:r>
+              <a:rPr lang="hu-HU" dirty="0"/>
+              <a:t>Samu:</a:t>
+            </a:r>
+          </a:p>
+          <a:p>
+            <a:pPr marL="0" lvl="0" indent="0" algn="l" rtl="0">
+              <a:spcBef>
+                <a:spcPts val="0"/>
+              </a:spcBef>
+              <a:spcAft>
+                <a:spcPts val="0"/>
+              </a:spcAft>
+              <a:buNone/>
+            </a:pPr>
+            <a:r>
+              <a:rPr lang="hu-HU" dirty="0"/>
+              <a:t>A fő modulok közé tartozik az események böngészése, létrehozása és kezelése, valamint az intézmények és osztályok adminisztrációja.</a:t>
+            </a:r>
+          </a:p>
+          <a:p>
+            <a:pPr marL="0" lvl="0" indent="0" algn="l" rtl="0">
+              <a:spcBef>
+                <a:spcPts val="0"/>
+              </a:spcBef>
+              <a:spcAft>
+                <a:spcPts val="0"/>
+              </a:spcAft>
+              <a:buNone/>
+            </a:pPr>
+            <a:r>
+              <a:rPr lang="hu-HU" dirty="0"/>
+              <a:t>Emellett a rendszer kezeli a csatlakozási kérelmeket is, így a jogosultságok és tagságok folyamata is egy helyen történik.</a:t>
+            </a:r>
+            <a:endParaRPr dirty="0"/>
           </a:p>
         </p:txBody>
       </p:sp>
@@ -1603,7 +1877,122 @@
               </a:spcAft>
               <a:buNone/>
             </a:pPr>
-            <a:endParaRPr/>
+            <a:r>
+              <a:rPr lang="hu-HU" dirty="0"/>
+              <a:t>Samu:</a:t>
+            </a:r>
+          </a:p>
+          <a:p>
+            <a:pPr marL="0" lvl="0" indent="0" algn="l" rtl="0">
+              <a:spcBef>
+                <a:spcPts val="0"/>
+              </a:spcBef>
+              <a:spcAft>
+                <a:spcPts val="0"/>
+              </a:spcAft>
+              <a:buNone/>
+            </a:pPr>
+            <a:r>
+              <a:rPr lang="hu-HU" dirty="0"/>
+              <a:t>A rendszer három fő részből áll: frontendből, backendből és adatbázisból.</a:t>
+            </a:r>
+          </a:p>
+          <a:p>
+            <a:pPr marL="0" lvl="0" indent="0" algn="l" rtl="0">
+              <a:spcBef>
+                <a:spcPts val="0"/>
+              </a:spcBef>
+              <a:spcAft>
+                <a:spcPts val="0"/>
+              </a:spcAft>
+              <a:buNone/>
+            </a:pPr>
+            <a:r>
+              <a:rPr lang="hu-HU" dirty="0"/>
+              <a:t>A frontend </a:t>
+            </a:r>
+            <a:r>
+              <a:rPr lang="hu-HU" dirty="0" err="1"/>
+              <a:t>Vue</a:t>
+            </a:r>
+            <a:r>
+              <a:rPr lang="hu-HU" dirty="0"/>
+              <a:t> 3 alapú kliensalkalmazás, ahol a felhasználó közvetlenül dolgozik.</a:t>
+            </a:r>
+          </a:p>
+          <a:p>
+            <a:pPr marL="0" lvl="0" indent="0" algn="l" rtl="0">
+              <a:spcBef>
+                <a:spcPts val="0"/>
+              </a:spcBef>
+              <a:spcAft>
+                <a:spcPts val="0"/>
+              </a:spcAft>
+              <a:buNone/>
+            </a:pPr>
+            <a:endParaRPr lang="hu-HU" dirty="0"/>
+          </a:p>
+          <a:p>
+            <a:pPr marL="0" lvl="0" indent="0" algn="l" rtl="0">
+              <a:spcBef>
+                <a:spcPts val="0"/>
+              </a:spcBef>
+              <a:spcAft>
+                <a:spcPts val="0"/>
+              </a:spcAft>
+              <a:buNone/>
+            </a:pPr>
+            <a:r>
+              <a:rPr lang="hu-HU" dirty="0"/>
+              <a:t>Tomi:</a:t>
+            </a:r>
+          </a:p>
+          <a:p>
+            <a:pPr marL="0" lvl="0" indent="0" algn="l" rtl="0">
+              <a:spcBef>
+                <a:spcPts val="0"/>
+              </a:spcBef>
+              <a:spcAft>
+                <a:spcPts val="0"/>
+              </a:spcAft>
+              <a:buNone/>
+            </a:pPr>
+            <a:r>
+              <a:rPr lang="hu-HU" dirty="0"/>
+              <a:t>A backend oldalt </a:t>
+            </a:r>
+            <a:r>
+              <a:rPr lang="hu-HU" dirty="0" err="1"/>
+              <a:t>Laravel</a:t>
+            </a:r>
+            <a:r>
+              <a:rPr lang="hu-HU" dirty="0"/>
+              <a:t> 12 alapú REST API biztosítja, az adatok tárolása pedig </a:t>
+            </a:r>
+            <a:r>
+              <a:rPr lang="hu-HU" dirty="0" err="1"/>
+              <a:t>MySQL</a:t>
+            </a:r>
+            <a:r>
+              <a:rPr lang="hu-HU" dirty="0"/>
+              <a:t> adatbázisban történik.</a:t>
+            </a:r>
+          </a:p>
+          <a:p>
+            <a:pPr marL="0" lvl="0" indent="0" algn="l" rtl="0">
+              <a:spcBef>
+                <a:spcPts val="0"/>
+              </a:spcBef>
+              <a:spcAft>
+                <a:spcPts val="0"/>
+              </a:spcAft>
+              <a:buNone/>
+            </a:pPr>
+            <a:r>
+              <a:rPr lang="hu-HU" dirty="0"/>
+              <a:t>A komponensek HTTP API-hívásokkal kommunikálnak egymással.</a:t>
+            </a:r>
+            <a:endParaRPr dirty="0"/>
           </a:p>
         </p:txBody>
       </p:sp>
@@ -12682,13 +13071,13 @@
   <p:clrMapOvr>
     <a:masterClrMapping/>
   </p:clrMapOvr>
-  <mc:AlternateContent xmlns:mc="http://schemas.openxmlformats.org/markup-compatibility/2006">
-    <mc:Choice xmlns:p159="http://schemas.microsoft.com/office/powerpoint/2015/09/main" Requires="p159">
+  <mc:AlternateContent xmlns:mc="http://schemas.openxmlformats.org/markup-compatibility/2006" xmlns:p159="http://schemas.microsoft.com/office/powerpoint/2015/09/main">
+    <mc:Choice Requires="p159">
       <p:transition xmlns:p14="http://schemas.microsoft.com/office/powerpoint/2010/main" spd="slow" p14:dur="2000">
         <p159:morph option="byObject"/>
       </p:transition>
     </mc:Choice>
-    <mc:Fallback>
+    <mc:Fallback xmlns="">
       <p:transition spd="slow">
         <p:fade/>
       </p:transition>
@@ -13031,18 +13420,47 @@
           </a:p>
         </p:txBody>
       </p:sp>
+      <p:pic>
+        <p:nvPicPr>
+          <p:cNvPr id="2" name="Kép 1">
+            <a:extLst>
+              <a:ext uri="{FF2B5EF4-FFF2-40B4-BE49-F238E27FC236}">
+                <a16:creationId xmlns:a16="http://schemas.microsoft.com/office/drawing/2014/main" id="{02D68B3B-2132-2F6A-4985-5A1B54A7F98D}"/>
+              </a:ext>
+            </a:extLst>
+          </p:cNvPr>
+          <p:cNvPicPr>
+            <a:picLocks noChangeAspect="1"/>
+          </p:cNvPicPr>
+          <p:nvPr/>
+        </p:nvPicPr>
+        <p:blipFill>
+          <a:blip r:embed="rId3"/>
+          <a:srcRect t="55" b="55"/>
+          <a:stretch/>
+        </p:blipFill>
+        <p:spPr>
+          <a:xfrm>
+            <a:off x="-317902" y="-137425"/>
+            <a:ext cx="2852432" cy="2621626"/>
+          </a:xfrm>
+          <a:prstGeom prst="rect">
+            <a:avLst/>
+          </a:prstGeom>
+        </p:spPr>
+      </p:pic>
     </p:spTree>
   </p:cSld>
   <p:clrMapOvr>
     <a:masterClrMapping/>
   </p:clrMapOvr>
-  <mc:AlternateContent xmlns:mc="http://schemas.openxmlformats.org/markup-compatibility/2006">
-    <mc:Choice xmlns:p159="http://schemas.microsoft.com/office/powerpoint/2015/09/main" Requires="p159">
+  <mc:AlternateContent xmlns:mc="http://schemas.openxmlformats.org/markup-compatibility/2006" xmlns:p159="http://schemas.microsoft.com/office/powerpoint/2015/09/main">
+    <mc:Choice Requires="p159">
       <p:transition xmlns:p14="http://schemas.microsoft.com/office/powerpoint/2010/main" spd="slow" p14:dur="2000">
         <p159:morph option="byObject"/>
       </p:transition>
     </mc:Choice>
-    <mc:Fallback>
+    <mc:Fallback xmlns="">
       <p:transition spd="slow">
         <p:fade/>
       </p:transition>
@@ -13137,7 +13555,7 @@
               <a:buNone/>
             </a:pPr>
             <a:r>
-              <a:rPr lang="hu-HU" sz="4400">
+              <a:rPr lang="hu-HU" sz="4400" dirty="0">
                 <a:latin typeface="Cambria"/>
                 <a:ea typeface="Cambria"/>
                 <a:cs typeface="Cambria"/>
@@ -13145,7 +13563,7 @@
               </a:rPr>
               <a:t>Csapatmunka</a:t>
             </a:r>
-            <a:endParaRPr/>
+            <a:endParaRPr dirty="0"/>
           </a:p>
         </p:txBody>
       </p:sp>
@@ -13372,13 +13790,13 @@
   <p:clrMapOvr>
     <a:masterClrMapping/>
   </p:clrMapOvr>
-  <mc:AlternateContent xmlns:mc="http://schemas.openxmlformats.org/markup-compatibility/2006">
-    <mc:Choice xmlns:p159="http://schemas.microsoft.com/office/powerpoint/2015/09/main" Requires="p159">
+  <mc:AlternateContent xmlns:mc="http://schemas.openxmlformats.org/markup-compatibility/2006" xmlns:p159="http://schemas.microsoft.com/office/powerpoint/2015/09/main">
+    <mc:Choice Requires="p159">
       <p:transition xmlns:p14="http://schemas.microsoft.com/office/powerpoint/2010/main" spd="slow" p14:dur="2000">
         <p159:morph option="byObject"/>
       </p:transition>
     </mc:Choice>
-    <mc:Fallback>
+    <mc:Fallback xmlns="">
       <p:transition spd="slow">
         <p:fade/>
       </p:transition>
@@ -13428,6 +13846,58 @@
       </p:grpSpPr>
       <p:sp>
         <p:nvSpPr>
+          <p:cNvPr id="3" name="Google Shape;186;p11">
+            <a:extLst>
+              <a:ext uri="{FF2B5EF4-FFF2-40B4-BE49-F238E27FC236}">
+                <a16:creationId xmlns:a16="http://schemas.microsoft.com/office/drawing/2014/main" id="{7A225262-4330-5433-DFC6-8966CB87C205}"/>
+              </a:ext>
+            </a:extLst>
+          </p:cNvPr>
+          <p:cNvSpPr/>
+          <p:nvPr/>
+        </p:nvSpPr>
+        <p:spPr>
+          <a:xfrm rot="-5400000">
+            <a:off x="-1598046" y="-2278429"/>
+            <a:ext cx="3492600" cy="4823100"/>
+          </a:xfrm>
+          <a:prstGeom prst="ellipse">
+            <a:avLst/>
+          </a:prstGeom>
+          <a:solidFill>
+            <a:srgbClr val="4A86E8"/>
+          </a:solidFill>
+          <a:ln w="9525" cap="flat" cmpd="sng">
+            <a:solidFill>
+              <a:srgbClr val="CFE2F3"/>
+            </a:solidFill>
+            <a:prstDash val="solid"/>
+            <a:round/>
+            <a:headEnd type="none" w="sm" len="sm"/>
+            <a:tailEnd type="none" w="sm" len="sm"/>
+          </a:ln>
+        </p:spPr>
+        <p:txBody>
+          <a:bodyPr spcFirstLastPara="1" wrap="square" lIns="91425" tIns="91425" rIns="91425" bIns="91425" anchor="ctr" anchorCtr="0">
+            <a:noAutofit/>
+          </a:bodyPr>
+          <a:lstStyle/>
+          <a:p>
+            <a:pPr marL="0" lvl="0" indent="0" algn="ctr" rtl="0">
+              <a:spcBef>
+                <a:spcPts val="0"/>
+              </a:spcBef>
+              <a:spcAft>
+                <a:spcPts val="0"/>
+              </a:spcAft>
+              <a:buNone/>
+            </a:pPr>
+            <a:endParaRPr/>
+          </a:p>
+        </p:txBody>
+      </p:sp>
+      <p:sp>
+        <p:nvSpPr>
           <p:cNvPr id="191" name="Google Shape;191;p12"/>
           <p:cNvSpPr txBox="1">
             <a:spLocks noGrp="1"/>
@@ -13438,8 +13908,8 @@
         </p:nvSpPr>
         <p:spPr>
           <a:xfrm>
-            <a:off x="430974" y="504378"/>
-            <a:ext cx="4336235" cy="810807"/>
+            <a:off x="430975" y="504378"/>
+            <a:ext cx="7864614" cy="810807"/>
           </a:xfrm>
           <a:prstGeom prst="rect">
             <a:avLst/>
@@ -13473,14 +13943,67 @@
               <a:buNone/>
             </a:pPr>
             <a:r>
-              <a:rPr lang="hu-HU" sz="4400">
-                <a:latin typeface="Cambria"/>
-                <a:ea typeface="Cambria"/>
-                <a:cs typeface="Cambria"/>
-                <a:sym typeface="Cambria"/>
+              <a:rPr lang="hu-HU" sz="4400" dirty="0">
+                <a:latin typeface="Cambria" panose="02040503050406030204" pitchFamily="18" charset="0"/>
+                <a:ea typeface="Cambria" panose="02040503050406030204" pitchFamily="18" charset="0"/>
               </a:rPr>
-              <a:t>Jövőbeli tervek</a:t>
+              <a:t>Továbbfejlesztési lehetőségek</a:t>
             </a:r>
+            <a:endParaRPr sz="4400" dirty="0">
+              <a:latin typeface="Cambria" panose="02040503050406030204" pitchFamily="18" charset="0"/>
+              <a:ea typeface="Cambria" panose="02040503050406030204" pitchFamily="18" charset="0"/>
+            </a:endParaRPr>
+          </a:p>
+        </p:txBody>
+      </p:sp>
+      <p:sp>
+        <p:nvSpPr>
+          <p:cNvPr id="2" name="Google Shape;185;p11">
+            <a:extLst>
+              <a:ext uri="{FF2B5EF4-FFF2-40B4-BE49-F238E27FC236}">
+                <a16:creationId xmlns:a16="http://schemas.microsoft.com/office/drawing/2014/main" id="{59FB9058-B16B-62FF-42D3-15B1E3A50903}"/>
+              </a:ext>
+            </a:extLst>
+          </p:cNvPr>
+          <p:cNvSpPr/>
+          <p:nvPr/>
+        </p:nvSpPr>
+        <p:spPr>
+          <a:xfrm>
+            <a:off x="10445700" y="4265855"/>
+            <a:ext cx="3492600" cy="4823100"/>
+          </a:xfrm>
+          <a:prstGeom prst="ellipse">
+            <a:avLst/>
+          </a:prstGeom>
+          <a:solidFill>
+            <a:srgbClr val="4A86E8"/>
+          </a:solidFill>
+          <a:ln w="9525" cap="flat" cmpd="sng">
+            <a:solidFill>
+              <a:srgbClr val="CFE2F3"/>
+            </a:solidFill>
+            <a:prstDash val="solid"/>
+            <a:round/>
+            <a:headEnd type="none" w="sm" len="sm"/>
+            <a:tailEnd type="none" w="sm" len="sm"/>
+          </a:ln>
+        </p:spPr>
+        <p:txBody>
+          <a:bodyPr spcFirstLastPara="1" wrap="square" lIns="91425" tIns="91425" rIns="91425" bIns="91425" anchor="ctr" anchorCtr="0">
+            <a:noAutofit/>
+          </a:bodyPr>
+          <a:lstStyle/>
+          <a:p>
+            <a:pPr marL="0" lvl="0" indent="0" algn="ctr" rtl="0">
+              <a:spcBef>
+                <a:spcPts val="0"/>
+              </a:spcBef>
+              <a:spcAft>
+                <a:spcPts val="0"/>
+              </a:spcAft>
+              <a:buNone/>
+            </a:pPr>
             <a:endParaRPr/>
           </a:p>
         </p:txBody>
@@ -13490,6 +14013,18 @@
   <p:clrMapOvr>
     <a:masterClrMapping/>
   </p:clrMapOvr>
+  <mc:AlternateContent xmlns:mc="http://schemas.openxmlformats.org/markup-compatibility/2006">
+    <mc:Choice xmlns:p159="http://schemas.microsoft.com/office/powerpoint/2015/09/main" Requires="p159">
+      <p:transition xmlns:p14="http://schemas.microsoft.com/office/powerpoint/2010/main" spd="slow" p14:dur="2000">
+        <p159:morph option="byObject"/>
+      </p:transition>
+    </mc:Choice>
+    <mc:Fallback>
+      <p:transition spd="slow">
+        <p:fade/>
+      </p:transition>
+    </mc:Fallback>
+  </mc:AlternateContent>
 </p:sld>
 </file>
 
@@ -13579,7 +14114,7 @@
               <a:buNone/>
             </a:pPr>
             <a:r>
-              <a:rPr lang="hu-HU" sz="4400">
+              <a:rPr lang="hu-HU" sz="4400" dirty="0">
                 <a:latin typeface="Cambria"/>
                 <a:ea typeface="Cambria"/>
                 <a:cs typeface="Cambria"/>
@@ -13587,7 +14122,7 @@
               </a:rPr>
               <a:t>Demó</a:t>
             </a:r>
-            <a:endParaRPr/>
+            <a:endParaRPr dirty="0"/>
           </a:p>
         </p:txBody>
       </p:sp>
@@ -13596,6 +14131,18 @@
   <p:clrMapOvr>
     <a:masterClrMapping/>
   </p:clrMapOvr>
+  <mc:AlternateContent xmlns:mc="http://schemas.openxmlformats.org/markup-compatibility/2006">
+    <mc:Choice xmlns:p159="http://schemas.microsoft.com/office/powerpoint/2015/09/main" Requires="p159">
+      <p:transition xmlns:p14="http://schemas.microsoft.com/office/powerpoint/2010/main" spd="slow" p14:dur="2000">
+        <p159:morph option="byObject"/>
+      </p:transition>
+    </mc:Choice>
+    <mc:Fallback>
+      <p:transition spd="slow">
+        <p:fade/>
+      </p:transition>
+    </mc:Fallback>
+  </mc:AlternateContent>
 </p:sld>
 </file>
 
@@ -13697,11 +14244,123 @@
           </a:p>
         </p:txBody>
       </p:sp>
+      <p:sp>
+        <p:nvSpPr>
+          <p:cNvPr id="2" name="Szövegdoboz 1">
+            <a:extLst>
+              <a:ext uri="{FF2B5EF4-FFF2-40B4-BE49-F238E27FC236}">
+                <a16:creationId xmlns:a16="http://schemas.microsoft.com/office/drawing/2014/main" id="{DADB9E7F-9F4E-0597-96C3-8F07F13D9B34}"/>
+              </a:ext>
+            </a:extLst>
+          </p:cNvPr>
+          <p:cNvSpPr txBox="1"/>
+          <p:nvPr/>
+        </p:nvSpPr>
+        <p:spPr>
+          <a:xfrm>
+            <a:off x="0" y="5380672"/>
+            <a:ext cx="3043442" cy="1477328"/>
+          </a:xfrm>
+          <a:prstGeom prst="rect">
+            <a:avLst/>
+          </a:prstGeom>
+          <a:noFill/>
+        </p:spPr>
+        <p:txBody>
+          <a:bodyPr wrap="square" rtlCol="0">
+            <a:spAutoFit/>
+          </a:bodyPr>
+          <a:lstStyle/>
+          <a:p>
+            <a:pPr>
+              <a:lnSpc>
+                <a:spcPct val="250000"/>
+              </a:lnSpc>
+            </a:pPr>
+            <a:r>
+              <a:rPr lang="hu-HU" sz="1200" dirty="0">
+                <a:latin typeface="Cambria" panose="02040503050406030204" pitchFamily="18" charset="0"/>
+                <a:ea typeface="Cambria" panose="02040503050406030204" pitchFamily="18" charset="0"/>
+              </a:rPr>
+              <a:t>Források:</a:t>
+            </a:r>
+          </a:p>
+          <a:p>
+            <a:r>
+              <a:rPr lang="hu-HU" sz="1200" dirty="0">
+                <a:latin typeface="Cambria" panose="02040503050406030204" pitchFamily="18" charset="0"/>
+                <a:ea typeface="Cambria" panose="02040503050406030204" pitchFamily="18" charset="0"/>
+              </a:rPr>
+              <a:t>http://www.chatgpt.com/</a:t>
+            </a:r>
+            <a:br>
+              <a:rPr lang="hu-HU" sz="1200" dirty="0">
+                <a:latin typeface="Cambria" panose="02040503050406030204" pitchFamily="18" charset="0"/>
+                <a:ea typeface="Cambria" panose="02040503050406030204" pitchFamily="18" charset="0"/>
+              </a:rPr>
+            </a:br>
+            <a:r>
+              <a:rPr lang="hu-HU" sz="1200" dirty="0">
+                <a:latin typeface="Cambria" panose="02040503050406030204" pitchFamily="18" charset="0"/>
+                <a:ea typeface="Cambria" panose="02040503050406030204" pitchFamily="18" charset="0"/>
+              </a:rPr>
+              <a:t>http://www.github.com/</a:t>
+            </a:r>
+          </a:p>
+          <a:p>
+            <a:r>
+              <a:rPr lang="hu-HU" sz="1200" dirty="0">
+                <a:latin typeface="Cambria" panose="02040503050406030204" pitchFamily="18" charset="0"/>
+                <a:ea typeface="Cambria" panose="02040503050406030204" pitchFamily="18" charset="0"/>
+              </a:rPr>
+              <a:t>http://www.figma.com/</a:t>
+            </a:r>
+            <a:br>
+              <a:rPr lang="hu-HU" sz="1200" dirty="0">
+                <a:latin typeface="Cambria" panose="02040503050406030204" pitchFamily="18" charset="0"/>
+                <a:ea typeface="Cambria" panose="02040503050406030204" pitchFamily="18" charset="0"/>
+              </a:rPr>
+            </a:br>
+            <a:r>
+              <a:rPr lang="hu-HU" sz="1200" dirty="0">
+                <a:latin typeface="Cambria" panose="02040503050406030204" pitchFamily="18" charset="0"/>
+                <a:ea typeface="Cambria" panose="02040503050406030204" pitchFamily="18" charset="0"/>
+              </a:rPr>
+              <a:t>http://www.drive.google.com/</a:t>
+            </a:r>
+            <a:br>
+              <a:rPr lang="hu-HU" sz="1200" dirty="0">
+                <a:latin typeface="Cambria" panose="02040503050406030204" pitchFamily="18" charset="0"/>
+                <a:ea typeface="Cambria" panose="02040503050406030204" pitchFamily="18" charset="0"/>
+              </a:rPr>
+            </a:br>
+            <a:r>
+              <a:rPr lang="hu-HU" sz="1200" dirty="0">
+                <a:latin typeface="Cambria" panose="02040503050406030204" pitchFamily="18" charset="0"/>
+                <a:ea typeface="Cambria" panose="02040503050406030204" pitchFamily="18" charset="0"/>
+              </a:rPr>
+              <a:t>https://discord.com/</a:t>
+            </a:r>
+          </a:p>
+        </p:txBody>
+      </p:sp>
     </p:spTree>
   </p:cSld>
   <p:clrMapOvr>
     <a:masterClrMapping/>
   </p:clrMapOvr>
+  <mc:AlternateContent xmlns:mc="http://schemas.openxmlformats.org/markup-compatibility/2006">
+    <mc:Choice xmlns:p159="http://schemas.microsoft.com/office/powerpoint/2015/09/main" Requires="p159">
+      <p:transition xmlns:p14="http://schemas.microsoft.com/office/powerpoint/2010/main" spd="slow" p14:dur="2000">
+        <p159:morph option="byObject"/>
+      </p:transition>
+    </mc:Choice>
+    <mc:Fallback>
+      <p:transition spd="slow">
+        <p:fade/>
+      </p:transition>
+    </mc:Fallback>
+  </mc:AlternateContent>
 </p:sld>
 </file>
 
@@ -14243,18 +14902,47 @@
           </a:p>
         </p:txBody>
       </p:sp>
+      <p:pic>
+        <p:nvPicPr>
+          <p:cNvPr id="8" name="Kép 7">
+            <a:extLst>
+              <a:ext uri="{FF2B5EF4-FFF2-40B4-BE49-F238E27FC236}">
+                <a16:creationId xmlns:a16="http://schemas.microsoft.com/office/drawing/2014/main" id="{B0E1AE6A-30E4-25BA-E263-09D543E67A56}"/>
+              </a:ext>
+            </a:extLst>
+          </p:cNvPr>
+          <p:cNvPicPr>
+            <a:picLocks noChangeAspect="1"/>
+          </p:cNvPicPr>
+          <p:nvPr/>
+        </p:nvPicPr>
+        <p:blipFill>
+          <a:blip r:embed="rId3"/>
+          <a:srcRect t="55" b="55"/>
+          <a:stretch/>
+        </p:blipFill>
+        <p:spPr>
+          <a:xfrm>
+            <a:off x="-317902" y="-137425"/>
+            <a:ext cx="2852432" cy="2621626"/>
+          </a:xfrm>
+          <a:prstGeom prst="rect">
+            <a:avLst/>
+          </a:prstGeom>
+        </p:spPr>
+      </p:pic>
     </p:spTree>
   </p:cSld>
   <p:clrMapOvr>
     <a:masterClrMapping/>
   </p:clrMapOvr>
-  <mc:AlternateContent xmlns:mc="http://schemas.openxmlformats.org/markup-compatibility/2006">
-    <mc:Choice xmlns:p159="http://schemas.microsoft.com/office/powerpoint/2015/09/main" Requires="p159">
+  <mc:AlternateContent xmlns:mc="http://schemas.openxmlformats.org/markup-compatibility/2006" xmlns:p159="http://schemas.microsoft.com/office/powerpoint/2015/09/main">
+    <mc:Choice Requires="p159">
       <p:transition xmlns:p14="http://schemas.microsoft.com/office/powerpoint/2010/main" spd="slow" p14:dur="2000">
         <p159:morph option="byObject"/>
       </p:transition>
     </mc:Choice>
-    <mc:Fallback>
+    <mc:Fallback xmlns="">
       <p:transition spd="slow">
         <p:fade/>
       </p:transition>
@@ -14801,18 +15489,47 @@
           </a:p>
         </p:txBody>
       </p:sp>
+      <p:pic>
+        <p:nvPicPr>
+          <p:cNvPr id="2" name="Kép 1">
+            <a:extLst>
+              <a:ext uri="{FF2B5EF4-FFF2-40B4-BE49-F238E27FC236}">
+                <a16:creationId xmlns:a16="http://schemas.microsoft.com/office/drawing/2014/main" id="{F81E4B4F-78E5-5BEA-E4F3-BDFB2C78B23F}"/>
+              </a:ext>
+            </a:extLst>
+          </p:cNvPr>
+          <p:cNvPicPr>
+            <a:picLocks noChangeAspect="1"/>
+          </p:cNvPicPr>
+          <p:nvPr/>
+        </p:nvPicPr>
+        <p:blipFill>
+          <a:blip r:embed="rId3"/>
+          <a:srcRect t="55" b="55"/>
+          <a:stretch/>
+        </p:blipFill>
+        <p:spPr>
+          <a:xfrm>
+            <a:off x="-317902" y="-137425"/>
+            <a:ext cx="2852432" cy="2621626"/>
+          </a:xfrm>
+          <a:prstGeom prst="rect">
+            <a:avLst/>
+          </a:prstGeom>
+        </p:spPr>
+      </p:pic>
     </p:spTree>
   </p:cSld>
   <p:clrMapOvr>
     <a:masterClrMapping/>
   </p:clrMapOvr>
-  <mc:AlternateContent xmlns:mc="http://schemas.openxmlformats.org/markup-compatibility/2006">
-    <mc:Choice xmlns:p159="http://schemas.microsoft.com/office/powerpoint/2015/09/main" Requires="p159">
+  <mc:AlternateContent xmlns:mc="http://schemas.openxmlformats.org/markup-compatibility/2006" xmlns:p159="http://schemas.microsoft.com/office/powerpoint/2015/09/main">
+    <mc:Choice Requires="p159">
       <p:transition xmlns:p14="http://schemas.microsoft.com/office/powerpoint/2010/main" spd="slow" p14:dur="2000">
         <p159:morph option="byObject"/>
       </p:transition>
     </mc:Choice>
-    <mc:Fallback>
+    <mc:Fallback xmlns="">
       <p:transition spd="slow">
         <p:fade/>
       </p:transition>
@@ -15243,18 +15960,47 @@
           </a:ln>
         </p:spPr>
       </p:pic>
+      <p:pic>
+        <p:nvPicPr>
+          <p:cNvPr id="2" name="Kép 1">
+            <a:extLst>
+              <a:ext uri="{FF2B5EF4-FFF2-40B4-BE49-F238E27FC236}">
+                <a16:creationId xmlns:a16="http://schemas.microsoft.com/office/drawing/2014/main" id="{CE37B5BB-7703-FB12-0FE0-1F492C959226}"/>
+              </a:ext>
+            </a:extLst>
+          </p:cNvPr>
+          <p:cNvPicPr>
+            <a:picLocks noChangeAspect="1"/>
+          </p:cNvPicPr>
+          <p:nvPr/>
+        </p:nvPicPr>
+        <p:blipFill>
+          <a:blip r:embed="rId6"/>
+          <a:srcRect t="55" b="55"/>
+          <a:stretch/>
+        </p:blipFill>
+        <p:spPr>
+          <a:xfrm>
+            <a:off x="-317902" y="-137425"/>
+            <a:ext cx="2852432" cy="2621626"/>
+          </a:xfrm>
+          <a:prstGeom prst="rect">
+            <a:avLst/>
+          </a:prstGeom>
+        </p:spPr>
+      </p:pic>
     </p:spTree>
   </p:cSld>
   <p:clrMapOvr>
     <a:masterClrMapping/>
   </p:clrMapOvr>
-  <mc:AlternateContent xmlns:mc="http://schemas.openxmlformats.org/markup-compatibility/2006">
-    <mc:Choice xmlns:p159="http://schemas.microsoft.com/office/powerpoint/2015/09/main" Requires="p159">
+  <mc:AlternateContent xmlns:mc="http://schemas.openxmlformats.org/markup-compatibility/2006" xmlns:p159="http://schemas.microsoft.com/office/powerpoint/2015/09/main">
+    <mc:Choice Requires="p159">
       <p:transition xmlns:p14="http://schemas.microsoft.com/office/powerpoint/2010/main" spd="slow" p14:dur="2000">
         <p159:morph option="byObject"/>
       </p:transition>
     </mc:Choice>
-    <mc:Fallback>
+    <mc:Fallback xmlns="">
       <p:transition spd="slow">
         <p:fade/>
       </p:transition>
@@ -15983,18 +16729,47 @@
           </p:txBody>
         </p:sp>
       </p:grpSp>
+      <p:pic>
+        <p:nvPicPr>
+          <p:cNvPr id="2" name="Kép 1">
+            <a:extLst>
+              <a:ext uri="{FF2B5EF4-FFF2-40B4-BE49-F238E27FC236}">
+                <a16:creationId xmlns:a16="http://schemas.microsoft.com/office/drawing/2014/main" id="{3615821A-0B5A-AFA2-70D0-BB28F94FB7F4}"/>
+              </a:ext>
+            </a:extLst>
+          </p:cNvPr>
+          <p:cNvPicPr>
+            <a:picLocks noChangeAspect="1"/>
+          </p:cNvPicPr>
+          <p:nvPr/>
+        </p:nvPicPr>
+        <p:blipFill>
+          <a:blip r:embed="rId3"/>
+          <a:srcRect t="55" b="55"/>
+          <a:stretch/>
+        </p:blipFill>
+        <p:spPr>
+          <a:xfrm>
+            <a:off x="-317902" y="-137425"/>
+            <a:ext cx="2852432" cy="2621626"/>
+          </a:xfrm>
+          <a:prstGeom prst="rect">
+            <a:avLst/>
+          </a:prstGeom>
+        </p:spPr>
+      </p:pic>
     </p:spTree>
   </p:cSld>
   <p:clrMapOvr>
     <a:masterClrMapping/>
   </p:clrMapOvr>
-  <mc:AlternateContent xmlns:mc="http://schemas.openxmlformats.org/markup-compatibility/2006">
-    <mc:Choice xmlns:p159="http://schemas.microsoft.com/office/powerpoint/2015/09/main" Requires="p159">
+  <mc:AlternateContent xmlns:mc="http://schemas.openxmlformats.org/markup-compatibility/2006" xmlns:p159="http://schemas.microsoft.com/office/powerpoint/2015/09/main">
+    <mc:Choice Requires="p159">
       <p:transition xmlns:p14="http://schemas.microsoft.com/office/powerpoint/2010/main" spd="slow" p14:dur="2000">
         <p159:morph option="byObject"/>
       </p:transition>
     </mc:Choice>
-    <mc:Fallback>
+    <mc:Fallback xmlns="">
       <p:transition spd="slow">
         <p:fade/>
       </p:transition>
@@ -16592,18 +17367,47 @@
           </a:p>
         </p:txBody>
       </p:sp>
+      <p:pic>
+        <p:nvPicPr>
+          <p:cNvPr id="2" name="Kép 1">
+            <a:extLst>
+              <a:ext uri="{FF2B5EF4-FFF2-40B4-BE49-F238E27FC236}">
+                <a16:creationId xmlns:a16="http://schemas.microsoft.com/office/drawing/2014/main" id="{C16AE64D-33DD-F020-DFA3-E586274913EE}"/>
+              </a:ext>
+            </a:extLst>
+          </p:cNvPr>
+          <p:cNvPicPr>
+            <a:picLocks noChangeAspect="1"/>
+          </p:cNvPicPr>
+          <p:nvPr/>
+        </p:nvPicPr>
+        <p:blipFill>
+          <a:blip r:embed="rId3"/>
+          <a:srcRect t="55" b="55"/>
+          <a:stretch/>
+        </p:blipFill>
+        <p:spPr>
+          <a:xfrm>
+            <a:off x="-317902" y="-137425"/>
+            <a:ext cx="2852432" cy="2621626"/>
+          </a:xfrm>
+          <a:prstGeom prst="rect">
+            <a:avLst/>
+          </a:prstGeom>
+        </p:spPr>
+      </p:pic>
     </p:spTree>
   </p:cSld>
   <p:clrMapOvr>
     <a:masterClrMapping/>
   </p:clrMapOvr>
-  <mc:AlternateContent xmlns:mc="http://schemas.openxmlformats.org/markup-compatibility/2006">
-    <mc:Choice xmlns:p159="http://schemas.microsoft.com/office/powerpoint/2015/09/main" Requires="p159">
+  <mc:AlternateContent xmlns:mc="http://schemas.openxmlformats.org/markup-compatibility/2006" xmlns:p159="http://schemas.microsoft.com/office/powerpoint/2015/09/main">
+    <mc:Choice Requires="p159">
       <p:transition xmlns:p14="http://schemas.microsoft.com/office/powerpoint/2010/main" spd="slow" p14:dur="2000">
         <p159:morph option="byObject"/>
       </p:transition>
     </mc:Choice>
-    <mc:Fallback>
+    <mc:Fallback xmlns="">
       <p:transition spd="slow">
         <p:fade/>
       </p:transition>
@@ -17123,18 +17927,47 @@
           </a:effectLst>
         </p:spPr>
       </p:pic>
+      <p:pic>
+        <p:nvPicPr>
+          <p:cNvPr id="2" name="Kép 1">
+            <a:extLst>
+              <a:ext uri="{FF2B5EF4-FFF2-40B4-BE49-F238E27FC236}">
+                <a16:creationId xmlns:a16="http://schemas.microsoft.com/office/drawing/2014/main" id="{7F97EB40-BCA8-156B-ADB7-A400002E5399}"/>
+              </a:ext>
+            </a:extLst>
+          </p:cNvPr>
+          <p:cNvPicPr>
+            <a:picLocks noChangeAspect="1"/>
+          </p:cNvPicPr>
+          <p:nvPr/>
+        </p:nvPicPr>
+        <p:blipFill>
+          <a:blip r:embed="rId4"/>
+          <a:srcRect t="55" b="55"/>
+          <a:stretch/>
+        </p:blipFill>
+        <p:spPr>
+          <a:xfrm>
+            <a:off x="-317902" y="-137425"/>
+            <a:ext cx="2852432" cy="2621626"/>
+          </a:xfrm>
+          <a:prstGeom prst="rect">
+            <a:avLst/>
+          </a:prstGeom>
+        </p:spPr>
+      </p:pic>
     </p:spTree>
   </p:cSld>
   <p:clrMapOvr>
     <a:masterClrMapping/>
   </p:clrMapOvr>
-  <mc:AlternateContent xmlns:mc="http://schemas.openxmlformats.org/markup-compatibility/2006">
-    <mc:Choice xmlns:p159="http://schemas.microsoft.com/office/powerpoint/2015/09/main" Requires="p159">
+  <mc:AlternateContent xmlns:mc="http://schemas.openxmlformats.org/markup-compatibility/2006" xmlns:p159="http://schemas.microsoft.com/office/powerpoint/2015/09/main">
+    <mc:Choice Requires="p159">
       <p:transition xmlns:p14="http://schemas.microsoft.com/office/powerpoint/2010/main" spd="slow" p14:dur="2000">
         <p159:morph option="byObject"/>
       </p:transition>
     </mc:Choice>
-    <mc:Fallback>
+    <mc:Fallback xmlns="">
       <p:transition spd="slow">
         <p:fade/>
       </p:transition>
@@ -17530,18 +18363,47 @@
           </a:p>
         </p:txBody>
       </p:sp>
+      <p:pic>
+        <p:nvPicPr>
+          <p:cNvPr id="2" name="Kép 1">
+            <a:extLst>
+              <a:ext uri="{FF2B5EF4-FFF2-40B4-BE49-F238E27FC236}">
+                <a16:creationId xmlns:a16="http://schemas.microsoft.com/office/drawing/2014/main" id="{C8115FEC-D477-C7C5-2EF0-1670B6153158}"/>
+              </a:ext>
+            </a:extLst>
+          </p:cNvPr>
+          <p:cNvPicPr>
+            <a:picLocks noChangeAspect="1"/>
+          </p:cNvPicPr>
+          <p:nvPr/>
+        </p:nvPicPr>
+        <p:blipFill>
+          <a:blip r:embed="rId3"/>
+          <a:srcRect t="55" b="55"/>
+          <a:stretch/>
+        </p:blipFill>
+        <p:spPr>
+          <a:xfrm>
+            <a:off x="-317902" y="-137425"/>
+            <a:ext cx="2852432" cy="2621626"/>
+          </a:xfrm>
+          <a:prstGeom prst="rect">
+            <a:avLst/>
+          </a:prstGeom>
+        </p:spPr>
+      </p:pic>
     </p:spTree>
   </p:cSld>
   <p:clrMapOvr>
     <a:masterClrMapping/>
   </p:clrMapOvr>
-  <mc:AlternateContent xmlns:mc="http://schemas.openxmlformats.org/markup-compatibility/2006">
-    <mc:Choice xmlns:p159="http://schemas.microsoft.com/office/powerpoint/2015/09/main" Requires="p159">
+  <mc:AlternateContent xmlns:mc="http://schemas.openxmlformats.org/markup-compatibility/2006" xmlns:p159="http://schemas.microsoft.com/office/powerpoint/2015/09/main">
+    <mc:Choice Requires="p159">
       <p:transition xmlns:p14="http://schemas.microsoft.com/office/powerpoint/2010/main" spd="slow" p14:dur="2000">
         <p159:morph option="byObject"/>
       </p:transition>
     </mc:Choice>
-    <mc:Fallback>
+    <mc:Fallback xmlns="">
       <p:transition spd="slow">
         <p:fade/>
       </p:transition>
@@ -17963,18 +18825,47 @@
           </a:p>
         </p:txBody>
       </p:sp>
+      <p:pic>
+        <p:nvPicPr>
+          <p:cNvPr id="2" name="Kép 1">
+            <a:extLst>
+              <a:ext uri="{FF2B5EF4-FFF2-40B4-BE49-F238E27FC236}">
+                <a16:creationId xmlns:a16="http://schemas.microsoft.com/office/drawing/2014/main" id="{26ABEE9A-C9D5-0750-497F-3E38C12853E7}"/>
+              </a:ext>
+            </a:extLst>
+          </p:cNvPr>
+          <p:cNvPicPr>
+            <a:picLocks noChangeAspect="1"/>
+          </p:cNvPicPr>
+          <p:nvPr/>
+        </p:nvPicPr>
+        <p:blipFill>
+          <a:blip r:embed="rId3"/>
+          <a:srcRect t="55" b="55"/>
+          <a:stretch/>
+        </p:blipFill>
+        <p:spPr>
+          <a:xfrm>
+            <a:off x="-317902" y="-137425"/>
+            <a:ext cx="2852432" cy="2621626"/>
+          </a:xfrm>
+          <a:prstGeom prst="rect">
+            <a:avLst/>
+          </a:prstGeom>
+        </p:spPr>
+      </p:pic>
     </p:spTree>
   </p:cSld>
   <p:clrMapOvr>
     <a:masterClrMapping/>
   </p:clrMapOvr>
-  <mc:AlternateContent xmlns:mc="http://schemas.openxmlformats.org/markup-compatibility/2006">
-    <mc:Choice xmlns:p159="http://schemas.microsoft.com/office/powerpoint/2015/09/main" Requires="p159">
+  <mc:AlternateContent xmlns:mc="http://schemas.openxmlformats.org/markup-compatibility/2006" xmlns:p159="http://schemas.microsoft.com/office/powerpoint/2015/09/main">
+    <mc:Choice Requires="p159">
       <p:transition xmlns:p14="http://schemas.microsoft.com/office/powerpoint/2010/main" spd="slow" p14:dur="2000">
         <p159:morph option="byObject"/>
       </p:transition>
     </mc:Choice>
-    <mc:Fallback>
+    <mc:Fallback xmlns="">
       <p:transition spd="slow">
         <p:fade/>
       </p:transition>

--- a/dokumentumok/Prezentáció_NagyLevedSamuel_TothTamas.pptx
+++ b/dokumentumok/Prezentáció_NagyLevedSamuel_TothTamas.pptx
@@ -5,38 +5,39 @@
     <p:sldMasterId id="2147483648" r:id="rId1"/>
   </p:sldMasterIdLst>
   <p:notesMasterIdLst>
-    <p:notesMasterId r:id="rId16"/>
+    <p:notesMasterId r:id="rId17"/>
   </p:notesMasterIdLst>
   <p:sldIdLst>
     <p:sldId id="256" r:id="rId2"/>
     <p:sldId id="257" r:id="rId3"/>
     <p:sldId id="258" r:id="rId4"/>
     <p:sldId id="259" r:id="rId5"/>
-    <p:sldId id="260" r:id="rId6"/>
-    <p:sldId id="261" r:id="rId7"/>
-    <p:sldId id="262" r:id="rId8"/>
+    <p:sldId id="262" r:id="rId6"/>
+    <p:sldId id="260" r:id="rId7"/>
+    <p:sldId id="261" r:id="rId8"/>
     <p:sldId id="263" r:id="rId9"/>
     <p:sldId id="264" r:id="rId10"/>
-    <p:sldId id="265" r:id="rId11"/>
-    <p:sldId id="266" r:id="rId12"/>
-    <p:sldId id="267" r:id="rId13"/>
-    <p:sldId id="268" r:id="rId14"/>
-    <p:sldId id="270" r:id="rId15"/>
+    <p:sldId id="271" r:id="rId11"/>
+    <p:sldId id="265" r:id="rId12"/>
+    <p:sldId id="266" r:id="rId13"/>
+    <p:sldId id="267" r:id="rId14"/>
+    <p:sldId id="268" r:id="rId15"/>
+    <p:sldId id="270" r:id="rId16"/>
   </p:sldIdLst>
   <p:sldSz cx="12192000" cy="6858000"/>
   <p:notesSz cx="6858000" cy="9144000"/>
   <p:embeddedFontLst>
     <p:embeddedFont>
       <p:font typeface="Cambria" panose="02040503050406030204" pitchFamily="18" charset="0"/>
-      <p:regular r:id="rId17"/>
-      <p:bold r:id="rId18"/>
-      <p:italic r:id="rId19"/>
-      <p:boldItalic r:id="rId20"/>
+      <p:regular r:id="rId18"/>
+      <p:bold r:id="rId19"/>
+      <p:italic r:id="rId20"/>
+      <p:boldItalic r:id="rId21"/>
     </p:embeddedFont>
     <p:embeddedFont>
       <p:font typeface="Play" panose="020B0604020202020204" charset="0"/>
-      <p:regular r:id="rId21"/>
-      <p:bold r:id="rId22"/>
+      <p:regular r:id="rId22"/>
+      <p:bold r:id="rId23"/>
     </p:embeddedFont>
   </p:embeddedFontLst>
   <p:defaultTextStyle>
@@ -921,6 +922,167 @@
   <p:cSld>
     <p:spTree>
       <p:nvGrpSpPr>
+        <p:cNvPr id="1" name="Shape 160">
+          <a:extLst>
+            <a:ext uri="{FF2B5EF4-FFF2-40B4-BE49-F238E27FC236}">
+              <a16:creationId xmlns:a16="http://schemas.microsoft.com/office/drawing/2014/main" id="{055D3378-106D-2E2B-631D-F0D20585386C}"/>
+            </a:ext>
+          </a:extLst>
+        </p:cNvPr>
+        <p:cNvGrpSpPr/>
+        <p:nvPr/>
+      </p:nvGrpSpPr>
+      <p:grpSpPr>
+        <a:xfrm>
+          <a:off x="0" y="0"/>
+          <a:ext cx="0" cy="0"/>
+          <a:chOff x="0" y="0"/>
+          <a:chExt cx="0" cy="0"/>
+        </a:xfrm>
+      </p:grpSpPr>
+      <p:sp>
+        <p:nvSpPr>
+          <p:cNvPr id="161" name="Google Shape;161;p9:notes">
+            <a:extLst>
+              <a:ext uri="{FF2B5EF4-FFF2-40B4-BE49-F238E27FC236}">
+                <a16:creationId xmlns:a16="http://schemas.microsoft.com/office/drawing/2014/main" id="{3B9BC4D0-5513-84DB-846C-7D8B0B648FF2}"/>
+              </a:ext>
+            </a:extLst>
+          </p:cNvPr>
+          <p:cNvSpPr txBox="1">
+            <a:spLocks noGrp="1"/>
+          </p:cNvSpPr>
+          <p:nvPr>
+            <p:ph type="body" idx="1"/>
+          </p:nvPr>
+        </p:nvSpPr>
+        <p:spPr>
+          <a:xfrm>
+            <a:off x="685800" y="4343400"/>
+            <a:ext cx="5486400" cy="4114800"/>
+          </a:xfrm>
+          <a:prstGeom prst="rect">
+            <a:avLst/>
+          </a:prstGeom>
+        </p:spPr>
+        <p:txBody>
+          <a:bodyPr spcFirstLastPara="1" wrap="square" lIns="91425" tIns="91425" rIns="91425" bIns="91425" anchor="t" anchorCtr="0">
+            <a:noAutofit/>
+          </a:bodyPr>
+          <a:lstStyle/>
+          <a:p>
+            <a:pPr marL="0" lvl="0" indent="0" algn="l" rtl="0">
+              <a:spcBef>
+                <a:spcPts val="0"/>
+              </a:spcBef>
+              <a:spcAft>
+                <a:spcPts val="0"/>
+              </a:spcAft>
+              <a:buNone/>
+            </a:pPr>
+            <a:r>
+              <a:rPr lang="hu-HU" dirty="0"/>
+              <a:t>Samu:</a:t>
+            </a:r>
+          </a:p>
+          <a:p>
+            <a:pPr marL="0" lvl="0" indent="0" algn="l" rtl="0">
+              <a:spcBef>
+                <a:spcPts val="0"/>
+              </a:spcBef>
+              <a:spcAft>
+                <a:spcPts val="0"/>
+              </a:spcAft>
+              <a:buNone/>
+            </a:pPr>
+            <a:r>
+              <a:rPr lang="hu-HU" dirty="0"/>
+              <a:t>Az oldalunk teljes mértékben reszponzív, azaz bármilyen mobileszközön használva is teljes mértékben a maximális élményt nyújtja.</a:t>
+            </a:r>
+          </a:p>
+          <a:p>
+            <a:pPr marL="0" lvl="0" indent="0" algn="l" rtl="0">
+              <a:spcBef>
+                <a:spcPts val="0"/>
+              </a:spcBef>
+              <a:spcAft>
+                <a:spcPts val="0"/>
+              </a:spcAft>
+              <a:buNone/>
+            </a:pPr>
+            <a:r>
+              <a:rPr lang="hu-HU" dirty="0"/>
+              <a:t>Ezáltal a felület kezelése nincsen asztali számítógéphez kötve, bármikor kitudjuk használni bármely funkcióját az oldalnak.</a:t>
+            </a:r>
+            <a:endParaRPr dirty="0"/>
+          </a:p>
+        </p:txBody>
+      </p:sp>
+      <p:sp>
+        <p:nvSpPr>
+          <p:cNvPr id="162" name="Google Shape;162;p9:notes">
+            <a:extLst>
+              <a:ext uri="{FF2B5EF4-FFF2-40B4-BE49-F238E27FC236}">
+                <a16:creationId xmlns:a16="http://schemas.microsoft.com/office/drawing/2014/main" id="{753B8D68-A1F8-22AF-5D25-7D41DF8FA62E}"/>
+              </a:ext>
+            </a:extLst>
+          </p:cNvPr>
+          <p:cNvSpPr>
+            <a:spLocks noGrp="1" noRot="1" noChangeAspect="1"/>
+          </p:cNvSpPr>
+          <p:nvPr>
+            <p:ph type="sldImg" idx="2"/>
+          </p:nvPr>
+        </p:nvSpPr>
+        <p:spPr>
+          <a:xfrm>
+            <a:off x="381000" y="685800"/>
+            <a:ext cx="6096000" cy="3429000"/>
+          </a:xfrm>
+          <a:custGeom>
+            <a:avLst/>
+            <a:gdLst/>
+            <a:ahLst/>
+            <a:cxnLst/>
+            <a:rect l="l" t="t" r="r" b="b"/>
+            <a:pathLst>
+              <a:path w="120000" h="120000" extrusionOk="0">
+                <a:moveTo>
+                  <a:pt x="0" y="0"/>
+                </a:moveTo>
+                <a:lnTo>
+                  <a:pt x="120000" y="0"/>
+                </a:lnTo>
+                <a:lnTo>
+                  <a:pt x="120000" y="120000"/>
+                </a:lnTo>
+                <a:lnTo>
+                  <a:pt x="0" y="120000"/>
+                </a:lnTo>
+                <a:close/>
+              </a:path>
+            </a:pathLst>
+          </a:custGeom>
+        </p:spPr>
+      </p:sp>
+    </p:spTree>
+    <p:extLst>
+      <p:ext uri="{BB962C8B-B14F-4D97-AF65-F5344CB8AC3E}">
+        <p14:creationId xmlns:p14="http://schemas.microsoft.com/office/powerpoint/2010/main" val="1000501265"/>
+      </p:ext>
+    </p:extLst>
+  </p:cSld>
+  <p:clrMapOvr>
+    <a:masterClrMapping/>
+  </p:clrMapOvr>
+</p:notes>
+</file>
+
+<file path=ppt/notesSlides/notesSlide11.xml><?xml version="1.0" encoding="utf-8"?>
+<p:notes xmlns:a="http://schemas.openxmlformats.org/drawingml/2006/main" xmlns:r="http://schemas.openxmlformats.org/officeDocument/2006/relationships" xmlns:p="http://schemas.openxmlformats.org/presentationml/2006/main" showMasterSp="0" showMasterPhAnim="0">
+  <p:cSld>
+    <p:spTree>
+      <p:nvGrpSpPr>
         <p:cNvPr id="1" name="Shape 168"/>
         <p:cNvGrpSpPr/>
         <p:nvPr/>
@@ -967,7 +1129,223 @@
               </a:spcAft>
               <a:buNone/>
             </a:pPr>
-            <a:endParaRPr/>
+            <a:r>
+              <a:rPr lang="hu-HU" dirty="0"/>
+              <a:t>Samu:</a:t>
+            </a:r>
+          </a:p>
+          <a:p>
+            <a:pPr marL="0" lvl="0" indent="0" algn="l" rtl="0">
+              <a:spcBef>
+                <a:spcPts val="0"/>
+              </a:spcBef>
+              <a:spcAft>
+                <a:spcPts val="0"/>
+              </a:spcAft>
+              <a:buNone/>
+            </a:pPr>
+            <a:r>
+              <a:rPr lang="hu-HU" sz="1100" b="0" i="0" u="none" strike="noStrike" cap="none" dirty="0">
+                <a:solidFill>
+                  <a:srgbClr val="000000"/>
+                </a:solidFill>
+                <a:effectLst/>
+                <a:latin typeface="Arial"/>
+                <a:ea typeface="Arial"/>
+                <a:cs typeface="Arial"/>
+                <a:sym typeface="Arial"/>
+              </a:rPr>
+              <a:t>A tesztelést két oldalon végeztük el.</a:t>
+            </a:r>
+            <a:br>
+              <a:rPr lang="hu-HU" dirty="0"/>
+            </a:br>
+            <a:r>
+              <a:rPr lang="hu-HU" sz="1100" b="0" i="0" u="none" strike="noStrike" cap="none" dirty="0">
+                <a:solidFill>
+                  <a:srgbClr val="000000"/>
+                </a:solidFill>
+                <a:effectLst/>
+                <a:latin typeface="Arial"/>
+                <a:ea typeface="Arial"/>
+                <a:cs typeface="Arial"/>
+                <a:sym typeface="Arial"/>
+              </a:rPr>
+              <a:t>Frontend oldalon automatizált </a:t>
+            </a:r>
+            <a:r>
+              <a:rPr lang="hu-HU" sz="1100" b="0" i="0" u="none" strike="noStrike" cap="none" dirty="0" err="1">
+                <a:solidFill>
+                  <a:srgbClr val="000000"/>
+                </a:solidFill>
+                <a:effectLst/>
+                <a:latin typeface="Arial"/>
+                <a:ea typeface="Arial"/>
+                <a:cs typeface="Arial"/>
+                <a:sym typeface="Arial"/>
+              </a:rPr>
+              <a:t>TypeScript</a:t>
+            </a:r>
+            <a:r>
+              <a:rPr lang="hu-HU" sz="1100" b="0" i="0" u="none" strike="noStrike" cap="none" dirty="0">
+                <a:solidFill>
+                  <a:srgbClr val="000000"/>
+                </a:solidFill>
+                <a:effectLst/>
+                <a:latin typeface="Arial"/>
+                <a:ea typeface="Arial"/>
+                <a:cs typeface="Arial"/>
+                <a:sym typeface="Arial"/>
+              </a:rPr>
+              <a:t> tesztekkel ellenőriztük a fő funkciókat.</a:t>
+            </a:r>
+          </a:p>
+          <a:p>
+            <a:pPr marL="0" lvl="0" indent="0" algn="l" rtl="0">
+              <a:spcBef>
+                <a:spcPts val="0"/>
+              </a:spcBef>
+              <a:spcAft>
+                <a:spcPts val="0"/>
+              </a:spcAft>
+              <a:buNone/>
+            </a:pPr>
+            <a:endParaRPr lang="hu-HU" sz="1100" b="0" i="0" u="none" strike="noStrike" cap="none" dirty="0">
+              <a:solidFill>
+                <a:srgbClr val="000000"/>
+              </a:solidFill>
+              <a:effectLst/>
+              <a:latin typeface="Arial"/>
+              <a:cs typeface="Arial"/>
+              <a:sym typeface="Arial"/>
+            </a:endParaRPr>
+          </a:p>
+          <a:p>
+            <a:pPr marL="0" lvl="0" indent="0" algn="l" rtl="0">
+              <a:spcBef>
+                <a:spcPts val="0"/>
+              </a:spcBef>
+              <a:spcAft>
+                <a:spcPts val="0"/>
+              </a:spcAft>
+              <a:buNone/>
+            </a:pPr>
+            <a:r>
+              <a:rPr lang="hu-HU" sz="1100" b="0" i="0" u="none" strike="noStrike" cap="none" dirty="0">
+                <a:solidFill>
+                  <a:srgbClr val="000000"/>
+                </a:solidFill>
+                <a:effectLst/>
+                <a:latin typeface="Arial"/>
+                <a:cs typeface="Arial"/>
+                <a:sym typeface="Arial"/>
+              </a:rPr>
+              <a:t>Tomi:</a:t>
+            </a:r>
+          </a:p>
+          <a:p>
+            <a:pPr marL="0" lvl="0" indent="0" algn="l" rtl="0">
+              <a:spcBef>
+                <a:spcPts val="0"/>
+              </a:spcBef>
+              <a:spcAft>
+                <a:spcPts val="0"/>
+              </a:spcAft>
+              <a:buNone/>
+            </a:pPr>
+            <a:r>
+              <a:rPr lang="hu-HU" sz="1100" b="0" i="0" u="none" strike="noStrike" cap="none" dirty="0">
+                <a:solidFill>
+                  <a:srgbClr val="000000"/>
+                </a:solidFill>
+                <a:effectLst/>
+                <a:latin typeface="Arial"/>
+                <a:ea typeface="Arial"/>
+                <a:cs typeface="Arial"/>
+                <a:sym typeface="Arial"/>
+              </a:rPr>
+              <a:t>Backend oldalon pedig Postman segítségével vizsgáltuk az API végpontokat.</a:t>
+            </a:r>
+          </a:p>
+          <a:p>
+            <a:pPr marL="0" lvl="0" indent="0" algn="l" rtl="0">
+              <a:spcBef>
+                <a:spcPts val="0"/>
+              </a:spcBef>
+              <a:spcAft>
+                <a:spcPts val="0"/>
+              </a:spcAft>
+              <a:buNone/>
+            </a:pPr>
+            <a:endParaRPr lang="hu-HU" sz="1100" b="0" i="0" u="none" strike="noStrike" cap="none" dirty="0">
+              <a:solidFill>
+                <a:srgbClr val="000000"/>
+              </a:solidFill>
+              <a:effectLst/>
+              <a:latin typeface="Arial"/>
+              <a:cs typeface="Arial"/>
+              <a:sym typeface="Arial"/>
+            </a:endParaRPr>
+          </a:p>
+          <a:p>
+            <a:pPr marL="0" lvl="0" indent="0" algn="l" rtl="0">
+              <a:spcBef>
+                <a:spcPts val="0"/>
+              </a:spcBef>
+              <a:spcAft>
+                <a:spcPts val="0"/>
+              </a:spcAft>
+              <a:buNone/>
+            </a:pPr>
+            <a:r>
+              <a:rPr lang="hu-HU" sz="1100" b="0" i="0" u="none" strike="noStrike" cap="none" dirty="0">
+                <a:solidFill>
+                  <a:srgbClr val="000000"/>
+                </a:solidFill>
+                <a:effectLst/>
+                <a:latin typeface="Arial"/>
+                <a:cs typeface="Arial"/>
+                <a:sym typeface="Arial"/>
+              </a:rPr>
+              <a:t>Samu:</a:t>
+            </a:r>
+          </a:p>
+          <a:p>
+            <a:pPr marL="0" lvl="0" indent="0" algn="l" rtl="0">
+              <a:spcBef>
+                <a:spcPts val="0"/>
+              </a:spcBef>
+              <a:spcAft>
+                <a:spcPts val="0"/>
+              </a:spcAft>
+              <a:buNone/>
+            </a:pPr>
+            <a:r>
+              <a:rPr lang="hu-HU" sz="1100" b="0" i="0" u="none" strike="noStrike" cap="none" dirty="0">
+                <a:solidFill>
+                  <a:srgbClr val="000000"/>
+                </a:solidFill>
+                <a:effectLst/>
+                <a:latin typeface="Arial"/>
+                <a:cs typeface="Arial"/>
+                <a:sym typeface="Arial"/>
+              </a:rPr>
+              <a:t>Azt kiemelném, hogy nem csak pozitív, de negatív </a:t>
+            </a:r>
+            <a:r>
+              <a:rPr lang="hu-HU" sz="1100" b="0" i="0" u="none" strike="noStrike" cap="none" dirty="0">
+                <a:solidFill>
+                  <a:srgbClr val="000000"/>
+                </a:solidFill>
+                <a:effectLst/>
+                <a:latin typeface="Arial"/>
+                <a:ea typeface="Arial"/>
+                <a:cs typeface="Arial"/>
+                <a:sym typeface="Arial"/>
+              </a:rPr>
+              <a:t>eseteket is teszteltünk, hogy minél stabilabb legyen a rendszer.</a:t>
+            </a:r>
+            <a:endParaRPr dirty="0"/>
           </a:p>
         </p:txBody>
       </p:sp>
@@ -1020,7 +1398,7 @@
 </p:notes>
 </file>
 
-<file path=ppt/notesSlides/notesSlide11.xml><?xml version="1.0" encoding="utf-8"?>
+<file path=ppt/notesSlides/notesSlide12.xml><?xml version="1.0" encoding="utf-8"?>
 <p:notes xmlns:a="http://schemas.openxmlformats.org/drawingml/2006/main" xmlns:r="http://schemas.openxmlformats.org/officeDocument/2006/relationships" xmlns:p="http://schemas.openxmlformats.org/presentationml/2006/main" showMasterSp="0" showMasterPhAnim="0">
   <p:cSld>
     <p:spTree>
@@ -1071,7 +1449,238 @@
               </a:spcAft>
               <a:buNone/>
             </a:pPr>
-            <a:endParaRPr/>
+            <a:r>
+              <a:rPr lang="hu-HU" dirty="0"/>
+              <a:t>Tomi:</a:t>
+            </a:r>
+          </a:p>
+          <a:p>
+            <a:pPr marL="0" lvl="0" indent="0" algn="l" rtl="0">
+              <a:spcBef>
+                <a:spcPts val="0"/>
+              </a:spcBef>
+              <a:spcAft>
+                <a:spcPts val="0"/>
+              </a:spcAft>
+              <a:buNone/>
+            </a:pPr>
+            <a:r>
+              <a:rPr lang="hu-HU" sz="1100" b="0" i="0" u="none" strike="noStrike" cap="none" dirty="0">
+                <a:solidFill>
+                  <a:srgbClr val="000000"/>
+                </a:solidFill>
+                <a:effectLst/>
+                <a:latin typeface="Arial"/>
+                <a:ea typeface="Arial"/>
+                <a:cs typeface="Arial"/>
+                <a:sym typeface="Arial"/>
+              </a:rPr>
+              <a:t>A projekt során a csapatmunkát több eszközzel támogattuk.</a:t>
+            </a:r>
+            <a:br>
+              <a:rPr lang="hu-HU" dirty="0"/>
+            </a:br>
+            <a:r>
+              <a:rPr lang="hu-HU" sz="1100" b="0" i="0" u="none" strike="noStrike" cap="none" dirty="0">
+                <a:solidFill>
+                  <a:srgbClr val="000000"/>
+                </a:solidFill>
+                <a:effectLst/>
+                <a:latin typeface="Arial"/>
+                <a:ea typeface="Arial"/>
+                <a:cs typeface="Arial"/>
+                <a:sym typeface="Arial"/>
+              </a:rPr>
+              <a:t>Napi kommunikációra </a:t>
+            </a:r>
+            <a:r>
+              <a:rPr lang="hu-HU" sz="1100" b="0" i="0" u="none" strike="noStrike" cap="none" dirty="0" err="1">
+                <a:solidFill>
+                  <a:srgbClr val="000000"/>
+                </a:solidFill>
+                <a:effectLst/>
+                <a:latin typeface="Arial"/>
+                <a:ea typeface="Arial"/>
+                <a:cs typeface="Arial"/>
+                <a:sym typeface="Arial"/>
+              </a:rPr>
+              <a:t>Discordot</a:t>
+            </a:r>
+            <a:r>
+              <a:rPr lang="hu-HU" sz="1100" b="0" i="0" u="none" strike="noStrike" cap="none" dirty="0">
+                <a:solidFill>
+                  <a:srgbClr val="000000"/>
+                </a:solidFill>
+                <a:effectLst/>
+                <a:latin typeface="Arial"/>
+                <a:ea typeface="Arial"/>
+                <a:cs typeface="Arial"/>
+                <a:sym typeface="Arial"/>
+              </a:rPr>
+              <a:t> használtunk, a fejlesztési feladatokat GitHubon, külön </a:t>
+            </a:r>
+            <a:r>
+              <a:rPr lang="hu-HU" sz="1100" b="0" i="0" u="none" strike="noStrike" cap="none" dirty="0" err="1">
+                <a:solidFill>
+                  <a:srgbClr val="000000"/>
+                </a:solidFill>
+                <a:effectLst/>
+                <a:latin typeface="Arial"/>
+                <a:ea typeface="Arial"/>
+                <a:cs typeface="Arial"/>
+                <a:sym typeface="Arial"/>
+              </a:rPr>
+              <a:t>branchekben</a:t>
+            </a:r>
+            <a:r>
+              <a:rPr lang="hu-HU" sz="1100" b="0" i="0" u="none" strike="noStrike" cap="none" dirty="0">
+                <a:solidFill>
+                  <a:srgbClr val="000000"/>
+                </a:solidFill>
+                <a:effectLst/>
+                <a:latin typeface="Arial"/>
+                <a:ea typeface="Arial"/>
+                <a:cs typeface="Arial"/>
+                <a:sym typeface="Arial"/>
+              </a:rPr>
+              <a:t> kezeltük.</a:t>
+            </a:r>
+          </a:p>
+          <a:p>
+            <a:pPr marL="0" lvl="0" indent="0" algn="l" rtl="0">
+              <a:spcBef>
+                <a:spcPts val="0"/>
+              </a:spcBef>
+              <a:spcAft>
+                <a:spcPts val="0"/>
+              </a:spcAft>
+              <a:buNone/>
+            </a:pPr>
+            <a:endParaRPr lang="hu-HU" sz="1100" b="0" i="0" u="none" strike="noStrike" cap="none" dirty="0">
+              <a:solidFill>
+                <a:srgbClr val="000000"/>
+              </a:solidFill>
+              <a:effectLst/>
+              <a:latin typeface="Arial"/>
+              <a:cs typeface="Arial"/>
+              <a:sym typeface="Arial"/>
+            </a:endParaRPr>
+          </a:p>
+          <a:p>
+            <a:pPr marL="0" lvl="0" indent="0" algn="l" rtl="0">
+              <a:spcBef>
+                <a:spcPts val="0"/>
+              </a:spcBef>
+              <a:spcAft>
+                <a:spcPts val="0"/>
+              </a:spcAft>
+              <a:buNone/>
+            </a:pPr>
+            <a:r>
+              <a:rPr lang="hu-HU" sz="1100" b="0" i="0" u="none" strike="noStrike" cap="none" dirty="0">
+                <a:solidFill>
+                  <a:srgbClr val="000000"/>
+                </a:solidFill>
+                <a:effectLst/>
+                <a:latin typeface="Arial"/>
+                <a:cs typeface="Arial"/>
+                <a:sym typeface="Arial"/>
+              </a:rPr>
+              <a:t>Samu:</a:t>
+            </a:r>
+          </a:p>
+          <a:p>
+            <a:pPr marL="0" lvl="0" indent="0" algn="l" rtl="0">
+              <a:spcBef>
+                <a:spcPts val="0"/>
+              </a:spcBef>
+              <a:spcAft>
+                <a:spcPts val="0"/>
+              </a:spcAft>
+              <a:buNone/>
+            </a:pPr>
+            <a:r>
+              <a:rPr lang="hu-HU" sz="1100" b="0" i="0" u="none" strike="noStrike" cap="none" dirty="0">
+                <a:solidFill>
+                  <a:srgbClr val="000000"/>
+                </a:solidFill>
+                <a:effectLst/>
+                <a:latin typeface="Arial"/>
+                <a:ea typeface="Arial"/>
+                <a:cs typeface="Arial"/>
+                <a:sym typeface="Arial"/>
+              </a:rPr>
+              <a:t>A közös megtervezések Google Drive-</a:t>
+            </a:r>
+            <a:r>
+              <a:rPr lang="hu-HU" sz="1100" b="0" i="0" u="none" strike="noStrike" cap="none" dirty="0" err="1">
+                <a:solidFill>
+                  <a:srgbClr val="000000"/>
+                </a:solidFill>
+                <a:effectLst/>
+                <a:latin typeface="Arial"/>
+                <a:ea typeface="Arial"/>
+                <a:cs typeface="Arial"/>
+                <a:sym typeface="Arial"/>
+              </a:rPr>
+              <a:t>on</a:t>
+            </a:r>
+            <a:r>
+              <a:rPr lang="hu-HU" sz="1100" b="0" i="0" u="none" strike="noStrike" cap="none" dirty="0">
+                <a:solidFill>
+                  <a:srgbClr val="000000"/>
+                </a:solidFill>
+                <a:effectLst/>
+                <a:latin typeface="Arial"/>
+                <a:ea typeface="Arial"/>
+                <a:cs typeface="Arial"/>
+                <a:sym typeface="Arial"/>
+              </a:rPr>
+              <a:t>, a felületterveket pedig </a:t>
+            </a:r>
+            <a:r>
+              <a:rPr lang="hu-HU" sz="1100" b="0" i="0" u="none" strike="noStrike" cap="none" dirty="0" err="1">
+                <a:solidFill>
+                  <a:srgbClr val="000000"/>
+                </a:solidFill>
+                <a:effectLst/>
+                <a:latin typeface="Arial"/>
+                <a:ea typeface="Arial"/>
+                <a:cs typeface="Arial"/>
+                <a:sym typeface="Arial"/>
+              </a:rPr>
+              <a:t>Figma</a:t>
+            </a:r>
+            <a:r>
+              <a:rPr lang="hu-HU" sz="1100" b="0" i="0" u="none" strike="noStrike" cap="none" dirty="0">
+                <a:solidFill>
+                  <a:srgbClr val="000000"/>
+                </a:solidFill>
+                <a:effectLst/>
+                <a:latin typeface="Arial"/>
+                <a:ea typeface="Arial"/>
+                <a:cs typeface="Arial"/>
+                <a:sym typeface="Arial"/>
+              </a:rPr>
+              <a:t> segítségével egyeztettük.</a:t>
+            </a:r>
+            <a:br>
+              <a:rPr lang="hu-HU" dirty="0"/>
+            </a:br>
+            <a:r>
+              <a:rPr lang="hu-HU" sz="1100" b="0" i="0" u="none" strike="noStrike" cap="none" dirty="0">
+                <a:solidFill>
+                  <a:srgbClr val="000000"/>
+                </a:solidFill>
+                <a:effectLst/>
+                <a:latin typeface="Arial"/>
+                <a:ea typeface="Arial"/>
+                <a:cs typeface="Arial"/>
+                <a:sym typeface="Arial"/>
+              </a:rPr>
+              <a:t>Ennek köszönhetően mindkettőnk pontosan látta a saját feladatait, és a munka jól szervezetten, párhuzamosan tudott haladni.</a:t>
+            </a:r>
+            <a:endParaRPr dirty="0"/>
           </a:p>
         </p:txBody>
       </p:sp>
@@ -1124,7 +1733,7 @@
 </p:notes>
 </file>
 
-<file path=ppt/notesSlides/notesSlide12.xml><?xml version="1.0" encoding="utf-8"?>
+<file path=ppt/notesSlides/notesSlide13.xml><?xml version="1.0" encoding="utf-8"?>
 <p:notes xmlns:a="http://schemas.openxmlformats.org/drawingml/2006/main" xmlns:r="http://schemas.openxmlformats.org/officeDocument/2006/relationships" xmlns:p="http://schemas.openxmlformats.org/presentationml/2006/main" showMasterSp="0" showMasterPhAnim="0">
   <p:cSld>
     <p:spTree>
@@ -1175,7 +1784,150 @@
               </a:spcAft>
               <a:buNone/>
             </a:pPr>
-            <a:endParaRPr/>
+            <a:r>
+              <a:rPr lang="hu-HU" dirty="0"/>
+              <a:t>Samu:</a:t>
+            </a:r>
+          </a:p>
+          <a:p>
+            <a:pPr marL="0" lvl="0" indent="0" algn="l" rtl="0">
+              <a:spcBef>
+                <a:spcPts val="0"/>
+              </a:spcBef>
+              <a:spcAft>
+                <a:spcPts val="0"/>
+              </a:spcAft>
+              <a:buNone/>
+            </a:pPr>
+            <a:r>
+              <a:rPr lang="hu-HU" sz="1100" b="0" i="0" u="none" strike="noStrike" cap="none" dirty="0">
+                <a:solidFill>
+                  <a:srgbClr val="000000"/>
+                </a:solidFill>
+                <a:effectLst/>
+                <a:latin typeface="Arial"/>
+                <a:ea typeface="Arial"/>
+                <a:cs typeface="Arial"/>
+                <a:sym typeface="Arial"/>
+              </a:rPr>
+              <a:t>A projekt következő lépéseit három fő irányban látjuk.</a:t>
+            </a:r>
+            <a:br>
+              <a:rPr lang="hu-HU" dirty="0"/>
+            </a:br>
+            <a:r>
+              <a:rPr lang="hu-HU" sz="1100" b="0" i="0" u="none" strike="noStrike" cap="none" dirty="0">
+                <a:solidFill>
+                  <a:srgbClr val="000000"/>
+                </a:solidFill>
+                <a:effectLst/>
+                <a:latin typeface="Arial"/>
+                <a:ea typeface="Arial"/>
+                <a:cs typeface="Arial"/>
+                <a:sym typeface="Arial"/>
+              </a:rPr>
+              <a:t>Az első a mobilos alkalmazás, hogy a felhasználók gyorsabban és kényelmesebben, bárhonnan elérjék az eseményeket.</a:t>
+            </a:r>
+            <a:br>
+              <a:rPr lang="hu-HU" dirty="0"/>
+            </a:br>
+            <a:r>
+              <a:rPr lang="hu-HU" sz="1100" b="0" i="0" u="none" strike="noStrike" cap="none" dirty="0">
+                <a:solidFill>
+                  <a:srgbClr val="000000"/>
+                </a:solidFill>
+                <a:effectLst/>
+                <a:latin typeface="Arial"/>
+                <a:ea typeface="Arial"/>
+                <a:cs typeface="Arial"/>
+                <a:sym typeface="Arial"/>
+              </a:rPr>
+              <a:t>A második az értesítőrendszer, amivel automatikusan tudjuk jelezni az új eseményeket, határidőket és fontos változásokat.</a:t>
+            </a:r>
+          </a:p>
+          <a:p>
+            <a:pPr marL="0" lvl="0" indent="0" algn="l" rtl="0">
+              <a:spcBef>
+                <a:spcPts val="0"/>
+              </a:spcBef>
+              <a:spcAft>
+                <a:spcPts val="0"/>
+              </a:spcAft>
+              <a:buNone/>
+            </a:pPr>
+            <a:endParaRPr lang="hu-HU" sz="1100" b="0" i="0" u="none" strike="noStrike" cap="none" dirty="0">
+              <a:solidFill>
+                <a:srgbClr val="000000"/>
+              </a:solidFill>
+              <a:effectLst/>
+              <a:latin typeface="Arial"/>
+              <a:cs typeface="Arial"/>
+              <a:sym typeface="Arial"/>
+            </a:endParaRPr>
+          </a:p>
+          <a:p>
+            <a:pPr marL="0" lvl="0" indent="0" algn="l" rtl="0">
+              <a:spcBef>
+                <a:spcPts val="0"/>
+              </a:spcBef>
+              <a:spcAft>
+                <a:spcPts val="0"/>
+              </a:spcAft>
+              <a:buNone/>
+            </a:pPr>
+            <a:r>
+              <a:rPr lang="hu-HU" sz="1100" b="0" i="0" u="none" strike="noStrike" cap="none" dirty="0">
+                <a:solidFill>
+                  <a:srgbClr val="000000"/>
+                </a:solidFill>
+                <a:effectLst/>
+                <a:latin typeface="Arial"/>
+                <a:cs typeface="Arial"/>
+                <a:sym typeface="Arial"/>
+              </a:rPr>
+              <a:t>Tomi:</a:t>
+            </a:r>
+          </a:p>
+          <a:p>
+            <a:pPr marL="0" lvl="0" indent="0" algn="l" rtl="0">
+              <a:spcBef>
+                <a:spcPts val="0"/>
+              </a:spcBef>
+              <a:spcAft>
+                <a:spcPts val="0"/>
+              </a:spcAft>
+              <a:buNone/>
+            </a:pPr>
+            <a:r>
+              <a:rPr lang="hu-HU" sz="1100" b="0" i="0" u="none" strike="noStrike" cap="none" dirty="0">
+                <a:solidFill>
+                  <a:srgbClr val="000000"/>
+                </a:solidFill>
+                <a:effectLst/>
+                <a:latin typeface="Arial"/>
+                <a:ea typeface="Arial"/>
+                <a:cs typeface="Arial"/>
+                <a:sym typeface="Arial"/>
+              </a:rPr>
+              <a:t>A harmadik az online vásárlást, intézményi előfizetésként képzeljük el.</a:t>
+            </a:r>
+            <a:br>
+              <a:rPr lang="hu-HU" dirty="0"/>
+            </a:br>
+            <a:r>
+              <a:rPr lang="hu-HU" sz="1100" b="0" i="0" u="none" strike="noStrike" cap="none" dirty="0">
+                <a:solidFill>
+                  <a:srgbClr val="000000"/>
+                </a:solidFill>
+                <a:effectLst/>
+                <a:latin typeface="Arial"/>
+                <a:ea typeface="Arial"/>
+                <a:cs typeface="Arial"/>
+                <a:sym typeface="Arial"/>
+              </a:rPr>
+              <a:t>Az iskolák éves bérletet vásárolhatnak, ami prémium funkciókat ad.</a:t>
+            </a:r>
+            <a:endParaRPr dirty="0"/>
           </a:p>
         </p:txBody>
       </p:sp>
@@ -1228,7 +1980,7 @@
 </p:notes>
 </file>
 
-<file path=ppt/notesSlides/notesSlide13.xml><?xml version="1.0" encoding="utf-8"?>
+<file path=ppt/notesSlides/notesSlide14.xml><?xml version="1.0" encoding="utf-8"?>
 <p:notes xmlns:a="http://schemas.openxmlformats.org/drawingml/2006/main" xmlns:r="http://schemas.openxmlformats.org/officeDocument/2006/relationships" xmlns:p="http://schemas.openxmlformats.org/presentationml/2006/main" showMasterSp="0" showMasterPhAnim="0">
   <p:cSld>
     <p:spTree>
@@ -1332,7 +2084,7 @@
 </p:notes>
 </file>
 
-<file path=ppt/notesSlides/notesSlide14.xml><?xml version="1.0" encoding="utf-8"?>
+<file path=ppt/notesSlides/notesSlide15.xml><?xml version="1.0" encoding="utf-8"?>
 <p:notes xmlns:a="http://schemas.openxmlformats.org/drawingml/2006/main" xmlns:r="http://schemas.openxmlformats.org/officeDocument/2006/relationships" xmlns:p="http://schemas.openxmlformats.org/presentationml/2006/main" showMasterSp="0" showMasterPhAnim="0">
   <p:cSld>
     <p:spTree>
@@ -1532,33 +2284,6 @@
               </a:spcAft>
               <a:buNone/>
             </a:pPr>
-            <a:endParaRPr lang="hu-HU" dirty="0"/>
-          </a:p>
-          <a:p>
-            <a:pPr marL="0" lvl="0" indent="0" algn="l" rtl="0">
-              <a:spcBef>
-                <a:spcPts val="0"/>
-              </a:spcBef>
-              <a:spcAft>
-                <a:spcPts val="0"/>
-              </a:spcAft>
-              <a:buNone/>
-            </a:pPr>
-            <a:r>
-              <a:rPr lang="hu-HU" dirty="0"/>
-              <a:t>Tomi:</a:t>
-            </a:r>
-          </a:p>
-          <a:p>
-            <a:pPr marL="0" lvl="0" indent="0" algn="l" rtl="0">
-              <a:spcBef>
-                <a:spcPts val="0"/>
-              </a:spcBef>
-              <a:spcAft>
-                <a:spcPts val="0"/>
-              </a:spcAft>
-              <a:buNone/>
-            </a:pPr>
             <a:r>
               <a:rPr lang="hu-HU" dirty="0"/>
               <a:t>Erre ad választ az </a:t>
@@ -1727,33 +2452,6 @@
               </a:spcAft>
               <a:buNone/>
             </a:pPr>
-            <a:endParaRPr lang="hu-HU" dirty="0"/>
-          </a:p>
-          <a:p>
-            <a:pPr marL="0" lvl="0" indent="0" algn="l" rtl="0">
-              <a:spcBef>
-                <a:spcPts val="0"/>
-              </a:spcBef>
-              <a:spcAft>
-                <a:spcPts val="0"/>
-              </a:spcAft>
-              <a:buNone/>
-            </a:pPr>
-            <a:r>
-              <a:rPr lang="hu-HU" dirty="0"/>
-              <a:t>Samu:</a:t>
-            </a:r>
-          </a:p>
-          <a:p>
-            <a:pPr marL="0" lvl="0" indent="0" algn="l" rtl="0">
-              <a:spcBef>
-                <a:spcPts val="0"/>
-              </a:spcBef>
-              <a:spcAft>
-                <a:spcPts val="0"/>
-              </a:spcAft>
-              <a:buNone/>
-            </a:pPr>
             <a:r>
               <a:rPr lang="hu-HU" dirty="0"/>
               <a:t>A fő modulok közé tartozik az események böngészése, létrehozása és kezelése, valamint az intézmények és osztályok adminisztrációja.</a:t>
@@ -1893,31 +2591,83 @@
               <a:buNone/>
             </a:pPr>
             <a:r>
+              <a:rPr lang="hu-HU" sz="1100" b="0" i="0" u="none" strike="noStrike" cap="none" dirty="0">
+                <a:solidFill>
+                  <a:srgbClr val="000000"/>
+                </a:solidFill>
+                <a:effectLst/>
+                <a:latin typeface="Arial"/>
+                <a:ea typeface="Arial"/>
+                <a:cs typeface="Arial"/>
+                <a:sym typeface="Arial"/>
+              </a:rPr>
+              <a:t>A rendszerünk három fő rétegből épül fel: frontendből, backendből és adatbázisból.</a:t>
+            </a:r>
+          </a:p>
+          <a:p>
+            <a:pPr marL="0" lvl="0" indent="0" algn="l" rtl="0">
+              <a:spcBef>
+                <a:spcPts val="0"/>
+              </a:spcBef>
+              <a:spcAft>
+                <a:spcPts val="0"/>
+              </a:spcAft>
+              <a:buNone/>
+            </a:pPr>
+            <a:r>
+              <a:rPr lang="hu-HU" sz="1100" b="0" i="0" u="none" strike="noStrike" cap="none" dirty="0">
+                <a:solidFill>
+                  <a:srgbClr val="000000"/>
+                </a:solidFill>
+                <a:effectLst/>
+                <a:latin typeface="Arial"/>
+                <a:ea typeface="Arial"/>
+                <a:cs typeface="Arial"/>
+                <a:sym typeface="Arial"/>
+              </a:rPr>
+              <a:t>A frontend egy </a:t>
+            </a:r>
+            <a:r>
+              <a:rPr lang="hu-HU" sz="1100" b="0" i="0" u="none" strike="noStrike" cap="none" dirty="0" err="1">
+                <a:solidFill>
+                  <a:srgbClr val="000000"/>
+                </a:solidFill>
+                <a:effectLst/>
+                <a:latin typeface="Arial"/>
+                <a:ea typeface="Arial"/>
+                <a:cs typeface="Arial"/>
+                <a:sym typeface="Arial"/>
+              </a:rPr>
+              <a:t>Vue</a:t>
+            </a:r>
+            <a:r>
+              <a:rPr lang="hu-HU" sz="1100" b="0" i="0" u="none" strike="noStrike" cap="none" dirty="0">
+                <a:solidFill>
+                  <a:srgbClr val="000000"/>
+                </a:solidFill>
+                <a:effectLst/>
+                <a:latin typeface="Arial"/>
+                <a:ea typeface="Arial"/>
+                <a:cs typeface="Arial"/>
+                <a:sym typeface="Arial"/>
+              </a:rPr>
+              <a:t> 3 alapú kliensalkalmazás, ezen keresztül éri el és használja a felhasználó a funkciókat.</a:t>
+            </a:r>
+            <a:br>
               <a:rPr lang="hu-HU" dirty="0"/>
-              <a:t>A rendszer három fő részből áll: frontendből, backendből és adatbázisból.</a:t>
-            </a:r>
-          </a:p>
-          <a:p>
-            <a:pPr marL="0" lvl="0" indent="0" algn="l" rtl="0">
-              <a:spcBef>
-                <a:spcPts val="0"/>
-              </a:spcBef>
-              <a:spcAft>
-                <a:spcPts val="0"/>
-              </a:spcAft>
-              <a:buNone/>
-            </a:pPr>
-            <a:r>
-              <a:rPr lang="hu-HU" dirty="0"/>
-              <a:t>A frontend </a:t>
-            </a:r>
-            <a:r>
-              <a:rPr lang="hu-HU" dirty="0" err="1"/>
-              <a:t>Vue</a:t>
-            </a:r>
-            <a:r>
-              <a:rPr lang="hu-HU" dirty="0"/>
-              <a:t> 3 alapú kliensalkalmazás, ahol a felhasználó közvetlenül dolgozik.</a:t>
+            </a:br>
+            <a:r>
+              <a:rPr lang="hu-HU" sz="1100" b="0" i="0" u="none" strike="noStrike" cap="none" dirty="0">
+                <a:solidFill>
+                  <a:srgbClr val="000000"/>
+                </a:solidFill>
+                <a:effectLst/>
+                <a:latin typeface="Arial"/>
+                <a:ea typeface="Arial"/>
+                <a:cs typeface="Arial"/>
+                <a:sym typeface="Arial"/>
+              </a:rPr>
+              <a:t>Itt történik a felület megjelenítése, az űrlapkezelés és a felhasználói műveletek indítása.</a:t>
             </a:r>
           </a:p>
           <a:p>
@@ -1958,39 +2708,109 @@
               <a:buNone/>
             </a:pPr>
             <a:r>
+              <a:rPr lang="hu-HU" sz="1100" b="0" i="0" u="none" strike="noStrike" cap="none" dirty="0">
+                <a:solidFill>
+                  <a:srgbClr val="000000"/>
+                </a:solidFill>
+                <a:effectLst/>
+                <a:latin typeface="Arial"/>
+                <a:ea typeface="Arial"/>
+                <a:cs typeface="Arial"/>
+                <a:sym typeface="Arial"/>
+              </a:rPr>
+              <a:t>A háttérlogikát egy </a:t>
+            </a:r>
+            <a:r>
+              <a:rPr lang="hu-HU" sz="1100" b="0" i="0" u="none" strike="noStrike" cap="none" dirty="0" err="1">
+                <a:solidFill>
+                  <a:srgbClr val="000000"/>
+                </a:solidFill>
+                <a:effectLst/>
+                <a:latin typeface="Arial"/>
+                <a:ea typeface="Arial"/>
+                <a:cs typeface="Arial"/>
+                <a:sym typeface="Arial"/>
+              </a:rPr>
+              <a:t>Laravel</a:t>
+            </a:r>
+            <a:r>
+              <a:rPr lang="hu-HU" sz="1100" b="0" i="0" u="none" strike="noStrike" cap="none" dirty="0">
+                <a:solidFill>
+                  <a:srgbClr val="000000"/>
+                </a:solidFill>
+                <a:effectLst/>
+                <a:latin typeface="Arial"/>
+                <a:ea typeface="Arial"/>
+                <a:cs typeface="Arial"/>
+                <a:sym typeface="Arial"/>
+              </a:rPr>
+              <a:t> 12 alapú REST API biztosítja, amely kezeli az üzleti folyamatokat és a jogosultságokat.</a:t>
+            </a:r>
+          </a:p>
+          <a:p>
+            <a:pPr marL="0" lvl="0" indent="0" algn="l" rtl="0">
+              <a:spcBef>
+                <a:spcPts val="0"/>
+              </a:spcBef>
+              <a:spcAft>
+                <a:spcPts val="0"/>
+              </a:spcAft>
+              <a:buNone/>
+            </a:pPr>
+            <a:r>
+              <a:rPr lang="hu-HU" sz="1100" b="0" i="0" u="none" strike="noStrike" cap="none" dirty="0">
+                <a:solidFill>
+                  <a:srgbClr val="000000"/>
+                </a:solidFill>
+                <a:effectLst/>
+                <a:latin typeface="Arial"/>
+                <a:ea typeface="Arial"/>
+                <a:cs typeface="Arial"/>
+                <a:sym typeface="Arial"/>
+              </a:rPr>
+              <a:t>Az adatok tárolása </a:t>
+            </a:r>
+            <a:r>
+              <a:rPr lang="hu-HU" sz="1100" b="0" i="0" u="none" strike="noStrike" cap="none" dirty="0" err="1">
+                <a:solidFill>
+                  <a:srgbClr val="000000"/>
+                </a:solidFill>
+                <a:effectLst/>
+                <a:latin typeface="Arial"/>
+                <a:ea typeface="Arial"/>
+                <a:cs typeface="Arial"/>
+                <a:sym typeface="Arial"/>
+              </a:rPr>
+              <a:t>MySQL</a:t>
+            </a:r>
+            <a:r>
+              <a:rPr lang="hu-HU" sz="1100" b="0" i="0" u="none" strike="noStrike" cap="none" dirty="0">
+                <a:solidFill>
+                  <a:srgbClr val="000000"/>
+                </a:solidFill>
+                <a:effectLst/>
+                <a:latin typeface="Arial"/>
+                <a:ea typeface="Arial"/>
+                <a:cs typeface="Arial"/>
+                <a:sym typeface="Arial"/>
+              </a:rPr>
+              <a:t> adatbázisban történik.</a:t>
+            </a:r>
+            <a:br>
               <a:rPr lang="hu-HU" dirty="0"/>
-              <a:t>A backend oldalt </a:t>
-            </a:r>
-            <a:r>
-              <a:rPr lang="hu-HU" dirty="0" err="1"/>
-              <a:t>Laravel</a:t>
-            </a:r>
-            <a:r>
-              <a:rPr lang="hu-HU" dirty="0"/>
-              <a:t> 12 alapú REST API biztosítja, az adatok tárolása pedig </a:t>
-            </a:r>
-            <a:r>
-              <a:rPr lang="hu-HU" dirty="0" err="1"/>
-              <a:t>MySQL</a:t>
-            </a:r>
-            <a:r>
-              <a:rPr lang="hu-HU" dirty="0"/>
-              <a:t> adatbázisban történik.</a:t>
-            </a:r>
-          </a:p>
-          <a:p>
-            <a:pPr marL="0" lvl="0" indent="0" algn="l" rtl="0">
-              <a:spcBef>
-                <a:spcPts val="0"/>
-              </a:spcBef>
-              <a:spcAft>
-                <a:spcPts val="0"/>
-              </a:spcAft>
-              <a:buNone/>
-            </a:pPr>
-            <a:r>
-              <a:rPr lang="hu-HU" dirty="0"/>
-              <a:t>A komponensek HTTP API-hívásokkal kommunikálnak egymással.</a:t>
+            </a:br>
+            <a:r>
+              <a:rPr lang="hu-HU" sz="1100" b="0" i="0" u="none" strike="noStrike" cap="none" dirty="0">
+                <a:solidFill>
+                  <a:srgbClr val="000000"/>
+                </a:solidFill>
+                <a:effectLst/>
+                <a:latin typeface="Arial"/>
+                <a:ea typeface="Arial"/>
+                <a:cs typeface="Arial"/>
+                <a:sym typeface="Arial"/>
+              </a:rPr>
+              <a:t>A frontend és a backend HTTP API-hívásokkal kommunikál, így a két réteg egymástól függetlenül fejleszthető és könnyen bővíthető.</a:t>
             </a:r>
             <a:endParaRPr dirty="0"/>
           </a:p>
@@ -2050,6 +2870,418 @@
   <p:cSld>
     <p:spTree>
       <p:nvGrpSpPr>
+        <p:cNvPr id="1" name="Shape 143"/>
+        <p:cNvGrpSpPr/>
+        <p:nvPr/>
+      </p:nvGrpSpPr>
+      <p:grpSpPr>
+        <a:xfrm>
+          <a:off x="0" y="0"/>
+          <a:ext cx="0" cy="0"/>
+          <a:chOff x="0" y="0"/>
+          <a:chExt cx="0" cy="0"/>
+        </a:xfrm>
+      </p:grpSpPr>
+      <p:sp>
+        <p:nvSpPr>
+          <p:cNvPr id="144" name="Google Shape;144;p7:notes"/>
+          <p:cNvSpPr txBox="1">
+            <a:spLocks noGrp="1"/>
+          </p:cNvSpPr>
+          <p:nvPr>
+            <p:ph type="body" idx="1"/>
+          </p:nvPr>
+        </p:nvSpPr>
+        <p:spPr>
+          <a:xfrm>
+            <a:off x="685800" y="4343400"/>
+            <a:ext cx="5486400" cy="4114800"/>
+          </a:xfrm>
+          <a:prstGeom prst="rect">
+            <a:avLst/>
+          </a:prstGeom>
+        </p:spPr>
+        <p:txBody>
+          <a:bodyPr spcFirstLastPara="1" wrap="square" lIns="91425" tIns="91425" rIns="91425" bIns="91425" anchor="t" anchorCtr="0">
+            <a:noAutofit/>
+          </a:bodyPr>
+          <a:lstStyle/>
+          <a:p>
+            <a:pPr marL="0" lvl="0" indent="0" algn="l" rtl="0">
+              <a:spcBef>
+                <a:spcPts val="0"/>
+              </a:spcBef>
+              <a:spcAft>
+                <a:spcPts val="0"/>
+              </a:spcAft>
+              <a:buNone/>
+            </a:pPr>
+            <a:r>
+              <a:rPr lang="hu-HU" dirty="0"/>
+              <a:t>Samu:</a:t>
+            </a:r>
+          </a:p>
+          <a:p>
+            <a:pPr marL="0" lvl="0" indent="0" algn="l" rtl="0">
+              <a:spcBef>
+                <a:spcPts val="0"/>
+              </a:spcBef>
+              <a:spcAft>
+                <a:spcPts val="0"/>
+              </a:spcAft>
+              <a:buNone/>
+            </a:pPr>
+            <a:r>
+              <a:rPr lang="hu-HU" sz="1100" b="0" i="0" u="none" strike="noStrike" cap="none" dirty="0">
+                <a:solidFill>
+                  <a:srgbClr val="000000"/>
+                </a:solidFill>
+                <a:effectLst/>
+                <a:latin typeface="Arial"/>
+                <a:ea typeface="Arial"/>
+                <a:cs typeface="Arial"/>
+                <a:sym typeface="Arial"/>
+              </a:rPr>
+              <a:t>A frontend egy </a:t>
+            </a:r>
+            <a:r>
+              <a:rPr lang="hu-HU" sz="1100" b="0" i="0" u="none" strike="noStrike" cap="none" dirty="0" err="1">
+                <a:solidFill>
+                  <a:srgbClr val="000000"/>
+                </a:solidFill>
+                <a:effectLst/>
+                <a:latin typeface="Arial"/>
+                <a:ea typeface="Arial"/>
+                <a:cs typeface="Arial"/>
+                <a:sym typeface="Arial"/>
+              </a:rPr>
+              <a:t>Vue</a:t>
+            </a:r>
+            <a:r>
+              <a:rPr lang="hu-HU" sz="1100" b="0" i="0" u="none" strike="noStrike" cap="none" dirty="0">
+                <a:solidFill>
+                  <a:srgbClr val="000000"/>
+                </a:solidFill>
+                <a:effectLst/>
+                <a:latin typeface="Arial"/>
+                <a:ea typeface="Arial"/>
+                <a:cs typeface="Arial"/>
+                <a:sym typeface="Arial"/>
+              </a:rPr>
+              <a:t> 3 alapú egyoldalas alkalmazás. </a:t>
+            </a:r>
+          </a:p>
+          <a:p>
+            <a:pPr marL="0" lvl="0" indent="0" algn="l" rtl="0">
+              <a:spcBef>
+                <a:spcPts val="0"/>
+              </a:spcBef>
+              <a:spcAft>
+                <a:spcPts val="0"/>
+              </a:spcAft>
+              <a:buNone/>
+            </a:pPr>
+            <a:r>
+              <a:rPr lang="hu-HU" sz="1100" b="0" i="0" u="none" strike="noStrike" cap="none" dirty="0">
+                <a:solidFill>
+                  <a:srgbClr val="000000"/>
+                </a:solidFill>
+                <a:effectLst/>
+                <a:latin typeface="Arial"/>
+                <a:ea typeface="Arial"/>
+                <a:cs typeface="Arial"/>
+                <a:sym typeface="Arial"/>
+              </a:rPr>
+              <a:t>A felhasználó </a:t>
+            </a:r>
+            <a:r>
+              <a:rPr lang="hu-HU" sz="1100" b="0" i="0" u="none" strike="noStrike" cap="none" dirty="0" err="1">
+                <a:solidFill>
+                  <a:srgbClr val="000000"/>
+                </a:solidFill>
+                <a:effectLst/>
+                <a:latin typeface="Arial"/>
+                <a:ea typeface="Arial"/>
+                <a:cs typeface="Arial"/>
+                <a:sym typeface="Arial"/>
+              </a:rPr>
+              <a:t>route</a:t>
+            </a:r>
+            <a:r>
+              <a:rPr lang="hu-HU" sz="1100" b="0" i="0" u="none" strike="noStrike" cap="none" dirty="0">
+                <a:solidFill>
+                  <a:srgbClr val="000000"/>
+                </a:solidFill>
+                <a:effectLst/>
+                <a:latin typeface="Arial"/>
+                <a:ea typeface="Arial"/>
+                <a:cs typeface="Arial"/>
+                <a:sym typeface="Arial"/>
+              </a:rPr>
+              <a:t>-okon keresztül éri el a fő funkciókat, például az eseménylistát, </a:t>
+            </a:r>
+            <a:r>
+              <a:rPr lang="hu-HU" sz="1100" b="0" i="0" u="none" strike="noStrike" cap="none" dirty="0" err="1">
+                <a:solidFill>
+                  <a:srgbClr val="000000"/>
+                </a:solidFill>
+                <a:effectLst/>
+                <a:latin typeface="Arial"/>
+                <a:ea typeface="Arial"/>
+                <a:cs typeface="Arial"/>
+                <a:sym typeface="Arial"/>
+              </a:rPr>
+              <a:t>naptárat</a:t>
+            </a:r>
+            <a:r>
+              <a:rPr lang="hu-HU" sz="1100" b="0" i="0" u="none" strike="noStrike" cap="none" dirty="0">
+                <a:solidFill>
+                  <a:srgbClr val="000000"/>
+                </a:solidFill>
+                <a:effectLst/>
+                <a:latin typeface="Arial"/>
+                <a:ea typeface="Arial"/>
+                <a:cs typeface="Arial"/>
+                <a:sym typeface="Arial"/>
+              </a:rPr>
+              <a:t> és részletező oldalt. </a:t>
+            </a:r>
+          </a:p>
+          <a:p>
+            <a:pPr marL="0" lvl="0" indent="0" algn="l" rtl="0">
+              <a:spcBef>
+                <a:spcPts val="0"/>
+              </a:spcBef>
+              <a:spcAft>
+                <a:spcPts val="0"/>
+              </a:spcAft>
+              <a:buNone/>
+            </a:pPr>
+            <a:r>
+              <a:rPr lang="hu-HU" sz="1100" b="0" i="0" u="none" strike="noStrike" cap="none" dirty="0">
+                <a:solidFill>
+                  <a:srgbClr val="000000"/>
+                </a:solidFill>
+                <a:effectLst/>
+                <a:latin typeface="Arial"/>
+                <a:ea typeface="Arial"/>
+                <a:cs typeface="Arial"/>
+                <a:sym typeface="Arial"/>
+              </a:rPr>
+              <a:t>A rendszer szerepkör szerint eltérő </a:t>
+            </a:r>
+            <a:r>
+              <a:rPr lang="hu-HU" sz="1100" b="0" i="0" u="none" strike="noStrike" cap="none" dirty="0" err="1">
+                <a:solidFill>
+                  <a:srgbClr val="000000"/>
+                </a:solidFill>
+                <a:effectLst/>
+                <a:latin typeface="Arial"/>
+                <a:ea typeface="Arial"/>
+                <a:cs typeface="Arial"/>
+                <a:sym typeface="Arial"/>
+              </a:rPr>
+              <a:t>dashboardokat</a:t>
+            </a:r>
+            <a:r>
+              <a:rPr lang="hu-HU" sz="1100" b="0" i="0" u="none" strike="noStrike" cap="none" dirty="0">
+                <a:solidFill>
+                  <a:srgbClr val="000000"/>
+                </a:solidFill>
+                <a:effectLst/>
+                <a:latin typeface="Arial"/>
+                <a:ea typeface="Arial"/>
+                <a:cs typeface="Arial"/>
+                <a:sym typeface="Arial"/>
+              </a:rPr>
+              <a:t> ad, így diák, tanár és az </a:t>
+            </a:r>
+            <a:r>
+              <a:rPr lang="hu-HU" sz="1100" b="0" i="0" u="none" strike="noStrike" cap="none" dirty="0" err="1">
+                <a:solidFill>
+                  <a:srgbClr val="000000"/>
+                </a:solidFill>
+                <a:effectLst/>
+                <a:latin typeface="Arial"/>
+                <a:ea typeface="Arial"/>
+                <a:cs typeface="Arial"/>
+                <a:sym typeface="Arial"/>
+              </a:rPr>
+              <a:t>admin</a:t>
+            </a:r>
+            <a:r>
+              <a:rPr lang="hu-HU" sz="1100" b="0" i="0" u="none" strike="noStrike" cap="none" dirty="0">
+                <a:solidFill>
+                  <a:srgbClr val="000000"/>
+                </a:solidFill>
+                <a:effectLst/>
+                <a:latin typeface="Arial"/>
+                <a:ea typeface="Arial"/>
+                <a:cs typeface="Arial"/>
+                <a:sym typeface="Arial"/>
+              </a:rPr>
+              <a:t> felhasználó más műveleteket lát. </a:t>
+            </a:r>
+          </a:p>
+          <a:p>
+            <a:pPr marL="0" lvl="0" indent="0" algn="l" rtl="0">
+              <a:spcBef>
+                <a:spcPts val="0"/>
+              </a:spcBef>
+              <a:spcAft>
+                <a:spcPts val="0"/>
+              </a:spcAft>
+              <a:buNone/>
+            </a:pPr>
+            <a:r>
+              <a:rPr lang="hu-HU" sz="1100" b="0" i="0" u="none" strike="noStrike" cap="none" dirty="0">
+                <a:solidFill>
+                  <a:srgbClr val="000000"/>
+                </a:solidFill>
+                <a:effectLst/>
+                <a:latin typeface="Arial"/>
+                <a:ea typeface="Arial"/>
+                <a:cs typeface="Arial"/>
+                <a:sym typeface="Arial"/>
+              </a:rPr>
+              <a:t>A kliens </a:t>
+            </a:r>
+            <a:r>
+              <a:rPr lang="hu-HU" sz="1100" b="0" i="0" u="none" strike="noStrike" cap="none" dirty="0" err="1">
+                <a:solidFill>
+                  <a:srgbClr val="000000"/>
+                </a:solidFill>
+                <a:effectLst/>
+                <a:latin typeface="Arial"/>
+                <a:ea typeface="Arial"/>
+                <a:cs typeface="Arial"/>
+                <a:sym typeface="Arial"/>
+              </a:rPr>
+              <a:t>tokennel</a:t>
+            </a:r>
+            <a:r>
+              <a:rPr lang="hu-HU" sz="1100" b="0" i="0" u="none" strike="noStrike" cap="none" dirty="0">
+                <a:solidFill>
+                  <a:srgbClr val="000000"/>
+                </a:solidFill>
+                <a:effectLst/>
+                <a:latin typeface="Arial"/>
+                <a:ea typeface="Arial"/>
+                <a:cs typeface="Arial"/>
+                <a:sym typeface="Arial"/>
+              </a:rPr>
+              <a:t> kommunikál a backend API-</a:t>
+            </a:r>
+            <a:r>
+              <a:rPr lang="hu-HU" sz="1100" b="0" i="0" u="none" strike="noStrike" cap="none" dirty="0" err="1">
+                <a:solidFill>
+                  <a:srgbClr val="000000"/>
+                </a:solidFill>
+                <a:effectLst/>
+                <a:latin typeface="Arial"/>
+                <a:ea typeface="Arial"/>
+                <a:cs typeface="Arial"/>
+                <a:sym typeface="Arial"/>
+              </a:rPr>
+              <a:t>val</a:t>
+            </a:r>
+            <a:r>
+              <a:rPr lang="hu-HU" sz="1100" b="0" i="0" u="none" strike="noStrike" cap="none" dirty="0">
+                <a:solidFill>
+                  <a:srgbClr val="000000"/>
+                </a:solidFill>
+                <a:effectLst/>
+                <a:latin typeface="Arial"/>
+                <a:ea typeface="Arial"/>
+                <a:cs typeface="Arial"/>
+                <a:sym typeface="Arial"/>
+              </a:rPr>
+              <a:t>, és kezeli az eseményekhez kapcsolódó műveleteket, például részvételt, kedvencek kezelését és </a:t>
+            </a:r>
+            <a:r>
+              <a:rPr lang="hu-HU" sz="1100" b="0" i="0" u="none" strike="noStrike" cap="none" dirty="0" err="1">
+                <a:solidFill>
+                  <a:srgbClr val="000000"/>
+                </a:solidFill>
+                <a:effectLst/>
+                <a:latin typeface="Arial"/>
+                <a:ea typeface="Arial"/>
+                <a:cs typeface="Arial"/>
+                <a:sym typeface="Arial"/>
+              </a:rPr>
+              <a:t>kommentelést</a:t>
+            </a:r>
+            <a:r>
+              <a:rPr lang="hu-HU" sz="1100" b="0" i="0" u="none" strike="noStrike" cap="none" dirty="0">
+                <a:solidFill>
+                  <a:srgbClr val="000000"/>
+                </a:solidFill>
+                <a:effectLst/>
+                <a:latin typeface="Arial"/>
+                <a:ea typeface="Arial"/>
+                <a:cs typeface="Arial"/>
+                <a:sym typeface="Arial"/>
+              </a:rPr>
+              <a:t>.</a:t>
+            </a:r>
+            <a:endParaRPr dirty="0"/>
+          </a:p>
+        </p:txBody>
+      </p:sp>
+      <p:sp>
+        <p:nvSpPr>
+          <p:cNvPr id="145" name="Google Shape;145;p7:notes"/>
+          <p:cNvSpPr>
+            <a:spLocks noGrp="1" noRot="1" noChangeAspect="1"/>
+          </p:cNvSpPr>
+          <p:nvPr>
+            <p:ph type="sldImg" idx="2"/>
+          </p:nvPr>
+        </p:nvSpPr>
+        <p:spPr>
+          <a:xfrm>
+            <a:off x="381000" y="685800"/>
+            <a:ext cx="6096000" cy="3429000"/>
+          </a:xfrm>
+          <a:custGeom>
+            <a:avLst/>
+            <a:gdLst/>
+            <a:ahLst/>
+            <a:cxnLst/>
+            <a:rect l="l" t="t" r="r" b="b"/>
+            <a:pathLst>
+              <a:path w="120000" h="120000" extrusionOk="0">
+                <a:moveTo>
+                  <a:pt x="0" y="0"/>
+                </a:moveTo>
+                <a:lnTo>
+                  <a:pt x="120000" y="0"/>
+                </a:lnTo>
+                <a:lnTo>
+                  <a:pt x="120000" y="120000"/>
+                </a:lnTo>
+                <a:lnTo>
+                  <a:pt x="0" y="120000"/>
+                </a:lnTo>
+                <a:close/>
+              </a:path>
+            </a:pathLst>
+          </a:custGeom>
+        </p:spPr>
+      </p:sp>
+    </p:spTree>
+  </p:cSld>
+  <p:clrMapOvr>
+    <a:masterClrMapping/>
+  </p:clrMapOvr>
+</p:notes>
+</file>
+
+<file path=ppt/notesSlides/notesSlide6.xml><?xml version="1.0" encoding="utf-8"?>
+<p:notes xmlns:a="http://schemas.openxmlformats.org/drawingml/2006/main" xmlns:r="http://schemas.openxmlformats.org/officeDocument/2006/relationships" xmlns:p="http://schemas.openxmlformats.org/presentationml/2006/main" showMasterSp="0" showMasterPhAnim="0">
+  <p:cSld>
+    <p:spTree>
+      <p:nvGrpSpPr>
         <p:cNvPr id="1" name="Shape 120"/>
         <p:cNvGrpSpPr/>
         <p:nvPr/>
@@ -2096,7 +3328,7 @@
               </a:spcAft>
               <a:buNone/>
             </a:pPr>
-            <a:endParaRPr/>
+            <a:endParaRPr dirty="0"/>
           </a:p>
         </p:txBody>
       </p:sp>
@@ -2149,7 +3381,7 @@
 </p:notes>
 </file>
 
-<file path=ppt/notesSlides/notesSlide6.xml><?xml version="1.0" encoding="utf-8"?>
+<file path=ppt/notesSlides/notesSlide7.xml><?xml version="1.0" encoding="utf-8"?>
 <p:notes xmlns:a="http://schemas.openxmlformats.org/drawingml/2006/main" xmlns:r="http://schemas.openxmlformats.org/officeDocument/2006/relationships" xmlns:p="http://schemas.openxmlformats.org/presentationml/2006/main" showMasterSp="0" showMasterPhAnim="0">
   <p:cSld>
     <p:spTree>
@@ -2207,110 +3439,6 @@
       <p:sp>
         <p:nvSpPr>
           <p:cNvPr id="136" name="Google Shape;136;p6:notes"/>
-          <p:cNvSpPr>
-            <a:spLocks noGrp="1" noRot="1" noChangeAspect="1"/>
-          </p:cNvSpPr>
-          <p:nvPr>
-            <p:ph type="sldImg" idx="2"/>
-          </p:nvPr>
-        </p:nvSpPr>
-        <p:spPr>
-          <a:xfrm>
-            <a:off x="381000" y="685800"/>
-            <a:ext cx="6096000" cy="3429000"/>
-          </a:xfrm>
-          <a:custGeom>
-            <a:avLst/>
-            <a:gdLst/>
-            <a:ahLst/>
-            <a:cxnLst/>
-            <a:rect l="l" t="t" r="r" b="b"/>
-            <a:pathLst>
-              <a:path w="120000" h="120000" extrusionOk="0">
-                <a:moveTo>
-                  <a:pt x="0" y="0"/>
-                </a:moveTo>
-                <a:lnTo>
-                  <a:pt x="120000" y="0"/>
-                </a:lnTo>
-                <a:lnTo>
-                  <a:pt x="120000" y="120000"/>
-                </a:lnTo>
-                <a:lnTo>
-                  <a:pt x="0" y="120000"/>
-                </a:lnTo>
-                <a:close/>
-              </a:path>
-            </a:pathLst>
-          </a:custGeom>
-        </p:spPr>
-      </p:sp>
-    </p:spTree>
-  </p:cSld>
-  <p:clrMapOvr>
-    <a:masterClrMapping/>
-  </p:clrMapOvr>
-</p:notes>
-</file>
-
-<file path=ppt/notesSlides/notesSlide7.xml><?xml version="1.0" encoding="utf-8"?>
-<p:notes xmlns:a="http://schemas.openxmlformats.org/drawingml/2006/main" xmlns:r="http://schemas.openxmlformats.org/officeDocument/2006/relationships" xmlns:p="http://schemas.openxmlformats.org/presentationml/2006/main" showMasterSp="0" showMasterPhAnim="0">
-  <p:cSld>
-    <p:spTree>
-      <p:nvGrpSpPr>
-        <p:cNvPr id="1" name="Shape 143"/>
-        <p:cNvGrpSpPr/>
-        <p:nvPr/>
-      </p:nvGrpSpPr>
-      <p:grpSpPr>
-        <a:xfrm>
-          <a:off x="0" y="0"/>
-          <a:ext cx="0" cy="0"/>
-          <a:chOff x="0" y="0"/>
-          <a:chExt cx="0" cy="0"/>
-        </a:xfrm>
-      </p:grpSpPr>
-      <p:sp>
-        <p:nvSpPr>
-          <p:cNvPr id="144" name="Google Shape;144;p7:notes"/>
-          <p:cNvSpPr txBox="1">
-            <a:spLocks noGrp="1"/>
-          </p:cNvSpPr>
-          <p:nvPr>
-            <p:ph type="body" idx="1"/>
-          </p:nvPr>
-        </p:nvSpPr>
-        <p:spPr>
-          <a:xfrm>
-            <a:off x="685800" y="4343400"/>
-            <a:ext cx="5486400" cy="4114800"/>
-          </a:xfrm>
-          <a:prstGeom prst="rect">
-            <a:avLst/>
-          </a:prstGeom>
-        </p:spPr>
-        <p:txBody>
-          <a:bodyPr spcFirstLastPara="1" wrap="square" lIns="91425" tIns="91425" rIns="91425" bIns="91425" anchor="t" anchorCtr="0">
-            <a:noAutofit/>
-          </a:bodyPr>
-          <a:lstStyle/>
-          <a:p>
-            <a:pPr marL="0" lvl="0" indent="0" algn="l" rtl="0">
-              <a:spcBef>
-                <a:spcPts val="0"/>
-              </a:spcBef>
-              <a:spcAft>
-                <a:spcPts val="0"/>
-              </a:spcAft>
-              <a:buNone/>
-            </a:pPr>
-            <a:endParaRPr/>
-          </a:p>
-        </p:txBody>
-      </p:sp>
-      <p:sp>
-        <p:nvSpPr>
-          <p:cNvPr id="145" name="Google Shape;145;p7:notes"/>
           <p:cNvSpPr>
             <a:spLocks noGrp="1" noRot="1" noChangeAspect="1"/>
           </p:cNvSpPr>
@@ -13113,6 +14241,375 @@
     </p:bg>
     <p:spTree>
       <p:nvGrpSpPr>
+        <p:cNvPr id="1" name="Shape 163">
+          <a:extLst>
+            <a:ext uri="{FF2B5EF4-FFF2-40B4-BE49-F238E27FC236}">
+              <a16:creationId xmlns:a16="http://schemas.microsoft.com/office/drawing/2014/main" id="{9FD071AA-436D-971A-A541-D08A464CAFC9}"/>
+            </a:ext>
+          </a:extLst>
+        </p:cNvPr>
+        <p:cNvGrpSpPr/>
+        <p:nvPr/>
+      </p:nvGrpSpPr>
+      <p:grpSpPr>
+        <a:xfrm>
+          <a:off x="0" y="0"/>
+          <a:ext cx="0" cy="0"/>
+          <a:chOff x="0" y="0"/>
+          <a:chExt cx="0" cy="0"/>
+        </a:xfrm>
+      </p:grpSpPr>
+      <p:sp>
+        <p:nvSpPr>
+          <p:cNvPr id="164" name="Google Shape;164;p9">
+            <a:extLst>
+              <a:ext uri="{FF2B5EF4-FFF2-40B4-BE49-F238E27FC236}">
+                <a16:creationId xmlns:a16="http://schemas.microsoft.com/office/drawing/2014/main" id="{570EDD70-0BDF-CEC5-2C59-32C50CD8E3BB}"/>
+              </a:ext>
+            </a:extLst>
+          </p:cNvPr>
+          <p:cNvSpPr txBox="1">
+            <a:spLocks noGrp="1"/>
+          </p:cNvSpPr>
+          <p:nvPr>
+            <p:ph type="ctrTitle"/>
+          </p:nvPr>
+        </p:nvSpPr>
+        <p:spPr>
+          <a:xfrm>
+            <a:off x="872762" y="524926"/>
+            <a:ext cx="10446473" cy="810807"/>
+          </a:xfrm>
+          <a:prstGeom prst="rect">
+            <a:avLst/>
+          </a:prstGeom>
+          <a:noFill/>
+          <a:ln>
+            <a:noFill/>
+          </a:ln>
+        </p:spPr>
+        <p:txBody>
+          <a:bodyPr spcFirstLastPara="1" wrap="square" lIns="91425" tIns="45700" rIns="91425" bIns="45700" anchor="b" anchorCtr="0">
+            <a:normAutofit fontScale="90000"/>
+          </a:bodyPr>
+          <a:lstStyle/>
+          <a:p>
+            <a:pPr marL="0" lvl="0" indent="0" rtl="0">
+              <a:lnSpc>
+                <a:spcPct val="90000"/>
+              </a:lnSpc>
+              <a:spcBef>
+                <a:spcPts val="0"/>
+              </a:spcBef>
+              <a:spcAft>
+                <a:spcPts val="0"/>
+              </a:spcAft>
+              <a:buClr>
+                <a:schemeClr val="dk1"/>
+              </a:buClr>
+              <a:buSzPts val="4400"/>
+              <a:buFont typeface="Cambria"/>
+              <a:buNone/>
+            </a:pPr>
+            <a:r>
+              <a:rPr lang="hu-HU" dirty="0" err="1">
+                <a:latin typeface="Cambria" panose="02040503050406030204" pitchFamily="18" charset="0"/>
+                <a:ea typeface="Cambria" panose="02040503050406030204" pitchFamily="18" charset="0"/>
+              </a:rPr>
+              <a:t>Reszponzivitás</a:t>
+            </a:r>
+            <a:endParaRPr dirty="0">
+              <a:latin typeface="Cambria" panose="02040503050406030204" pitchFamily="18" charset="0"/>
+              <a:ea typeface="Cambria" panose="02040503050406030204" pitchFamily="18" charset="0"/>
+            </a:endParaRPr>
+          </a:p>
+        </p:txBody>
+      </p:sp>
+      <p:sp>
+        <p:nvSpPr>
+          <p:cNvPr id="166" name="Google Shape;166;p9">
+            <a:extLst>
+              <a:ext uri="{FF2B5EF4-FFF2-40B4-BE49-F238E27FC236}">
+                <a16:creationId xmlns:a16="http://schemas.microsoft.com/office/drawing/2014/main" id="{9474E5A6-E23B-DABB-5990-92CEA2EE42DD}"/>
+              </a:ext>
+            </a:extLst>
+          </p:cNvPr>
+          <p:cNvSpPr txBox="1"/>
+          <p:nvPr/>
+        </p:nvSpPr>
+        <p:spPr>
+          <a:xfrm>
+            <a:off x="389240" y="2268714"/>
+            <a:ext cx="7767600" cy="2585283"/>
+          </a:xfrm>
+          <a:prstGeom prst="rect">
+            <a:avLst/>
+          </a:prstGeom>
+          <a:noFill/>
+          <a:ln>
+            <a:noFill/>
+          </a:ln>
+        </p:spPr>
+        <p:txBody>
+          <a:bodyPr spcFirstLastPara="1" wrap="square" lIns="91425" tIns="45700" rIns="91425" bIns="45700" anchor="t" anchorCtr="0">
+            <a:spAutoFit/>
+          </a:bodyPr>
+          <a:lstStyle/>
+          <a:p>
+            <a:r>
+              <a:rPr lang="hu-HU" sz="1800" dirty="0"/>
+              <a:t>Reszponzív felület asztali, tablet és mobil nézetre</a:t>
+            </a:r>
+          </a:p>
+          <a:p>
+            <a:pPr marL="0" marR="0" lvl="0" indent="0" algn="l" rtl="0">
+              <a:spcBef>
+                <a:spcPts val="0"/>
+              </a:spcBef>
+              <a:spcAft>
+                <a:spcPts val="0"/>
+              </a:spcAft>
+              <a:buNone/>
+            </a:pPr>
+            <a:endParaRPr sz="1800" dirty="0">
+              <a:solidFill>
+                <a:schemeClr val="dk1"/>
+              </a:solidFill>
+            </a:endParaRPr>
+          </a:p>
+          <a:p>
+            <a:r>
+              <a:rPr lang="hu-HU" sz="1800" dirty="0"/>
+              <a:t>Rugalmas elrendezés (kártyák, listák, menük igazodnak a kijelzőhöz)</a:t>
+            </a:r>
+          </a:p>
+          <a:p>
+            <a:pPr marL="0" marR="0" lvl="0" indent="0" algn="l" rtl="0">
+              <a:spcBef>
+                <a:spcPts val="0"/>
+              </a:spcBef>
+              <a:spcAft>
+                <a:spcPts val="0"/>
+              </a:spcAft>
+              <a:buNone/>
+            </a:pPr>
+            <a:endParaRPr sz="1800" dirty="0">
+              <a:solidFill>
+                <a:schemeClr val="dk1"/>
+              </a:solidFill>
+            </a:endParaRPr>
+          </a:p>
+          <a:p>
+            <a:r>
+              <a:rPr lang="hu-HU" sz="1800" dirty="0"/>
+              <a:t>Olvasható betűméret és jól kezelhető gombok kisebb kijelzőn is</a:t>
+            </a:r>
+          </a:p>
+          <a:p>
+            <a:pPr marL="0" marR="0" lvl="0" indent="0" algn="l" rtl="0">
+              <a:spcBef>
+                <a:spcPts val="0"/>
+              </a:spcBef>
+              <a:spcAft>
+                <a:spcPts val="0"/>
+              </a:spcAft>
+              <a:buNone/>
+            </a:pPr>
+            <a:endParaRPr sz="1800" dirty="0">
+              <a:solidFill>
+                <a:schemeClr val="dk1"/>
+              </a:solidFill>
+            </a:endParaRPr>
+          </a:p>
+          <a:p>
+            <a:r>
+              <a:rPr lang="hu-HU" sz="1800" dirty="0"/>
+              <a:t>Fő funkciók minden nézetben elérhetők</a:t>
+            </a:r>
+            <a:endParaRPr sz="1800" dirty="0">
+              <a:solidFill>
+                <a:schemeClr val="dk1"/>
+              </a:solidFill>
+              <a:latin typeface="Arial"/>
+              <a:ea typeface="Arial"/>
+              <a:cs typeface="Arial"/>
+              <a:sym typeface="Arial"/>
+            </a:endParaRPr>
+          </a:p>
+          <a:p>
+            <a:pPr marL="0" marR="0" lvl="0" indent="0" algn="l" rtl="0">
+              <a:spcBef>
+                <a:spcPts val="0"/>
+              </a:spcBef>
+              <a:spcAft>
+                <a:spcPts val="0"/>
+              </a:spcAft>
+              <a:buNone/>
+            </a:pPr>
+            <a:br>
+              <a:rPr lang="hu-HU" sz="1800" dirty="0">
+                <a:solidFill>
+                  <a:schemeClr val="dk1"/>
+                </a:solidFill>
+                <a:latin typeface="Arial"/>
+                <a:ea typeface="Arial"/>
+                <a:cs typeface="Arial"/>
+                <a:sym typeface="Arial"/>
+              </a:rPr>
+            </a:br>
+            <a:endParaRPr sz="1800" dirty="0">
+              <a:solidFill>
+                <a:schemeClr val="dk1"/>
+              </a:solidFill>
+              <a:latin typeface="Arial"/>
+              <a:ea typeface="Arial"/>
+              <a:cs typeface="Arial"/>
+              <a:sym typeface="Arial"/>
+            </a:endParaRPr>
+          </a:p>
+        </p:txBody>
+      </p:sp>
+      <p:pic>
+        <p:nvPicPr>
+          <p:cNvPr id="2" name="Kép 1">
+            <a:extLst>
+              <a:ext uri="{FF2B5EF4-FFF2-40B4-BE49-F238E27FC236}">
+                <a16:creationId xmlns:a16="http://schemas.microsoft.com/office/drawing/2014/main" id="{7ADDCDEC-1DC4-5524-2DCA-9EB04EF60825}"/>
+              </a:ext>
+            </a:extLst>
+          </p:cNvPr>
+          <p:cNvPicPr>
+            <a:picLocks noChangeAspect="1"/>
+          </p:cNvPicPr>
+          <p:nvPr/>
+        </p:nvPicPr>
+        <p:blipFill>
+          <a:blip r:embed="rId3"/>
+          <a:srcRect t="55" b="55"/>
+          <a:stretch/>
+        </p:blipFill>
+        <p:spPr>
+          <a:xfrm>
+            <a:off x="-317902" y="-137425"/>
+            <a:ext cx="2852432" cy="2621626"/>
+          </a:xfrm>
+          <a:prstGeom prst="rect">
+            <a:avLst/>
+          </a:prstGeom>
+        </p:spPr>
+      </p:pic>
+      <p:pic>
+        <p:nvPicPr>
+          <p:cNvPr id="4" name="Kép 3">
+            <a:extLst>
+              <a:ext uri="{FF2B5EF4-FFF2-40B4-BE49-F238E27FC236}">
+                <a16:creationId xmlns:a16="http://schemas.microsoft.com/office/drawing/2014/main" id="{27C76B75-C4A7-F786-8BD9-C2B96D12BAC0}"/>
+              </a:ext>
+            </a:extLst>
+          </p:cNvPr>
+          <p:cNvPicPr>
+            <a:picLocks noChangeAspect="1"/>
+          </p:cNvPicPr>
+          <p:nvPr/>
+        </p:nvPicPr>
+        <p:blipFill>
+          <a:blip r:embed="rId4"/>
+          <a:stretch>
+            <a:fillRect/>
+          </a:stretch>
+        </p:blipFill>
+        <p:spPr>
+          <a:xfrm>
+            <a:off x="9539421" y="1335733"/>
+            <a:ext cx="2581639" cy="4588810"/>
+          </a:xfrm>
+          <a:prstGeom prst="rect">
+            <a:avLst/>
+          </a:prstGeom>
+        </p:spPr>
+      </p:pic>
+      <p:pic>
+        <p:nvPicPr>
+          <p:cNvPr id="8" name="Kép 7">
+            <a:extLst>
+              <a:ext uri="{FF2B5EF4-FFF2-40B4-BE49-F238E27FC236}">
+                <a16:creationId xmlns:a16="http://schemas.microsoft.com/office/drawing/2014/main" id="{27568F30-6AA1-5E0A-7D41-3F9E2278A3DF}"/>
+              </a:ext>
+            </a:extLst>
+          </p:cNvPr>
+          <p:cNvPicPr>
+            <a:picLocks noChangeAspect="1"/>
+          </p:cNvPicPr>
+          <p:nvPr/>
+        </p:nvPicPr>
+        <p:blipFill>
+          <a:blip r:embed="rId5"/>
+          <a:stretch>
+            <a:fillRect/>
+          </a:stretch>
+        </p:blipFill>
+        <p:spPr>
+          <a:xfrm>
+            <a:off x="7165409" y="3429000"/>
+            <a:ext cx="2275771" cy="3349593"/>
+          </a:xfrm>
+          <a:prstGeom prst="rect">
+            <a:avLst/>
+          </a:prstGeom>
+        </p:spPr>
+      </p:pic>
+    </p:spTree>
+    <p:extLst>
+      <p:ext uri="{BB962C8B-B14F-4D97-AF65-F5344CB8AC3E}">
+        <p14:creationId xmlns:p14="http://schemas.microsoft.com/office/powerpoint/2010/main" val="2284585627"/>
+      </p:ext>
+    </p:extLst>
+  </p:cSld>
+  <p:clrMapOvr>
+    <a:masterClrMapping/>
+  </p:clrMapOvr>
+  <mc:AlternateContent xmlns:mc="http://schemas.openxmlformats.org/markup-compatibility/2006">
+    <mc:Choice xmlns:p159="http://schemas.microsoft.com/office/powerpoint/2015/09/main" Requires="p159">
+      <p:transition xmlns:p14="http://schemas.microsoft.com/office/powerpoint/2010/main" spd="slow" p14:dur="2000">
+        <p159:morph option="byObject"/>
+      </p:transition>
+    </mc:Choice>
+    <mc:Fallback>
+      <p:transition spd="slow">
+        <p:fade/>
+      </p:transition>
+    </mc:Fallback>
+  </mc:AlternateContent>
+</p:sld>
+</file>
+
+<file path=ppt/slides/slide11.xml><?xml version="1.0" encoding="utf-8"?>
+<p:sld xmlns:a="http://schemas.openxmlformats.org/drawingml/2006/main" xmlns:r="http://schemas.openxmlformats.org/officeDocument/2006/relationships" xmlns:p="http://schemas.openxmlformats.org/presentationml/2006/main">
+  <p:cSld>
+    <p:bg>
+      <p:bgPr>
+        <a:gradFill>
+          <a:gsLst>
+            <a:gs pos="0">
+              <a:srgbClr val="A3C5ED"/>
+            </a:gs>
+            <a:gs pos="74000">
+              <a:srgbClr val="72C4E9"/>
+            </a:gs>
+            <a:gs pos="83000">
+              <a:srgbClr val="72C4E9"/>
+            </a:gs>
+            <a:gs pos="100000">
+              <a:srgbClr val="A1D6F0"/>
+            </a:gs>
+          </a:gsLst>
+          <a:lin ang="5400000" scaled="0"/>
+        </a:gradFill>
+        <a:effectLst/>
+      </p:bgPr>
+    </p:bg>
+    <p:spTree>
+      <p:nvGrpSpPr>
         <p:cNvPr id="1" name="Shape 171"/>
         <p:cNvGrpSpPr/>
         <p:nvPr/>
@@ -13218,15 +14715,15 @@
               <a:buNone/>
             </a:pPr>
             <a:r>
-              <a:rPr lang="hu-HU" sz="4400">
+              <a:rPr lang="hu-HU" sz="4400" dirty="0">
                 <a:latin typeface="Cambria"/>
                 <a:ea typeface="Cambria"/>
                 <a:cs typeface="Cambria"/>
                 <a:sym typeface="Cambria"/>
               </a:rPr>
-              <a:t>Tesztelés és minőségbiztosítás</a:t>
-            </a:r>
-            <a:endParaRPr/>
+              <a:t>Tesztelés</a:t>
+            </a:r>
+            <a:endParaRPr dirty="0"/>
           </a:p>
         </p:txBody>
       </p:sp>
@@ -13238,7 +14735,7 @@
         </p:nvSpPr>
         <p:spPr>
           <a:xfrm>
-            <a:off x="1291479" y="1983980"/>
+            <a:off x="1520079" y="2274600"/>
             <a:ext cx="6777900" cy="2308800"/>
           </a:xfrm>
           <a:prstGeom prst="rect">
@@ -13265,7 +14762,7 @@
               <a:buNone/>
             </a:pPr>
             <a:r>
-              <a:rPr lang="hu-HU" sz="1800">
+              <a:rPr lang="hu-HU" sz="1800" b="1" dirty="0">
                 <a:solidFill>
                   <a:schemeClr val="dk1"/>
                 </a:solidFill>
@@ -13274,38 +14771,10 @@
                 <a:cs typeface="Arial"/>
                 <a:sym typeface="Arial"/>
               </a:rPr>
-              <a:t>Frontend TypeScript tesztek pozitív és negatív tesztek</a:t>
-            </a:r>
-            <a:endParaRPr/>
-          </a:p>
-          <a:p>
-            <a:pPr marL="0" marR="0" lvl="0" indent="0" algn="l" rtl="0">
-              <a:spcBef>
-                <a:spcPts val="0"/>
-              </a:spcBef>
-              <a:spcAft>
-                <a:spcPts val="0"/>
-              </a:spcAft>
-              <a:buNone/>
-            </a:pPr>
-            <a:endParaRPr sz="1800">
-              <a:solidFill>
-                <a:schemeClr val="dk1"/>
-              </a:solidFill>
-            </a:endParaRPr>
-          </a:p>
-          <a:p>
-            <a:pPr marL="0" marR="0" lvl="0" indent="0" algn="l" rtl="0">
-              <a:spcBef>
-                <a:spcPts val="0"/>
-              </a:spcBef>
-              <a:spcAft>
-                <a:spcPts val="0"/>
-              </a:spcAft>
-              <a:buNone/>
-            </a:pPr>
-            <a:r>
-              <a:rPr lang="hu-HU" sz="1800">
+              <a:t>Frontend:</a:t>
+            </a:r>
+            <a:r>
+              <a:rPr lang="hu-HU" sz="1800" dirty="0">
                 <a:solidFill>
                   <a:schemeClr val="dk1"/>
                 </a:solidFill>
@@ -13314,9 +14783,33 @@
                 <a:cs typeface="Arial"/>
                 <a:sym typeface="Arial"/>
               </a:rPr>
-              <a:t>Backend API tesztelés Postmannel</a:t>
-            </a:r>
-            <a:endParaRPr/>
+              <a:t> </a:t>
+            </a:r>
+            <a:r>
+              <a:rPr lang="hu-HU" sz="1800" dirty="0" err="1">
+                <a:solidFill>
+                  <a:schemeClr val="dk1"/>
+                </a:solidFill>
+                <a:latin typeface="Arial"/>
+                <a:ea typeface="Arial"/>
+                <a:cs typeface="Arial"/>
+                <a:sym typeface="Arial"/>
+              </a:rPr>
+              <a:t>TypeScript</a:t>
+            </a:r>
+            <a:r>
+              <a:rPr lang="hu-HU" sz="1800" dirty="0">
+                <a:solidFill>
+                  <a:schemeClr val="dk1"/>
+                </a:solidFill>
+                <a:latin typeface="Arial"/>
+                <a:ea typeface="Arial"/>
+                <a:cs typeface="Arial"/>
+                <a:sym typeface="Arial"/>
+              </a:rPr>
+              <a:t> tesztek pozitív és negatív tesztek</a:t>
+            </a:r>
+            <a:endParaRPr dirty="0"/>
           </a:p>
           <a:p>
             <a:pPr marL="0" marR="0" lvl="0" indent="0" algn="l" rtl="0">
@@ -13328,7 +14821,7 @@
               </a:spcAft>
               <a:buNone/>
             </a:pPr>
-            <a:endParaRPr sz="1800">
+            <a:endParaRPr sz="1800" dirty="0">
               <a:solidFill>
                 <a:schemeClr val="dk1"/>
               </a:solidFill>
@@ -13345,7 +14838,59 @@
               <a:buNone/>
             </a:pPr>
             <a:r>
-              <a:rPr lang="hu-HU" sz="1800">
+              <a:rPr lang="hu-HU" sz="1800" b="1" dirty="0">
+                <a:solidFill>
+                  <a:schemeClr val="dk1"/>
+                </a:solidFill>
+                <a:latin typeface="Arial"/>
+                <a:ea typeface="Arial"/>
+                <a:cs typeface="Arial"/>
+                <a:sym typeface="Arial"/>
+              </a:rPr>
+              <a:t>Backend: </a:t>
+            </a:r>
+            <a:r>
+              <a:rPr lang="hu-HU" sz="1800" dirty="0">
+                <a:solidFill>
+                  <a:schemeClr val="dk1"/>
+                </a:solidFill>
+                <a:latin typeface="Arial"/>
+                <a:ea typeface="Arial"/>
+                <a:cs typeface="Arial"/>
+                <a:sym typeface="Arial"/>
+              </a:rPr>
+              <a:t>API tesztelés Postmannel</a:t>
+            </a:r>
+            <a:endParaRPr dirty="0"/>
+          </a:p>
+          <a:p>
+            <a:pPr marL="0" marR="0" lvl="0" indent="0" algn="l" rtl="0">
+              <a:spcBef>
+                <a:spcPts val="0"/>
+              </a:spcBef>
+              <a:spcAft>
+                <a:spcPts val="0"/>
+              </a:spcAft>
+              <a:buNone/>
+            </a:pPr>
+            <a:endParaRPr sz="1800" dirty="0">
+              <a:solidFill>
+                <a:schemeClr val="dk1"/>
+              </a:solidFill>
+            </a:endParaRPr>
+          </a:p>
+          <a:p>
+            <a:pPr marL="0" marR="0" lvl="0" indent="0" algn="l" rtl="0">
+              <a:spcBef>
+                <a:spcPts val="0"/>
+              </a:spcBef>
+              <a:spcAft>
+                <a:spcPts val="0"/>
+              </a:spcAft>
+              <a:buNone/>
+            </a:pPr>
+            <a:r>
+              <a:rPr lang="hu-HU" sz="1800" dirty="0">
                 <a:solidFill>
                   <a:schemeClr val="dk1"/>
                 </a:solidFill>
@@ -13356,7 +14901,7 @@
               </a:rPr>
               <a:t>Pozitív és negatív esetek ellenőrzése</a:t>
             </a:r>
-            <a:endParaRPr/>
+            <a:endParaRPr dirty="0"/>
           </a:p>
           <a:p>
             <a:pPr marL="0" marR="0" lvl="0" indent="0" algn="l" rtl="0">
@@ -13368,7 +14913,7 @@
               </a:spcAft>
               <a:buNone/>
             </a:pPr>
-            <a:endParaRPr sz="1800">
+            <a:endParaRPr sz="1800" dirty="0">
               <a:solidFill>
                 <a:schemeClr val="dk1"/>
               </a:solidFill>
@@ -13385,7 +14930,7 @@
               <a:buNone/>
             </a:pPr>
             <a:r>
-              <a:rPr lang="hu-HU" sz="1800">
+              <a:rPr lang="hu-HU" sz="1800" dirty="0">
                 <a:solidFill>
                   <a:schemeClr val="dk1"/>
                 </a:solidFill>
@@ -13396,7 +14941,7 @@
               </a:rPr>
               <a:t>Cél: stabil működés és hibák korai kiszűrése</a:t>
             </a:r>
-            <a:endParaRPr/>
+            <a:endParaRPr dirty="0"/>
           </a:p>
           <a:p>
             <a:pPr marL="0" marR="0" lvl="0" indent="0" algn="l" rtl="0">
@@ -13408,7 +14953,7 @@
               </a:spcAft>
               <a:buNone/>
             </a:pPr>
-            <a:endParaRPr sz="1800">
+            <a:endParaRPr sz="1800" dirty="0">
               <a:solidFill>
                 <a:schemeClr val="dk1"/>
               </a:solidFill>
@@ -13449,6 +14994,64 @@
           </a:prstGeom>
         </p:spPr>
       </p:pic>
+      <p:pic>
+        <p:nvPicPr>
+          <p:cNvPr id="4" name="Kép 3">
+            <a:extLst>
+              <a:ext uri="{FF2B5EF4-FFF2-40B4-BE49-F238E27FC236}">
+                <a16:creationId xmlns:a16="http://schemas.microsoft.com/office/drawing/2014/main" id="{4BE8C11D-ABCB-AD67-494E-6C26538EC1EF}"/>
+              </a:ext>
+            </a:extLst>
+          </p:cNvPr>
+          <p:cNvPicPr>
+            <a:picLocks noChangeAspect="1"/>
+          </p:cNvPicPr>
+          <p:nvPr/>
+        </p:nvPicPr>
+        <p:blipFill>
+          <a:blip r:embed="rId4"/>
+          <a:srcRect/>
+          <a:stretch/>
+        </p:blipFill>
+        <p:spPr>
+          <a:xfrm>
+            <a:off x="9489371" y="3857626"/>
+            <a:ext cx="1829864" cy="1829864"/>
+          </a:xfrm>
+          <a:prstGeom prst="rect">
+            <a:avLst/>
+          </a:prstGeom>
+        </p:spPr>
+      </p:pic>
+      <p:pic>
+        <p:nvPicPr>
+          <p:cNvPr id="6" name="Kép 5">
+            <a:extLst>
+              <a:ext uri="{FF2B5EF4-FFF2-40B4-BE49-F238E27FC236}">
+                <a16:creationId xmlns:a16="http://schemas.microsoft.com/office/drawing/2014/main" id="{1986AE4E-E05B-3DF2-C1AB-9899B9A8274C}"/>
+              </a:ext>
+            </a:extLst>
+          </p:cNvPr>
+          <p:cNvPicPr>
+            <a:picLocks noChangeAspect="1"/>
+          </p:cNvPicPr>
+          <p:nvPr/>
+        </p:nvPicPr>
+        <p:blipFill>
+          <a:blip r:embed="rId5"/>
+          <a:srcRect/>
+          <a:stretch/>
+        </p:blipFill>
+        <p:spPr>
+          <a:xfrm>
+            <a:off x="9489371" y="1538070"/>
+            <a:ext cx="1670573" cy="1892261"/>
+          </a:xfrm>
+          <a:prstGeom prst="rect">
+            <a:avLst/>
+          </a:prstGeom>
+        </p:spPr>
+      </p:pic>
     </p:spTree>
   </p:cSld>
   <p:clrMapOvr>
@@ -13469,7 +15072,7 @@
 </p:sld>
 </file>
 
-<file path=ppt/slides/slide11.xml><?xml version="1.0" encoding="utf-8"?>
+<file path=ppt/slides/slide12.xml><?xml version="1.0" encoding="utf-8"?>
 <p:sld xmlns:a="http://schemas.openxmlformats.org/drawingml/2006/main" xmlns:r="http://schemas.openxmlformats.org/officeDocument/2006/relationships" xmlns:p="http://schemas.openxmlformats.org/presentationml/2006/main">
   <p:cSld>
     <p:bg>
@@ -13785,6 +15388,122 @@
           </a:p>
         </p:txBody>
       </p:sp>
+      <p:pic>
+        <p:nvPicPr>
+          <p:cNvPr id="3" name="Kép 2">
+            <a:extLst>
+              <a:ext uri="{FF2B5EF4-FFF2-40B4-BE49-F238E27FC236}">
+                <a16:creationId xmlns:a16="http://schemas.microsoft.com/office/drawing/2014/main" id="{32FD08B5-7A42-9156-76EE-A85EACDFFE7D}"/>
+              </a:ext>
+            </a:extLst>
+          </p:cNvPr>
+          <p:cNvPicPr>
+            <a:picLocks noChangeAspect="1"/>
+          </p:cNvPicPr>
+          <p:nvPr/>
+        </p:nvPicPr>
+        <p:blipFill>
+          <a:blip r:embed="rId3"/>
+          <a:srcRect t="345" b="345"/>
+          <a:stretch/>
+        </p:blipFill>
+        <p:spPr>
+          <a:xfrm>
+            <a:off x="8565083" y="1556073"/>
+            <a:ext cx="2696838" cy="2678252"/>
+          </a:xfrm>
+          <a:prstGeom prst="rect">
+            <a:avLst/>
+          </a:prstGeom>
+        </p:spPr>
+      </p:pic>
+      <p:pic>
+        <p:nvPicPr>
+          <p:cNvPr id="5" name="Kép 4">
+            <a:extLst>
+              <a:ext uri="{FF2B5EF4-FFF2-40B4-BE49-F238E27FC236}">
+                <a16:creationId xmlns:a16="http://schemas.microsoft.com/office/drawing/2014/main" id="{23ACE7F7-D201-D52C-68D5-69DA9EE2533F}"/>
+              </a:ext>
+            </a:extLst>
+          </p:cNvPr>
+          <p:cNvPicPr>
+            <a:picLocks noChangeAspect="1"/>
+          </p:cNvPicPr>
+          <p:nvPr/>
+        </p:nvPicPr>
+        <p:blipFill>
+          <a:blip r:embed="rId4"/>
+          <a:srcRect/>
+          <a:stretch/>
+        </p:blipFill>
+        <p:spPr>
+          <a:xfrm>
+            <a:off x="3270896" y="4174295"/>
+            <a:ext cx="1998785" cy="1998785"/>
+          </a:xfrm>
+          <a:prstGeom prst="rect">
+            <a:avLst/>
+          </a:prstGeom>
+        </p:spPr>
+      </p:pic>
+      <p:pic>
+        <p:nvPicPr>
+          <p:cNvPr id="7" name="Kép 6">
+            <a:extLst>
+              <a:ext uri="{FF2B5EF4-FFF2-40B4-BE49-F238E27FC236}">
+                <a16:creationId xmlns:a16="http://schemas.microsoft.com/office/drawing/2014/main" id="{D77C569F-51E7-248F-140C-C2C7D950D85C}"/>
+              </a:ext>
+            </a:extLst>
+          </p:cNvPr>
+          <p:cNvPicPr>
+            <a:picLocks noChangeAspect="1"/>
+          </p:cNvPicPr>
+          <p:nvPr/>
+        </p:nvPicPr>
+        <p:blipFill>
+          <a:blip r:embed="rId5"/>
+          <a:srcRect/>
+          <a:stretch/>
+        </p:blipFill>
+        <p:spPr>
+          <a:xfrm>
+            <a:off x="6438052" y="3467013"/>
+            <a:ext cx="1534624" cy="1534624"/>
+          </a:xfrm>
+          <a:prstGeom prst="rect">
+            <a:avLst/>
+          </a:prstGeom>
+        </p:spPr>
+      </p:pic>
+      <p:pic>
+        <p:nvPicPr>
+          <p:cNvPr id="9" name="Kép 8">
+            <a:extLst>
+              <a:ext uri="{FF2B5EF4-FFF2-40B4-BE49-F238E27FC236}">
+                <a16:creationId xmlns:a16="http://schemas.microsoft.com/office/drawing/2014/main" id="{93D3B566-02E0-8135-75EC-6F16C95533DB}"/>
+              </a:ext>
+            </a:extLst>
+          </p:cNvPr>
+          <p:cNvPicPr>
+            <a:picLocks noChangeAspect="1"/>
+          </p:cNvPicPr>
+          <p:nvPr/>
+        </p:nvPicPr>
+        <p:blipFill>
+          <a:blip r:embed="rId6"/>
+          <a:srcRect/>
+          <a:stretch/>
+        </p:blipFill>
+        <p:spPr>
+          <a:xfrm>
+            <a:off x="8438343" y="4502750"/>
+            <a:ext cx="2143125" cy="2143125"/>
+          </a:xfrm>
+          <a:prstGeom prst="rect">
+            <a:avLst/>
+          </a:prstGeom>
+        </p:spPr>
+      </p:pic>
     </p:spTree>
   </p:cSld>
   <p:clrMapOvr>
@@ -13805,7 +15524,7 @@
 </p:sld>
 </file>
 
-<file path=ppt/slides/slide12.xml><?xml version="1.0" encoding="utf-8"?>
+<file path=ppt/slides/slide13.xml><?xml version="1.0" encoding="utf-8"?>
 <p:sld xmlns:a="http://schemas.openxmlformats.org/drawingml/2006/main" xmlns:r="http://schemas.openxmlformats.org/officeDocument/2006/relationships" xmlns:p="http://schemas.openxmlformats.org/presentationml/2006/main">
   <p:cSld>
     <p:bg>
@@ -13844,6 +15563,88 @@
           <a:chExt cx="0" cy="0"/>
         </a:xfrm>
       </p:grpSpPr>
+      <p:pic>
+        <p:nvPicPr>
+          <p:cNvPr id="7" name="Kép 6">
+            <a:extLst>
+              <a:ext uri="{FF2B5EF4-FFF2-40B4-BE49-F238E27FC236}">
+                <a16:creationId xmlns:a16="http://schemas.microsoft.com/office/drawing/2014/main" id="{D5D502B9-1114-96F0-137A-8AF8CA8069BB}"/>
+              </a:ext>
+            </a:extLst>
+          </p:cNvPr>
+          <p:cNvPicPr>
+            <a:picLocks noChangeAspect="1"/>
+          </p:cNvPicPr>
+          <p:nvPr/>
+        </p:nvPicPr>
+        <p:blipFill>
+          <a:blip r:embed="rId3"/>
+          <a:stretch>
+            <a:fillRect/>
+          </a:stretch>
+        </p:blipFill>
+        <p:spPr>
+          <a:xfrm>
+            <a:off x="9785451" y="363285"/>
+            <a:ext cx="2113472" cy="4167199"/>
+          </a:xfrm>
+          <a:prstGeom prst="rect">
+            <a:avLst/>
+          </a:prstGeom>
+        </p:spPr>
+      </p:pic>
+      <p:sp>
+        <p:nvSpPr>
+          <p:cNvPr id="2" name="Google Shape;185;p11">
+            <a:extLst>
+              <a:ext uri="{FF2B5EF4-FFF2-40B4-BE49-F238E27FC236}">
+                <a16:creationId xmlns:a16="http://schemas.microsoft.com/office/drawing/2014/main" id="{59FB9058-B16B-62FF-42D3-15B1E3A50903}"/>
+              </a:ext>
+            </a:extLst>
+          </p:cNvPr>
+          <p:cNvSpPr/>
+          <p:nvPr/>
+        </p:nvSpPr>
+        <p:spPr>
+          <a:xfrm>
+            <a:off x="10445700" y="4265855"/>
+            <a:ext cx="3492600" cy="4823100"/>
+          </a:xfrm>
+          <a:prstGeom prst="ellipse">
+            <a:avLst/>
+          </a:prstGeom>
+          <a:solidFill>
+            <a:srgbClr val="4A86E8"/>
+          </a:solidFill>
+          <a:ln w="9525" cap="flat" cmpd="sng">
+            <a:solidFill>
+              <a:srgbClr val="CFE2F3"/>
+            </a:solidFill>
+            <a:prstDash val="solid"/>
+            <a:round/>
+            <a:headEnd type="none" w="sm" len="sm"/>
+            <a:tailEnd type="none" w="sm" len="sm"/>
+          </a:ln>
+        </p:spPr>
+        <p:txBody>
+          <a:bodyPr spcFirstLastPara="1" wrap="square" lIns="91425" tIns="91425" rIns="91425" bIns="91425" anchor="ctr" anchorCtr="0">
+            <a:noAutofit/>
+          </a:bodyPr>
+          <a:lstStyle/>
+          <a:p>
+            <a:pPr marL="0" lvl="0" indent="0" algn="ctr" rtl="0">
+              <a:spcBef>
+                <a:spcPts val="0"/>
+              </a:spcBef>
+              <a:spcAft>
+                <a:spcPts val="0"/>
+              </a:spcAft>
+              <a:buNone/>
+            </a:pPr>
+            <a:endParaRPr/>
+          </a:p>
+        </p:txBody>
+      </p:sp>
       <p:sp>
         <p:nvSpPr>
           <p:cNvPr id="3" name="Google Shape;186;p11">
@@ -13958,10 +15759,10 @@
       </p:sp>
       <p:sp>
         <p:nvSpPr>
-          <p:cNvPr id="2" name="Google Shape;185;p11">
+          <p:cNvPr id="4" name="Téglalap 3">
             <a:extLst>
               <a:ext uri="{FF2B5EF4-FFF2-40B4-BE49-F238E27FC236}">
-                <a16:creationId xmlns:a16="http://schemas.microsoft.com/office/drawing/2014/main" id="{59FB9058-B16B-62FF-42D3-15B1E3A50903}"/>
+                <a16:creationId xmlns:a16="http://schemas.microsoft.com/office/drawing/2014/main" id="{E884CCC8-F38A-918E-2031-3A469699B264}"/>
               </a:ext>
             </a:extLst>
           </p:cNvPr>
@@ -13970,56 +15771,185 @@
         </p:nvSpPr>
         <p:spPr>
           <a:xfrm>
-            <a:off x="10445700" y="4265855"/>
-            <a:ext cx="3492600" cy="4823100"/>
+            <a:off x="621323" y="2446885"/>
+            <a:ext cx="5154930" cy="2686050"/>
           </a:xfrm>
-          <a:prstGeom prst="ellipse">
+          <a:prstGeom prst="rect">
             <a:avLst/>
           </a:prstGeom>
-          <a:solidFill>
-            <a:srgbClr val="4A86E8"/>
-          </a:solidFill>
-          <a:ln w="9525" cap="flat" cmpd="sng">
+          <a:ln>
             <a:solidFill>
-              <a:srgbClr val="CFE2F3"/>
+              <a:schemeClr val="accent1">
+                <a:shade val="15000"/>
+              </a:schemeClr>
             </a:solidFill>
-            <a:prstDash val="solid"/>
-            <a:round/>
-            <a:headEnd type="none" w="sm" len="sm"/>
-            <a:tailEnd type="none" w="sm" len="sm"/>
           </a:ln>
+          <a:effectLst>
+            <a:outerShdw blurRad="139700" dist="50800" dir="5400000" algn="ctr" rotWithShape="0">
+              <a:srgbClr val="000000"/>
+            </a:outerShdw>
+          </a:effectLst>
+        </p:spPr>
+        <p:style>
+          <a:lnRef idx="2">
+            <a:schemeClr val="accent1">
+              <a:shade val="15000"/>
+            </a:schemeClr>
+          </a:lnRef>
+          <a:fillRef idx="1">
+            <a:schemeClr val="accent1"/>
+          </a:fillRef>
+          <a:effectRef idx="0">
+            <a:schemeClr val="accent1"/>
+          </a:effectRef>
+          <a:fontRef idx="minor">
+            <a:schemeClr val="lt1"/>
+          </a:fontRef>
+        </p:style>
+        <p:txBody>
+          <a:bodyPr rtlCol="0" anchor="ctr"/>
+          <a:lstStyle/>
+          <a:p>
+            <a:pPr algn="ctr"/>
+            <a:endParaRPr lang="hu-HU" dirty="0"/>
+          </a:p>
+        </p:txBody>
+      </p:sp>
+      <p:sp>
+        <p:nvSpPr>
+          <p:cNvPr id="5" name="Szövegdoboz 4">
+            <a:extLst>
+              <a:ext uri="{FF2B5EF4-FFF2-40B4-BE49-F238E27FC236}">
+                <a16:creationId xmlns:a16="http://schemas.microsoft.com/office/drawing/2014/main" id="{5070E45E-AE58-19F9-F366-069C291D09D9}"/>
+              </a:ext>
+            </a:extLst>
+          </p:cNvPr>
+          <p:cNvSpPr txBox="1"/>
+          <p:nvPr/>
+        </p:nvSpPr>
+        <p:spPr>
+          <a:xfrm>
+            <a:off x="848592" y="2872460"/>
+            <a:ext cx="5036393" cy="1658024"/>
+          </a:xfrm>
+          <a:prstGeom prst="rect">
+            <a:avLst/>
+          </a:prstGeom>
+          <a:noFill/>
         </p:spPr>
         <p:txBody>
-          <a:bodyPr spcFirstLastPara="1" wrap="square" lIns="91425" tIns="91425" rIns="91425" bIns="91425" anchor="ctr" anchorCtr="0">
-            <a:noAutofit/>
+          <a:bodyPr wrap="square" rtlCol="0">
+            <a:spAutoFit/>
           </a:bodyPr>
           <a:lstStyle/>
           <a:p>
-            <a:pPr marL="0" lvl="0" indent="0" algn="ctr" rtl="0">
-              <a:spcBef>
-                <a:spcPts val="0"/>
-              </a:spcBef>
-              <a:spcAft>
-                <a:spcPts val="0"/>
-              </a:spcAft>
-              <a:buNone/>
+            <a:pPr marL="285750" indent="-285750">
+              <a:buFont typeface="Courier New" panose="02070309020205020404" pitchFamily="49" charset="0"/>
+              <a:buChar char="o"/>
             </a:pPr>
-            <a:endParaRPr/>
+            <a:r>
+              <a:rPr lang="hu-HU" sz="2800" dirty="0">
+                <a:solidFill>
+                  <a:schemeClr val="bg1"/>
+                </a:solidFill>
+                <a:latin typeface="Cambria" panose="02040503050406030204" pitchFamily="18" charset="0"/>
+                <a:ea typeface="Cambria" panose="02040503050406030204" pitchFamily="18" charset="0"/>
+              </a:rPr>
+              <a:t>Mobilos alkalmazás</a:t>
+            </a:r>
+          </a:p>
+          <a:p>
+            <a:pPr marL="285750" indent="-285750">
+              <a:buFont typeface="Courier New" panose="02070309020205020404" pitchFamily="49" charset="0"/>
+              <a:buChar char="o"/>
+            </a:pPr>
+            <a:r>
+              <a:rPr lang="hu-HU" sz="2800" dirty="0">
+                <a:solidFill>
+                  <a:schemeClr val="bg1"/>
+                </a:solidFill>
+                <a:latin typeface="Cambria" panose="02040503050406030204" pitchFamily="18" charset="0"/>
+                <a:ea typeface="Cambria" panose="02040503050406030204" pitchFamily="18" charset="0"/>
+              </a:rPr>
+              <a:t>Értesítő rendszer</a:t>
+            </a:r>
+          </a:p>
+          <a:p>
+            <a:pPr marL="285750" indent="-285750">
+              <a:buFont typeface="Courier New" panose="02070309020205020404" pitchFamily="49" charset="0"/>
+              <a:buChar char="o"/>
+            </a:pPr>
+            <a:r>
+              <a:rPr lang="hu-HU" sz="2800" dirty="0">
+                <a:solidFill>
+                  <a:schemeClr val="bg1"/>
+                </a:solidFill>
+                <a:latin typeface="Cambria" panose="02040503050406030204" pitchFamily="18" charset="0"/>
+                <a:ea typeface="Cambria" panose="02040503050406030204" pitchFamily="18" charset="0"/>
+              </a:rPr>
+              <a:t>Online vásárlás</a:t>
+            </a:r>
+          </a:p>
+          <a:p>
+            <a:endParaRPr lang="hu-HU" dirty="0"/>
           </a:p>
         </p:txBody>
       </p:sp>
+      <p:pic>
+        <p:nvPicPr>
+          <p:cNvPr id="9" name="Kép 8">
+            <a:extLst>
+              <a:ext uri="{FF2B5EF4-FFF2-40B4-BE49-F238E27FC236}">
+                <a16:creationId xmlns:a16="http://schemas.microsoft.com/office/drawing/2014/main" id="{9B18EEF8-EFE1-B675-104E-DC6B6D2D45B4}"/>
+              </a:ext>
+            </a:extLst>
+          </p:cNvPr>
+          <p:cNvPicPr>
+            <a:picLocks noChangeAspect="1"/>
+          </p:cNvPicPr>
+          <p:nvPr/>
+        </p:nvPicPr>
+        <p:blipFill>
+          <a:blip r:embed="rId4"/>
+          <a:stretch>
+            <a:fillRect/>
+          </a:stretch>
+        </p:blipFill>
+        <p:spPr>
+          <a:xfrm>
+            <a:off x="7324730" y="4717636"/>
+            <a:ext cx="3603423" cy="1000238"/>
+          </a:xfrm>
+          <a:prstGeom prst="roundRect">
+            <a:avLst>
+              <a:gd name="adj" fmla="val 8594"/>
+            </a:avLst>
+          </a:prstGeom>
+          <a:solidFill>
+            <a:srgbClr val="FFFFFF">
+              <a:shade val="85000"/>
+            </a:srgbClr>
+          </a:solidFill>
+          <a:ln>
+            <a:noFill/>
+          </a:ln>
+          <a:effectLst>
+            <a:reflection blurRad="12700" stA="38000" endPos="28000" dist="5000" dir="5400000" sy="-100000" algn="bl" rotWithShape="0"/>
+          </a:effectLst>
+        </p:spPr>
+      </p:pic>
     </p:spTree>
   </p:cSld>
   <p:clrMapOvr>
     <a:masterClrMapping/>
   </p:clrMapOvr>
-  <mc:AlternateContent xmlns:mc="http://schemas.openxmlformats.org/markup-compatibility/2006">
-    <mc:Choice xmlns:p159="http://schemas.microsoft.com/office/powerpoint/2015/09/main" Requires="p159">
+  <mc:AlternateContent xmlns:mc="http://schemas.openxmlformats.org/markup-compatibility/2006" xmlns:p159="http://schemas.microsoft.com/office/powerpoint/2015/09/main">
+    <mc:Choice Requires="p159">
       <p:transition xmlns:p14="http://schemas.microsoft.com/office/powerpoint/2010/main" spd="slow" p14:dur="2000">
         <p159:morph option="byObject"/>
       </p:transition>
     </mc:Choice>
-    <mc:Fallback>
+    <mc:Fallback xmlns="">
       <p:transition spd="slow">
         <p:fade/>
       </p:transition>
@@ -14028,7 +15958,7 @@
 </p:sld>
 </file>
 
-<file path=ppt/slides/slide13.xml><?xml version="1.0" encoding="utf-8"?>
+<file path=ppt/slides/slide14.xml><?xml version="1.0" encoding="utf-8"?>
 <p:sld xmlns:a="http://schemas.openxmlformats.org/drawingml/2006/main" xmlns:r="http://schemas.openxmlformats.org/officeDocument/2006/relationships" xmlns:p="http://schemas.openxmlformats.org/presentationml/2006/main">
   <p:cSld>
     <p:bg>
@@ -14069,6 +15999,52 @@
       </p:grpSpPr>
       <p:sp>
         <p:nvSpPr>
+          <p:cNvPr id="2" name="Téglalap 1">
+            <a:extLst>
+              <a:ext uri="{FF2B5EF4-FFF2-40B4-BE49-F238E27FC236}">
+                <a16:creationId xmlns:a16="http://schemas.microsoft.com/office/drawing/2014/main" id="{0090FA25-CD5A-C010-3B50-EEB51A3D6401}"/>
+              </a:ext>
+            </a:extLst>
+          </p:cNvPr>
+          <p:cNvSpPr/>
+          <p:nvPr/>
+        </p:nvSpPr>
+        <p:spPr>
+          <a:xfrm rot="16200000">
+            <a:off x="485515" y="-674370"/>
+            <a:ext cx="4227151" cy="2832691"/>
+          </a:xfrm>
+          <a:prstGeom prst="rect">
+            <a:avLst/>
+          </a:prstGeom>
+        </p:spPr>
+        <p:style>
+          <a:lnRef idx="2">
+            <a:schemeClr val="accent1">
+              <a:shade val="15000"/>
+            </a:schemeClr>
+          </a:lnRef>
+          <a:fillRef idx="1">
+            <a:schemeClr val="accent1"/>
+          </a:fillRef>
+          <a:effectRef idx="0">
+            <a:schemeClr val="accent1"/>
+          </a:effectRef>
+          <a:fontRef idx="minor">
+            <a:schemeClr val="lt1"/>
+          </a:fontRef>
+        </p:style>
+        <p:txBody>
+          <a:bodyPr rtlCol="0" anchor="ctr"/>
+          <a:lstStyle/>
+          <a:p>
+            <a:pPr algn="ctr"/>
+            <a:endParaRPr lang="hu-HU" dirty="0"/>
+          </a:p>
+        </p:txBody>
+      </p:sp>
+      <p:sp>
+        <p:nvSpPr>
           <p:cNvPr id="196" name="Google Shape;196;p13"/>
           <p:cNvSpPr txBox="1">
             <a:spLocks noGrp="1"/>
@@ -14131,13 +16107,13 @@
   <p:clrMapOvr>
     <a:masterClrMapping/>
   </p:clrMapOvr>
-  <mc:AlternateContent xmlns:mc="http://schemas.openxmlformats.org/markup-compatibility/2006">
-    <mc:Choice xmlns:p159="http://schemas.microsoft.com/office/powerpoint/2015/09/main" Requires="p159">
+  <mc:AlternateContent xmlns:mc="http://schemas.openxmlformats.org/markup-compatibility/2006" xmlns:p159="http://schemas.microsoft.com/office/powerpoint/2015/09/main">
+    <mc:Choice Requires="p159">
       <p:transition xmlns:p14="http://schemas.microsoft.com/office/powerpoint/2010/main" spd="slow" p14:dur="2000">
         <p159:morph option="byObject"/>
       </p:transition>
     </mc:Choice>
-    <mc:Fallback>
+    <mc:Fallback xmlns="">
       <p:transition spd="slow">
         <p:fade/>
       </p:transition>
@@ -14146,7 +16122,7 @@
 </p:sld>
 </file>
 
-<file path=ppt/slides/slide14.xml><?xml version="1.0" encoding="utf-8"?>
+<file path=ppt/slides/slide15.xml><?xml version="1.0" encoding="utf-8"?>
 <p:sld xmlns:a="http://schemas.openxmlformats.org/drawingml/2006/main" xmlns:r="http://schemas.openxmlformats.org/officeDocument/2006/relationships" xmlns:p="http://schemas.openxmlformats.org/presentationml/2006/main">
   <p:cSld>
     <p:bg>
@@ -14349,13 +16325,13 @@
   <p:clrMapOvr>
     <a:masterClrMapping/>
   </p:clrMapOvr>
-  <mc:AlternateContent xmlns:mc="http://schemas.openxmlformats.org/markup-compatibility/2006">
-    <mc:Choice xmlns:p159="http://schemas.microsoft.com/office/powerpoint/2015/09/main" Requires="p159">
+  <mc:AlternateContent xmlns:mc="http://schemas.openxmlformats.org/markup-compatibility/2006" xmlns:p159="http://schemas.microsoft.com/office/powerpoint/2015/09/main">
+    <mc:Choice Requires="p159">
       <p:transition xmlns:p14="http://schemas.microsoft.com/office/powerpoint/2010/main" spd="slow" p14:dur="2000">
         <p159:morph option="byObject"/>
       </p:transition>
     </mc:Choice>
-    <mc:Fallback>
+    <mc:Fallback xmlns="">
       <p:transition spd="slow">
         <p:fade/>
       </p:transition>
@@ -15717,7 +17693,7 @@
               <a:buNone/>
             </a:pPr>
             <a:r>
-              <a:rPr lang="hu-HU" sz="1800" b="1">
+              <a:rPr lang="hu-HU" sz="1800" b="1" dirty="0">
                 <a:solidFill>
                   <a:schemeClr val="dk1"/>
                 </a:solidFill>
@@ -15725,7 +17701,7 @@
               <a:t>Frontend</a:t>
             </a:r>
             <a:r>
-              <a:rPr lang="hu-HU" sz="1800">
+              <a:rPr lang="hu-HU" sz="1800" dirty="0">
                 <a:solidFill>
                   <a:schemeClr val="dk1"/>
                 </a:solidFill>
@@ -15734,30 +17710,10 @@
                 <a:cs typeface="Arial"/>
                 <a:sym typeface="Arial"/>
               </a:rPr>
-              <a:t>: Vue 3 alapú kliensalkalmazás</a:t>
-            </a:r>
-            <a:endParaRPr/>
-          </a:p>
-          <a:p>
-            <a:pPr marL="0" marR="0" lvl="0" indent="0" algn="l" rtl="0">
-              <a:spcBef>
-                <a:spcPts val="0"/>
-              </a:spcBef>
-              <a:spcAft>
-                <a:spcPts val="0"/>
-              </a:spcAft>
-              <a:buNone/>
-            </a:pPr>
-            <a:r>
-              <a:rPr lang="hu-HU" sz="1800" b="1">
-                <a:solidFill>
-                  <a:schemeClr val="dk1"/>
-                </a:solidFill>
-              </a:rPr>
-              <a:t>Backend</a:t>
-            </a:r>
-            <a:r>
-              <a:rPr lang="hu-HU" sz="1800">
+              <a:t>: </a:t>
+            </a:r>
+            <a:r>
+              <a:rPr lang="hu-HU" sz="1800" dirty="0" err="1">
                 <a:solidFill>
                   <a:schemeClr val="dk1"/>
                 </a:solidFill>
@@ -15766,30 +17722,10 @@
                 <a:cs typeface="Arial"/>
                 <a:sym typeface="Arial"/>
               </a:rPr>
-              <a:t>: Laravel 12 REST API</a:t>
-            </a:r>
-            <a:endParaRPr/>
-          </a:p>
-          <a:p>
-            <a:pPr marL="0" marR="0" lvl="0" indent="0" algn="l" rtl="0">
-              <a:spcBef>
-                <a:spcPts val="0"/>
-              </a:spcBef>
-              <a:spcAft>
-                <a:spcPts val="0"/>
-              </a:spcAft>
-              <a:buNone/>
-            </a:pPr>
-            <a:r>
-              <a:rPr lang="hu-HU" sz="1800" b="1">
-                <a:solidFill>
-                  <a:schemeClr val="dk1"/>
-                </a:solidFill>
-              </a:rPr>
-              <a:t>Adatbázis</a:t>
-            </a:r>
-            <a:r>
-              <a:rPr lang="hu-HU" sz="1800">
+              <a:t>Vue</a:t>
+            </a:r>
+            <a:r>
+              <a:rPr lang="hu-HU" sz="1800" dirty="0">
                 <a:solidFill>
                   <a:schemeClr val="dk1"/>
                 </a:solidFill>
@@ -15798,9 +17734,109 @@
                 <a:cs typeface="Arial"/>
                 <a:sym typeface="Arial"/>
               </a:rPr>
-              <a:t>: MySQL</a:t>
-            </a:r>
-            <a:endParaRPr sz="1800">
+              <a:t> 3 alapú kliensalkalmazás</a:t>
+            </a:r>
+            <a:endParaRPr dirty="0"/>
+          </a:p>
+          <a:p>
+            <a:pPr marL="0" marR="0" lvl="0" indent="0" algn="l" rtl="0">
+              <a:spcBef>
+                <a:spcPts val="0"/>
+              </a:spcBef>
+              <a:spcAft>
+                <a:spcPts val="0"/>
+              </a:spcAft>
+              <a:buNone/>
+            </a:pPr>
+            <a:r>
+              <a:rPr lang="hu-HU" sz="1800" b="1" dirty="0">
+                <a:solidFill>
+                  <a:schemeClr val="dk1"/>
+                </a:solidFill>
+              </a:rPr>
+              <a:t>Backend</a:t>
+            </a:r>
+            <a:r>
+              <a:rPr lang="hu-HU" sz="1800" dirty="0">
+                <a:solidFill>
+                  <a:schemeClr val="dk1"/>
+                </a:solidFill>
+                <a:latin typeface="Arial"/>
+                <a:ea typeface="Arial"/>
+                <a:cs typeface="Arial"/>
+                <a:sym typeface="Arial"/>
+              </a:rPr>
+              <a:t>: </a:t>
+            </a:r>
+            <a:r>
+              <a:rPr lang="hu-HU" sz="1800" dirty="0" err="1">
+                <a:solidFill>
+                  <a:schemeClr val="dk1"/>
+                </a:solidFill>
+                <a:latin typeface="Arial"/>
+                <a:ea typeface="Arial"/>
+                <a:cs typeface="Arial"/>
+                <a:sym typeface="Arial"/>
+              </a:rPr>
+              <a:t>Laravel</a:t>
+            </a:r>
+            <a:r>
+              <a:rPr lang="hu-HU" sz="1800" dirty="0">
+                <a:solidFill>
+                  <a:schemeClr val="dk1"/>
+                </a:solidFill>
+                <a:latin typeface="Arial"/>
+                <a:ea typeface="Arial"/>
+                <a:cs typeface="Arial"/>
+                <a:sym typeface="Arial"/>
+              </a:rPr>
+              <a:t> 12 REST API</a:t>
+            </a:r>
+            <a:endParaRPr dirty="0"/>
+          </a:p>
+          <a:p>
+            <a:pPr marL="0" marR="0" lvl="0" indent="0" algn="l" rtl="0">
+              <a:spcBef>
+                <a:spcPts val="0"/>
+              </a:spcBef>
+              <a:spcAft>
+                <a:spcPts val="0"/>
+              </a:spcAft>
+              <a:buNone/>
+            </a:pPr>
+            <a:r>
+              <a:rPr lang="hu-HU" sz="1800" b="1" dirty="0">
+                <a:solidFill>
+                  <a:schemeClr val="dk1"/>
+                </a:solidFill>
+              </a:rPr>
+              <a:t>Adatbázis</a:t>
+            </a:r>
+            <a:r>
+              <a:rPr lang="hu-HU" sz="1800" dirty="0">
+                <a:solidFill>
+                  <a:schemeClr val="dk1"/>
+                </a:solidFill>
+                <a:latin typeface="Arial"/>
+                <a:ea typeface="Arial"/>
+                <a:cs typeface="Arial"/>
+                <a:sym typeface="Arial"/>
+              </a:rPr>
+              <a:t>: </a:t>
+            </a:r>
+            <a:r>
+              <a:rPr lang="hu-HU" sz="1800" dirty="0" err="1">
+                <a:solidFill>
+                  <a:schemeClr val="dk1"/>
+                </a:solidFill>
+                <a:latin typeface="Arial"/>
+                <a:ea typeface="Arial"/>
+                <a:cs typeface="Arial"/>
+                <a:sym typeface="Arial"/>
+              </a:rPr>
+              <a:t>MySQL</a:t>
+            </a:r>
+            <a:endParaRPr sz="1800" dirty="0">
               <a:solidFill>
                 <a:schemeClr val="dk1"/>
               </a:solidFill>
@@ -15821,7 +17857,7 @@
               <a:buNone/>
             </a:pPr>
             <a:r>
-              <a:rPr lang="hu-HU" sz="1800" b="1">
+              <a:rPr lang="hu-HU" sz="1800" b="1" dirty="0">
                 <a:solidFill>
                   <a:schemeClr val="dk1"/>
                 </a:solidFill>
@@ -15829,7 +17865,7 @@
               <a:t>Kommunikáció</a:t>
             </a:r>
             <a:r>
-              <a:rPr lang="hu-HU" sz="1800">
+              <a:rPr lang="hu-HU" sz="1800" dirty="0">
                 <a:solidFill>
                   <a:schemeClr val="dk1"/>
                 </a:solidFill>
@@ -15840,7 +17876,7 @@
               </a:rPr>
               <a:t>: HTTP API hívások</a:t>
             </a:r>
-            <a:endParaRPr/>
+            <a:endParaRPr dirty="0"/>
           </a:p>
           <a:p>
             <a:pPr marL="0" marR="0" lvl="0" indent="0" algn="l" rtl="0">
@@ -15853,7 +17889,7 @@
               <a:buNone/>
             </a:pPr>
             <a:r>
-              <a:rPr lang="hu-HU" sz="1800" b="1">
+              <a:rPr lang="hu-HU" sz="1800" b="1" dirty="0">
                 <a:solidFill>
                   <a:schemeClr val="dk1"/>
                 </a:solidFill>
@@ -15861,7 +17897,7 @@
               <a:t>Előny</a:t>
             </a:r>
             <a:r>
-              <a:rPr lang="hu-HU" sz="1800">
+              <a:rPr lang="hu-HU" sz="1800" dirty="0">
                 <a:solidFill>
                   <a:schemeClr val="dk1"/>
                 </a:solidFill>
@@ -15872,7 +17908,7 @@
               </a:rPr>
               <a:t>: a frontend és backend külön fejleszthető, bővíthető</a:t>
             </a:r>
-            <a:endParaRPr/>
+            <a:endParaRPr dirty="0"/>
           </a:p>
         </p:txBody>
       </p:sp>
@@ -16036,7 +18072,7 @@
     </p:bg>
     <p:spTree>
       <p:nvGrpSpPr>
-        <p:cNvPr id="1" name="Shape 123"/>
+        <p:cNvPr id="1" name="Shape 146"/>
         <p:cNvGrpSpPr/>
         <p:nvPr/>
       </p:nvGrpSpPr>
@@ -16050,99 +18086,7 @@
       </p:grpSpPr>
       <p:sp>
         <p:nvSpPr>
-          <p:cNvPr id="124" name="Google Shape;124;p5"/>
-          <p:cNvSpPr/>
-          <p:nvPr/>
-        </p:nvSpPr>
-        <p:spPr>
-          <a:xfrm>
-            <a:off x="5715725" y="1436574"/>
-            <a:ext cx="5272800" cy="4541400"/>
-          </a:xfrm>
-          <a:prstGeom prst="ellipse">
-            <a:avLst/>
-          </a:prstGeom>
-          <a:solidFill>
-            <a:srgbClr val="4A86E8"/>
-          </a:solidFill>
-          <a:ln w="9525" cap="flat" cmpd="sng">
-            <a:solidFill>
-              <a:srgbClr val="CFE2F3"/>
-            </a:solidFill>
-            <a:prstDash val="solid"/>
-            <a:round/>
-            <a:headEnd type="none" w="sm" len="sm"/>
-            <a:tailEnd type="none" w="sm" len="sm"/>
-          </a:ln>
-        </p:spPr>
-        <p:txBody>
-          <a:bodyPr spcFirstLastPara="1" wrap="square" lIns="91425" tIns="91425" rIns="91425" bIns="91425" anchor="ctr" anchorCtr="0">
-            <a:noAutofit/>
-          </a:bodyPr>
-          <a:lstStyle/>
-          <a:p>
-            <a:pPr marL="0" lvl="0" indent="0" algn="ctr" rtl="0">
-              <a:spcBef>
-                <a:spcPts val="0"/>
-              </a:spcBef>
-              <a:spcAft>
-                <a:spcPts val="0"/>
-              </a:spcAft>
-              <a:buNone/>
-            </a:pPr>
-            <a:endParaRPr/>
-          </a:p>
-        </p:txBody>
-      </p:sp>
-      <p:sp>
-        <p:nvSpPr>
-          <p:cNvPr id="125" name="Google Shape;125;p5"/>
-          <p:cNvSpPr/>
-          <p:nvPr/>
-        </p:nvSpPr>
-        <p:spPr>
-          <a:xfrm>
-            <a:off x="548325" y="1778700"/>
-            <a:ext cx="4968000" cy="3286200"/>
-          </a:xfrm>
-          <a:prstGeom prst="ellipse">
-            <a:avLst/>
-          </a:prstGeom>
-          <a:solidFill>
-            <a:srgbClr val="4A86E8"/>
-          </a:solidFill>
-          <a:ln w="9525" cap="flat" cmpd="sng">
-            <a:solidFill>
-              <a:srgbClr val="CFE2F3"/>
-            </a:solidFill>
-            <a:prstDash val="solid"/>
-            <a:round/>
-            <a:headEnd type="none" w="sm" len="sm"/>
-            <a:tailEnd type="none" w="sm" len="sm"/>
-          </a:ln>
-        </p:spPr>
-        <p:txBody>
-          <a:bodyPr spcFirstLastPara="1" wrap="square" lIns="91425" tIns="91425" rIns="91425" bIns="91425" anchor="ctr" anchorCtr="0">
-            <a:noAutofit/>
-          </a:bodyPr>
-          <a:lstStyle/>
-          <a:p>
-            <a:pPr marL="0" lvl="0" indent="0" algn="ctr" rtl="0">
-              <a:spcBef>
-                <a:spcPts val="0"/>
-              </a:spcBef>
-              <a:spcAft>
-                <a:spcPts val="0"/>
-              </a:spcAft>
-              <a:buNone/>
-            </a:pPr>
-            <a:endParaRPr/>
-          </a:p>
-        </p:txBody>
-      </p:sp>
-      <p:sp>
-        <p:nvSpPr>
-          <p:cNvPr id="126" name="Google Shape;126;p5"/>
+          <p:cNvPr id="147" name="Google Shape;147;p7"/>
           <p:cNvSpPr txBox="1">
             <a:spLocks noGrp="1"/>
           </p:cNvSpPr>
@@ -16187,28 +18131,28 @@
               <a:buNone/>
             </a:pPr>
             <a:r>
-              <a:rPr lang="hu-HU" sz="4400" dirty="0">
+              <a:rPr lang="hu-HU" sz="4400">
                 <a:latin typeface="Cambria"/>
                 <a:ea typeface="Cambria"/>
                 <a:cs typeface="Cambria"/>
                 <a:sym typeface="Cambria"/>
               </a:rPr>
-              <a:t>Backend architektúra és API</a:t>
-            </a:r>
-            <a:endParaRPr dirty="0"/>
+              <a:t>Frontend felépítés és navigáció</a:t>
+            </a:r>
+            <a:endParaRPr/>
           </a:p>
         </p:txBody>
       </p:sp>
       <p:sp>
         <p:nvSpPr>
-          <p:cNvPr id="128" name="Google Shape;128;p5"/>
+          <p:cNvPr id="149" name="Google Shape;149;p7"/>
           <p:cNvSpPr txBox="1"/>
           <p:nvPr/>
         </p:nvSpPr>
         <p:spPr>
           <a:xfrm>
-            <a:off x="1321138" y="2128809"/>
-            <a:ext cx="3940200" cy="2586000"/>
+            <a:off x="872762" y="2472571"/>
+            <a:ext cx="6509700" cy="3139281"/>
           </a:xfrm>
           <a:prstGeom prst="rect">
             <a:avLst/>
@@ -16239,6 +18183,18 @@
               <a:buChar char="•"/>
             </a:pPr>
             <a:r>
+              <a:rPr lang="hu-HU" sz="1800" dirty="0" err="1">
+                <a:solidFill>
+                  <a:schemeClr val="dk1"/>
+                </a:solidFill>
+                <a:latin typeface="Arial"/>
+                <a:ea typeface="Arial"/>
+                <a:cs typeface="Arial"/>
+                <a:sym typeface="Arial"/>
+              </a:rPr>
+              <a:t>Vue</a:t>
+            </a:r>
+            <a:r>
               <a:rPr lang="hu-HU" sz="1800" dirty="0">
                 <a:solidFill>
                   <a:schemeClr val="dk1"/>
@@ -16248,49 +18204,20 @@
                 <a:cs typeface="Arial"/>
                 <a:sym typeface="Arial"/>
               </a:rPr>
-              <a:t>Rétegelt backend felépítés</a:t>
-            </a:r>
-            <a:endParaRPr sz="1800" dirty="0">
-              <a:solidFill>
-                <a:schemeClr val="dk1"/>
-              </a:solidFill>
-              <a:latin typeface="Arial"/>
-              <a:ea typeface="Arial"/>
-              <a:cs typeface="Arial"/>
-              <a:sym typeface="Arial"/>
-            </a:endParaRPr>
-          </a:p>
-          <a:p>
-            <a:pPr marL="457200" marR="0" lvl="0" indent="0" algn="l" rtl="0">
-              <a:spcBef>
-                <a:spcPts val="0"/>
-              </a:spcBef>
-              <a:spcAft>
-                <a:spcPts val="0"/>
-              </a:spcAft>
-              <a:buNone/>
-            </a:pPr>
-            <a:endParaRPr sz="1800" dirty="0">
-              <a:solidFill>
-                <a:schemeClr val="dk1"/>
-              </a:solidFill>
-            </a:endParaRPr>
-          </a:p>
-          <a:p>
-            <a:pPr marL="285750" marR="0" lvl="0" indent="-285750" algn="l" rtl="0">
-              <a:spcBef>
-                <a:spcPts val="0"/>
-              </a:spcBef>
-              <a:spcAft>
-                <a:spcPts val="0"/>
-              </a:spcAft>
-              <a:buClr>
-                <a:schemeClr val="dk1"/>
-              </a:buClr>
-              <a:buSzPts val="1800"/>
-              <a:buFont typeface="Arial"/>
-              <a:buChar char="•"/>
-            </a:pPr>
+              <a:t> 3 SPA, </a:t>
+            </a:r>
+            <a:r>
+              <a:rPr lang="hu-HU" sz="1800" dirty="0" err="1">
+                <a:solidFill>
+                  <a:schemeClr val="dk1"/>
+                </a:solidFill>
+                <a:latin typeface="Arial"/>
+                <a:ea typeface="Arial"/>
+                <a:cs typeface="Arial"/>
+                <a:sym typeface="Arial"/>
+              </a:rPr>
+              <a:t>route</a:t>
+            </a:r>
             <a:r>
               <a:rPr lang="hu-HU" sz="1800" dirty="0">
                 <a:solidFill>
@@ -16301,29 +18228,9 @@
                 <a:cs typeface="Arial"/>
                 <a:sym typeface="Arial"/>
               </a:rPr>
-              <a:t>API modulonként szervezve</a:t>
-            </a:r>
-            <a:endParaRPr sz="1800" dirty="0">
-              <a:solidFill>
-                <a:schemeClr val="dk1"/>
-              </a:solidFill>
-              <a:latin typeface="Arial"/>
-              <a:ea typeface="Arial"/>
-              <a:cs typeface="Arial"/>
-              <a:sym typeface="Arial"/>
-            </a:endParaRPr>
-          </a:p>
-          <a:p>
-            <a:pPr marL="457200" marR="0" lvl="0" indent="0" algn="l" rtl="0">
-              <a:spcBef>
-                <a:spcPts val="0"/>
-              </a:spcBef>
-              <a:spcAft>
-                <a:spcPts val="0"/>
-              </a:spcAft>
-              <a:buNone/>
-            </a:pPr>
-            <a:endParaRPr sz="1800" dirty="0">
+              <a:t> alapú navigáció</a:t>
+            </a:r>
+            <a:endParaRPr lang="hu-HU" sz="1800" dirty="0">
               <a:solidFill>
                 <a:schemeClr val="dk1"/>
               </a:solidFill>
@@ -16344,39 +18251,7 @@
               <a:buFont typeface="Arial"/>
               <a:buChar char="•"/>
             </a:pPr>
-            <a:r>
-              <a:rPr lang="hu-HU" sz="1800" dirty="0">
-                <a:solidFill>
-                  <a:schemeClr val="dk1"/>
-                </a:solidFill>
-                <a:latin typeface="Arial"/>
-                <a:ea typeface="Arial"/>
-                <a:cs typeface="Arial"/>
-                <a:sym typeface="Arial"/>
-              </a:rPr>
-              <a:t>Egységes hibakezelés</a:t>
-            </a:r>
-            <a:endParaRPr sz="1800" dirty="0">
-              <a:solidFill>
-                <a:schemeClr val="dk1"/>
-              </a:solidFill>
-              <a:latin typeface="Arial"/>
-              <a:ea typeface="Arial"/>
-              <a:cs typeface="Arial"/>
-              <a:sym typeface="Arial"/>
-            </a:endParaRPr>
-          </a:p>
-          <a:p>
-            <a:pPr marL="457200" marR="0" lvl="0" indent="0" algn="l" rtl="0">
-              <a:spcBef>
-                <a:spcPts val="0"/>
-              </a:spcBef>
-              <a:spcAft>
-                <a:spcPts val="0"/>
-              </a:spcAft>
-              <a:buNone/>
-            </a:pPr>
-            <a:endParaRPr sz="1800" dirty="0">
+            <a:endParaRPr lang="hu-HU" sz="1800" dirty="0">
               <a:solidFill>
                 <a:schemeClr val="dk1"/>
               </a:solidFill>
@@ -16402,38 +18277,9 @@
                 <a:solidFill>
                   <a:schemeClr val="dk1"/>
                 </a:solidFill>
-                <a:latin typeface="Arial"/>
-                <a:ea typeface="Arial"/>
-                <a:cs typeface="Arial"/>
-                <a:sym typeface="Arial"/>
               </a:rPr>
-              <a:t>Központi validáció és üzleti logika</a:t>
-            </a:r>
-            <a:endParaRPr sz="1800" dirty="0">
-              <a:solidFill>
-                <a:schemeClr val="dk1"/>
-              </a:solidFill>
-              <a:latin typeface="Arial"/>
-              <a:ea typeface="Arial"/>
-              <a:cs typeface="Arial"/>
-              <a:sym typeface="Arial"/>
-            </a:endParaRPr>
-          </a:p>
-          <a:p>
-            <a:pPr marL="457200" marR="0" lvl="0" indent="0" algn="l" rtl="0">
-              <a:spcBef>
-                <a:spcPts val="0"/>
-              </a:spcBef>
-              <a:spcAft>
-                <a:spcPts val="0"/>
-              </a:spcAft>
-              <a:buNone/>
-            </a:pPr>
-            <a:endParaRPr sz="1800" dirty="0">
-              <a:solidFill>
-                <a:schemeClr val="dk1"/>
-              </a:solidFill>
-            </a:endParaRPr>
+              <a:t>Fő oldalak: Bejelentkezés, regisztráció, eseménylista, eseményrészletek, naptár</a:t>
+            </a:r>
           </a:p>
           <a:p>
             <a:pPr marL="285750" marR="0" lvl="0" indent="-285750" algn="l" rtl="0">
@@ -16450,291 +18296,230 @@
               <a:buFont typeface="Arial"/>
               <a:buChar char="•"/>
             </a:pPr>
+            <a:endParaRPr lang="hu-HU" sz="1800" dirty="0">
+              <a:solidFill>
+                <a:schemeClr val="dk1"/>
+              </a:solidFill>
+            </a:endParaRPr>
+          </a:p>
+          <a:p>
+            <a:pPr marL="285750" marR="0" lvl="0" indent="-285750" algn="l" rtl="0">
+              <a:spcBef>
+                <a:spcPts val="0"/>
+              </a:spcBef>
+              <a:spcAft>
+                <a:spcPts val="0"/>
+              </a:spcAft>
+              <a:buClr>
+                <a:schemeClr val="dk1"/>
+              </a:buClr>
+              <a:buSzPts val="1800"/>
+              <a:buFont typeface="Arial"/>
+              <a:buChar char="•"/>
+            </a:pPr>
             <a:r>
               <a:rPr lang="hu-HU" sz="1800" dirty="0">
                 <a:solidFill>
                   <a:schemeClr val="dk1"/>
                 </a:solidFill>
-                <a:latin typeface="Arial"/>
-                <a:ea typeface="Arial"/>
-                <a:cs typeface="Arial"/>
-                <a:sym typeface="Arial"/>
               </a:rPr>
-              <a:t>Stabil, bővíthető működés</a:t>
-            </a:r>
-            <a:endParaRPr dirty="0"/>
+              <a:t>Szerepkör alapú irányítópultok</a:t>
+            </a:r>
+          </a:p>
+          <a:p>
+            <a:pPr marL="285750" marR="0" lvl="0" indent="-285750" algn="l" rtl="0">
+              <a:spcBef>
+                <a:spcPts val="0"/>
+              </a:spcBef>
+              <a:spcAft>
+                <a:spcPts val="0"/>
+              </a:spcAft>
+              <a:buClr>
+                <a:schemeClr val="dk1"/>
+              </a:buClr>
+              <a:buSzPts val="1800"/>
+              <a:buFont typeface="Arial"/>
+              <a:buChar char="•"/>
+            </a:pPr>
+            <a:endParaRPr lang="hu-HU" sz="1800" dirty="0">
+              <a:solidFill>
+                <a:schemeClr val="dk1"/>
+              </a:solidFill>
+            </a:endParaRPr>
+          </a:p>
+          <a:p>
+            <a:pPr marL="285750" marR="0" lvl="0" indent="-285750" algn="l" rtl="0">
+              <a:spcBef>
+                <a:spcPts val="0"/>
+              </a:spcBef>
+              <a:spcAft>
+                <a:spcPts val="0"/>
+              </a:spcAft>
+              <a:buClr>
+                <a:schemeClr val="dk1"/>
+              </a:buClr>
+              <a:buSzPts val="1800"/>
+              <a:buFont typeface="Arial"/>
+              <a:buChar char="•"/>
+            </a:pPr>
+            <a:r>
+              <a:rPr lang="hu-HU" sz="1800" dirty="0">
+                <a:solidFill>
+                  <a:schemeClr val="dk1"/>
+                </a:solidFill>
+              </a:rPr>
+              <a:t>Állapotkezelés böngésző tárolóval és </a:t>
+            </a:r>
+            <a:r>
+              <a:rPr lang="hu-HU" sz="1800" dirty="0" err="1">
+                <a:solidFill>
+                  <a:schemeClr val="dk1"/>
+                </a:solidFill>
+              </a:rPr>
+              <a:t>tokenes</a:t>
+            </a:r>
+            <a:r>
+              <a:rPr lang="hu-HU" sz="1800" dirty="0">
+                <a:solidFill>
+                  <a:schemeClr val="dk1"/>
+                </a:solidFill>
+              </a:rPr>
+              <a:t> hitelesítéssel</a:t>
+            </a:r>
+          </a:p>
+          <a:p>
+            <a:pPr marL="285750" marR="0" lvl="0" indent="-285750" algn="l" rtl="0">
+              <a:spcBef>
+                <a:spcPts val="0"/>
+              </a:spcBef>
+              <a:spcAft>
+                <a:spcPts val="0"/>
+              </a:spcAft>
+              <a:buClr>
+                <a:schemeClr val="dk1"/>
+              </a:buClr>
+              <a:buSzPts val="1800"/>
+              <a:buFont typeface="Arial"/>
+              <a:buChar char="•"/>
+            </a:pPr>
+            <a:endParaRPr lang="hu-HU" sz="1800" dirty="0">
+              <a:solidFill>
+                <a:schemeClr val="dk1"/>
+              </a:solidFill>
+            </a:endParaRPr>
+          </a:p>
+          <a:p>
+            <a:pPr marL="285750" marR="0" lvl="0" indent="-285750" algn="l" rtl="0">
+              <a:spcBef>
+                <a:spcPts val="0"/>
+              </a:spcBef>
+              <a:spcAft>
+                <a:spcPts val="0"/>
+              </a:spcAft>
+              <a:buClr>
+                <a:schemeClr val="dk1"/>
+              </a:buClr>
+              <a:buSzPts val="1800"/>
+              <a:buFont typeface="Arial"/>
+              <a:buChar char="•"/>
+            </a:pPr>
+            <a:r>
+              <a:rPr lang="hu-HU" sz="1800" dirty="0">
+                <a:solidFill>
+                  <a:schemeClr val="dk1"/>
+                </a:solidFill>
+              </a:rPr>
+              <a:t>API kapcsolat: események, kommentek, kedvencek, részvétel, osztály és kérelmek kezelése</a:t>
+            </a:r>
           </a:p>
         </p:txBody>
       </p:sp>
-      <p:grpSp>
-        <p:nvGrpSpPr>
-          <p:cNvPr id="129" name="Google Shape;129;p5"/>
-          <p:cNvGrpSpPr/>
+      <p:sp>
+        <p:nvSpPr>
+          <p:cNvPr id="150" name="Google Shape;150;p7"/>
+          <p:cNvSpPr/>
           <p:nvPr/>
-        </p:nvGrpSpPr>
-        <p:grpSpPr>
+        </p:nvSpPr>
+        <p:spPr>
           <a:xfrm>
-            <a:off x="6637421" y="1960734"/>
-            <a:ext cx="4681800" cy="3286207"/>
-            <a:chOff x="6254496" y="2128809"/>
-            <a:chExt cx="4681800" cy="3286207"/>
+            <a:off x="7826625" y="1335725"/>
+            <a:ext cx="3492600" cy="5292900"/>
           </a:xfrm>
-        </p:grpSpPr>
-        <p:sp>
-          <p:nvSpPr>
-            <p:cNvPr id="130" name="Google Shape;130;p5"/>
-            <p:cNvSpPr txBox="1"/>
-            <p:nvPr/>
-          </p:nvSpPr>
-          <p:spPr>
-            <a:xfrm>
-              <a:off x="6254496" y="2128809"/>
-              <a:ext cx="3822300" cy="923400"/>
-            </a:xfrm>
-            <a:prstGeom prst="rect">
-              <a:avLst/>
-            </a:prstGeom>
+          <a:prstGeom prst="ellipse">
+            <a:avLst/>
+          </a:prstGeom>
+          <a:solidFill>
+            <a:srgbClr val="4A86E8"/>
+          </a:solidFill>
+          <a:ln w="9525" cap="flat" cmpd="sng">
+            <a:solidFill>
+              <a:srgbClr val="CFE2F3"/>
+            </a:solidFill>
+            <a:prstDash val="solid"/>
+            <a:round/>
+            <a:headEnd type="none" w="sm" len="sm"/>
+            <a:tailEnd type="none" w="sm" len="sm"/>
+          </a:ln>
+        </p:spPr>
+        <p:txBody>
+          <a:bodyPr spcFirstLastPara="1" wrap="square" lIns="91425" tIns="91425" rIns="91425" bIns="91425" anchor="ctr" anchorCtr="0">
+            <a:noAutofit/>
+          </a:bodyPr>
+          <a:lstStyle/>
+          <a:p>
+            <a:pPr marL="0" lvl="0" indent="0" algn="ctr" rtl="0">
+              <a:spcBef>
+                <a:spcPts val="0"/>
+              </a:spcBef>
+              <a:spcAft>
+                <a:spcPts val="0"/>
+              </a:spcAft>
+              <a:buNone/>
+            </a:pPr>
+            <a:endParaRPr/>
+          </a:p>
+        </p:txBody>
+      </p:sp>
+      <p:pic>
+        <p:nvPicPr>
+          <p:cNvPr id="151" name="Google Shape;151;p7"/>
+          <p:cNvPicPr preferRelativeResize="0"/>
+          <p:nvPr/>
+        </p:nvPicPr>
+        <p:blipFill>
+          <a:blip r:embed="rId3">
+            <a:alphaModFix/>
+          </a:blip>
+          <a:stretch>
+            <a:fillRect/>
+          </a:stretch>
+        </p:blipFill>
+        <p:spPr>
+          <a:xfrm>
+            <a:off x="6789540" y="1714300"/>
+            <a:ext cx="5566768" cy="4823099"/>
+          </a:xfrm>
+          <a:prstGeom prst="rect">
+            <a:avLst/>
+          </a:prstGeom>
+          <a:ln>
             <a:noFill/>
-            <a:ln>
-              <a:noFill/>
-            </a:ln>
-          </p:spPr>
-          <p:txBody>
-            <a:bodyPr spcFirstLastPara="1" wrap="square" lIns="91425" tIns="45700" rIns="91425" bIns="45700" anchor="t" anchorCtr="0">
-              <a:spAutoFit/>
-            </a:bodyPr>
-            <a:lstStyle/>
-            <a:p>
-              <a:pPr marL="0" marR="0" lvl="0" indent="0" algn="l" rtl="0">
-                <a:spcBef>
-                  <a:spcPts val="0"/>
-                </a:spcBef>
-                <a:spcAft>
-                  <a:spcPts val="0"/>
-                </a:spcAft>
-                <a:buNone/>
-              </a:pPr>
-              <a:r>
-                <a:rPr lang="hu-HU" sz="1800" b="1" dirty="0">
-                  <a:solidFill>
-                    <a:schemeClr val="dk1"/>
-                  </a:solidFill>
-                  <a:latin typeface="Arial"/>
-                  <a:ea typeface="Arial"/>
-                  <a:cs typeface="Arial"/>
-                  <a:sym typeface="Arial"/>
-                </a:rPr>
-                <a:t>Fő API modulok:</a:t>
-              </a:r>
-              <a:r>
-                <a:rPr lang="hu-HU" sz="1800" dirty="0">
-                  <a:solidFill>
-                    <a:schemeClr val="dk1"/>
-                  </a:solidFill>
-                  <a:latin typeface="Arial"/>
-                  <a:ea typeface="Arial"/>
-                  <a:cs typeface="Arial"/>
-                  <a:sym typeface="Arial"/>
-                </a:rPr>
-                <a:t> Auth, Események, Intézmények, Osztályok, Kérelmek</a:t>
-              </a:r>
-              <a:endParaRPr dirty="0"/>
-            </a:p>
-          </p:txBody>
-        </p:sp>
-        <p:sp>
-          <p:nvSpPr>
-            <p:cNvPr id="131" name="Google Shape;131;p5"/>
-            <p:cNvSpPr txBox="1"/>
-            <p:nvPr/>
-          </p:nvSpPr>
-          <p:spPr>
-            <a:xfrm>
-              <a:off x="6254496" y="3005982"/>
-              <a:ext cx="4227600" cy="923400"/>
-            </a:xfrm>
-            <a:prstGeom prst="rect">
-              <a:avLst/>
-            </a:prstGeom>
-            <a:noFill/>
-            <a:ln>
-              <a:noFill/>
-            </a:ln>
-          </p:spPr>
-          <p:txBody>
-            <a:bodyPr spcFirstLastPara="1" wrap="square" lIns="91425" tIns="45700" rIns="91425" bIns="45700" anchor="t" anchorCtr="0">
-              <a:spAutoFit/>
-            </a:bodyPr>
-            <a:lstStyle/>
-            <a:p>
-              <a:pPr marL="0" marR="0" lvl="0" indent="0" algn="l" rtl="0">
-                <a:spcBef>
-                  <a:spcPts val="0"/>
-                </a:spcBef>
-                <a:spcAft>
-                  <a:spcPts val="0"/>
-                </a:spcAft>
-                <a:buNone/>
-              </a:pPr>
-              <a:r>
-                <a:rPr lang="hu-HU" sz="1800" b="1" dirty="0">
-                  <a:solidFill>
-                    <a:schemeClr val="dk1"/>
-                  </a:solidFill>
-                  <a:latin typeface="Arial"/>
-                  <a:ea typeface="Arial"/>
-                  <a:cs typeface="Arial"/>
-                  <a:sym typeface="Arial"/>
-                </a:rPr>
-                <a:t>Hibakezelés:</a:t>
-              </a:r>
-              <a:r>
-                <a:rPr lang="hu-HU" sz="1800" dirty="0">
-                  <a:solidFill>
-                    <a:schemeClr val="dk1"/>
-                  </a:solidFill>
-                  <a:latin typeface="Arial"/>
-                  <a:ea typeface="Arial"/>
-                  <a:cs typeface="Arial"/>
-                  <a:sym typeface="Arial"/>
-                </a:rPr>
-                <a:t> egységes válaszkódok (siker, validációs hiba, jogosultsági hiba)</a:t>
-              </a:r>
-              <a:endParaRPr dirty="0"/>
-            </a:p>
-          </p:txBody>
-        </p:sp>
-        <p:sp>
-          <p:nvSpPr>
-            <p:cNvPr id="132" name="Google Shape;132;p5"/>
-            <p:cNvSpPr txBox="1"/>
-            <p:nvPr/>
-          </p:nvSpPr>
-          <p:spPr>
-            <a:xfrm>
-              <a:off x="6254496" y="3845305"/>
-              <a:ext cx="4681800" cy="646500"/>
-            </a:xfrm>
-            <a:prstGeom prst="rect">
-              <a:avLst/>
-            </a:prstGeom>
-            <a:noFill/>
-            <a:ln>
-              <a:noFill/>
-            </a:ln>
-          </p:spPr>
-          <p:txBody>
-            <a:bodyPr spcFirstLastPara="1" wrap="square" lIns="91425" tIns="45700" rIns="91425" bIns="45700" anchor="t" anchorCtr="0">
-              <a:spAutoFit/>
-            </a:bodyPr>
-            <a:lstStyle/>
-            <a:p>
-              <a:pPr marL="0" marR="0" lvl="0" indent="0" algn="l" rtl="0">
-                <a:spcBef>
-                  <a:spcPts val="0"/>
-                </a:spcBef>
-                <a:spcAft>
-                  <a:spcPts val="0"/>
-                </a:spcAft>
-                <a:buNone/>
-              </a:pPr>
-              <a:r>
-                <a:rPr lang="hu-HU" sz="1800" b="1" dirty="0">
-                  <a:solidFill>
-                    <a:schemeClr val="dk1"/>
-                  </a:solidFill>
-                  <a:latin typeface="Arial"/>
-                  <a:ea typeface="Arial"/>
-                  <a:cs typeface="Arial"/>
-                  <a:sym typeface="Arial"/>
-                </a:rPr>
-                <a:t>Központi logika:</a:t>
-              </a:r>
-              <a:r>
-                <a:rPr lang="hu-HU" sz="1800" dirty="0">
-                  <a:solidFill>
-                    <a:schemeClr val="dk1"/>
-                  </a:solidFill>
-                  <a:latin typeface="Arial"/>
-                  <a:ea typeface="Arial"/>
-                  <a:cs typeface="Arial"/>
-                  <a:sym typeface="Arial"/>
-                </a:rPr>
-                <a:t> validáció és üzleti szabályok a backendben</a:t>
-              </a:r>
-              <a:endParaRPr dirty="0"/>
-            </a:p>
-          </p:txBody>
-        </p:sp>
-        <p:sp>
-          <p:nvSpPr>
-            <p:cNvPr id="133" name="Google Shape;133;p5"/>
-            <p:cNvSpPr txBox="1"/>
-            <p:nvPr/>
-          </p:nvSpPr>
-          <p:spPr>
-            <a:xfrm>
-              <a:off x="6254508" y="4491616"/>
-              <a:ext cx="3474600" cy="923400"/>
-            </a:xfrm>
-            <a:prstGeom prst="rect">
-              <a:avLst/>
-            </a:prstGeom>
-            <a:noFill/>
-            <a:ln>
-              <a:noFill/>
-            </a:ln>
-          </p:spPr>
-          <p:txBody>
-            <a:bodyPr spcFirstLastPara="1" wrap="square" lIns="91425" tIns="45700" rIns="91425" bIns="45700" anchor="t" anchorCtr="0">
-              <a:spAutoFit/>
-            </a:bodyPr>
-            <a:lstStyle/>
-            <a:p>
-              <a:pPr marL="0" marR="0" lvl="0" indent="0" algn="l" rtl="0">
-                <a:spcBef>
-                  <a:spcPts val="0"/>
-                </a:spcBef>
-                <a:spcAft>
-                  <a:spcPts val="0"/>
-                </a:spcAft>
-                <a:buNone/>
-              </a:pPr>
-              <a:r>
-                <a:rPr lang="hu-HU" sz="1800" b="1" dirty="0">
-                  <a:solidFill>
-                    <a:schemeClr val="dk1"/>
-                  </a:solidFill>
-                  <a:latin typeface="Arial"/>
-                  <a:ea typeface="Arial"/>
-                  <a:cs typeface="Arial"/>
-                  <a:sym typeface="Arial"/>
-                </a:rPr>
-                <a:t>Eredmény:</a:t>
-              </a:r>
-              <a:r>
-                <a:rPr lang="hu-HU" sz="1800" dirty="0">
-                  <a:solidFill>
-                    <a:schemeClr val="dk1"/>
-                  </a:solidFill>
-                  <a:latin typeface="Arial"/>
-                  <a:ea typeface="Arial"/>
-                  <a:cs typeface="Arial"/>
-                  <a:sym typeface="Arial"/>
-                </a:rPr>
-                <a:t> stabil, átlátható, könnyen karbantartható rendszer</a:t>
-              </a:r>
-              <a:endParaRPr dirty="0"/>
-            </a:p>
-          </p:txBody>
-        </p:sp>
-      </p:grpSp>
+          </a:ln>
+          <a:effectLst>
+            <a:outerShdw blurRad="292100" dist="139700" dir="2700000" algn="tl" rotWithShape="0">
+              <a:srgbClr val="333333">
+                <a:alpha val="65000"/>
+              </a:srgbClr>
+            </a:outerShdw>
+          </a:effectLst>
+        </p:spPr>
+      </p:pic>
       <p:pic>
         <p:nvPicPr>
           <p:cNvPr id="2" name="Kép 1">
             <a:extLst>
               <a:ext uri="{FF2B5EF4-FFF2-40B4-BE49-F238E27FC236}">
-                <a16:creationId xmlns:a16="http://schemas.microsoft.com/office/drawing/2014/main" id="{3615821A-0B5A-AFA2-70D0-BB28F94FB7F4}"/>
+                <a16:creationId xmlns:a16="http://schemas.microsoft.com/office/drawing/2014/main" id="{7F97EB40-BCA8-156B-ADB7-A400002E5399}"/>
               </a:ext>
             </a:extLst>
           </p:cNvPr>
@@ -16744,7 +18529,7 @@
           <p:nvPr/>
         </p:nvPicPr>
         <p:blipFill>
-          <a:blip r:embed="rId3"/>
+          <a:blip r:embed="rId4"/>
           <a:srcRect t="55" b="55"/>
           <a:stretch/>
         </p:blipFill>
@@ -16779,6 +18564,329 @@
 </file>
 
 <file path=ppt/slides/slide6.xml><?xml version="1.0" encoding="utf-8"?>
+<p:sld xmlns:a="http://schemas.openxmlformats.org/drawingml/2006/main" xmlns:r="http://schemas.openxmlformats.org/officeDocument/2006/relationships" xmlns:p="http://schemas.openxmlformats.org/presentationml/2006/main">
+  <p:cSld>
+    <p:bg>
+      <p:bgPr>
+        <a:gradFill>
+          <a:gsLst>
+            <a:gs pos="0">
+              <a:srgbClr val="A3C5ED"/>
+            </a:gs>
+            <a:gs pos="74000">
+              <a:srgbClr val="72C4E9"/>
+            </a:gs>
+            <a:gs pos="83000">
+              <a:srgbClr val="72C4E9"/>
+            </a:gs>
+            <a:gs pos="100000">
+              <a:srgbClr val="A1D6F0"/>
+            </a:gs>
+          </a:gsLst>
+          <a:lin ang="5400000" scaled="0"/>
+        </a:gradFill>
+        <a:effectLst/>
+      </p:bgPr>
+    </p:bg>
+    <p:spTree>
+      <p:nvGrpSpPr>
+        <p:cNvPr id="1" name="Shape 123"/>
+        <p:cNvGrpSpPr/>
+        <p:nvPr/>
+      </p:nvGrpSpPr>
+      <p:grpSpPr>
+        <a:xfrm>
+          <a:off x="0" y="0"/>
+          <a:ext cx="0" cy="0"/>
+          <a:chOff x="0" y="0"/>
+          <a:chExt cx="0" cy="0"/>
+        </a:xfrm>
+      </p:grpSpPr>
+      <p:sp>
+        <p:nvSpPr>
+          <p:cNvPr id="124" name="Google Shape;124;p5"/>
+          <p:cNvSpPr/>
+          <p:nvPr/>
+        </p:nvSpPr>
+        <p:spPr>
+          <a:xfrm>
+            <a:off x="273924" y="1525348"/>
+            <a:ext cx="7475616" cy="5332652"/>
+          </a:xfrm>
+          <a:prstGeom prst="ellipse">
+            <a:avLst/>
+          </a:prstGeom>
+          <a:solidFill>
+            <a:srgbClr val="4A86E8"/>
+          </a:solidFill>
+          <a:ln w="9525" cap="flat" cmpd="sng">
+            <a:solidFill>
+              <a:srgbClr val="CFE2F3"/>
+            </a:solidFill>
+            <a:prstDash val="solid"/>
+            <a:round/>
+            <a:headEnd type="none" w="sm" len="sm"/>
+            <a:tailEnd type="none" w="sm" len="sm"/>
+          </a:ln>
+        </p:spPr>
+        <p:txBody>
+          <a:bodyPr spcFirstLastPara="1" wrap="square" lIns="91425" tIns="91425" rIns="91425" bIns="91425" anchor="ctr" anchorCtr="0">
+            <a:noAutofit/>
+          </a:bodyPr>
+          <a:lstStyle/>
+          <a:p>
+            <a:pPr marL="0" lvl="0" indent="0" algn="ctr" rtl="0">
+              <a:spcBef>
+                <a:spcPts val="0"/>
+              </a:spcBef>
+              <a:spcAft>
+                <a:spcPts val="0"/>
+              </a:spcAft>
+              <a:buNone/>
+            </a:pPr>
+            <a:endParaRPr dirty="0"/>
+          </a:p>
+        </p:txBody>
+      </p:sp>
+      <p:sp>
+        <p:nvSpPr>
+          <p:cNvPr id="126" name="Google Shape;126;p5"/>
+          <p:cNvSpPr txBox="1">
+            <a:spLocks noGrp="1"/>
+          </p:cNvSpPr>
+          <p:nvPr>
+            <p:ph type="ctrTitle"/>
+          </p:nvPr>
+        </p:nvSpPr>
+        <p:spPr>
+          <a:xfrm>
+            <a:off x="872762" y="524926"/>
+            <a:ext cx="10446473" cy="810807"/>
+          </a:xfrm>
+          <a:prstGeom prst="rect">
+            <a:avLst/>
+          </a:prstGeom>
+          <a:noFill/>
+          <a:ln>
+            <a:noFill/>
+          </a:ln>
+        </p:spPr>
+        <p:txBody>
+          <a:bodyPr spcFirstLastPara="1" wrap="square" lIns="91425" tIns="45700" rIns="91425" bIns="45700" anchor="b" anchorCtr="0">
+            <a:normAutofit/>
+          </a:bodyPr>
+          <a:lstStyle/>
+          <a:p>
+            <a:pPr marL="0" lvl="0" indent="0" algn="ctr" rtl="0">
+              <a:lnSpc>
+                <a:spcPct val="90000"/>
+              </a:lnSpc>
+              <a:spcBef>
+                <a:spcPts val="0"/>
+              </a:spcBef>
+              <a:spcAft>
+                <a:spcPts val="0"/>
+              </a:spcAft>
+              <a:buClr>
+                <a:schemeClr val="dk1"/>
+              </a:buClr>
+              <a:buSzPts val="4400"/>
+              <a:buFont typeface="Cambria"/>
+              <a:buNone/>
+            </a:pPr>
+            <a:r>
+              <a:rPr lang="hu-HU" sz="4400" dirty="0">
+                <a:latin typeface="Cambria"/>
+                <a:ea typeface="Cambria"/>
+                <a:cs typeface="Cambria"/>
+                <a:sym typeface="Cambria"/>
+              </a:rPr>
+              <a:t>Backend architektúra és API</a:t>
+            </a:r>
+            <a:endParaRPr dirty="0"/>
+          </a:p>
+        </p:txBody>
+      </p:sp>
+      <p:pic>
+        <p:nvPicPr>
+          <p:cNvPr id="2" name="Kép 1">
+            <a:extLst>
+              <a:ext uri="{FF2B5EF4-FFF2-40B4-BE49-F238E27FC236}">
+                <a16:creationId xmlns:a16="http://schemas.microsoft.com/office/drawing/2014/main" id="{3615821A-0B5A-AFA2-70D0-BB28F94FB7F4}"/>
+              </a:ext>
+            </a:extLst>
+          </p:cNvPr>
+          <p:cNvPicPr>
+            <a:picLocks noChangeAspect="1"/>
+          </p:cNvPicPr>
+          <p:nvPr/>
+        </p:nvPicPr>
+        <p:blipFill>
+          <a:blip r:embed="rId3"/>
+          <a:srcRect t="55" b="55"/>
+          <a:stretch/>
+        </p:blipFill>
+        <p:spPr>
+          <a:xfrm>
+            <a:off x="-317902" y="-137425"/>
+            <a:ext cx="2852432" cy="2621626"/>
+          </a:xfrm>
+          <a:prstGeom prst="rect">
+            <a:avLst/>
+          </a:prstGeom>
+        </p:spPr>
+      </p:pic>
+      <p:sp>
+        <p:nvSpPr>
+          <p:cNvPr id="3" name="Szövegdoboz 2">
+            <a:extLst>
+              <a:ext uri="{FF2B5EF4-FFF2-40B4-BE49-F238E27FC236}">
+                <a16:creationId xmlns:a16="http://schemas.microsoft.com/office/drawing/2014/main" id="{1A182C00-DF9A-595F-45C3-1B92870DB267}"/>
+              </a:ext>
+            </a:extLst>
+          </p:cNvPr>
+          <p:cNvSpPr txBox="1"/>
+          <p:nvPr/>
+        </p:nvSpPr>
+        <p:spPr>
+          <a:xfrm>
+            <a:off x="1432921" y="2238753"/>
+            <a:ext cx="5634354" cy="4185761"/>
+          </a:xfrm>
+          <a:prstGeom prst="rect">
+            <a:avLst/>
+          </a:prstGeom>
+          <a:noFill/>
+        </p:spPr>
+        <p:txBody>
+          <a:bodyPr wrap="square" rtlCol="0">
+            <a:spAutoFit/>
+          </a:bodyPr>
+          <a:lstStyle/>
+          <a:p>
+            <a:pPr marL="285750" indent="-285750">
+              <a:buFont typeface="Arial" panose="020B0604020202020204" pitchFamily="34" charset="0"/>
+              <a:buChar char="•"/>
+            </a:pPr>
+            <a:r>
+              <a:rPr lang="hu-HU" sz="1800" dirty="0" err="1"/>
+              <a:t>Laravel</a:t>
+            </a:r>
+            <a:r>
+              <a:rPr lang="hu-HU" sz="1800" dirty="0"/>
+              <a:t> 12 REST API, </a:t>
+            </a:r>
+            <a:r>
+              <a:rPr lang="hu-HU" sz="1800" dirty="0" err="1"/>
+              <a:t>Sanctum</a:t>
+            </a:r>
+            <a:r>
+              <a:rPr lang="hu-HU" sz="1800" dirty="0"/>
+              <a:t> alapú </a:t>
+            </a:r>
+            <a:r>
+              <a:rPr lang="hu-HU" sz="1800" dirty="0" err="1"/>
+              <a:t>tokenes</a:t>
+            </a:r>
+            <a:r>
+              <a:rPr lang="hu-HU" sz="1800" dirty="0"/>
+              <a:t> védelem</a:t>
+            </a:r>
+          </a:p>
+          <a:p>
+            <a:pPr marL="285750" indent="-285750">
+              <a:buFont typeface="Arial" panose="020B0604020202020204" pitchFamily="34" charset="0"/>
+              <a:buChar char="•"/>
+            </a:pPr>
+            <a:endParaRPr lang="hu-HU" sz="1800" dirty="0"/>
+          </a:p>
+          <a:p>
+            <a:pPr marL="285750" indent="-285750">
+              <a:buFont typeface="Arial" panose="020B0604020202020204" pitchFamily="34" charset="0"/>
+              <a:buChar char="•"/>
+            </a:pPr>
+            <a:r>
+              <a:rPr lang="hu-HU" sz="1800" dirty="0"/>
+              <a:t>Modulok: Auth és email-verifikáció, események, intézmények, osztályok, kérelmek, kommentek</a:t>
+            </a:r>
+          </a:p>
+          <a:p>
+            <a:pPr marL="285750" indent="-285750">
+              <a:buFont typeface="Arial" panose="020B0604020202020204" pitchFamily="34" charset="0"/>
+              <a:buChar char="•"/>
+            </a:pPr>
+            <a:endParaRPr lang="hu-HU" sz="1800" dirty="0"/>
+          </a:p>
+          <a:p>
+            <a:pPr marL="285750" indent="-285750">
+              <a:buFont typeface="Arial" panose="020B0604020202020204" pitchFamily="34" charset="0"/>
+              <a:buChar char="•"/>
+            </a:pPr>
+            <a:r>
+              <a:rPr lang="hu-HU" sz="1800" dirty="0"/>
+              <a:t>Implementált műveletek: esemény létrehozás, részvétel, kedvenc, ismétlődő alkalmak kezelése</a:t>
+            </a:r>
+          </a:p>
+          <a:p>
+            <a:pPr marL="285750" indent="-285750">
+              <a:buFont typeface="Arial" panose="020B0604020202020204" pitchFamily="34" charset="0"/>
+              <a:buChar char="•"/>
+            </a:pPr>
+            <a:endParaRPr lang="hu-HU" sz="1800" dirty="0"/>
+          </a:p>
+          <a:p>
+            <a:pPr marL="285750" indent="-285750">
+              <a:buFont typeface="Arial" panose="020B0604020202020204" pitchFamily="34" charset="0"/>
+              <a:buChar char="•"/>
+            </a:pPr>
+            <a:r>
+              <a:rPr lang="hu-HU" sz="1800" dirty="0"/>
+              <a:t>Intézményi folyamatok: osztály- és tagságkezelés, kérelmek jóváhagyása/elutasítása</a:t>
+            </a:r>
+          </a:p>
+          <a:p>
+            <a:pPr marL="285750" indent="-285750">
+              <a:buFont typeface="Arial" panose="020B0604020202020204" pitchFamily="34" charset="0"/>
+              <a:buChar char="•"/>
+            </a:pPr>
+            <a:endParaRPr lang="hu-HU" sz="1800" dirty="0"/>
+          </a:p>
+          <a:p>
+            <a:pPr marL="285750" indent="-285750">
+              <a:buFont typeface="Arial" panose="020B0604020202020204" pitchFamily="34" charset="0"/>
+              <a:buChar char="•"/>
+            </a:pPr>
+            <a:r>
+              <a:rPr lang="hu-HU" sz="1800" dirty="0"/>
+              <a:t>Egységes JSON válaszok és validáció a megbízható működésért</a:t>
+            </a:r>
+          </a:p>
+          <a:p>
+            <a:endParaRPr lang="hu-HU" dirty="0"/>
+          </a:p>
+        </p:txBody>
+      </p:sp>
+    </p:spTree>
+  </p:cSld>
+  <p:clrMapOvr>
+    <a:masterClrMapping/>
+  </p:clrMapOvr>
+  <mc:AlternateContent xmlns:mc="http://schemas.openxmlformats.org/markup-compatibility/2006" xmlns:p159="http://schemas.microsoft.com/office/powerpoint/2015/09/main">
+    <mc:Choice Requires="p159">
+      <p:transition xmlns:p14="http://schemas.microsoft.com/office/powerpoint/2010/main" spd="slow" p14:dur="2000">
+        <p159:morph option="byObject"/>
+      </p:transition>
+    </mc:Choice>
+    <mc:Fallback xmlns="">
+      <p:transition spd="slow">
+        <p:fade/>
+      </p:transition>
+    </mc:Fallback>
+  </mc:AlternateContent>
+</p:sld>
+</file>
+
+<file path=ppt/slides/slide7.xml><?xml version="1.0" encoding="utf-8"?>
 <p:sld xmlns:a="http://schemas.openxmlformats.org/drawingml/2006/main" xmlns:r="http://schemas.openxmlformats.org/officeDocument/2006/relationships" xmlns:p="http://schemas.openxmlformats.org/presentationml/2006/main">
   <p:cSld>
     <p:bg>
@@ -17383,566 +19491,6 @@
         </p:nvPicPr>
         <p:blipFill>
           <a:blip r:embed="rId3"/>
-          <a:srcRect t="55" b="55"/>
-          <a:stretch/>
-        </p:blipFill>
-        <p:spPr>
-          <a:xfrm>
-            <a:off x="-317902" y="-137425"/>
-            <a:ext cx="2852432" cy="2621626"/>
-          </a:xfrm>
-          <a:prstGeom prst="rect">
-            <a:avLst/>
-          </a:prstGeom>
-        </p:spPr>
-      </p:pic>
-    </p:spTree>
-  </p:cSld>
-  <p:clrMapOvr>
-    <a:masterClrMapping/>
-  </p:clrMapOvr>
-  <mc:AlternateContent xmlns:mc="http://schemas.openxmlformats.org/markup-compatibility/2006" xmlns:p159="http://schemas.microsoft.com/office/powerpoint/2015/09/main">
-    <mc:Choice Requires="p159">
-      <p:transition xmlns:p14="http://schemas.microsoft.com/office/powerpoint/2010/main" spd="slow" p14:dur="2000">
-        <p159:morph option="byObject"/>
-      </p:transition>
-    </mc:Choice>
-    <mc:Fallback xmlns="">
-      <p:transition spd="slow">
-        <p:fade/>
-      </p:transition>
-    </mc:Fallback>
-  </mc:AlternateContent>
-</p:sld>
-</file>
-
-<file path=ppt/slides/slide7.xml><?xml version="1.0" encoding="utf-8"?>
-<p:sld xmlns:a="http://schemas.openxmlformats.org/drawingml/2006/main" xmlns:r="http://schemas.openxmlformats.org/officeDocument/2006/relationships" xmlns:p="http://schemas.openxmlformats.org/presentationml/2006/main">
-  <p:cSld>
-    <p:bg>
-      <p:bgPr>
-        <a:gradFill>
-          <a:gsLst>
-            <a:gs pos="0">
-              <a:srgbClr val="A3C5ED"/>
-            </a:gs>
-            <a:gs pos="74000">
-              <a:srgbClr val="72C4E9"/>
-            </a:gs>
-            <a:gs pos="83000">
-              <a:srgbClr val="72C4E9"/>
-            </a:gs>
-            <a:gs pos="100000">
-              <a:srgbClr val="A1D6F0"/>
-            </a:gs>
-          </a:gsLst>
-          <a:lin ang="5400000" scaled="0"/>
-        </a:gradFill>
-        <a:effectLst/>
-      </p:bgPr>
-    </p:bg>
-    <p:spTree>
-      <p:nvGrpSpPr>
-        <p:cNvPr id="1" name="Shape 146"/>
-        <p:cNvGrpSpPr/>
-        <p:nvPr/>
-      </p:nvGrpSpPr>
-      <p:grpSpPr>
-        <a:xfrm>
-          <a:off x="0" y="0"/>
-          <a:ext cx="0" cy="0"/>
-          <a:chOff x="0" y="0"/>
-          <a:chExt cx="0" cy="0"/>
-        </a:xfrm>
-      </p:grpSpPr>
-      <p:sp>
-        <p:nvSpPr>
-          <p:cNvPr id="147" name="Google Shape;147;p7"/>
-          <p:cNvSpPr txBox="1">
-            <a:spLocks noGrp="1"/>
-          </p:cNvSpPr>
-          <p:nvPr>
-            <p:ph type="ctrTitle"/>
-          </p:nvPr>
-        </p:nvSpPr>
-        <p:spPr>
-          <a:xfrm>
-            <a:off x="872762" y="524926"/>
-            <a:ext cx="10446473" cy="810807"/>
-          </a:xfrm>
-          <a:prstGeom prst="rect">
-            <a:avLst/>
-          </a:prstGeom>
-          <a:noFill/>
-          <a:ln>
-            <a:noFill/>
-          </a:ln>
-        </p:spPr>
-        <p:txBody>
-          <a:bodyPr spcFirstLastPara="1" wrap="square" lIns="91425" tIns="45700" rIns="91425" bIns="45700" anchor="b" anchorCtr="0">
-            <a:normAutofit/>
-          </a:bodyPr>
-          <a:lstStyle/>
-          <a:p>
-            <a:pPr marL="0" lvl="0" indent="0" algn="ctr" rtl="0">
-              <a:lnSpc>
-                <a:spcPct val="90000"/>
-              </a:lnSpc>
-              <a:spcBef>
-                <a:spcPts val="0"/>
-              </a:spcBef>
-              <a:spcAft>
-                <a:spcPts val="0"/>
-              </a:spcAft>
-              <a:buClr>
-                <a:schemeClr val="dk1"/>
-              </a:buClr>
-              <a:buSzPts val="4400"/>
-              <a:buFont typeface="Cambria"/>
-              <a:buNone/>
-            </a:pPr>
-            <a:r>
-              <a:rPr lang="hu-HU" sz="4400">
-                <a:latin typeface="Cambria"/>
-                <a:ea typeface="Cambria"/>
-                <a:cs typeface="Cambria"/>
-                <a:sym typeface="Cambria"/>
-              </a:rPr>
-              <a:t>Frontend felépítés és navigáció</a:t>
-            </a:r>
-            <a:endParaRPr/>
-          </a:p>
-        </p:txBody>
-      </p:sp>
-      <p:sp>
-        <p:nvSpPr>
-          <p:cNvPr id="149" name="Google Shape;149;p7"/>
-          <p:cNvSpPr txBox="1"/>
-          <p:nvPr/>
-        </p:nvSpPr>
-        <p:spPr>
-          <a:xfrm>
-            <a:off x="1377020" y="1714310"/>
-            <a:ext cx="6509700" cy="3971100"/>
-          </a:xfrm>
-          <a:prstGeom prst="rect">
-            <a:avLst/>
-          </a:prstGeom>
-          <a:noFill/>
-          <a:ln>
-            <a:noFill/>
-          </a:ln>
-        </p:spPr>
-        <p:txBody>
-          <a:bodyPr spcFirstLastPara="1" wrap="square" lIns="91425" tIns="45700" rIns="91425" bIns="45700" anchor="t" anchorCtr="0">
-            <a:spAutoFit/>
-          </a:bodyPr>
-          <a:lstStyle/>
-          <a:p>
-            <a:pPr marL="285750" marR="0" lvl="0" indent="-285750" algn="l" rtl="0">
-              <a:spcBef>
-                <a:spcPts val="0"/>
-              </a:spcBef>
-              <a:spcAft>
-                <a:spcPts val="0"/>
-              </a:spcAft>
-              <a:buClr>
-                <a:schemeClr val="dk1"/>
-              </a:buClr>
-              <a:buSzPts val="1800"/>
-              <a:buFont typeface="Arial"/>
-              <a:buChar char="•"/>
-            </a:pPr>
-            <a:r>
-              <a:rPr lang="hu-HU" sz="1800">
-                <a:solidFill>
-                  <a:schemeClr val="dk1"/>
-                </a:solidFill>
-                <a:latin typeface="Arial"/>
-                <a:ea typeface="Arial"/>
-                <a:cs typeface="Arial"/>
-                <a:sym typeface="Arial"/>
-              </a:rPr>
-              <a:t>SPA működés modern, reszponzív felülettel</a:t>
-            </a:r>
-            <a:endParaRPr sz="1800">
-              <a:solidFill>
-                <a:schemeClr val="dk1"/>
-              </a:solidFill>
-              <a:latin typeface="Arial"/>
-              <a:ea typeface="Arial"/>
-              <a:cs typeface="Arial"/>
-              <a:sym typeface="Arial"/>
-            </a:endParaRPr>
-          </a:p>
-          <a:p>
-            <a:pPr marL="457200" marR="0" lvl="0" indent="0" algn="l" rtl="0">
-              <a:spcBef>
-                <a:spcPts val="0"/>
-              </a:spcBef>
-              <a:spcAft>
-                <a:spcPts val="0"/>
-              </a:spcAft>
-              <a:buNone/>
-            </a:pPr>
-            <a:endParaRPr sz="1800">
-              <a:solidFill>
-                <a:schemeClr val="dk1"/>
-              </a:solidFill>
-            </a:endParaRPr>
-          </a:p>
-          <a:p>
-            <a:pPr marL="285750" marR="0" lvl="0" indent="-285750" algn="l" rtl="0">
-              <a:spcBef>
-                <a:spcPts val="0"/>
-              </a:spcBef>
-              <a:spcAft>
-                <a:spcPts val="0"/>
-              </a:spcAft>
-              <a:buClr>
-                <a:schemeClr val="dk1"/>
-              </a:buClr>
-              <a:buSzPts val="1800"/>
-              <a:buFont typeface="Arial"/>
-              <a:buChar char="•"/>
-            </a:pPr>
-            <a:r>
-              <a:rPr lang="hu-HU" sz="1800">
-                <a:solidFill>
-                  <a:schemeClr val="dk1"/>
-                </a:solidFill>
-                <a:latin typeface="Arial"/>
-                <a:ea typeface="Arial"/>
-                <a:cs typeface="Arial"/>
-                <a:sym typeface="Arial"/>
-              </a:rPr>
-              <a:t>Route alapú navigáció</a:t>
-            </a:r>
-            <a:endParaRPr/>
-          </a:p>
-          <a:p>
-            <a:pPr marL="457200" marR="0" lvl="0" indent="0" algn="l" rtl="0">
-              <a:spcBef>
-                <a:spcPts val="0"/>
-              </a:spcBef>
-              <a:spcAft>
-                <a:spcPts val="0"/>
-              </a:spcAft>
-              <a:buNone/>
-            </a:pPr>
-            <a:endParaRPr sz="1800">
-              <a:solidFill>
-                <a:schemeClr val="dk1"/>
-              </a:solidFill>
-            </a:endParaRPr>
-          </a:p>
-          <a:p>
-            <a:pPr marL="285750" marR="0" lvl="0" indent="-285750" algn="l" rtl="0">
-              <a:spcBef>
-                <a:spcPts val="0"/>
-              </a:spcBef>
-              <a:spcAft>
-                <a:spcPts val="0"/>
-              </a:spcAft>
-              <a:buClr>
-                <a:schemeClr val="dk1"/>
-              </a:buClr>
-              <a:buSzPts val="1800"/>
-              <a:buFont typeface="Arial"/>
-              <a:buChar char="•"/>
-            </a:pPr>
-            <a:r>
-              <a:rPr lang="hu-HU" sz="1800">
-                <a:solidFill>
-                  <a:schemeClr val="dk1"/>
-                </a:solidFill>
-                <a:latin typeface="Arial"/>
-                <a:ea typeface="Arial"/>
-                <a:cs typeface="Arial"/>
-                <a:sym typeface="Arial"/>
-              </a:rPr>
-              <a:t>Szerepkörhöz igazított irányítópultok</a:t>
-            </a:r>
-            <a:endParaRPr/>
-          </a:p>
-          <a:p>
-            <a:pPr marL="457200" marR="0" lvl="0" indent="0" algn="l" rtl="0">
-              <a:spcBef>
-                <a:spcPts val="0"/>
-              </a:spcBef>
-              <a:spcAft>
-                <a:spcPts val="0"/>
-              </a:spcAft>
-              <a:buNone/>
-            </a:pPr>
-            <a:endParaRPr sz="1800">
-              <a:solidFill>
-                <a:schemeClr val="dk1"/>
-              </a:solidFill>
-            </a:endParaRPr>
-          </a:p>
-          <a:p>
-            <a:pPr marL="285750" marR="0" lvl="0" indent="-285750" algn="l" rtl="0">
-              <a:spcBef>
-                <a:spcPts val="0"/>
-              </a:spcBef>
-              <a:spcAft>
-                <a:spcPts val="0"/>
-              </a:spcAft>
-              <a:buClr>
-                <a:schemeClr val="dk1"/>
-              </a:buClr>
-              <a:buSzPts val="1800"/>
-              <a:buFont typeface="Arial"/>
-              <a:buChar char="•"/>
-            </a:pPr>
-            <a:r>
-              <a:rPr lang="hu-HU" sz="1800">
-                <a:solidFill>
-                  <a:schemeClr val="dk1"/>
-                </a:solidFill>
-                <a:latin typeface="Arial"/>
-                <a:ea typeface="Arial"/>
-                <a:cs typeface="Arial"/>
-                <a:sym typeface="Arial"/>
-              </a:rPr>
-              <a:t>Események listázása és esemény részletei oldal kapcsolata</a:t>
-            </a:r>
-            <a:endParaRPr/>
-          </a:p>
-          <a:p>
-            <a:pPr marL="457200" marR="0" lvl="0" indent="0" algn="l" rtl="0">
-              <a:spcBef>
-                <a:spcPts val="0"/>
-              </a:spcBef>
-              <a:spcAft>
-                <a:spcPts val="0"/>
-              </a:spcAft>
-              <a:buNone/>
-            </a:pPr>
-            <a:endParaRPr sz="1800">
-              <a:solidFill>
-                <a:schemeClr val="dk1"/>
-              </a:solidFill>
-            </a:endParaRPr>
-          </a:p>
-          <a:p>
-            <a:pPr marL="285750" marR="0" lvl="0" indent="-285750" algn="l" rtl="0">
-              <a:spcBef>
-                <a:spcPts val="0"/>
-              </a:spcBef>
-              <a:spcAft>
-                <a:spcPts val="0"/>
-              </a:spcAft>
-              <a:buClr>
-                <a:schemeClr val="dk1"/>
-              </a:buClr>
-              <a:buSzPts val="1800"/>
-              <a:buFont typeface="Arial"/>
-              <a:buChar char="•"/>
-            </a:pPr>
-            <a:r>
-              <a:rPr lang="hu-HU" sz="1800">
-                <a:solidFill>
-                  <a:schemeClr val="dk1"/>
-                </a:solidFill>
-                <a:latin typeface="Arial"/>
-                <a:ea typeface="Arial"/>
-                <a:cs typeface="Arial"/>
-                <a:sym typeface="Arial"/>
-              </a:rPr>
-              <a:t>Felhasználói állapotkezelés local/session tárolással</a:t>
-            </a:r>
-            <a:endParaRPr/>
-          </a:p>
-          <a:p>
-            <a:pPr marL="457200" marR="0" lvl="0" indent="0" algn="l" rtl="0">
-              <a:spcBef>
-                <a:spcPts val="0"/>
-              </a:spcBef>
-              <a:spcAft>
-                <a:spcPts val="0"/>
-              </a:spcAft>
-              <a:buNone/>
-            </a:pPr>
-            <a:endParaRPr sz="1800">
-              <a:solidFill>
-                <a:schemeClr val="dk1"/>
-              </a:solidFill>
-            </a:endParaRPr>
-          </a:p>
-          <a:p>
-            <a:pPr marL="285750" marR="0" lvl="0" indent="-285750" algn="l" rtl="0">
-              <a:spcBef>
-                <a:spcPts val="0"/>
-              </a:spcBef>
-              <a:spcAft>
-                <a:spcPts val="0"/>
-              </a:spcAft>
-              <a:buClr>
-                <a:schemeClr val="dk1"/>
-              </a:buClr>
-              <a:buSzPts val="1800"/>
-              <a:buFont typeface="Arial"/>
-              <a:buChar char="•"/>
-            </a:pPr>
-            <a:r>
-              <a:rPr lang="hu-HU" sz="1800">
-                <a:solidFill>
-                  <a:schemeClr val="dk1"/>
-                </a:solidFill>
-                <a:latin typeface="Arial"/>
-                <a:ea typeface="Arial"/>
-                <a:cs typeface="Arial"/>
-                <a:sym typeface="Arial"/>
-              </a:rPr>
-              <a:t>Reszponzív UI</a:t>
-            </a:r>
-            <a:endParaRPr/>
-          </a:p>
-          <a:p>
-            <a:pPr marL="457200" marR="0" lvl="0" indent="0" algn="l" rtl="0">
-              <a:spcBef>
-                <a:spcPts val="0"/>
-              </a:spcBef>
-              <a:spcAft>
-                <a:spcPts val="0"/>
-              </a:spcAft>
-              <a:buNone/>
-            </a:pPr>
-            <a:endParaRPr sz="1800">
-              <a:solidFill>
-                <a:schemeClr val="dk1"/>
-              </a:solidFill>
-            </a:endParaRPr>
-          </a:p>
-          <a:p>
-            <a:pPr marL="285750" marR="0" lvl="0" indent="-285750" algn="l" rtl="0">
-              <a:spcBef>
-                <a:spcPts val="0"/>
-              </a:spcBef>
-              <a:spcAft>
-                <a:spcPts val="0"/>
-              </a:spcAft>
-              <a:buClr>
-                <a:schemeClr val="dk1"/>
-              </a:buClr>
-              <a:buSzPts val="1800"/>
-              <a:buFont typeface="Arial"/>
-              <a:buChar char="•"/>
-            </a:pPr>
-            <a:r>
-              <a:rPr lang="hu-HU" sz="1800">
-                <a:solidFill>
-                  <a:schemeClr val="dk1"/>
-                </a:solidFill>
-                <a:latin typeface="Arial"/>
-                <a:ea typeface="Arial"/>
-                <a:cs typeface="Arial"/>
-                <a:sym typeface="Arial"/>
-              </a:rPr>
-              <a:t>Cél: gyors és egyszerű felhasználói élmény</a:t>
-            </a:r>
-            <a:endParaRPr/>
-          </a:p>
-        </p:txBody>
-      </p:sp>
-      <p:sp>
-        <p:nvSpPr>
-          <p:cNvPr id="150" name="Google Shape;150;p7"/>
-          <p:cNvSpPr/>
-          <p:nvPr/>
-        </p:nvSpPr>
-        <p:spPr>
-          <a:xfrm>
-            <a:off x="7826625" y="1335725"/>
-            <a:ext cx="3492600" cy="5292900"/>
-          </a:xfrm>
-          <a:prstGeom prst="ellipse">
-            <a:avLst/>
-          </a:prstGeom>
-          <a:solidFill>
-            <a:srgbClr val="4A86E8"/>
-          </a:solidFill>
-          <a:ln w="9525" cap="flat" cmpd="sng">
-            <a:solidFill>
-              <a:srgbClr val="CFE2F3"/>
-            </a:solidFill>
-            <a:prstDash val="solid"/>
-            <a:round/>
-            <a:headEnd type="none" w="sm" len="sm"/>
-            <a:tailEnd type="none" w="sm" len="sm"/>
-          </a:ln>
-        </p:spPr>
-        <p:txBody>
-          <a:bodyPr spcFirstLastPara="1" wrap="square" lIns="91425" tIns="91425" rIns="91425" bIns="91425" anchor="ctr" anchorCtr="0">
-            <a:noAutofit/>
-          </a:bodyPr>
-          <a:lstStyle/>
-          <a:p>
-            <a:pPr marL="0" lvl="0" indent="0" algn="ctr" rtl="0">
-              <a:spcBef>
-                <a:spcPts val="0"/>
-              </a:spcBef>
-              <a:spcAft>
-                <a:spcPts val="0"/>
-              </a:spcAft>
-              <a:buNone/>
-            </a:pPr>
-            <a:endParaRPr/>
-          </a:p>
-        </p:txBody>
-      </p:sp>
-      <p:pic>
-        <p:nvPicPr>
-          <p:cNvPr id="151" name="Google Shape;151;p7"/>
-          <p:cNvPicPr preferRelativeResize="0"/>
-          <p:nvPr/>
-        </p:nvPicPr>
-        <p:blipFill>
-          <a:blip r:embed="rId3">
-            <a:alphaModFix/>
-          </a:blip>
-          <a:stretch>
-            <a:fillRect/>
-          </a:stretch>
-        </p:blipFill>
-        <p:spPr>
-          <a:xfrm>
-            <a:off x="6789540" y="1714300"/>
-            <a:ext cx="5566768" cy="4823099"/>
-          </a:xfrm>
-          <a:prstGeom prst="rect">
-            <a:avLst/>
-          </a:prstGeom>
-          <a:ln>
-            <a:noFill/>
-          </a:ln>
-          <a:effectLst>
-            <a:outerShdw blurRad="292100" dist="139700" dir="2700000" algn="tl" rotWithShape="0">
-              <a:srgbClr val="333333">
-                <a:alpha val="65000"/>
-              </a:srgbClr>
-            </a:outerShdw>
-          </a:effectLst>
-        </p:spPr>
-      </p:pic>
-      <p:pic>
-        <p:nvPicPr>
-          <p:cNvPr id="2" name="Kép 1">
-            <a:extLst>
-              <a:ext uri="{FF2B5EF4-FFF2-40B4-BE49-F238E27FC236}">
-                <a16:creationId xmlns:a16="http://schemas.microsoft.com/office/drawing/2014/main" id="{7F97EB40-BCA8-156B-ADB7-A400002E5399}"/>
-              </a:ext>
-            </a:extLst>
-          </p:cNvPr>
-          <p:cNvPicPr>
-            <a:picLocks noChangeAspect="1"/>
-          </p:cNvPicPr>
-          <p:nvPr/>
-        </p:nvPicPr>
-        <p:blipFill>
-          <a:blip r:embed="rId4"/>
           <a:srcRect t="55" b="55"/>
           <a:stretch/>
         </p:blipFill>

--- a/dokumentumok/Prezentáció_NagyLevedSamuel_TothTamas.pptx
+++ b/dokumentumok/Prezentáció_NagyLevedSamuel_TothTamas.pptx
@@ -14,8 +14,8 @@
     <p:sldId id="259" r:id="rId5"/>
     <p:sldId id="262" r:id="rId6"/>
     <p:sldId id="260" r:id="rId7"/>
-    <p:sldId id="261" r:id="rId8"/>
-    <p:sldId id="263" r:id="rId9"/>
+    <p:sldId id="272" r:id="rId8"/>
+    <p:sldId id="261" r:id="rId9"/>
     <p:sldId id="264" r:id="rId10"/>
     <p:sldId id="271" r:id="rId11"/>
     <p:sldId id="265" r:id="rId12"/>
@@ -274,7 +274,7 @@
       <p15:sldGuideLst xmlns:p15="http://schemas.microsoft.com/office/powerpoint/2012/main"/>
     </p:ext>
     <p:ext uri="GoogleSlidesCustomDataVersion2">
-      <go:slidesCustomData xmlns="" xmlns:mc="http://schemas.openxmlformats.org/markup-compatibility/2006" xmlns:mv="urn:schemas-microsoft-com:mac:vml" xmlns:c="http://schemas.openxmlformats.org/drawingml/2006/chart" xmlns:dgm="http://schemas.openxmlformats.org/drawingml/2006/diagram" xmlns:o="urn:schemas-microsoft-com:office:office" xmlns:v="urn:schemas-microsoft-com:vml" xmlns:pvml="urn:schemas-microsoft-com:office:powerpoint" xmlns:com="http://schemas.openxmlformats.org/drawingml/2006/compatibility" xmlns:p14="http://schemas.microsoft.com/office/powerpoint/2010/main" xmlns:p15="http://schemas.microsoft.com/office/powerpoint/2012/main" xmlns:ahyp="http://schemas.microsoft.com/office/drawing/2018/hyperlinkcolor" xmlns:go="http://customooxmlschemas.google.com/" r:id="rId24" roundtripDataSignature="AMtx7mj67VHAuCHlscAUacmt/Mbt/wFFlA=="/>
+      <go:slidesCustomData xmlns:go="http://customooxmlschemas.google.com/" xmlns:ahyp="http://schemas.microsoft.com/office/drawing/2018/hyperlinkcolor" xmlns:p15="http://schemas.microsoft.com/office/powerpoint/2012/main" xmlns:p14="http://schemas.microsoft.com/office/powerpoint/2010/main" xmlns:com="http://schemas.openxmlformats.org/drawingml/2006/compatibility" xmlns:pvml="urn:schemas-microsoft-com:office:powerpoint" xmlns:v="urn:schemas-microsoft-com:vml" xmlns:o="urn:schemas-microsoft-com:office:office" xmlns:dgm="http://schemas.openxmlformats.org/drawingml/2006/diagram" xmlns:c="http://schemas.openxmlformats.org/drawingml/2006/chart" xmlns:mv="urn:schemas-microsoft-com:mac:vml" xmlns:mc="http://schemas.openxmlformats.org/markup-compatibility/2006" xmlns="" r:id="rId24" roundtripDataSignature="AMtx7mj67VHAuCHlscAUacmt/Mbt/wFFlA=="/>
     </p:ext>
   </p:extLst>
 </p:presentation>
@@ -2022,16 +2022,818 @@
           </a:bodyPr>
           <a:lstStyle/>
           <a:p>
-            <a:pPr marL="0" lvl="0" indent="0" algn="l" rtl="0">
-              <a:spcBef>
-                <a:spcPts val="0"/>
-              </a:spcBef>
-              <a:spcAft>
-                <a:spcPts val="0"/>
-              </a:spcAft>
+            <a:pPr marL="158750" indent="0">
               <a:buNone/>
             </a:pPr>
-            <a:endParaRPr/>
+            <a:r>
+              <a:rPr lang="hu-HU" dirty="0"/>
+              <a:t>Tomi:</a:t>
+            </a:r>
+          </a:p>
+          <a:p>
+            <a:pPr marL="158750" indent="0">
+              <a:buNone/>
+            </a:pPr>
+            <a:r>
+              <a:rPr lang="en-US" sz="1100" b="0" i="0" u="none" strike="noStrike" cap="none" dirty="0">
+                <a:solidFill>
+                  <a:srgbClr val="000000"/>
+                </a:solidFill>
+                <a:effectLst/>
+                <a:latin typeface="Arial"/>
+                <a:ea typeface="Arial"/>
+                <a:cs typeface="Arial"/>
+                <a:sym typeface="Arial"/>
+              </a:rPr>
+              <a:t>This is our home page. From here, users can either register or log in.</a:t>
+            </a:r>
+            <a:endParaRPr lang="hu-HU" sz="1100" b="0" i="0" u="none" strike="noStrike" cap="none" dirty="0">
+              <a:solidFill>
+                <a:srgbClr val="000000"/>
+              </a:solidFill>
+              <a:effectLst/>
+              <a:latin typeface="Arial"/>
+              <a:ea typeface="Arial"/>
+              <a:cs typeface="Arial"/>
+              <a:sym typeface="Arial"/>
+            </a:endParaRPr>
+          </a:p>
+          <a:p>
+            <a:pPr marL="158750" indent="0">
+              <a:buNone/>
+            </a:pPr>
+            <a:endParaRPr lang="en-US" sz="1100" b="0" i="0" u="none" strike="noStrike" cap="none" dirty="0">
+              <a:solidFill>
+                <a:srgbClr val="000000"/>
+              </a:solidFill>
+              <a:effectLst/>
+              <a:latin typeface="Arial"/>
+              <a:ea typeface="Arial"/>
+              <a:cs typeface="Arial"/>
+              <a:sym typeface="Arial"/>
+            </a:endParaRPr>
+          </a:p>
+          <a:p>
+            <a:pPr marL="158750" indent="0">
+              <a:buNone/>
+            </a:pPr>
+            <a:r>
+              <a:rPr lang="en-US" sz="1100" b="0" i="0" u="none" strike="noStrike" cap="none" dirty="0">
+                <a:solidFill>
+                  <a:srgbClr val="000000"/>
+                </a:solidFill>
+                <a:effectLst/>
+                <a:latin typeface="Arial"/>
+                <a:ea typeface="Arial"/>
+                <a:cs typeface="Arial"/>
+                <a:sym typeface="Arial"/>
+              </a:rPr>
+              <a:t>To create an account, users enter their name, email address, and password. After registration, the system sends a verification code by email. Once the account is confirmed, the user is redirected to the dashboard.</a:t>
+            </a:r>
+            <a:endParaRPr lang="hu-HU" sz="1100" b="0" i="0" u="none" strike="noStrike" cap="none" dirty="0">
+              <a:solidFill>
+                <a:srgbClr val="000000"/>
+              </a:solidFill>
+              <a:effectLst/>
+              <a:latin typeface="Arial"/>
+              <a:ea typeface="Arial"/>
+              <a:cs typeface="Arial"/>
+              <a:sym typeface="Arial"/>
+            </a:endParaRPr>
+          </a:p>
+          <a:p>
+            <a:pPr marL="158750" indent="0">
+              <a:buNone/>
+            </a:pPr>
+            <a:endParaRPr lang="en-US" sz="1100" b="0" i="0" u="none" strike="noStrike" cap="none" dirty="0">
+              <a:solidFill>
+                <a:srgbClr val="000000"/>
+              </a:solidFill>
+              <a:effectLst/>
+              <a:latin typeface="Arial"/>
+              <a:ea typeface="Arial"/>
+              <a:cs typeface="Arial"/>
+              <a:sym typeface="Arial"/>
+            </a:endParaRPr>
+          </a:p>
+          <a:p>
+            <a:pPr marL="158750" indent="0">
+              <a:buNone/>
+            </a:pPr>
+            <a:r>
+              <a:rPr lang="en-US" sz="1100" b="0" i="0" u="none" strike="noStrike" cap="none" dirty="0">
+                <a:solidFill>
+                  <a:srgbClr val="000000"/>
+                </a:solidFill>
+                <a:effectLst/>
+                <a:latin typeface="Arial"/>
+                <a:ea typeface="Arial"/>
+                <a:cs typeface="Arial"/>
+                <a:sym typeface="Arial"/>
+              </a:rPr>
+              <a:t>In today’s presentation, we log in with a pre-created demo account.</a:t>
+            </a:r>
+            <a:br>
+              <a:rPr lang="en-US" sz="1100" b="0" i="0" u="none" strike="noStrike" cap="none" dirty="0">
+                <a:solidFill>
+                  <a:srgbClr val="000000"/>
+                </a:solidFill>
+                <a:effectLst/>
+                <a:latin typeface="Arial"/>
+                <a:ea typeface="Arial"/>
+                <a:cs typeface="Arial"/>
+                <a:sym typeface="Arial"/>
+              </a:rPr>
+            </a:br>
+            <a:r>
+              <a:rPr lang="en-US" sz="1100" b="0" i="0" u="none" strike="noStrike" cap="none" dirty="0">
+                <a:solidFill>
+                  <a:srgbClr val="000000"/>
+                </a:solidFill>
+                <a:effectLst/>
+                <a:latin typeface="Arial"/>
+                <a:ea typeface="Arial"/>
+                <a:cs typeface="Arial"/>
+                <a:sym typeface="Arial"/>
+              </a:rPr>
+              <a:t>After logging in, the user is also redirected to the dashboard.</a:t>
+            </a:r>
+            <a:endParaRPr lang="hu-HU" sz="1100" b="0" i="0" u="none" strike="noStrike" cap="none" dirty="0">
+              <a:solidFill>
+                <a:srgbClr val="000000"/>
+              </a:solidFill>
+              <a:effectLst/>
+              <a:latin typeface="Arial"/>
+              <a:ea typeface="Arial"/>
+              <a:cs typeface="Arial"/>
+              <a:sym typeface="Arial"/>
+            </a:endParaRPr>
+          </a:p>
+          <a:p>
+            <a:pPr marL="158750" indent="0">
+              <a:buNone/>
+            </a:pPr>
+            <a:endParaRPr lang="en-US" sz="1100" b="0" i="0" u="none" strike="noStrike" cap="none" dirty="0">
+              <a:solidFill>
+                <a:srgbClr val="000000"/>
+              </a:solidFill>
+              <a:effectLst/>
+              <a:latin typeface="Arial"/>
+              <a:ea typeface="Arial"/>
+              <a:cs typeface="Arial"/>
+              <a:sym typeface="Arial"/>
+            </a:endParaRPr>
+          </a:p>
+          <a:p>
+            <a:pPr marL="158750" indent="0">
+              <a:buNone/>
+            </a:pPr>
+            <a:r>
+              <a:rPr lang="en-US" sz="1100" b="0" i="0" u="none" strike="noStrike" cap="none" dirty="0">
+                <a:solidFill>
+                  <a:srgbClr val="000000"/>
+                </a:solidFill>
+                <a:effectLst/>
+                <a:latin typeface="Arial"/>
+                <a:ea typeface="Arial"/>
+                <a:cs typeface="Arial"/>
+                <a:sym typeface="Arial"/>
+              </a:rPr>
+              <a:t>On the dashboard, users choose a role: student, teacher, or administrator.</a:t>
+            </a:r>
+            <a:br>
+              <a:rPr lang="en-US" sz="1100" b="0" i="0" u="none" strike="noStrike" cap="none" dirty="0">
+                <a:solidFill>
+                  <a:srgbClr val="000000"/>
+                </a:solidFill>
+                <a:effectLst/>
+                <a:latin typeface="Arial"/>
+                <a:ea typeface="Arial"/>
+                <a:cs typeface="Arial"/>
+                <a:sym typeface="Arial"/>
+              </a:rPr>
+            </a:br>
+            <a:r>
+              <a:rPr lang="en-US" sz="1100" b="0" i="0" u="none" strike="noStrike" cap="none" dirty="0">
+                <a:solidFill>
+                  <a:srgbClr val="000000"/>
+                </a:solidFill>
+                <a:effectLst/>
+                <a:latin typeface="Arial"/>
+                <a:ea typeface="Arial"/>
+                <a:cs typeface="Arial"/>
+                <a:sym typeface="Arial"/>
+              </a:rPr>
+              <a:t>For this demo, we continue with the administrator role.</a:t>
+            </a:r>
+            <a:br>
+              <a:rPr lang="en-US" sz="1100" b="0" i="0" u="none" strike="noStrike" cap="none" dirty="0">
+                <a:solidFill>
+                  <a:srgbClr val="000000"/>
+                </a:solidFill>
+                <a:effectLst/>
+                <a:latin typeface="Arial"/>
+                <a:ea typeface="Arial"/>
+                <a:cs typeface="Arial"/>
+                <a:sym typeface="Arial"/>
+              </a:rPr>
+            </a:br>
+            <a:r>
+              <a:rPr lang="en-US" sz="1100" b="0" i="0" u="none" strike="noStrike" cap="none" dirty="0">
+                <a:solidFill>
+                  <a:srgbClr val="000000"/>
+                </a:solidFill>
+                <a:effectLst/>
+                <a:latin typeface="Arial"/>
+                <a:ea typeface="Arial"/>
+                <a:cs typeface="Arial"/>
+                <a:sym typeface="Arial"/>
+              </a:rPr>
+              <a:t>After that, users select their location step by step, and the system displays the schools available in the selected city.</a:t>
+            </a:r>
+            <a:endParaRPr lang="hu-HU" sz="1100" b="0" i="0" u="none" strike="noStrike" cap="none" dirty="0">
+              <a:solidFill>
+                <a:srgbClr val="000000"/>
+              </a:solidFill>
+              <a:effectLst/>
+              <a:latin typeface="Arial"/>
+              <a:ea typeface="Arial"/>
+              <a:cs typeface="Arial"/>
+              <a:sym typeface="Arial"/>
+            </a:endParaRPr>
+          </a:p>
+          <a:p>
+            <a:pPr marL="158750" indent="0">
+              <a:buNone/>
+            </a:pPr>
+            <a:endParaRPr lang="en-US" sz="1100" b="0" i="0" u="none" strike="noStrike" cap="none" dirty="0">
+              <a:solidFill>
+                <a:srgbClr val="000000"/>
+              </a:solidFill>
+              <a:effectLst/>
+              <a:latin typeface="Arial"/>
+              <a:ea typeface="Arial"/>
+              <a:cs typeface="Arial"/>
+              <a:sym typeface="Arial"/>
+            </a:endParaRPr>
+          </a:p>
+          <a:p>
+            <a:pPr marL="158750" indent="0">
+              <a:buNone/>
+            </a:pPr>
+            <a:r>
+              <a:rPr lang="en-US" sz="1100" b="0" i="0" u="none" strike="noStrike" cap="none" dirty="0">
+                <a:solidFill>
+                  <a:srgbClr val="000000"/>
+                </a:solidFill>
+                <a:effectLst/>
+                <a:latin typeface="Arial"/>
+                <a:ea typeface="Arial"/>
+                <a:cs typeface="Arial"/>
+                <a:sym typeface="Arial"/>
+              </a:rPr>
+              <a:t>Students and teachers can apply to join a school. Their request remains pending until an administrator approves it.</a:t>
+            </a:r>
+            <a:br>
+              <a:rPr lang="en-US" sz="1100" b="0" i="0" u="none" strike="noStrike" cap="none" dirty="0">
+                <a:solidFill>
+                  <a:srgbClr val="000000"/>
+                </a:solidFill>
+                <a:effectLst/>
+                <a:latin typeface="Arial"/>
+                <a:ea typeface="Arial"/>
+                <a:cs typeface="Arial"/>
+                <a:sym typeface="Arial"/>
+              </a:rPr>
+            </a:br>
+            <a:r>
+              <a:rPr lang="en-US" sz="1100" b="0" i="0" u="none" strike="noStrike" cap="none" dirty="0">
+                <a:solidFill>
+                  <a:srgbClr val="000000"/>
+                </a:solidFill>
+                <a:effectLst/>
+                <a:latin typeface="Arial"/>
+                <a:ea typeface="Arial"/>
+                <a:cs typeface="Arial"/>
+                <a:sym typeface="Arial"/>
+              </a:rPr>
+              <a:t>The administrator flow is slightly different: administrators can register a new institution by entering the basic details, then handle incoming requests and assign users to classes.</a:t>
+            </a:r>
+            <a:endParaRPr lang="hu-HU" sz="1100" b="0" i="0" u="none" strike="noStrike" cap="none" dirty="0">
+              <a:solidFill>
+                <a:srgbClr val="000000"/>
+              </a:solidFill>
+              <a:effectLst/>
+              <a:latin typeface="Arial"/>
+              <a:ea typeface="Arial"/>
+              <a:cs typeface="Arial"/>
+              <a:sym typeface="Arial"/>
+            </a:endParaRPr>
+          </a:p>
+          <a:p>
+            <a:pPr marL="158750" indent="0">
+              <a:buNone/>
+            </a:pPr>
+            <a:endParaRPr lang="en-US" sz="1100" b="0" i="0" u="none" strike="noStrike" cap="none" dirty="0">
+              <a:solidFill>
+                <a:srgbClr val="000000"/>
+              </a:solidFill>
+              <a:effectLst/>
+              <a:latin typeface="Arial"/>
+              <a:ea typeface="Arial"/>
+              <a:cs typeface="Arial"/>
+              <a:sym typeface="Arial"/>
+            </a:endParaRPr>
+          </a:p>
+          <a:p>
+            <a:pPr marL="158750" indent="0">
+              <a:buNone/>
+            </a:pPr>
+            <a:r>
+              <a:rPr lang="en-US" sz="1100" b="0" i="0" u="none" strike="noStrike" cap="none" dirty="0">
+                <a:solidFill>
+                  <a:srgbClr val="000000"/>
+                </a:solidFill>
+                <a:effectLst/>
+                <a:latin typeface="Arial"/>
+                <a:ea typeface="Arial"/>
+                <a:cs typeface="Arial"/>
+                <a:sym typeface="Arial"/>
+              </a:rPr>
+              <a:t>After approval, users can access the main platform features.</a:t>
+            </a:r>
+            <a:endParaRPr lang="hu-HU" sz="1100" b="0" i="0" u="none" strike="noStrike" cap="none" dirty="0">
+              <a:solidFill>
+                <a:srgbClr val="000000"/>
+              </a:solidFill>
+              <a:effectLst/>
+              <a:latin typeface="Arial"/>
+              <a:ea typeface="Arial"/>
+              <a:cs typeface="Arial"/>
+              <a:sym typeface="Arial"/>
+            </a:endParaRPr>
+          </a:p>
+          <a:p>
+            <a:pPr marL="158750" indent="0">
+              <a:buNone/>
+            </a:pPr>
+            <a:endParaRPr lang="hu-HU" sz="1100" b="0" i="0" u="none" strike="noStrike" cap="none" dirty="0">
+              <a:solidFill>
+                <a:srgbClr val="000000"/>
+              </a:solidFill>
+              <a:effectLst/>
+              <a:latin typeface="Arial"/>
+              <a:cs typeface="Arial"/>
+              <a:sym typeface="Arial"/>
+            </a:endParaRPr>
+          </a:p>
+          <a:p>
+            <a:pPr marL="158750" indent="0">
+              <a:buNone/>
+            </a:pPr>
+            <a:r>
+              <a:rPr lang="hu-HU" dirty="0"/>
+              <a:t>Samu:</a:t>
+            </a:r>
+          </a:p>
+          <a:p>
+            <a:pPr marL="158750" indent="0">
+              <a:buNone/>
+            </a:pPr>
+            <a:r>
+              <a:rPr lang="en-US" sz="1100" b="0" i="0" u="none" strike="noStrike" cap="none" dirty="0">
+                <a:solidFill>
+                  <a:srgbClr val="000000"/>
+                </a:solidFill>
+                <a:effectLst/>
+                <a:latin typeface="Arial"/>
+                <a:ea typeface="Arial"/>
+                <a:cs typeface="Arial"/>
+                <a:sym typeface="Arial"/>
+              </a:rPr>
+              <a:t>In the Events section, users can view the events relevant to them.</a:t>
+            </a:r>
+            <a:br>
+              <a:rPr lang="en-US" sz="1100" b="0" i="0" u="none" strike="noStrike" cap="none" dirty="0">
+                <a:solidFill>
+                  <a:srgbClr val="000000"/>
+                </a:solidFill>
+                <a:effectLst/>
+                <a:latin typeface="Arial"/>
+                <a:ea typeface="Arial"/>
+                <a:cs typeface="Arial"/>
+                <a:sym typeface="Arial"/>
+              </a:rPr>
+            </a:br>
+            <a:r>
+              <a:rPr lang="en-US" sz="1100" b="0" i="0" u="none" strike="noStrike" cap="none" dirty="0">
+                <a:solidFill>
+                  <a:srgbClr val="000000"/>
+                </a:solidFill>
+                <a:effectLst/>
+                <a:latin typeface="Arial"/>
+                <a:ea typeface="Arial"/>
+                <a:cs typeface="Arial"/>
+                <a:sym typeface="Arial"/>
+              </a:rPr>
+              <a:t>They can filter by type, for example local or global, and by status, for example active or closed events.</a:t>
+            </a:r>
+            <a:br>
+              <a:rPr lang="en-US" sz="1100" b="0" i="0" u="none" strike="noStrike" cap="none" dirty="0">
+                <a:solidFill>
+                  <a:srgbClr val="000000"/>
+                </a:solidFill>
+                <a:effectLst/>
+                <a:latin typeface="Arial"/>
+                <a:ea typeface="Arial"/>
+                <a:cs typeface="Arial"/>
+                <a:sym typeface="Arial"/>
+              </a:rPr>
+            </a:br>
+            <a:r>
+              <a:rPr lang="en-US" sz="1100" b="0" i="0" u="none" strike="noStrike" cap="none" dirty="0">
+                <a:solidFill>
+                  <a:srgbClr val="000000"/>
+                </a:solidFill>
+                <a:effectLst/>
+                <a:latin typeface="Arial"/>
+                <a:ea typeface="Arial"/>
+                <a:cs typeface="Arial"/>
+                <a:sym typeface="Arial"/>
+              </a:rPr>
+              <a:t>They can also sort the list and switch to calendar view.</a:t>
+            </a:r>
+            <a:endParaRPr lang="hu-HU" sz="1100" b="0" i="0" u="none" strike="noStrike" cap="none" dirty="0">
+              <a:solidFill>
+                <a:srgbClr val="000000"/>
+              </a:solidFill>
+              <a:effectLst/>
+              <a:latin typeface="Arial"/>
+              <a:ea typeface="Arial"/>
+              <a:cs typeface="Arial"/>
+              <a:sym typeface="Arial"/>
+            </a:endParaRPr>
+          </a:p>
+          <a:p>
+            <a:endParaRPr lang="en-US" sz="1100" b="0" i="0" u="none" strike="noStrike" cap="none" dirty="0">
+              <a:solidFill>
+                <a:srgbClr val="000000"/>
+              </a:solidFill>
+              <a:effectLst/>
+              <a:latin typeface="Arial"/>
+              <a:ea typeface="Arial"/>
+              <a:cs typeface="Arial"/>
+              <a:sym typeface="Arial"/>
+            </a:endParaRPr>
+          </a:p>
+          <a:p>
+            <a:pPr marL="158750" indent="0">
+              <a:buNone/>
+            </a:pPr>
+            <a:r>
+              <a:rPr lang="en-US" sz="1100" b="0" i="0" u="none" strike="noStrike" cap="none" dirty="0">
+                <a:solidFill>
+                  <a:srgbClr val="000000"/>
+                </a:solidFill>
+                <a:effectLst/>
+                <a:latin typeface="Arial"/>
+                <a:ea typeface="Arial"/>
+                <a:cs typeface="Arial"/>
+                <a:sym typeface="Arial"/>
+              </a:rPr>
+              <a:t>When opening an event, users can see all key details and decide whether to participate.</a:t>
+            </a:r>
+            <a:br>
+              <a:rPr lang="en-US" sz="1100" b="0" i="0" u="none" strike="noStrike" cap="none" dirty="0">
+                <a:solidFill>
+                  <a:srgbClr val="000000"/>
+                </a:solidFill>
+                <a:effectLst/>
+                <a:latin typeface="Arial"/>
+                <a:ea typeface="Arial"/>
+                <a:cs typeface="Arial"/>
+                <a:sym typeface="Arial"/>
+              </a:rPr>
+            </a:br>
+            <a:r>
+              <a:rPr lang="en-US" sz="1100" b="0" i="0" u="none" strike="noStrike" cap="none" dirty="0">
+                <a:solidFill>
+                  <a:srgbClr val="000000"/>
+                </a:solidFill>
+                <a:effectLst/>
+                <a:latin typeface="Arial"/>
+                <a:ea typeface="Arial"/>
+                <a:cs typeface="Arial"/>
+                <a:sym typeface="Arial"/>
+              </a:rPr>
+              <a:t>They can also vote, comment, and save events as favorites.</a:t>
+            </a:r>
+            <a:br>
+              <a:rPr lang="en-US" sz="1100" b="0" i="0" u="none" strike="noStrike" cap="none" dirty="0">
+                <a:solidFill>
+                  <a:srgbClr val="000000"/>
+                </a:solidFill>
+                <a:effectLst/>
+                <a:latin typeface="Arial"/>
+                <a:ea typeface="Arial"/>
+                <a:cs typeface="Arial"/>
+                <a:sym typeface="Arial"/>
+              </a:rPr>
+            </a:br>
+            <a:r>
+              <a:rPr lang="en-US" sz="1100" b="0" i="0" u="none" strike="noStrike" cap="none" dirty="0">
+                <a:solidFill>
+                  <a:srgbClr val="000000"/>
+                </a:solidFill>
+                <a:effectLst/>
+                <a:latin typeface="Arial"/>
+                <a:ea typeface="Arial"/>
+                <a:cs typeface="Arial"/>
+                <a:sym typeface="Arial"/>
+              </a:rPr>
+              <a:t>In the student view, this part looks almost the same, but with fewer administrative actions.</a:t>
+            </a:r>
+            <a:endParaRPr lang="hu-HU" sz="1100" b="0" i="0" u="none" strike="noStrike" cap="none" dirty="0">
+              <a:solidFill>
+                <a:srgbClr val="000000"/>
+              </a:solidFill>
+              <a:effectLst/>
+              <a:latin typeface="Arial"/>
+              <a:ea typeface="Arial"/>
+              <a:cs typeface="Arial"/>
+              <a:sym typeface="Arial"/>
+            </a:endParaRPr>
+          </a:p>
+          <a:p>
+            <a:endParaRPr lang="en-US" sz="1100" b="0" i="0" u="none" strike="noStrike" cap="none" dirty="0">
+              <a:solidFill>
+                <a:srgbClr val="000000"/>
+              </a:solidFill>
+              <a:effectLst/>
+              <a:latin typeface="Arial"/>
+              <a:ea typeface="Arial"/>
+              <a:cs typeface="Arial"/>
+              <a:sym typeface="Arial"/>
+            </a:endParaRPr>
+          </a:p>
+          <a:p>
+            <a:pPr marL="158750" indent="0">
+              <a:buNone/>
+            </a:pPr>
+            <a:r>
+              <a:rPr lang="en-US" sz="1100" b="0" i="0" u="none" strike="noStrike" cap="none" dirty="0">
+                <a:solidFill>
+                  <a:srgbClr val="000000"/>
+                </a:solidFill>
+                <a:effectLst/>
+                <a:latin typeface="Arial"/>
+                <a:ea typeface="Arial"/>
+                <a:cs typeface="Arial"/>
+                <a:sym typeface="Arial"/>
+              </a:rPr>
+              <a:t>For event creation, teachers and administrators can create school-level events.</a:t>
+            </a:r>
+            <a:br>
+              <a:rPr lang="en-US" sz="1100" b="0" i="0" u="none" strike="noStrike" cap="none" dirty="0">
+                <a:solidFill>
+                  <a:srgbClr val="000000"/>
+                </a:solidFill>
+                <a:effectLst/>
+                <a:latin typeface="Arial"/>
+                <a:ea typeface="Arial"/>
+                <a:cs typeface="Arial"/>
+                <a:sym typeface="Arial"/>
+              </a:rPr>
+            </a:br>
+            <a:r>
+              <a:rPr lang="en-US" sz="1100" b="0" i="0" u="none" strike="noStrike" cap="none" dirty="0">
+                <a:solidFill>
+                  <a:srgbClr val="000000"/>
+                </a:solidFill>
+                <a:effectLst/>
+                <a:latin typeface="Arial"/>
+                <a:ea typeface="Arial"/>
+                <a:cs typeface="Arial"/>
+                <a:sym typeface="Arial"/>
+              </a:rPr>
+              <a:t>However, global events that affect multiple schools can only be created by administrators.</a:t>
+            </a:r>
+            <a:endParaRPr lang="hu-HU" sz="1100" b="0" i="0" u="none" strike="noStrike" cap="none" dirty="0">
+              <a:solidFill>
+                <a:srgbClr val="000000"/>
+              </a:solidFill>
+              <a:effectLst/>
+              <a:latin typeface="Arial"/>
+              <a:ea typeface="Arial"/>
+              <a:cs typeface="Arial"/>
+              <a:sym typeface="Arial"/>
+            </a:endParaRPr>
+          </a:p>
+          <a:p>
+            <a:endParaRPr lang="en-US" sz="1100" b="0" i="0" u="none" strike="noStrike" cap="none" dirty="0">
+              <a:solidFill>
+                <a:srgbClr val="000000"/>
+              </a:solidFill>
+              <a:effectLst/>
+              <a:latin typeface="Arial"/>
+              <a:ea typeface="Arial"/>
+              <a:cs typeface="Arial"/>
+              <a:sym typeface="Arial"/>
+            </a:endParaRPr>
+          </a:p>
+          <a:p>
+            <a:pPr marL="158750" indent="0">
+              <a:buNone/>
+            </a:pPr>
+            <a:r>
+              <a:rPr lang="en-US" sz="1100" b="0" i="0" u="none" strike="noStrike" cap="none" dirty="0">
+                <a:solidFill>
+                  <a:srgbClr val="000000"/>
+                </a:solidFill>
+                <a:effectLst/>
+                <a:latin typeface="Arial"/>
+                <a:ea typeface="Arial"/>
+                <a:cs typeface="Arial"/>
+                <a:sym typeface="Arial"/>
+              </a:rPr>
+              <a:t>For global events, the administrator selects the target areas or schools, fills in the details, and submits the event.</a:t>
+            </a:r>
+            <a:br>
+              <a:rPr lang="en-US" sz="1100" b="0" i="0" u="none" strike="noStrike" cap="none" dirty="0">
+                <a:solidFill>
+                  <a:srgbClr val="000000"/>
+                </a:solidFill>
+                <a:effectLst/>
+                <a:latin typeface="Arial"/>
+                <a:ea typeface="Arial"/>
+                <a:cs typeface="Arial"/>
+                <a:sym typeface="Arial"/>
+              </a:rPr>
+            </a:br>
+            <a:r>
+              <a:rPr lang="en-US" sz="1100" b="0" i="0" u="none" strike="noStrike" cap="none" dirty="0">
+                <a:solidFill>
+                  <a:srgbClr val="000000"/>
+                </a:solidFill>
+                <a:effectLst/>
+                <a:latin typeface="Arial"/>
+                <a:ea typeface="Arial"/>
+                <a:cs typeface="Arial"/>
+                <a:sym typeface="Arial"/>
+              </a:rPr>
+              <a:t>After that, local school administrators can accept or reject it.</a:t>
+            </a:r>
+            <a:endParaRPr lang="hu-HU" sz="1100" b="0" i="0" u="none" strike="noStrike" cap="none" dirty="0">
+              <a:solidFill>
+                <a:srgbClr val="000000"/>
+              </a:solidFill>
+              <a:effectLst/>
+              <a:latin typeface="Arial"/>
+              <a:ea typeface="Arial"/>
+              <a:cs typeface="Arial"/>
+              <a:sym typeface="Arial"/>
+            </a:endParaRPr>
+          </a:p>
+          <a:p>
+            <a:endParaRPr lang="en-US" sz="1100" b="0" i="0" u="none" strike="noStrike" cap="none" dirty="0">
+              <a:solidFill>
+                <a:srgbClr val="000000"/>
+              </a:solidFill>
+              <a:effectLst/>
+              <a:latin typeface="Arial"/>
+              <a:ea typeface="Arial"/>
+              <a:cs typeface="Arial"/>
+              <a:sym typeface="Arial"/>
+            </a:endParaRPr>
+          </a:p>
+          <a:p>
+            <a:pPr marL="158750" indent="0">
+              <a:buNone/>
+            </a:pPr>
+            <a:r>
+              <a:rPr lang="en-US" sz="1100" b="0" i="0" u="none" strike="noStrike" cap="none" dirty="0">
+                <a:solidFill>
+                  <a:srgbClr val="000000"/>
+                </a:solidFill>
+                <a:effectLst/>
+                <a:latin typeface="Arial"/>
+                <a:ea typeface="Arial"/>
+                <a:cs typeface="Arial"/>
+                <a:sym typeface="Arial"/>
+              </a:rPr>
+              <a:t>For school-level events, the target group can be defined precisely: for example a specific class, a full grade level, or the entire school.</a:t>
+            </a:r>
+            <a:endParaRPr lang="hu-HU" sz="1100" b="0" i="0" u="none" strike="noStrike" cap="none" dirty="0">
+              <a:solidFill>
+                <a:srgbClr val="000000"/>
+              </a:solidFill>
+              <a:effectLst/>
+              <a:latin typeface="Arial"/>
+              <a:ea typeface="Arial"/>
+              <a:cs typeface="Arial"/>
+              <a:sym typeface="Arial"/>
+            </a:endParaRPr>
+          </a:p>
+          <a:p>
+            <a:endParaRPr lang="en-US" sz="1100" b="0" i="0" u="none" strike="noStrike" cap="none" dirty="0">
+              <a:solidFill>
+                <a:srgbClr val="000000"/>
+              </a:solidFill>
+              <a:effectLst/>
+              <a:latin typeface="Arial"/>
+              <a:ea typeface="Arial"/>
+              <a:cs typeface="Arial"/>
+              <a:sym typeface="Arial"/>
+            </a:endParaRPr>
+          </a:p>
+          <a:p>
+            <a:pPr marL="158750" indent="0">
+              <a:buNone/>
+            </a:pPr>
+            <a:r>
+              <a:rPr lang="en-US" sz="1100" b="0" i="0" u="none" strike="noStrike" cap="none" dirty="0">
+                <a:solidFill>
+                  <a:srgbClr val="000000"/>
+                </a:solidFill>
+                <a:effectLst/>
+                <a:latin typeface="Arial"/>
+                <a:ea typeface="Arial"/>
+                <a:cs typeface="Arial"/>
+                <a:sym typeface="Arial"/>
+              </a:rPr>
+              <a:t>The platform also supports recurring weekly events.</a:t>
+            </a:r>
+            <a:br>
+              <a:rPr lang="en-US" sz="1100" b="0" i="0" u="none" strike="noStrike" cap="none" dirty="0">
+                <a:solidFill>
+                  <a:srgbClr val="000000"/>
+                </a:solidFill>
+                <a:effectLst/>
+                <a:latin typeface="Arial"/>
+                <a:ea typeface="Arial"/>
+                <a:cs typeface="Arial"/>
+                <a:sym typeface="Arial"/>
+              </a:rPr>
+            </a:br>
+            <a:r>
+              <a:rPr lang="en-US" sz="1100" b="0" i="0" u="none" strike="noStrike" cap="none" dirty="0">
+                <a:solidFill>
+                  <a:srgbClr val="000000"/>
+                </a:solidFill>
+                <a:effectLst/>
+                <a:latin typeface="Arial"/>
+                <a:ea typeface="Arial"/>
+                <a:cs typeface="Arial"/>
+                <a:sym typeface="Arial"/>
+              </a:rPr>
+              <a:t>In this case, users set the day, start time, duration, and date range, and the system automatically creates all sessions.</a:t>
+            </a:r>
+            <a:endParaRPr lang="hu-HU" sz="1100" b="0" i="0" u="none" strike="noStrike" cap="none" dirty="0">
+              <a:solidFill>
+                <a:srgbClr val="000000"/>
+              </a:solidFill>
+              <a:effectLst/>
+              <a:latin typeface="Arial"/>
+              <a:ea typeface="Arial"/>
+              <a:cs typeface="Arial"/>
+              <a:sym typeface="Arial"/>
+            </a:endParaRPr>
+          </a:p>
+          <a:p>
+            <a:endParaRPr lang="en-US" sz="1100" b="0" i="0" u="none" strike="noStrike" cap="none" dirty="0">
+              <a:solidFill>
+                <a:srgbClr val="000000"/>
+              </a:solidFill>
+              <a:effectLst/>
+              <a:latin typeface="Arial"/>
+              <a:ea typeface="Arial"/>
+              <a:cs typeface="Arial"/>
+              <a:sym typeface="Arial"/>
+            </a:endParaRPr>
+          </a:p>
+          <a:p>
+            <a:pPr marL="158750" indent="0">
+              <a:buNone/>
+            </a:pPr>
+            <a:r>
+              <a:rPr lang="en-US" sz="1100" b="0" i="0" u="none" strike="noStrike" cap="none" dirty="0">
+                <a:solidFill>
+                  <a:srgbClr val="000000"/>
+                </a:solidFill>
+                <a:effectLst/>
+                <a:latin typeface="Arial"/>
+                <a:ea typeface="Arial"/>
+                <a:cs typeface="Arial"/>
+                <a:sym typeface="Arial"/>
+              </a:rPr>
+              <a:t>Finally, on the Profile page, users can view their personal information.</a:t>
+            </a:r>
+          </a:p>
+          <a:p>
+            <a:pPr marL="158750" indent="0">
+              <a:buNone/>
+            </a:pPr>
+            <a:endParaRPr lang="hu-HU" dirty="0"/>
           </a:p>
         </p:txBody>
       </p:sp>
@@ -2942,7 +3744,7 @@
                 <a:cs typeface="Arial"/>
                 <a:sym typeface="Arial"/>
               </a:rPr>
-              <a:t>A frontend egy </a:t>
+              <a:t>A frontendünk </a:t>
             </a:r>
             <a:r>
               <a:rPr lang="hu-HU" sz="1100" b="0" i="0" u="none" strike="noStrike" cap="none" dirty="0" err="1">
@@ -2968,21 +3770,10 @@
                 <a:cs typeface="Arial"/>
                 <a:sym typeface="Arial"/>
               </a:rPr>
-              <a:t> 3 alapú egyoldalas alkalmazás. </a:t>
-            </a:r>
-          </a:p>
-          <a:p>
-            <a:pPr marL="0" lvl="0" indent="0" algn="l" rtl="0">
-              <a:spcBef>
-                <a:spcPts val="0"/>
-              </a:spcBef>
-              <a:spcAft>
-                <a:spcPts val="0"/>
-              </a:spcAft>
-              <a:buNone/>
-            </a:pPr>
-            <a:r>
-              <a:rPr lang="hu-HU" sz="1100" b="0" i="0" u="none" strike="noStrike" cap="none" dirty="0">
+              <a:t> 3 alapú SPA, ahol </a:t>
+            </a:r>
+            <a:r>
+              <a:rPr lang="hu-HU" sz="1100" b="0" i="0" u="none" strike="noStrike" cap="none" dirty="0" err="1">
                 <a:solidFill>
                   <a:srgbClr val="000000"/>
                 </a:solidFill>
@@ -2992,10 +3783,10 @@
                 <a:cs typeface="Arial"/>
                 <a:sym typeface="Arial"/>
               </a:rPr>
-              <a:t>A felhasználó </a:t>
-            </a:r>
-            <a:r>
-              <a:rPr lang="hu-HU" sz="1100" b="0" i="0" u="none" strike="noStrike" cap="none" dirty="0" err="1">
+              <a:t>route</a:t>
+            </a:r>
+            <a:r>
+              <a:rPr lang="hu-HU" sz="1100" b="0" i="0" u="none" strike="noStrike" cap="none" dirty="0">
                 <a:solidFill>
                   <a:srgbClr val="000000"/>
                 </a:solidFill>
@@ -3005,8 +3796,19 @@
                 <a:cs typeface="Arial"/>
                 <a:sym typeface="Arial"/>
               </a:rPr>
-              <a:t>route</a:t>
-            </a:r>
+              <a:t> alapú navigációval kezeljük az oldalak közötti váltást.</a:t>
+            </a:r>
+          </a:p>
+          <a:p>
+            <a:pPr marL="0" lvl="0" indent="0" algn="l" rtl="0">
+              <a:spcBef>
+                <a:spcPts val="0"/>
+              </a:spcBef>
+              <a:spcAft>
+                <a:spcPts val="0"/>
+              </a:spcAft>
+              <a:buNone/>
+            </a:pPr>
             <a:r>
               <a:rPr lang="hu-HU" sz="1100" b="0" i="0" u="none" strike="noStrike" cap="none" dirty="0">
                 <a:solidFill>
@@ -3018,10 +3820,21 @@
                 <a:cs typeface="Arial"/>
                 <a:sym typeface="Arial"/>
               </a:rPr>
-              <a:t>-okon keresztül éri el a fő funkciókat, például az eseménylistát, </a:t>
-            </a:r>
-            <a:r>
-              <a:rPr lang="hu-HU" sz="1100" b="0" i="0" u="none" strike="noStrike" cap="none" dirty="0" err="1">
+              <a:t>A felület komponensalapúan épül fel, funkciók szerint csoportosítva, ezért jól átlátható és bővíthető. </a:t>
+            </a:r>
+          </a:p>
+          <a:p>
+            <a:pPr marL="0" lvl="0" indent="0" algn="l" rtl="0">
+              <a:spcBef>
+                <a:spcPts val="0"/>
+              </a:spcBef>
+              <a:spcAft>
+                <a:spcPts val="0"/>
+              </a:spcAft>
+              <a:buNone/>
+            </a:pPr>
+            <a:r>
+              <a:rPr lang="hu-HU" sz="1100" b="0" i="0" u="none" strike="noStrike" cap="none" dirty="0">
                 <a:solidFill>
                   <a:srgbClr val="000000"/>
                 </a:solidFill>
@@ -3031,10 +3844,10 @@
                 <a:cs typeface="Arial"/>
                 <a:sym typeface="Arial"/>
               </a:rPr>
-              <a:t>naptárat</a:t>
-            </a:r>
-            <a:r>
-              <a:rPr lang="hu-HU" sz="1100" b="0" i="0" u="none" strike="noStrike" cap="none" dirty="0">
+              <a:t>A </a:t>
+            </a:r>
+            <a:r>
+              <a:rPr lang="hu-HU" sz="1100" b="0" i="0" u="none" strike="noStrike" cap="none" dirty="0" err="1">
                 <a:solidFill>
                   <a:srgbClr val="000000"/>
                 </a:solidFill>
@@ -3044,19 +3857,8 @@
                 <a:cs typeface="Arial"/>
                 <a:sym typeface="Arial"/>
               </a:rPr>
-              <a:t> és részletező oldalt. </a:t>
-            </a:r>
-          </a:p>
-          <a:p>
-            <a:pPr marL="0" lvl="0" indent="0" algn="l" rtl="0">
-              <a:spcBef>
-                <a:spcPts val="0"/>
-              </a:spcBef>
-              <a:spcAft>
-                <a:spcPts val="0"/>
-              </a:spcAft>
-              <a:buNone/>
-            </a:pPr>
+              <a:t>dashboard</a:t>
+            </a:r>
             <a:r>
               <a:rPr lang="hu-HU" sz="1100" b="0" i="0" u="none" strike="noStrike" cap="none" dirty="0">
                 <a:solidFill>
@@ -3068,7 +3870,7 @@
                 <a:cs typeface="Arial"/>
                 <a:sym typeface="Arial"/>
               </a:rPr>
-              <a:t>A rendszer szerepkör szerint eltérő </a:t>
+              <a:t> szerepkör szerint jelenik meg, így a diák, tanár és </a:t>
             </a:r>
             <a:r>
               <a:rPr lang="hu-HU" sz="1100" b="0" i="0" u="none" strike="noStrike" cap="none" dirty="0" err="1">
@@ -3081,7 +3883,7 @@
                 <a:cs typeface="Arial"/>
                 <a:sym typeface="Arial"/>
               </a:rPr>
-              <a:t>dashboardokat</a:t>
+              <a:t>admin</a:t>
             </a:r>
             <a:r>
               <a:rPr lang="hu-HU" sz="1100" b="0" i="0" u="none" strike="noStrike" cap="none" dirty="0">
@@ -3094,10 +3896,21 @@
                 <a:cs typeface="Arial"/>
                 <a:sym typeface="Arial"/>
               </a:rPr>
-              <a:t> ad, így diák, tanár és az </a:t>
-            </a:r>
-            <a:r>
-              <a:rPr lang="hu-HU" sz="1100" b="0" i="0" u="none" strike="noStrike" cap="none" dirty="0" err="1">
+              <a:t> eltérő nézetet kap. </a:t>
+            </a:r>
+          </a:p>
+          <a:p>
+            <a:pPr marL="0" lvl="0" indent="0" algn="l" rtl="0">
+              <a:spcBef>
+                <a:spcPts val="0"/>
+              </a:spcBef>
+              <a:spcAft>
+                <a:spcPts val="0"/>
+              </a:spcAft>
+              <a:buNone/>
+            </a:pPr>
+            <a:r>
+              <a:rPr lang="hu-HU" sz="1100" b="0" i="0" u="none" strike="noStrike" cap="none" dirty="0">
                 <a:solidFill>
                   <a:srgbClr val="000000"/>
                 </a:solidFill>
@@ -3107,10 +3920,10 @@
                 <a:cs typeface="Arial"/>
                 <a:sym typeface="Arial"/>
               </a:rPr>
-              <a:t>admin</a:t>
-            </a:r>
-            <a:r>
-              <a:rPr lang="hu-HU" sz="1100" b="0" i="0" u="none" strike="noStrike" cap="none" dirty="0">
+              <a:t>Az állapotkezelés böngésző-tárolóval és </a:t>
+            </a:r>
+            <a:r>
+              <a:rPr lang="hu-HU" sz="1100" b="0" i="0" u="none" strike="noStrike" cap="none" dirty="0" err="1">
                 <a:solidFill>
                   <a:srgbClr val="000000"/>
                 </a:solidFill>
@@ -3120,19 +3933,8 @@
                 <a:cs typeface="Arial"/>
                 <a:sym typeface="Arial"/>
               </a:rPr>
-              <a:t> felhasználó más műveleteket lát. </a:t>
-            </a:r>
-          </a:p>
-          <a:p>
-            <a:pPr marL="0" lvl="0" indent="0" algn="l" rtl="0">
-              <a:spcBef>
-                <a:spcPts val="0"/>
-              </a:spcBef>
-              <a:spcAft>
-                <a:spcPts val="0"/>
-              </a:spcAft>
-              <a:buNone/>
-            </a:pPr>
+              <a:t>tokenes</a:t>
+            </a:r>
             <a:r>
               <a:rPr lang="hu-HU" sz="1100" b="0" i="0" u="none" strike="noStrike" cap="none" dirty="0">
                 <a:solidFill>
@@ -3144,7 +3946,7 @@
                 <a:cs typeface="Arial"/>
                 <a:sym typeface="Arial"/>
               </a:rPr>
-              <a:t>A kliens </a:t>
+              <a:t> hitelesítéssel történik, a felhasználói visszajelzéseket pedig egységes </a:t>
             </a:r>
             <a:r>
               <a:rPr lang="hu-HU" sz="1100" b="0" i="0" u="none" strike="noStrike" cap="none" dirty="0" err="1">
@@ -3157,7 +3959,7 @@
                 <a:cs typeface="Arial"/>
                 <a:sym typeface="Arial"/>
               </a:rPr>
-              <a:t>tokennel</a:t>
+              <a:t>toast</a:t>
             </a:r>
             <a:r>
               <a:rPr lang="hu-HU" sz="1100" b="0" i="0" u="none" strike="noStrike" cap="none" dirty="0">
@@ -3170,59 +3972,7 @@
                 <a:cs typeface="Arial"/>
                 <a:sym typeface="Arial"/>
               </a:rPr>
-              <a:t> kommunikál a backend API-</a:t>
-            </a:r>
-            <a:r>
-              <a:rPr lang="hu-HU" sz="1100" b="0" i="0" u="none" strike="noStrike" cap="none" dirty="0" err="1">
-                <a:solidFill>
-                  <a:srgbClr val="000000"/>
-                </a:solidFill>
-                <a:effectLst/>
-                <a:latin typeface="Arial"/>
-                <a:ea typeface="Arial"/>
-                <a:cs typeface="Arial"/>
-                <a:sym typeface="Arial"/>
-              </a:rPr>
-              <a:t>val</a:t>
-            </a:r>
-            <a:r>
-              <a:rPr lang="hu-HU" sz="1100" b="0" i="0" u="none" strike="noStrike" cap="none" dirty="0">
-                <a:solidFill>
-                  <a:srgbClr val="000000"/>
-                </a:solidFill>
-                <a:effectLst/>
-                <a:latin typeface="Arial"/>
-                <a:ea typeface="Arial"/>
-                <a:cs typeface="Arial"/>
-                <a:sym typeface="Arial"/>
-              </a:rPr>
-              <a:t>, és kezeli az eseményekhez kapcsolódó műveleteket, például részvételt, kedvencek kezelését és </a:t>
-            </a:r>
-            <a:r>
-              <a:rPr lang="hu-HU" sz="1100" b="0" i="0" u="none" strike="noStrike" cap="none" dirty="0" err="1">
-                <a:solidFill>
-                  <a:srgbClr val="000000"/>
-                </a:solidFill>
-                <a:effectLst/>
-                <a:latin typeface="Arial"/>
-                <a:ea typeface="Arial"/>
-                <a:cs typeface="Arial"/>
-                <a:sym typeface="Arial"/>
-              </a:rPr>
-              <a:t>kommentelést</a:t>
-            </a:r>
-            <a:r>
-              <a:rPr lang="hu-HU" sz="1100" b="0" i="0" u="none" strike="noStrike" cap="none" dirty="0">
-                <a:solidFill>
-                  <a:srgbClr val="000000"/>
-                </a:solidFill>
-                <a:effectLst/>
-                <a:latin typeface="Arial"/>
-                <a:ea typeface="Arial"/>
-                <a:cs typeface="Arial"/>
-                <a:sym typeface="Arial"/>
-              </a:rPr>
-              <a:t>.</a:t>
+              <a:t> értesítési rendszer biztosítja..</a:t>
             </a:r>
             <a:endParaRPr dirty="0"/>
           </a:p>
@@ -3328,6 +4078,218 @@
               </a:spcAft>
               <a:buNone/>
             </a:pPr>
+            <a:r>
+              <a:rPr lang="hu-HU" dirty="0"/>
+              <a:t>Tomi:</a:t>
+            </a:r>
+          </a:p>
+          <a:p>
+            <a:pPr marL="0" lvl="0" indent="0" algn="l" rtl="0">
+              <a:spcBef>
+                <a:spcPts val="0"/>
+              </a:spcBef>
+              <a:spcAft>
+                <a:spcPts val="0"/>
+              </a:spcAft>
+              <a:buNone/>
+            </a:pPr>
+            <a:r>
+              <a:rPr lang="hu-HU" sz="1100" b="0" i="0" u="none" strike="noStrike" cap="none" dirty="0">
+                <a:solidFill>
+                  <a:srgbClr val="000000"/>
+                </a:solidFill>
+                <a:effectLst/>
+                <a:latin typeface="Arial"/>
+                <a:ea typeface="Arial"/>
+                <a:cs typeface="Arial"/>
+                <a:sym typeface="Arial"/>
+              </a:rPr>
+              <a:t>Itt a backendünk réteges felépítése látható.</a:t>
+            </a:r>
+            <a:br>
+              <a:rPr lang="hu-HU" dirty="0"/>
+            </a:br>
+            <a:r>
+              <a:rPr lang="hu-HU" sz="1100" b="0" i="0" u="none" strike="noStrike" cap="none" dirty="0">
+                <a:solidFill>
+                  <a:srgbClr val="000000"/>
+                </a:solidFill>
+                <a:effectLst/>
+                <a:latin typeface="Arial"/>
+                <a:ea typeface="Arial"/>
+                <a:cs typeface="Arial"/>
+                <a:sym typeface="Arial"/>
+              </a:rPr>
+              <a:t>Az API/</a:t>
+            </a:r>
+            <a:r>
+              <a:rPr lang="hu-HU" sz="1100" b="0" i="0" u="none" strike="noStrike" cap="none" dirty="0" err="1">
+                <a:solidFill>
+                  <a:srgbClr val="000000"/>
+                </a:solidFill>
+                <a:effectLst/>
+                <a:latin typeface="Arial"/>
+                <a:ea typeface="Arial"/>
+                <a:cs typeface="Arial"/>
+                <a:sym typeface="Arial"/>
+              </a:rPr>
+              <a:t>routing</a:t>
+            </a:r>
+            <a:r>
+              <a:rPr lang="hu-HU" sz="1100" b="0" i="0" u="none" strike="noStrike" cap="none" dirty="0">
+                <a:solidFill>
+                  <a:srgbClr val="000000"/>
+                </a:solidFill>
+                <a:effectLst/>
+                <a:latin typeface="Arial"/>
+                <a:ea typeface="Arial"/>
+                <a:cs typeface="Arial"/>
+                <a:sym typeface="Arial"/>
+              </a:rPr>
+              <a:t> réteg fogadja és irányítja a kéréseket.</a:t>
+            </a:r>
+            <a:br>
+              <a:rPr lang="hu-HU" dirty="0"/>
+            </a:br>
+            <a:r>
+              <a:rPr lang="hu-HU" sz="1100" b="0" i="0" u="none" strike="noStrike" cap="none" dirty="0">
+                <a:solidFill>
+                  <a:srgbClr val="000000"/>
+                </a:solidFill>
+                <a:effectLst/>
+                <a:latin typeface="Arial"/>
+                <a:ea typeface="Arial"/>
+                <a:cs typeface="Arial"/>
+                <a:sym typeface="Arial"/>
+              </a:rPr>
+              <a:t>A kontrollerek kezelik a </a:t>
+            </a:r>
+            <a:r>
+              <a:rPr lang="hu-HU" sz="1100" b="0" i="0" u="none" strike="noStrike" cap="none" dirty="0" err="1">
+                <a:solidFill>
+                  <a:srgbClr val="000000"/>
+                </a:solidFill>
+                <a:effectLst/>
+                <a:latin typeface="Arial"/>
+                <a:ea typeface="Arial"/>
+                <a:cs typeface="Arial"/>
+                <a:sym typeface="Arial"/>
+              </a:rPr>
+              <a:t>requesteket</a:t>
+            </a:r>
+            <a:r>
+              <a:rPr lang="hu-HU" sz="1100" b="0" i="0" u="none" strike="noStrike" cap="none" dirty="0">
+                <a:solidFill>
+                  <a:srgbClr val="000000"/>
+                </a:solidFill>
+                <a:effectLst/>
+                <a:latin typeface="Arial"/>
+                <a:ea typeface="Arial"/>
+                <a:cs typeface="Arial"/>
+                <a:sym typeface="Arial"/>
+              </a:rPr>
+              <a:t>, majd a service rétegben fut az üzleti logika.</a:t>
+            </a:r>
+            <a:br>
+              <a:rPr lang="hu-HU" dirty="0"/>
+            </a:br>
+            <a:r>
+              <a:rPr lang="hu-HU" sz="1100" b="0" i="0" u="none" strike="noStrike" cap="none" dirty="0">
+                <a:solidFill>
+                  <a:srgbClr val="000000"/>
+                </a:solidFill>
+                <a:effectLst/>
+                <a:latin typeface="Arial"/>
+                <a:ea typeface="Arial"/>
+                <a:cs typeface="Arial"/>
+                <a:sym typeface="Arial"/>
+              </a:rPr>
+              <a:t>A modellek és az adatkezelés az adatbázis-műveletekért és relációkért felelnek.</a:t>
+            </a:r>
+            <a:br>
+              <a:rPr lang="hu-HU" dirty="0"/>
+            </a:br>
+            <a:r>
+              <a:rPr lang="hu-HU" sz="1100" b="0" i="0" u="none" strike="noStrike" cap="none" dirty="0">
+                <a:solidFill>
+                  <a:srgbClr val="000000"/>
+                </a:solidFill>
+                <a:effectLst/>
+                <a:latin typeface="Arial"/>
+                <a:ea typeface="Arial"/>
+                <a:cs typeface="Arial"/>
+                <a:sym typeface="Arial"/>
+              </a:rPr>
+              <a:t>Az infrastruktúra réteg pedig a </a:t>
+            </a:r>
+            <a:r>
+              <a:rPr lang="hu-HU" sz="1100" b="0" i="0" u="none" strike="noStrike" cap="none" dirty="0" err="1">
+                <a:solidFill>
+                  <a:srgbClr val="000000"/>
+                </a:solidFill>
+                <a:effectLst/>
+                <a:latin typeface="Arial"/>
+                <a:ea typeface="Arial"/>
+                <a:cs typeface="Arial"/>
+                <a:sym typeface="Arial"/>
+              </a:rPr>
+              <a:t>middleware</a:t>
+            </a:r>
+            <a:r>
+              <a:rPr lang="hu-HU" sz="1100" b="0" i="0" u="none" strike="noStrike" cap="none" dirty="0">
+                <a:solidFill>
+                  <a:srgbClr val="000000"/>
+                </a:solidFill>
+                <a:effectLst/>
+                <a:latin typeface="Arial"/>
+                <a:ea typeface="Arial"/>
+                <a:cs typeface="Arial"/>
+                <a:sym typeface="Arial"/>
+              </a:rPr>
+              <a:t>-t, </a:t>
+            </a:r>
+            <a:r>
+              <a:rPr lang="hu-HU" sz="1100" b="0" i="0" u="none" strike="noStrike" cap="none" dirty="0" err="1">
+                <a:solidFill>
+                  <a:srgbClr val="000000"/>
+                </a:solidFill>
+                <a:effectLst/>
+                <a:latin typeface="Arial"/>
+                <a:ea typeface="Arial"/>
+                <a:cs typeface="Arial"/>
+                <a:sym typeface="Arial"/>
+              </a:rPr>
+              <a:t>autentikációt</a:t>
+            </a:r>
+            <a:r>
+              <a:rPr lang="hu-HU" sz="1100" b="0" i="0" u="none" strike="noStrike" cap="none" dirty="0">
+                <a:solidFill>
+                  <a:srgbClr val="000000"/>
+                </a:solidFill>
+                <a:effectLst/>
+                <a:latin typeface="Arial"/>
+                <a:ea typeface="Arial"/>
+                <a:cs typeface="Arial"/>
+                <a:sym typeface="Arial"/>
+              </a:rPr>
+              <a:t> és rendszer szintű működést biztosítja.</a:t>
+            </a:r>
+            <a:br>
+              <a:rPr lang="hu-HU" dirty="0"/>
+            </a:br>
+            <a:r>
+              <a:rPr lang="hu-HU" sz="1100" b="0" i="0" u="none" strike="noStrike" cap="none" dirty="0">
+                <a:solidFill>
+                  <a:srgbClr val="000000"/>
+                </a:solidFill>
+                <a:effectLst/>
+                <a:latin typeface="Arial"/>
+                <a:ea typeface="Arial"/>
+                <a:cs typeface="Arial"/>
+                <a:sym typeface="Arial"/>
+              </a:rPr>
+              <a:t>Ez a struktúra átlátható, jól bővíthető és stabil működést ad.</a:t>
+            </a:r>
             <a:endParaRPr dirty="0"/>
           </a:p>
         </p:txBody>
@@ -3386,7 +4348,13 @@
   <p:cSld>
     <p:spTree>
       <p:nvGrpSpPr>
-        <p:cNvPr id="1" name="Shape 134"/>
+        <p:cNvPr id="1" name="Shape 120">
+          <a:extLst>
+            <a:ext uri="{FF2B5EF4-FFF2-40B4-BE49-F238E27FC236}">
+              <a16:creationId xmlns:a16="http://schemas.microsoft.com/office/drawing/2014/main" id="{8C01DFBA-FAA2-DD3F-8AEB-75C6C856939B}"/>
+            </a:ext>
+          </a:extLst>
+        </p:cNvPr>
         <p:cNvGrpSpPr/>
         <p:nvPr/>
       </p:nvGrpSpPr>
@@ -3400,7 +4368,13 @@
       </p:grpSpPr>
       <p:sp>
         <p:nvSpPr>
-          <p:cNvPr id="135" name="Google Shape;135;p6:notes"/>
+          <p:cNvPr id="121" name="Google Shape;121;p5:notes">
+            <a:extLst>
+              <a:ext uri="{FF2B5EF4-FFF2-40B4-BE49-F238E27FC236}">
+                <a16:creationId xmlns:a16="http://schemas.microsoft.com/office/drawing/2014/main" id="{C3A81FB4-E590-BCD8-2560-67A910175A71}"/>
+              </a:ext>
+            </a:extLst>
+          </p:cNvPr>
           <p:cNvSpPr txBox="1">
             <a:spLocks noGrp="1"/>
           </p:cNvSpPr>
@@ -3432,13 +4406,95 @@
               </a:spcAft>
               <a:buNone/>
             </a:pPr>
-            <a:endParaRPr/>
+            <a:r>
+              <a:rPr lang="hu-HU" dirty="0"/>
+              <a:t>Tomi:</a:t>
+            </a:r>
+          </a:p>
+          <a:p>
+            <a:pPr marL="0" lvl="0" indent="0" algn="l" rtl="0">
+              <a:spcBef>
+                <a:spcPts val="0"/>
+              </a:spcBef>
+              <a:spcAft>
+                <a:spcPts val="0"/>
+              </a:spcAft>
+              <a:buNone/>
+            </a:pPr>
+            <a:r>
+              <a:rPr lang="hu-HU" sz="1100" b="0" i="0" u="none" strike="noStrike" cap="none" dirty="0">
+                <a:solidFill>
+                  <a:srgbClr val="000000"/>
+                </a:solidFill>
+                <a:effectLst/>
+                <a:latin typeface="Arial"/>
+                <a:ea typeface="Arial"/>
+                <a:cs typeface="Arial"/>
+                <a:sym typeface="Arial"/>
+              </a:rPr>
+              <a:t>A kontrollerek a backend belépési pontjai.</a:t>
+            </a:r>
+            <a:br>
+              <a:rPr lang="hu-HU" dirty="0"/>
+            </a:br>
+            <a:r>
+              <a:rPr lang="hu-HU" sz="1100" b="0" i="0" u="none" strike="noStrike" cap="none" dirty="0">
+                <a:solidFill>
+                  <a:srgbClr val="000000"/>
+                </a:solidFill>
+                <a:effectLst/>
+                <a:latin typeface="Arial"/>
+                <a:ea typeface="Arial"/>
+                <a:cs typeface="Arial"/>
+                <a:sym typeface="Arial"/>
+              </a:rPr>
+              <a:t>Itt érkeznek be az API kérések, itt történik az adatok ellenőrzése, majd a kérés továbbadása az üzleti logikának.</a:t>
+            </a:r>
+            <a:br>
+              <a:rPr lang="hu-HU" dirty="0"/>
+            </a:br>
+            <a:r>
+              <a:rPr lang="hu-HU" sz="1100" b="0" i="0" u="none" strike="noStrike" cap="none" dirty="0">
+                <a:solidFill>
+                  <a:srgbClr val="000000"/>
+                </a:solidFill>
+                <a:effectLst/>
+                <a:latin typeface="Arial"/>
+                <a:ea typeface="Arial"/>
+                <a:cs typeface="Arial"/>
+                <a:sym typeface="Arial"/>
+              </a:rPr>
+              <a:t>A kontrollerek feladata az is, hogy egységes, jól kezelhető JSON válaszokat adjanak a frontendnek.</a:t>
+            </a:r>
+            <a:br>
+              <a:rPr lang="hu-HU" dirty="0"/>
+            </a:br>
+            <a:r>
+              <a:rPr lang="hu-HU" sz="1100" b="0" i="0" u="none" strike="noStrike" cap="none" dirty="0">
+                <a:solidFill>
+                  <a:srgbClr val="000000"/>
+                </a:solidFill>
+                <a:effectLst/>
+                <a:latin typeface="Arial"/>
+                <a:ea typeface="Arial"/>
+                <a:cs typeface="Arial"/>
+                <a:sym typeface="Arial"/>
+              </a:rPr>
+              <a:t>Mivel a rendszer szerepkör-alapú, a kontrollerek figyelembe veszik, hogy diák, tanár vagy adminisztrátor használja a funkciót.</a:t>
+            </a:r>
+            <a:endParaRPr dirty="0"/>
           </a:p>
         </p:txBody>
       </p:sp>
       <p:sp>
         <p:nvSpPr>
-          <p:cNvPr id="136" name="Google Shape;136;p6:notes"/>
+          <p:cNvPr id="122" name="Google Shape;122;p5:notes">
+            <a:extLst>
+              <a:ext uri="{FF2B5EF4-FFF2-40B4-BE49-F238E27FC236}">
+                <a16:creationId xmlns:a16="http://schemas.microsoft.com/office/drawing/2014/main" id="{9EF0938B-0088-7C27-9A33-B5412EA5AE1C}"/>
+              </a:ext>
+            </a:extLst>
+          </p:cNvPr>
           <p:cNvSpPr>
             <a:spLocks noGrp="1" noRot="1" noChangeAspect="1"/>
           </p:cNvSpPr>
@@ -3478,6 +4534,11 @@
         </p:spPr>
       </p:sp>
     </p:spTree>
+    <p:extLst>
+      <p:ext uri="{BB962C8B-B14F-4D97-AF65-F5344CB8AC3E}">
+        <p14:creationId xmlns:p14="http://schemas.microsoft.com/office/powerpoint/2010/main" val="3592021064"/>
+      </p:ext>
+    </p:extLst>
   </p:cSld>
   <p:clrMapOvr>
     <a:masterClrMapping/>
@@ -3490,7 +4551,7 @@
   <p:cSld>
     <p:spTree>
       <p:nvGrpSpPr>
-        <p:cNvPr id="1" name="Shape 152"/>
+        <p:cNvPr id="1" name="Shape 134"/>
         <p:cNvGrpSpPr/>
         <p:nvPr/>
       </p:nvGrpSpPr>
@@ -3504,7 +4565,7 @@
       </p:grpSpPr>
       <p:sp>
         <p:nvSpPr>
-          <p:cNvPr id="153" name="Google Shape;153;p8:notes"/>
+          <p:cNvPr id="135" name="Google Shape;135;p6:notes"/>
           <p:cNvSpPr txBox="1">
             <a:spLocks noGrp="1"/>
           </p:cNvSpPr>
@@ -3536,13 +4597,271 @@
               </a:spcAft>
               <a:buNone/>
             </a:pPr>
-            <a:endParaRPr/>
+            <a:r>
+              <a:rPr lang="hu-HU" dirty="0"/>
+              <a:t>Samu:</a:t>
+            </a:r>
+          </a:p>
+          <a:p>
+            <a:pPr marL="0" lvl="0" indent="0" algn="l" rtl="0">
+              <a:spcBef>
+                <a:spcPts val="0"/>
+              </a:spcBef>
+              <a:spcAft>
+                <a:spcPts val="0"/>
+              </a:spcAft>
+              <a:buNone/>
+            </a:pPr>
+            <a:r>
+              <a:rPr lang="hu-HU" sz="1100" b="0" i="0" u="none" strike="noStrike" cap="none" dirty="0">
+                <a:solidFill>
+                  <a:srgbClr val="000000"/>
+                </a:solidFill>
+                <a:effectLst/>
+                <a:latin typeface="Arial"/>
+                <a:ea typeface="Arial"/>
+                <a:cs typeface="Arial"/>
+                <a:sym typeface="Arial"/>
+              </a:rPr>
+              <a:t>A rendszer biztonságát </a:t>
+            </a:r>
+            <a:r>
+              <a:rPr lang="hu-HU" sz="1100" b="0" i="0" u="none" strike="noStrike" cap="none" dirty="0" err="1">
+                <a:solidFill>
+                  <a:srgbClr val="000000"/>
+                </a:solidFill>
+                <a:effectLst/>
+                <a:latin typeface="Arial"/>
+                <a:ea typeface="Arial"/>
+                <a:cs typeface="Arial"/>
+                <a:sym typeface="Arial"/>
+              </a:rPr>
+              <a:t>token</a:t>
+            </a:r>
+            <a:r>
+              <a:rPr lang="hu-HU" sz="1100" b="0" i="0" u="none" strike="noStrike" cap="none" dirty="0">
+                <a:solidFill>
+                  <a:srgbClr val="000000"/>
+                </a:solidFill>
+                <a:effectLst/>
+                <a:latin typeface="Arial"/>
+                <a:ea typeface="Arial"/>
+                <a:cs typeface="Arial"/>
+                <a:sym typeface="Arial"/>
+              </a:rPr>
+              <a:t> alapú hitelesítés adja </a:t>
+            </a:r>
+            <a:r>
+              <a:rPr lang="hu-HU" sz="1100" b="0" i="0" u="none" strike="noStrike" cap="none" dirty="0" err="1">
+                <a:solidFill>
+                  <a:srgbClr val="000000"/>
+                </a:solidFill>
+                <a:effectLst/>
+                <a:latin typeface="Arial"/>
+                <a:ea typeface="Arial"/>
+                <a:cs typeface="Arial"/>
+                <a:sym typeface="Arial"/>
+              </a:rPr>
+              <a:t>Laravel</a:t>
+            </a:r>
+            <a:r>
+              <a:rPr lang="hu-HU" sz="1100" b="0" i="0" u="none" strike="noStrike" cap="none" dirty="0">
+                <a:solidFill>
+                  <a:srgbClr val="000000"/>
+                </a:solidFill>
+                <a:effectLst/>
+                <a:latin typeface="Arial"/>
+                <a:ea typeface="Arial"/>
+                <a:cs typeface="Arial"/>
+                <a:sym typeface="Arial"/>
+              </a:rPr>
+              <a:t> </a:t>
+            </a:r>
+            <a:r>
+              <a:rPr lang="hu-HU" sz="1100" b="0" i="0" u="none" strike="noStrike" cap="none" dirty="0" err="1">
+                <a:solidFill>
+                  <a:srgbClr val="000000"/>
+                </a:solidFill>
+                <a:effectLst/>
+                <a:latin typeface="Arial"/>
+                <a:ea typeface="Arial"/>
+                <a:cs typeface="Arial"/>
+                <a:sym typeface="Arial"/>
+              </a:rPr>
+              <a:t>Sanctummal</a:t>
+            </a:r>
+            <a:r>
+              <a:rPr lang="hu-HU" sz="1100" b="0" i="0" u="none" strike="noStrike" cap="none" dirty="0">
+                <a:solidFill>
+                  <a:srgbClr val="000000"/>
+                </a:solidFill>
+                <a:effectLst/>
+                <a:latin typeface="Arial"/>
+                <a:ea typeface="Arial"/>
+                <a:cs typeface="Arial"/>
+                <a:sym typeface="Arial"/>
+              </a:rPr>
+              <a:t>.</a:t>
+            </a:r>
+            <a:br>
+              <a:rPr lang="hu-HU" sz="1100" b="0" i="0" u="none" strike="noStrike" cap="none" dirty="0">
+                <a:solidFill>
+                  <a:srgbClr val="000000"/>
+                </a:solidFill>
+                <a:effectLst/>
+                <a:latin typeface="Arial"/>
+                <a:ea typeface="Arial"/>
+                <a:cs typeface="Arial"/>
+                <a:sym typeface="Arial"/>
+              </a:rPr>
+            </a:br>
+            <a:r>
+              <a:rPr lang="hu-HU" sz="1100" b="0" i="0" u="none" strike="noStrike" cap="none" dirty="0">
+                <a:solidFill>
+                  <a:srgbClr val="000000"/>
+                </a:solidFill>
+                <a:effectLst/>
+                <a:latin typeface="Arial"/>
+                <a:ea typeface="Arial"/>
+                <a:cs typeface="Arial"/>
+                <a:sym typeface="Arial"/>
+              </a:rPr>
+              <a:t>A védett API végpontokat </a:t>
+            </a:r>
+            <a:r>
+              <a:rPr lang="hu-HU" sz="1100" b="0" i="0" u="none" strike="noStrike" cap="none" dirty="0" err="1">
+                <a:solidFill>
+                  <a:srgbClr val="000000"/>
+                </a:solidFill>
+                <a:effectLst/>
+                <a:latin typeface="Arial"/>
+                <a:ea typeface="Arial"/>
+                <a:cs typeface="Arial"/>
+                <a:sym typeface="Arial"/>
+              </a:rPr>
+              <a:t>middleware</a:t>
+            </a:r>
+            <a:r>
+              <a:rPr lang="hu-HU" sz="1100" b="0" i="0" u="none" strike="noStrike" cap="none" dirty="0">
+                <a:solidFill>
+                  <a:srgbClr val="000000"/>
+                </a:solidFill>
+                <a:effectLst/>
+                <a:latin typeface="Arial"/>
+                <a:ea typeface="Arial"/>
+                <a:cs typeface="Arial"/>
+                <a:sym typeface="Arial"/>
+              </a:rPr>
+              <a:t> ellenőrzi, ezért csak hitelesített felhasználók érhetik el.</a:t>
+            </a:r>
+            <a:br>
+              <a:rPr lang="hu-HU" sz="1100" b="0" i="0" u="none" strike="noStrike" cap="none" dirty="0">
+                <a:solidFill>
+                  <a:srgbClr val="000000"/>
+                </a:solidFill>
+                <a:effectLst/>
+                <a:latin typeface="Arial"/>
+                <a:ea typeface="Arial"/>
+                <a:cs typeface="Arial"/>
+                <a:sym typeface="Arial"/>
+              </a:rPr>
+            </a:br>
+            <a:r>
+              <a:rPr lang="hu-HU" sz="1100" b="0" i="0" u="none" strike="noStrike" cap="none" dirty="0">
+                <a:solidFill>
+                  <a:srgbClr val="000000"/>
+                </a:solidFill>
+                <a:effectLst/>
+                <a:latin typeface="Arial"/>
+                <a:ea typeface="Arial"/>
+                <a:cs typeface="Arial"/>
+                <a:sym typeface="Arial"/>
+              </a:rPr>
+              <a:t>Erre épül a szerepkör-alapú hozzáférés diák, tanár és </a:t>
+            </a:r>
+            <a:r>
+              <a:rPr lang="hu-HU" sz="1100" b="0" i="0" u="none" strike="noStrike" cap="none" dirty="0" err="1">
+                <a:solidFill>
+                  <a:srgbClr val="000000"/>
+                </a:solidFill>
+                <a:effectLst/>
+                <a:latin typeface="Arial"/>
+                <a:ea typeface="Arial"/>
+                <a:cs typeface="Arial"/>
+                <a:sym typeface="Arial"/>
+              </a:rPr>
+              <a:t>admin</a:t>
+            </a:r>
+            <a:r>
+              <a:rPr lang="hu-HU" sz="1100" b="0" i="0" u="none" strike="noStrike" cap="none" dirty="0">
+                <a:solidFill>
+                  <a:srgbClr val="000000"/>
+                </a:solidFill>
+                <a:effectLst/>
+                <a:latin typeface="Arial"/>
+                <a:ea typeface="Arial"/>
+                <a:cs typeface="Arial"/>
+                <a:sym typeface="Arial"/>
+              </a:rPr>
+              <a:t> szintekkel.</a:t>
+            </a:r>
+            <a:br>
+              <a:rPr lang="hu-HU" sz="1100" b="0" i="0" u="none" strike="noStrike" cap="none" dirty="0">
+                <a:solidFill>
+                  <a:srgbClr val="000000"/>
+                </a:solidFill>
+                <a:effectLst/>
+                <a:latin typeface="Arial"/>
+                <a:ea typeface="Arial"/>
+                <a:cs typeface="Arial"/>
+                <a:sym typeface="Arial"/>
+              </a:rPr>
+            </a:br>
+            <a:r>
+              <a:rPr lang="hu-HU" sz="1100" b="0" i="0" u="none" strike="noStrike" cap="none" dirty="0">
+                <a:solidFill>
+                  <a:srgbClr val="000000"/>
+                </a:solidFill>
+                <a:effectLst/>
+                <a:latin typeface="Arial"/>
+                <a:ea typeface="Arial"/>
+                <a:cs typeface="Arial"/>
+                <a:sym typeface="Arial"/>
+              </a:rPr>
+              <a:t>A kritikus műveletek </a:t>
+            </a:r>
+            <a:r>
+              <a:rPr lang="hu-HU" sz="1100" b="0" i="0" u="none" strike="noStrike" cap="none" dirty="0" err="1">
+                <a:solidFill>
+                  <a:srgbClr val="000000"/>
+                </a:solidFill>
+                <a:effectLst/>
+                <a:latin typeface="Arial"/>
+                <a:ea typeface="Arial"/>
+                <a:cs typeface="Arial"/>
+                <a:sym typeface="Arial"/>
+              </a:rPr>
+              <a:t>admin</a:t>
+            </a:r>
+            <a:r>
+              <a:rPr lang="hu-HU" sz="1100" b="0" i="0" u="none" strike="noStrike" cap="none" dirty="0">
+                <a:solidFill>
+                  <a:srgbClr val="000000"/>
+                </a:solidFill>
+                <a:effectLst/>
+                <a:latin typeface="Arial"/>
+                <a:ea typeface="Arial"/>
+                <a:cs typeface="Arial"/>
+                <a:sym typeface="Arial"/>
+              </a:rPr>
+              <a:t> jogosultsághoz kötöttek, a regisztrációt pedig email-verifikáció védi.</a:t>
+            </a:r>
           </a:p>
         </p:txBody>
       </p:sp>
       <p:sp>
         <p:nvSpPr>
-          <p:cNvPr id="154" name="Google Shape;154;p8:notes"/>
+          <p:cNvPr id="136" name="Google Shape;136;p6:notes"/>
           <p:cNvSpPr>
             <a:spLocks noGrp="1" noRot="1" noChangeAspect="1"/>
           </p:cNvSpPr>
@@ -14568,13 +15887,13 @@
   <p:clrMapOvr>
     <a:masterClrMapping/>
   </p:clrMapOvr>
-  <mc:AlternateContent xmlns:mc="http://schemas.openxmlformats.org/markup-compatibility/2006">
-    <mc:Choice xmlns:p159="http://schemas.microsoft.com/office/powerpoint/2015/09/main" Requires="p159">
+  <mc:AlternateContent xmlns:mc="http://schemas.openxmlformats.org/markup-compatibility/2006" xmlns:p159="http://schemas.microsoft.com/office/powerpoint/2015/09/main">
+    <mc:Choice Requires="p159">
       <p:transition xmlns:p14="http://schemas.microsoft.com/office/powerpoint/2010/main" spd="slow" p14:dur="2000">
         <p159:morph option="byObject"/>
       </p:transition>
     </mc:Choice>
-    <mc:Fallback>
+    <mc:Fallback xmlns="">
       <p:transition spd="slow">
         <p:fade/>
       </p:transition>
@@ -15179,7 +16498,7 @@
         <p:spPr>
           <a:xfrm>
             <a:off x="1235026" y="2149950"/>
-            <a:ext cx="5394374" cy="646290"/>
+            <a:ext cx="5394374" cy="1969730"/>
           </a:xfrm>
           <a:prstGeom prst="rect">
             <a:avLst/>
@@ -15292,6 +16611,106 @@
               </a:rPr>
               <a:t>Figma</a:t>
             </a:r>
+            <a:endParaRPr lang="hu-HU" sz="1800" dirty="0">
+              <a:solidFill>
+                <a:schemeClr val="dk1"/>
+              </a:solidFill>
+              <a:latin typeface="Arial"/>
+              <a:ea typeface="Arial"/>
+              <a:cs typeface="Arial"/>
+              <a:sym typeface="Arial"/>
+            </a:endParaRPr>
+          </a:p>
+          <a:p>
+            <a:pPr marL="0" marR="0" lvl="0" indent="0" algn="l" rtl="0">
+              <a:spcBef>
+                <a:spcPts val="0"/>
+              </a:spcBef>
+              <a:spcAft>
+                <a:spcPts val="0"/>
+              </a:spcAft>
+              <a:buNone/>
+            </a:pPr>
+            <a:endParaRPr lang="hu-HU" sz="1800" dirty="0">
+              <a:solidFill>
+                <a:schemeClr val="dk1"/>
+              </a:solidFill>
+            </a:endParaRPr>
+          </a:p>
+          <a:p>
+            <a:pPr marL="0" marR="0" lvl="0" indent="0" algn="l" rtl="0">
+              <a:spcBef>
+                <a:spcPts val="0"/>
+              </a:spcBef>
+              <a:spcAft>
+                <a:spcPts val="0"/>
+              </a:spcAft>
+              <a:buNone/>
+            </a:pPr>
+            <a:r>
+              <a:rPr lang="hu-HU" sz="1800" dirty="0">
+                <a:solidFill>
+                  <a:schemeClr val="dk1"/>
+                </a:solidFill>
+              </a:rPr>
+              <a:t>Feladatmegosztás:</a:t>
+            </a:r>
+          </a:p>
+          <a:p>
+            <a:pPr marL="285750" lvl="0" indent="-285750">
+              <a:buFont typeface="Arial" panose="020B0604020202020204" pitchFamily="34" charset="0"/>
+              <a:buChar char="•"/>
+            </a:pPr>
+            <a:r>
+              <a:rPr lang="hu-HU" sz="1800" dirty="0">
+                <a:solidFill>
+                  <a:schemeClr val="dk1"/>
+                </a:solidFill>
+              </a:rPr>
+              <a:t>Nagy </a:t>
+            </a:r>
+            <a:r>
+              <a:rPr lang="hu-HU" sz="1800" dirty="0" err="1">
+                <a:solidFill>
+                  <a:schemeClr val="dk1"/>
+                </a:solidFill>
+              </a:rPr>
+              <a:t>Levéd</a:t>
+            </a:r>
+            <a:r>
+              <a:rPr lang="hu-HU" sz="1800" dirty="0">
+                <a:solidFill>
+                  <a:schemeClr val="dk1"/>
+                </a:solidFill>
+              </a:rPr>
+              <a:t> Sámuel – Frontend</a:t>
+            </a:r>
+          </a:p>
+          <a:p>
+            <a:pPr marL="285750" lvl="0" indent="-285750">
+              <a:buFont typeface="Arial" panose="020B0604020202020204" pitchFamily="34" charset="0"/>
+              <a:buChar char="•"/>
+            </a:pPr>
+            <a:r>
+              <a:rPr lang="hu-HU" sz="1800" dirty="0">
+                <a:solidFill>
+                  <a:schemeClr val="dk1"/>
+                </a:solidFill>
+              </a:rPr>
+              <a:t>Tóth Tamás - Backend</a:t>
+            </a:r>
+          </a:p>
+          <a:p>
+            <a:pPr marL="285750" marR="0" lvl="0" indent="-285750" algn="l" rtl="0">
+              <a:spcBef>
+                <a:spcPts val="0"/>
+              </a:spcBef>
+              <a:spcAft>
+                <a:spcPts val="0"/>
+              </a:spcAft>
+              <a:buFont typeface="Arial" panose="020B0604020202020204" pitchFamily="34" charset="0"/>
+              <a:buChar char="•"/>
+            </a:pPr>
             <a:endParaRPr dirty="0"/>
           </a:p>
         </p:txBody>
@@ -15829,8 +17248,8 @@
         </p:nvSpPr>
         <p:spPr>
           <a:xfrm>
-            <a:off x="848592" y="2872460"/>
-            <a:ext cx="5036393" cy="1658024"/>
+            <a:off x="727852" y="2810263"/>
+            <a:ext cx="5036393" cy="2154436"/>
           </a:xfrm>
           <a:prstGeom prst="rect">
             <a:avLst/>
@@ -15848,7 +17267,7 @@
               <a:buChar char="o"/>
             </a:pPr>
             <a:r>
-              <a:rPr lang="hu-HU" sz="2800" dirty="0">
+              <a:rPr lang="hu-HU" sz="2400" dirty="0">
                 <a:solidFill>
                   <a:schemeClr val="bg1"/>
                 </a:solidFill>
@@ -15863,16 +17282,13 @@
               <a:buFont typeface="Courier New" panose="02070309020205020404" pitchFamily="49" charset="0"/>
               <a:buChar char="o"/>
             </a:pPr>
-            <a:r>
-              <a:rPr lang="hu-HU" sz="2800" dirty="0">
-                <a:solidFill>
-                  <a:schemeClr val="bg1"/>
-                </a:solidFill>
-                <a:latin typeface="Cambria" panose="02040503050406030204" pitchFamily="18" charset="0"/>
-                <a:ea typeface="Cambria" panose="02040503050406030204" pitchFamily="18" charset="0"/>
-              </a:rPr>
-              <a:t>Értesítő rendszer</a:t>
-            </a:r>
+            <a:endParaRPr lang="hu-HU" sz="2400" dirty="0">
+              <a:solidFill>
+                <a:schemeClr val="bg1"/>
+              </a:solidFill>
+              <a:latin typeface="Cambria" panose="02040503050406030204" pitchFamily="18" charset="0"/>
+              <a:ea typeface="Cambria" panose="02040503050406030204" pitchFamily="18" charset="0"/>
+            </a:endParaRPr>
           </a:p>
           <a:p>
             <a:pPr marL="285750" indent="-285750">
@@ -15880,7 +17296,36 @@
               <a:buChar char="o"/>
             </a:pPr>
             <a:r>
-              <a:rPr lang="hu-HU" sz="2800" dirty="0">
+              <a:rPr lang="hu-HU" sz="2400" dirty="0">
+                <a:solidFill>
+                  <a:schemeClr val="bg1"/>
+                </a:solidFill>
+                <a:latin typeface="Cambria" panose="02040503050406030204" pitchFamily="18" charset="0"/>
+                <a:ea typeface="Cambria" panose="02040503050406030204" pitchFamily="18" charset="0"/>
+              </a:rPr>
+              <a:t>Értesítő rendszer</a:t>
+            </a:r>
+          </a:p>
+          <a:p>
+            <a:pPr marL="285750" indent="-285750">
+              <a:buFont typeface="Courier New" panose="02070309020205020404" pitchFamily="49" charset="0"/>
+              <a:buChar char="o"/>
+            </a:pPr>
+            <a:endParaRPr lang="hu-HU" sz="2400" dirty="0">
+              <a:solidFill>
+                <a:schemeClr val="bg1"/>
+              </a:solidFill>
+              <a:latin typeface="Cambria" panose="02040503050406030204" pitchFamily="18" charset="0"/>
+              <a:ea typeface="Cambria" panose="02040503050406030204" pitchFamily="18" charset="0"/>
+            </a:endParaRPr>
+          </a:p>
+          <a:p>
+            <a:pPr marL="285750" indent="-285750">
+              <a:buFont typeface="Courier New" panose="02070309020205020404" pitchFamily="49" charset="0"/>
+              <a:buChar char="o"/>
+            </a:pPr>
+            <a:r>
+              <a:rPr lang="hu-HU" sz="2400" dirty="0">
                 <a:solidFill>
                   <a:schemeClr val="bg1"/>
                 </a:solidFill>
@@ -18086,6 +19531,52 @@
       </p:grpSpPr>
       <p:sp>
         <p:nvSpPr>
+          <p:cNvPr id="150" name="Google Shape;150;p7"/>
+          <p:cNvSpPr/>
+          <p:nvPr/>
+        </p:nvSpPr>
+        <p:spPr>
+          <a:xfrm rot="5400000">
+            <a:off x="-1468870" y="1124578"/>
+            <a:ext cx="3492600" cy="5292900"/>
+          </a:xfrm>
+          <a:prstGeom prst="ellipse">
+            <a:avLst/>
+          </a:prstGeom>
+          <a:solidFill>
+            <a:srgbClr val="4A86E8"/>
+          </a:solidFill>
+          <a:ln w="9525" cap="flat" cmpd="sng">
+            <a:solidFill>
+              <a:srgbClr val="CFE2F3"/>
+            </a:solidFill>
+            <a:prstDash val="solid"/>
+            <a:round/>
+            <a:headEnd type="none" w="sm" len="sm"/>
+            <a:tailEnd type="none" w="sm" len="sm"/>
+          </a:ln>
+        </p:spPr>
+        <p:txBody>
+          <a:bodyPr spcFirstLastPara="1" wrap="square" lIns="91425" tIns="91425" rIns="91425" bIns="91425" anchor="ctr" anchorCtr="0">
+            <a:noAutofit/>
+          </a:bodyPr>
+          <a:lstStyle/>
+          <a:p>
+            <a:pPr marL="0" lvl="0" indent="0" algn="ctr" rtl="0">
+              <a:spcBef>
+                <a:spcPts val="0"/>
+              </a:spcBef>
+              <a:spcAft>
+                <a:spcPts val="0"/>
+              </a:spcAft>
+              <a:buNone/>
+            </a:pPr>
+            <a:endParaRPr/>
+          </a:p>
+        </p:txBody>
+      </p:sp>
+      <p:sp>
+        <p:nvSpPr>
           <p:cNvPr id="147" name="Google Shape;147;p7"/>
           <p:cNvSpPr txBox="1">
             <a:spLocks noGrp="1"/>
@@ -18131,15 +19622,15 @@
               <a:buNone/>
             </a:pPr>
             <a:r>
-              <a:rPr lang="hu-HU" sz="4400">
+              <a:rPr lang="hu-HU" sz="4400" dirty="0">
                 <a:latin typeface="Cambria"/>
                 <a:ea typeface="Cambria"/>
                 <a:cs typeface="Cambria"/>
                 <a:sym typeface="Cambria"/>
               </a:rPr>
-              <a:t>Frontend felépítés és navigáció</a:t>
-            </a:r>
-            <a:endParaRPr/>
+              <a:t>Frontend</a:t>
+            </a:r>
+            <a:endParaRPr dirty="0"/>
           </a:p>
         </p:txBody>
       </p:sp>
@@ -18152,7 +19643,7 @@
         <p:spPr>
           <a:xfrm>
             <a:off x="872762" y="2472571"/>
-            <a:ext cx="6509700" cy="3139281"/>
+            <a:ext cx="6509700" cy="2585283"/>
           </a:xfrm>
           <a:prstGeom prst="rect">
             <a:avLst/>
@@ -18223,12 +19714,20 @@
                 <a:solidFill>
                   <a:schemeClr val="dk1"/>
                 </a:solidFill>
+              </a:rPr>
+              <a:t>-</a:t>
+            </a:r>
+            <a:r>
+              <a:rPr lang="hu-HU" sz="1800" dirty="0">
+                <a:solidFill>
+                  <a:schemeClr val="dk1"/>
+                </a:solidFill>
                 <a:latin typeface="Arial"/>
                 <a:ea typeface="Arial"/>
                 <a:cs typeface="Arial"/>
                 <a:sym typeface="Arial"/>
               </a:rPr>
-              <a:t> alapú navigáció</a:t>
+              <a:t>alapú navigáció</a:t>
             </a:r>
             <a:endParaRPr lang="hu-HU" sz="1800" dirty="0">
               <a:solidFill>
@@ -18258,13 +19757,7 @@
             </a:endParaRPr>
           </a:p>
           <a:p>
-            <a:pPr marL="285750" marR="0" lvl="0" indent="-285750" algn="l" rtl="0">
-              <a:spcBef>
-                <a:spcPts val="0"/>
-              </a:spcBef>
-              <a:spcAft>
-                <a:spcPts val="0"/>
-              </a:spcAft>
+            <a:pPr marL="285750" indent="-285750">
               <a:buClr>
                 <a:schemeClr val="dk1"/>
               </a:buClr>
@@ -18273,12 +19766,8 @@
               <a:buChar char="•"/>
             </a:pPr>
             <a:r>
-              <a:rPr lang="hu-HU" sz="1800" dirty="0">
-                <a:solidFill>
-                  <a:schemeClr val="dk1"/>
-                </a:solidFill>
-              </a:rPr>
-              <a:t>Fő oldalak: Bejelentkezés, regisztráció, eseménylista, eseményrészletek, naptár</a:t>
+              <a:rPr lang="hu-HU" sz="1800" dirty="0"/>
+              <a:t>Komponensalapú felépítés, funkciók szerint csoportosítva</a:t>
             </a:r>
           </a:p>
           <a:p>
@@ -18424,96 +19913,20 @@
               <a:buChar char="•"/>
             </a:pPr>
             <a:r>
-              <a:rPr lang="hu-HU" sz="1800" dirty="0">
-                <a:solidFill>
-                  <a:schemeClr val="dk1"/>
-                </a:solidFill>
-              </a:rPr>
-              <a:t>API kapcsolat: események, kommentek, kedvencek, részvétel, osztály és kérelmek kezelése</a:t>
+              <a:rPr lang="hu-HU" sz="1800" dirty="0"/>
+              <a:t>Egységes értesítési rendszer (</a:t>
+            </a:r>
+            <a:r>
+              <a:rPr lang="hu-HU" sz="1800" dirty="0" err="1"/>
+              <a:t>toastok</a:t>
+            </a:r>
+            <a:r>
+              <a:rPr lang="hu-HU" sz="1800" dirty="0"/>
+              <a:t>)</a:t>
             </a:r>
           </a:p>
         </p:txBody>
       </p:sp>
-      <p:sp>
-        <p:nvSpPr>
-          <p:cNvPr id="150" name="Google Shape;150;p7"/>
-          <p:cNvSpPr/>
-          <p:nvPr/>
-        </p:nvSpPr>
-        <p:spPr>
-          <a:xfrm>
-            <a:off x="7826625" y="1335725"/>
-            <a:ext cx="3492600" cy="5292900"/>
-          </a:xfrm>
-          <a:prstGeom prst="ellipse">
-            <a:avLst/>
-          </a:prstGeom>
-          <a:solidFill>
-            <a:srgbClr val="4A86E8"/>
-          </a:solidFill>
-          <a:ln w="9525" cap="flat" cmpd="sng">
-            <a:solidFill>
-              <a:srgbClr val="CFE2F3"/>
-            </a:solidFill>
-            <a:prstDash val="solid"/>
-            <a:round/>
-            <a:headEnd type="none" w="sm" len="sm"/>
-            <a:tailEnd type="none" w="sm" len="sm"/>
-          </a:ln>
-        </p:spPr>
-        <p:txBody>
-          <a:bodyPr spcFirstLastPara="1" wrap="square" lIns="91425" tIns="91425" rIns="91425" bIns="91425" anchor="ctr" anchorCtr="0">
-            <a:noAutofit/>
-          </a:bodyPr>
-          <a:lstStyle/>
-          <a:p>
-            <a:pPr marL="0" lvl="0" indent="0" algn="ctr" rtl="0">
-              <a:spcBef>
-                <a:spcPts val="0"/>
-              </a:spcBef>
-              <a:spcAft>
-                <a:spcPts val="0"/>
-              </a:spcAft>
-              <a:buNone/>
-            </a:pPr>
-            <a:endParaRPr/>
-          </a:p>
-        </p:txBody>
-      </p:sp>
-      <p:pic>
-        <p:nvPicPr>
-          <p:cNvPr id="151" name="Google Shape;151;p7"/>
-          <p:cNvPicPr preferRelativeResize="0"/>
-          <p:nvPr/>
-        </p:nvPicPr>
-        <p:blipFill>
-          <a:blip r:embed="rId3">
-            <a:alphaModFix/>
-          </a:blip>
-          <a:stretch>
-            <a:fillRect/>
-          </a:stretch>
-        </p:blipFill>
-        <p:spPr>
-          <a:xfrm>
-            <a:off x="6789540" y="1714300"/>
-            <a:ext cx="5566768" cy="4823099"/>
-          </a:xfrm>
-          <a:prstGeom prst="rect">
-            <a:avLst/>
-          </a:prstGeom>
-          <a:ln>
-            <a:noFill/>
-          </a:ln>
-          <a:effectLst>
-            <a:outerShdw blurRad="292100" dist="139700" dir="2700000" algn="tl" rotWithShape="0">
-              <a:srgbClr val="333333">
-                <a:alpha val="65000"/>
-              </a:srgbClr>
-            </a:outerShdw>
-          </a:effectLst>
-        </p:spPr>
-      </p:pic>
       <p:pic>
         <p:nvPicPr>
           <p:cNvPr id="2" name="Kép 1">
@@ -18529,7 +19942,7 @@
           <p:nvPr/>
         </p:nvPicPr>
         <p:blipFill>
-          <a:blip r:embed="rId4"/>
+          <a:blip r:embed="rId3"/>
           <a:srcRect t="55" b="55"/>
           <a:stretch/>
         </p:blipFill>
@@ -18537,6 +19950,36 @@
           <a:xfrm>
             <a:off x="-317902" y="-137425"/>
             <a:ext cx="2852432" cy="2621626"/>
+          </a:xfrm>
+          <a:prstGeom prst="rect">
+            <a:avLst/>
+          </a:prstGeom>
+        </p:spPr>
+      </p:pic>
+      <p:pic>
+        <p:nvPicPr>
+          <p:cNvPr id="4" name="Kép 3">
+            <a:extLst>
+              <a:ext uri="{FF2B5EF4-FFF2-40B4-BE49-F238E27FC236}">
+                <a16:creationId xmlns:a16="http://schemas.microsoft.com/office/drawing/2014/main" id="{369E2F3D-E7E9-5259-2122-96AE26EF1D5B}"/>
+              </a:ext>
+            </a:extLst>
+          </p:cNvPr>
+          <p:cNvPicPr>
+            <a:picLocks noChangeAspect="1"/>
+          </p:cNvPicPr>
+          <p:nvPr/>
+        </p:nvPicPr>
+        <p:blipFill>
+          <a:blip r:embed="rId4"/>
+          <a:stretch>
+            <a:fillRect/>
+          </a:stretch>
+        </p:blipFill>
+        <p:spPr>
+          <a:xfrm>
+            <a:off x="8716345" y="262104"/>
+            <a:ext cx="2852432" cy="6518778"/>
           </a:xfrm>
           <a:prstGeom prst="rect">
             <a:avLst/>
@@ -18610,8 +20053,8 @@
         </p:nvSpPr>
         <p:spPr>
           <a:xfrm>
-            <a:off x="273924" y="1525348"/>
-            <a:ext cx="7475616" cy="5332652"/>
+            <a:off x="421030" y="1871108"/>
+            <a:ext cx="6190671" cy="4194968"/>
           </a:xfrm>
           <a:prstGeom prst="ellipse">
             <a:avLst/>
@@ -18701,7 +20144,7 @@
                 <a:cs typeface="Cambria"/>
                 <a:sym typeface="Cambria"/>
               </a:rPr>
-              <a:t>Backend architektúra és API</a:t>
+              <a:t>Backend architektúra</a:t>
             </a:r>
             <a:endParaRPr dirty="0"/>
           </a:p>
@@ -18750,8 +20193,8 @@
         </p:nvSpPr>
         <p:spPr>
           <a:xfrm>
-            <a:off x="1432921" y="2238753"/>
-            <a:ext cx="5634354" cy="4185761"/>
+            <a:off x="1292528" y="2531736"/>
+            <a:ext cx="5634354" cy="2585323"/>
           </a:xfrm>
           <a:prstGeom prst="rect">
             <a:avLst/>
@@ -18769,28 +20212,16 @@
               <a:buChar char="•"/>
             </a:pPr>
             <a:r>
+              <a:rPr lang="hu-HU" sz="1800" dirty="0"/>
+              <a:t>API / </a:t>
+            </a:r>
+            <a:r>
               <a:rPr lang="hu-HU" sz="1800" dirty="0" err="1"/>
-              <a:t>Laravel</a:t>
+              <a:t>Routing</a:t>
             </a:r>
             <a:r>
               <a:rPr lang="hu-HU" sz="1800" dirty="0"/>
-              <a:t> 12 REST API, </a:t>
-            </a:r>
-            <a:r>
-              <a:rPr lang="hu-HU" sz="1800" dirty="0" err="1"/>
-              <a:t>Sanctum</a:t>
-            </a:r>
-            <a:r>
-              <a:rPr lang="hu-HU" sz="1800" dirty="0"/>
-              <a:t> alapú </a:t>
-            </a:r>
-            <a:r>
-              <a:rPr lang="hu-HU" sz="1800" dirty="0" err="1"/>
-              <a:t>tokenes</a:t>
-            </a:r>
-            <a:r>
-              <a:rPr lang="hu-HU" sz="1800" dirty="0"/>
-              <a:t> védelem</a:t>
+              <a:t> </a:t>
             </a:r>
           </a:p>
           <a:p>
@@ -18806,9 +20237,10 @@
               <a:buChar char="•"/>
             </a:pPr>
             <a:r>
-              <a:rPr lang="hu-HU" sz="1800" dirty="0"/>
-              <a:t>Modulok: Auth és email-verifikáció, események, intézmények, osztályok, kérelmek, kommentek</a:t>
-            </a:r>
+              <a:rPr lang="hu-HU" sz="1800" dirty="0" err="1"/>
+              <a:t>Controller</a:t>
+            </a:r>
+            <a:endParaRPr lang="hu-HU" sz="1800" dirty="0"/>
           </a:p>
           <a:p>
             <a:pPr marL="285750" indent="-285750">
@@ -18824,7 +20256,7 @@
             </a:pPr>
             <a:r>
               <a:rPr lang="hu-HU" sz="1800" dirty="0"/>
-              <a:t>Implementált műveletek: esemény létrehozás, részvétel, kedvenc, ismétlődő alkalmak kezelése</a:t>
+              <a:t>Service</a:t>
             </a:r>
           </a:p>
           <a:p>
@@ -18840,8 +20272,12 @@
               <a:buChar char="•"/>
             </a:pPr>
             <a:r>
+              <a:rPr lang="hu-HU" sz="1800" dirty="0" err="1"/>
+              <a:t>Model</a:t>
+            </a:r>
+            <a:r>
               <a:rPr lang="hu-HU" sz="1800" dirty="0"/>
-              <a:t>Intézményi folyamatok: osztály- és tagságkezelés, kérelmek jóváhagyása/elutasítása</a:t>
+              <a:t> + adatkezelés</a:t>
             </a:r>
           </a:p>
           <a:p>
@@ -18858,14 +20294,57 @@
             </a:pPr>
             <a:r>
               <a:rPr lang="hu-HU" sz="1800" dirty="0"/>
-              <a:t>Egységes JSON válaszok és validáció a megbízható működésért</a:t>
-            </a:r>
-          </a:p>
-          <a:p>
-            <a:endParaRPr lang="hu-HU" dirty="0"/>
+              <a:t>Infrastruktúra (</a:t>
+            </a:r>
+            <a:r>
+              <a:rPr lang="hu-HU" sz="1800" dirty="0" err="1"/>
+              <a:t>middleware</a:t>
+            </a:r>
+            <a:r>
+              <a:rPr lang="hu-HU" sz="1800" dirty="0"/>
+              <a:t>, </a:t>
+            </a:r>
+            <a:r>
+              <a:rPr lang="hu-HU" sz="1800" dirty="0" err="1"/>
+              <a:t>auth</a:t>
+            </a:r>
+            <a:r>
+              <a:rPr lang="hu-HU" sz="1800" dirty="0"/>
+              <a:t>, stb.)</a:t>
+            </a:r>
           </a:p>
         </p:txBody>
       </p:sp>
+      <p:pic>
+        <p:nvPicPr>
+          <p:cNvPr id="7" name="Kép 6">
+            <a:extLst>
+              <a:ext uri="{FF2B5EF4-FFF2-40B4-BE49-F238E27FC236}">
+                <a16:creationId xmlns:a16="http://schemas.microsoft.com/office/drawing/2014/main" id="{82ECEB9B-A547-C71D-4219-18C311736373}"/>
+              </a:ext>
+            </a:extLst>
+          </p:cNvPr>
+          <p:cNvPicPr>
+            <a:picLocks noChangeAspect="1"/>
+          </p:cNvPicPr>
+          <p:nvPr/>
+        </p:nvPicPr>
+        <p:blipFill>
+          <a:blip r:embed="rId4"/>
+          <a:stretch>
+            <a:fillRect/>
+          </a:stretch>
+        </p:blipFill>
+        <p:spPr>
+          <a:xfrm>
+            <a:off x="9137050" y="824003"/>
+            <a:ext cx="2669037" cy="5777448"/>
+          </a:xfrm>
+          <a:prstGeom prst="rect">
+            <a:avLst/>
+          </a:prstGeom>
+        </p:spPr>
+      </p:pic>
     </p:spTree>
   </p:cSld>
   <p:clrMapOvr>
@@ -18887,6 +20366,380 @@
 </file>
 
 <file path=ppt/slides/slide7.xml><?xml version="1.0" encoding="utf-8"?>
+<p:sld xmlns:a="http://schemas.openxmlformats.org/drawingml/2006/main" xmlns:r="http://schemas.openxmlformats.org/officeDocument/2006/relationships" xmlns:p="http://schemas.openxmlformats.org/presentationml/2006/main">
+  <p:cSld>
+    <p:bg>
+      <p:bgPr>
+        <a:gradFill>
+          <a:gsLst>
+            <a:gs pos="0">
+              <a:srgbClr val="A3C5ED"/>
+            </a:gs>
+            <a:gs pos="74000">
+              <a:srgbClr val="72C4E9"/>
+            </a:gs>
+            <a:gs pos="83000">
+              <a:srgbClr val="72C4E9"/>
+            </a:gs>
+            <a:gs pos="100000">
+              <a:srgbClr val="A1D6F0"/>
+            </a:gs>
+          </a:gsLst>
+          <a:lin ang="5400000" scaled="0"/>
+        </a:gradFill>
+        <a:effectLst/>
+      </p:bgPr>
+    </p:bg>
+    <p:spTree>
+      <p:nvGrpSpPr>
+        <p:cNvPr id="1" name="Shape 123">
+          <a:extLst>
+            <a:ext uri="{FF2B5EF4-FFF2-40B4-BE49-F238E27FC236}">
+              <a16:creationId xmlns:a16="http://schemas.microsoft.com/office/drawing/2014/main" id="{89CDD949-1624-D715-4274-70BF1D69E757}"/>
+            </a:ext>
+          </a:extLst>
+        </p:cNvPr>
+        <p:cNvGrpSpPr/>
+        <p:nvPr/>
+      </p:nvGrpSpPr>
+      <p:grpSpPr>
+        <a:xfrm>
+          <a:off x="0" y="0"/>
+          <a:ext cx="0" cy="0"/>
+          <a:chOff x="0" y="0"/>
+          <a:chExt cx="0" cy="0"/>
+        </a:xfrm>
+      </p:grpSpPr>
+      <p:sp>
+        <p:nvSpPr>
+          <p:cNvPr id="124" name="Google Shape;124;p5">
+            <a:extLst>
+              <a:ext uri="{FF2B5EF4-FFF2-40B4-BE49-F238E27FC236}">
+                <a16:creationId xmlns:a16="http://schemas.microsoft.com/office/drawing/2014/main" id="{8C811668-B0F4-F47B-B18A-FBEF94CE94E7}"/>
+              </a:ext>
+            </a:extLst>
+          </p:cNvPr>
+          <p:cNvSpPr/>
+          <p:nvPr/>
+        </p:nvSpPr>
+        <p:spPr>
+          <a:xfrm>
+            <a:off x="5401340" y="1695157"/>
+            <a:ext cx="6579804" cy="4486486"/>
+          </a:xfrm>
+          <a:prstGeom prst="ellipse">
+            <a:avLst/>
+          </a:prstGeom>
+          <a:solidFill>
+            <a:srgbClr val="4A86E8"/>
+          </a:solidFill>
+          <a:ln w="9525" cap="flat" cmpd="sng">
+            <a:solidFill>
+              <a:srgbClr val="CFE2F3"/>
+            </a:solidFill>
+            <a:prstDash val="solid"/>
+            <a:round/>
+            <a:headEnd type="none" w="sm" len="sm"/>
+            <a:tailEnd type="none" w="sm" len="sm"/>
+          </a:ln>
+        </p:spPr>
+        <p:txBody>
+          <a:bodyPr spcFirstLastPara="1" wrap="square" lIns="91425" tIns="91425" rIns="91425" bIns="91425" anchor="ctr" anchorCtr="0">
+            <a:noAutofit/>
+          </a:bodyPr>
+          <a:lstStyle/>
+          <a:p>
+            <a:pPr marL="0" lvl="0" indent="0" algn="ctr" rtl="0">
+              <a:spcBef>
+                <a:spcPts val="0"/>
+              </a:spcBef>
+              <a:spcAft>
+                <a:spcPts val="0"/>
+              </a:spcAft>
+              <a:buNone/>
+            </a:pPr>
+            <a:endParaRPr dirty="0"/>
+          </a:p>
+        </p:txBody>
+      </p:sp>
+      <p:sp>
+        <p:nvSpPr>
+          <p:cNvPr id="126" name="Google Shape;126;p5">
+            <a:extLst>
+              <a:ext uri="{FF2B5EF4-FFF2-40B4-BE49-F238E27FC236}">
+                <a16:creationId xmlns:a16="http://schemas.microsoft.com/office/drawing/2014/main" id="{0FD3525F-9239-F39B-02A8-B12202CFE554}"/>
+              </a:ext>
+            </a:extLst>
+          </p:cNvPr>
+          <p:cNvSpPr txBox="1">
+            <a:spLocks noGrp="1"/>
+          </p:cNvSpPr>
+          <p:nvPr>
+            <p:ph type="ctrTitle"/>
+          </p:nvPr>
+        </p:nvSpPr>
+        <p:spPr>
+          <a:xfrm>
+            <a:off x="872762" y="524926"/>
+            <a:ext cx="10446473" cy="810807"/>
+          </a:xfrm>
+          <a:prstGeom prst="rect">
+            <a:avLst/>
+          </a:prstGeom>
+          <a:noFill/>
+          <a:ln>
+            <a:noFill/>
+          </a:ln>
+        </p:spPr>
+        <p:txBody>
+          <a:bodyPr spcFirstLastPara="1" wrap="square" lIns="91425" tIns="45700" rIns="91425" bIns="45700" anchor="b" anchorCtr="0">
+            <a:normAutofit fontScale="90000"/>
+          </a:bodyPr>
+          <a:lstStyle/>
+          <a:p>
+            <a:pPr marL="0" lvl="0" indent="0" algn="ctr" rtl="0">
+              <a:lnSpc>
+                <a:spcPct val="90000"/>
+              </a:lnSpc>
+              <a:spcBef>
+                <a:spcPts val="0"/>
+              </a:spcBef>
+              <a:spcAft>
+                <a:spcPts val="0"/>
+              </a:spcAft>
+              <a:buClr>
+                <a:schemeClr val="dk1"/>
+              </a:buClr>
+              <a:buSzPts val="4400"/>
+              <a:buFont typeface="Cambria"/>
+              <a:buNone/>
+            </a:pPr>
+            <a:r>
+              <a:rPr lang="hu-HU" dirty="0">
+                <a:latin typeface="Cambria" panose="02040503050406030204" pitchFamily="18" charset="0"/>
+                <a:ea typeface="Cambria" panose="02040503050406030204" pitchFamily="18" charset="0"/>
+              </a:rPr>
+              <a:t>Kontrollerek</a:t>
+            </a:r>
+            <a:endParaRPr dirty="0">
+              <a:latin typeface="Cambria" panose="02040503050406030204" pitchFamily="18" charset="0"/>
+              <a:ea typeface="Cambria" panose="02040503050406030204" pitchFamily="18" charset="0"/>
+            </a:endParaRPr>
+          </a:p>
+        </p:txBody>
+      </p:sp>
+      <p:pic>
+        <p:nvPicPr>
+          <p:cNvPr id="2" name="Kép 1">
+            <a:extLst>
+              <a:ext uri="{FF2B5EF4-FFF2-40B4-BE49-F238E27FC236}">
+                <a16:creationId xmlns:a16="http://schemas.microsoft.com/office/drawing/2014/main" id="{F66B6417-0E38-F43A-3A77-709C67B4E2BE}"/>
+              </a:ext>
+            </a:extLst>
+          </p:cNvPr>
+          <p:cNvPicPr>
+            <a:picLocks noChangeAspect="1"/>
+          </p:cNvPicPr>
+          <p:nvPr/>
+        </p:nvPicPr>
+        <p:blipFill>
+          <a:blip r:embed="rId3"/>
+          <a:srcRect t="55" b="55"/>
+          <a:stretch/>
+        </p:blipFill>
+        <p:spPr>
+          <a:xfrm>
+            <a:off x="-317902" y="-137425"/>
+            <a:ext cx="2852432" cy="2621626"/>
+          </a:xfrm>
+          <a:prstGeom prst="rect">
+            <a:avLst/>
+          </a:prstGeom>
+        </p:spPr>
+      </p:pic>
+      <p:sp>
+        <p:nvSpPr>
+          <p:cNvPr id="3" name="Szövegdoboz 2">
+            <a:extLst>
+              <a:ext uri="{FF2B5EF4-FFF2-40B4-BE49-F238E27FC236}">
+                <a16:creationId xmlns:a16="http://schemas.microsoft.com/office/drawing/2014/main" id="{D9B7A07A-2D6A-1984-F4A7-476723F6C2A3}"/>
+              </a:ext>
+            </a:extLst>
+          </p:cNvPr>
+          <p:cNvSpPr txBox="1"/>
+          <p:nvPr/>
+        </p:nvSpPr>
+        <p:spPr>
+          <a:xfrm>
+            <a:off x="6095998" y="2472572"/>
+            <a:ext cx="5634354" cy="2862322"/>
+          </a:xfrm>
+          <a:prstGeom prst="rect">
+            <a:avLst/>
+          </a:prstGeom>
+          <a:noFill/>
+        </p:spPr>
+        <p:txBody>
+          <a:bodyPr wrap="square" rtlCol="0">
+            <a:spAutoFit/>
+          </a:bodyPr>
+          <a:lstStyle/>
+          <a:p>
+            <a:pPr marL="285750" indent="-285750">
+              <a:buFont typeface="Arial" panose="020B0604020202020204" pitchFamily="34" charset="0"/>
+              <a:buChar char="•"/>
+            </a:pPr>
+            <a:r>
+              <a:rPr lang="hu-HU" sz="1800" dirty="0"/>
+              <a:t>A </a:t>
+            </a:r>
+            <a:r>
+              <a:rPr lang="hu-HU" sz="1800" dirty="0" err="1"/>
+              <a:t>kontreollerek</a:t>
+            </a:r>
+            <a:r>
+              <a:rPr lang="hu-HU" sz="1800" dirty="0"/>
+              <a:t> fogadják az API kéréseket</a:t>
+            </a:r>
+          </a:p>
+          <a:p>
+            <a:pPr marL="285750" indent="-285750">
+              <a:buFont typeface="Arial" panose="020B0604020202020204" pitchFamily="34" charset="0"/>
+              <a:buChar char="•"/>
+            </a:pPr>
+            <a:endParaRPr lang="hu-HU" sz="1800" dirty="0"/>
+          </a:p>
+          <a:p>
+            <a:pPr marL="285750" indent="-285750">
+              <a:buFont typeface="Arial" panose="020B0604020202020204" pitchFamily="34" charset="0"/>
+              <a:buChar char="•"/>
+            </a:pPr>
+            <a:r>
+              <a:rPr lang="hu-HU" sz="1800" dirty="0" err="1"/>
+              <a:t>Validálják</a:t>
+            </a:r>
+            <a:r>
+              <a:rPr lang="hu-HU" sz="1800" dirty="0"/>
+              <a:t> a bejövő adatokat</a:t>
+            </a:r>
+          </a:p>
+          <a:p>
+            <a:pPr marL="285750" indent="-285750">
+              <a:buFont typeface="Arial" panose="020B0604020202020204" pitchFamily="34" charset="0"/>
+              <a:buChar char="•"/>
+            </a:pPr>
+            <a:endParaRPr lang="hu-HU" sz="1800" dirty="0"/>
+          </a:p>
+          <a:p>
+            <a:pPr marL="285750" indent="-285750">
+              <a:buFont typeface="Arial" panose="020B0604020202020204" pitchFamily="34" charset="0"/>
+              <a:buChar char="•"/>
+            </a:pPr>
+            <a:r>
+              <a:rPr lang="hu-HU" sz="1800" dirty="0"/>
+              <a:t>Meghívják a megfelelő service / </a:t>
+            </a:r>
+            <a:r>
+              <a:rPr lang="hu-HU" sz="1800" dirty="0" err="1"/>
+              <a:t>model</a:t>
+            </a:r>
+            <a:r>
+              <a:rPr lang="hu-HU" sz="1800" dirty="0"/>
+              <a:t> logikát</a:t>
+            </a:r>
+          </a:p>
+          <a:p>
+            <a:pPr marL="285750" indent="-285750">
+              <a:buFont typeface="Arial" panose="020B0604020202020204" pitchFamily="34" charset="0"/>
+              <a:buChar char="•"/>
+            </a:pPr>
+            <a:endParaRPr lang="hu-HU" sz="1800" dirty="0"/>
+          </a:p>
+          <a:p>
+            <a:pPr marL="285750" indent="-285750">
+              <a:buFont typeface="Arial" panose="020B0604020202020204" pitchFamily="34" charset="0"/>
+              <a:buChar char="•"/>
+            </a:pPr>
+            <a:r>
+              <a:rPr lang="hu-HU" sz="1800" dirty="0"/>
+              <a:t>Egységes JSON választ adnak vissza</a:t>
+            </a:r>
+          </a:p>
+          <a:p>
+            <a:pPr marL="285750" indent="-285750">
+              <a:buFont typeface="Arial" panose="020B0604020202020204" pitchFamily="34" charset="0"/>
+              <a:buChar char="•"/>
+            </a:pPr>
+            <a:endParaRPr lang="hu-HU" sz="1800" dirty="0"/>
+          </a:p>
+          <a:p>
+            <a:pPr marL="285750" indent="-285750">
+              <a:buFont typeface="Arial" panose="020B0604020202020204" pitchFamily="34" charset="0"/>
+              <a:buChar char="•"/>
+            </a:pPr>
+            <a:r>
+              <a:rPr lang="hu-HU" sz="1800" dirty="0"/>
+              <a:t>Szerepkör és jogosultság alapján eltérő működést kezelnek</a:t>
+            </a:r>
+          </a:p>
+        </p:txBody>
+      </p:sp>
+      <p:pic>
+        <p:nvPicPr>
+          <p:cNvPr id="5" name="Kép 4">
+            <a:extLst>
+              <a:ext uri="{FF2B5EF4-FFF2-40B4-BE49-F238E27FC236}">
+                <a16:creationId xmlns:a16="http://schemas.microsoft.com/office/drawing/2014/main" id="{4BED8106-2703-BE1C-9D9F-D960A92443D0}"/>
+              </a:ext>
+            </a:extLst>
+          </p:cNvPr>
+          <p:cNvPicPr>
+            <a:picLocks noChangeAspect="1"/>
+          </p:cNvPicPr>
+          <p:nvPr/>
+        </p:nvPicPr>
+        <p:blipFill>
+          <a:blip r:embed="rId4"/>
+          <a:stretch>
+            <a:fillRect/>
+          </a:stretch>
+        </p:blipFill>
+        <p:spPr>
+          <a:xfrm>
+            <a:off x="702266" y="2247477"/>
+            <a:ext cx="3915321" cy="3381847"/>
+          </a:xfrm>
+          <a:prstGeom prst="rect">
+            <a:avLst/>
+          </a:prstGeom>
+        </p:spPr>
+      </p:pic>
+    </p:spTree>
+    <p:extLst>
+      <p:ext uri="{BB962C8B-B14F-4D97-AF65-F5344CB8AC3E}">
+        <p14:creationId xmlns:p14="http://schemas.microsoft.com/office/powerpoint/2010/main" val="2036302648"/>
+      </p:ext>
+    </p:extLst>
+  </p:cSld>
+  <p:clrMapOvr>
+    <a:masterClrMapping/>
+  </p:clrMapOvr>
+  <mc:AlternateContent xmlns:mc="http://schemas.openxmlformats.org/markup-compatibility/2006">
+    <mc:Choice xmlns:p159="http://schemas.microsoft.com/office/powerpoint/2015/09/main" Requires="p159">
+      <p:transition xmlns:p14="http://schemas.microsoft.com/office/powerpoint/2010/main" spd="slow" p14:dur="2000">
+        <p159:morph option="byObject"/>
+      </p:transition>
+    </mc:Choice>
+    <mc:Fallback>
+      <p:transition spd="slow">
+        <p:fade/>
+      </p:transition>
+    </mc:Fallback>
+  </mc:AlternateContent>
+</p:sld>
+</file>
+
+<file path=ppt/slides/slide8.xml><?xml version="1.0" encoding="utf-8"?>
 <p:sld xmlns:a="http://schemas.openxmlformats.org/drawingml/2006/main" xmlns:r="http://schemas.openxmlformats.org/officeDocument/2006/relationships" xmlns:p="http://schemas.openxmlformats.org/presentationml/2006/main">
   <p:cSld>
     <p:bg>
@@ -19018,7 +20871,7 @@
               <a:buNone/>
             </a:pPr>
             <a:r>
-              <a:rPr lang="hu-HU" sz="4400">
+              <a:rPr lang="hu-HU" sz="4400" dirty="0">
                 <a:latin typeface="Cambria"/>
                 <a:ea typeface="Cambria"/>
                 <a:cs typeface="Cambria"/>
@@ -19026,7 +20879,7 @@
               </a:rPr>
               <a:t>Jogosultság és biztonság</a:t>
             </a:r>
-            <a:endParaRPr/>
+            <a:endParaRPr dirty="0"/>
           </a:p>
         </p:txBody>
       </p:sp>
@@ -19039,7 +20892,7 @@
         <p:spPr>
           <a:xfrm>
             <a:off x="1291479" y="2404683"/>
-            <a:ext cx="4524000" cy="2862900"/>
+            <a:ext cx="4524000" cy="2585283"/>
           </a:xfrm>
           <a:prstGeom prst="rect">
             <a:avLst/>
@@ -19070,7 +20923,7 @@
               <a:buChar char="•"/>
             </a:pPr>
             <a:r>
-              <a:rPr lang="hu-HU" sz="1800">
+              <a:rPr lang="hu-HU" sz="1800" dirty="0" err="1">
                 <a:solidFill>
                   <a:schemeClr val="dk1"/>
                 </a:solidFill>
@@ -19079,9 +20932,45 @@
                 <a:cs typeface="Arial"/>
                 <a:sym typeface="Arial"/>
               </a:rPr>
-              <a:t>Token alapú hitelesítés (Sanctum)</a:t>
-            </a:r>
-            <a:endParaRPr sz="1800">
+              <a:t>Token</a:t>
+            </a:r>
+            <a:r>
+              <a:rPr lang="hu-HU" sz="1800" dirty="0">
+                <a:solidFill>
+                  <a:schemeClr val="dk1"/>
+                </a:solidFill>
+                <a:latin typeface="Arial"/>
+                <a:ea typeface="Arial"/>
+                <a:cs typeface="Arial"/>
+                <a:sym typeface="Arial"/>
+              </a:rPr>
+              <a:t> alapú hitelesítés (</a:t>
+            </a:r>
+            <a:r>
+              <a:rPr lang="hu-HU" sz="1800" dirty="0" err="1">
+                <a:solidFill>
+                  <a:schemeClr val="dk1"/>
+                </a:solidFill>
+                <a:latin typeface="Arial"/>
+                <a:ea typeface="Arial"/>
+                <a:cs typeface="Arial"/>
+                <a:sym typeface="Arial"/>
+              </a:rPr>
+              <a:t>Sanctum</a:t>
+            </a:r>
+            <a:r>
+              <a:rPr lang="hu-HU" sz="1800" dirty="0">
+                <a:solidFill>
+                  <a:schemeClr val="dk1"/>
+                </a:solidFill>
+                <a:latin typeface="Arial"/>
+                <a:ea typeface="Arial"/>
+                <a:cs typeface="Arial"/>
+                <a:sym typeface="Arial"/>
+              </a:rPr>
+              <a:t>)</a:t>
+            </a:r>
+            <a:endParaRPr sz="1800" dirty="0">
               <a:solidFill>
                 <a:schemeClr val="dk1"/>
               </a:solidFill>
@@ -19101,7 +20990,7 @@
               </a:spcAft>
               <a:buNone/>
             </a:pPr>
-            <a:endParaRPr sz="1800">
+            <a:endParaRPr sz="1800" dirty="0">
               <a:solidFill>
                 <a:schemeClr val="dk1"/>
               </a:solidFill>
@@ -19123,7 +21012,7 @@
               <a:buChar char="•"/>
             </a:pPr>
             <a:r>
-              <a:rPr lang="hu-HU" sz="1800">
+              <a:rPr lang="hu-HU" sz="1800" dirty="0">
                 <a:solidFill>
                   <a:schemeClr val="dk1"/>
                 </a:solidFill>
@@ -19134,7 +21023,7 @@
               </a:rPr>
               <a:t>Védett API végpontok</a:t>
             </a:r>
-            <a:endParaRPr sz="1800">
+            <a:endParaRPr sz="1800" dirty="0">
               <a:solidFill>
                 <a:schemeClr val="dk1"/>
               </a:solidFill>
@@ -19154,7 +21043,7 @@
               </a:spcAft>
               <a:buNone/>
             </a:pPr>
-            <a:endParaRPr sz="1800">
+            <a:endParaRPr sz="1800" dirty="0">
               <a:solidFill>
                 <a:schemeClr val="dk1"/>
               </a:solidFill>
@@ -19176,7 +21065,7 @@
               <a:buChar char="•"/>
             </a:pPr>
             <a:r>
-              <a:rPr lang="hu-HU" sz="1800">
+              <a:rPr lang="hu-HU" sz="1800" dirty="0">
                 <a:solidFill>
                   <a:schemeClr val="dk1"/>
                 </a:solidFill>
@@ -19187,7 +21076,7 @@
               </a:rPr>
               <a:t>Szerepkör-alapú hozzáférés</a:t>
             </a:r>
-            <a:endParaRPr/>
+            <a:endParaRPr dirty="0"/>
           </a:p>
           <a:p>
             <a:pPr marL="457200" marR="0" lvl="0" indent="0" algn="l" rtl="0">
@@ -19199,7 +21088,7 @@
               </a:spcAft>
               <a:buNone/>
             </a:pPr>
-            <a:endParaRPr sz="1800">
+            <a:endParaRPr sz="1800" dirty="0">
               <a:solidFill>
                 <a:schemeClr val="dk1"/>
               </a:solidFill>
@@ -19221,7 +21110,7 @@
               <a:buChar char="•"/>
             </a:pPr>
             <a:r>
-              <a:rPr lang="hu-HU" sz="1800">
+              <a:rPr lang="hu-HU" sz="1800" dirty="0" err="1">
                 <a:solidFill>
                   <a:schemeClr val="dk1"/>
                 </a:solidFill>
@@ -19230,9 +21119,21 @@
                 <a:cs typeface="Arial"/>
                 <a:sym typeface="Arial"/>
               </a:rPr>
-              <a:t>Kritikus műveletek korlátozása</a:t>
-            </a:r>
-            <a:endParaRPr/>
+              <a:t>Admin</a:t>
+            </a:r>
+            <a:r>
+              <a:rPr lang="hu-HU" sz="1800" dirty="0">
+                <a:solidFill>
+                  <a:schemeClr val="dk1"/>
+                </a:solidFill>
+                <a:latin typeface="Arial"/>
+                <a:ea typeface="Arial"/>
+                <a:cs typeface="Arial"/>
+                <a:sym typeface="Arial"/>
+              </a:rPr>
+              <a:t> jogosultsághoz kötött műveletek</a:t>
+            </a:r>
+            <a:endParaRPr dirty="0"/>
           </a:p>
           <a:p>
             <a:pPr marL="457200" marR="0" lvl="0" indent="0" algn="l" rtl="0">
@@ -19244,7 +21145,7 @@
               </a:spcAft>
               <a:buNone/>
             </a:pPr>
-            <a:endParaRPr sz="1800">
+            <a:endParaRPr sz="1800" dirty="0">
               <a:solidFill>
                 <a:schemeClr val="dk1"/>
               </a:solidFill>
@@ -19266,7 +21167,7 @@
               <a:buChar char="•"/>
             </a:pPr>
             <a:r>
-              <a:rPr lang="hu-HU" sz="1800">
+              <a:rPr lang="hu-HU" sz="1800" dirty="0">
                 <a:solidFill>
                   <a:schemeClr val="dk1"/>
                 </a:solidFill>
@@ -19275,9 +21176,9 @@
                 <a:cs typeface="Arial"/>
                 <a:sym typeface="Arial"/>
               </a:rPr>
-              <a:t>Email-verifikáció és hozzáférés-védelem</a:t>
-            </a:r>
-            <a:endParaRPr sz="1800">
+              <a:t>Email-verifikáció</a:t>
+            </a:r>
+            <a:endParaRPr sz="1800" dirty="0">
               <a:solidFill>
                 <a:schemeClr val="dk1"/>
               </a:solidFill>
@@ -19293,7 +21194,7 @@
         </p:nvSpPr>
         <p:spPr>
           <a:xfrm>
-            <a:off x="7216234" y="2413058"/>
+            <a:off x="7890362" y="2163226"/>
             <a:ext cx="3429000" cy="2031900"/>
           </a:xfrm>
           <a:prstGeom prst="rect">
@@ -19320,7 +21221,7 @@
               <a:buNone/>
             </a:pPr>
             <a:r>
-              <a:rPr lang="hu-HU" sz="1800" b="1">
+              <a:rPr lang="hu-HU" sz="1800" b="1" dirty="0">
                 <a:solidFill>
                   <a:schemeClr val="dk1"/>
                 </a:solidFill>
@@ -19331,7 +21232,7 @@
               </a:rPr>
               <a:t>Szerepkörök:</a:t>
             </a:r>
-            <a:endParaRPr sz="1800" b="1">
+            <a:endParaRPr sz="1800" b="1" dirty="0">
               <a:solidFill>
                 <a:schemeClr val="dk1"/>
               </a:solidFill>
@@ -19351,7 +21252,7 @@
               </a:spcAft>
               <a:buNone/>
             </a:pPr>
-            <a:endParaRPr sz="1800" b="1">
+            <a:endParaRPr sz="1800" b="1" dirty="0">
               <a:solidFill>
                 <a:schemeClr val="dk1"/>
               </a:solidFill>
@@ -19372,14 +21273,14 @@
               <a:buChar char="•"/>
             </a:pPr>
             <a:r>
-              <a:rPr lang="hu-HU" sz="1800">
+              <a:rPr lang="hu-HU" sz="1800" dirty="0">
                 <a:solidFill>
                   <a:schemeClr val="dk1"/>
                 </a:solidFill>
               </a:rPr>
               <a:t>Diák</a:t>
             </a:r>
-            <a:endParaRPr sz="1800">
+            <a:endParaRPr sz="1800" dirty="0">
               <a:solidFill>
                 <a:schemeClr val="dk1"/>
               </a:solidFill>
@@ -19395,7 +21296,7 @@
               </a:spcAft>
               <a:buNone/>
             </a:pPr>
-            <a:endParaRPr sz="1800">
+            <a:endParaRPr sz="1800" dirty="0">
               <a:solidFill>
                 <a:schemeClr val="dk1"/>
               </a:solidFill>
@@ -19416,14 +21317,14 @@
               <a:buChar char="•"/>
             </a:pPr>
             <a:r>
-              <a:rPr lang="hu-HU" sz="1800">
+              <a:rPr lang="hu-HU" sz="1800" dirty="0">
                 <a:solidFill>
                   <a:schemeClr val="dk1"/>
                 </a:solidFill>
               </a:rPr>
               <a:t>Tanár</a:t>
             </a:r>
-            <a:endParaRPr sz="1800">
+            <a:endParaRPr sz="1800" dirty="0">
               <a:solidFill>
                 <a:schemeClr val="dk1"/>
               </a:solidFill>
@@ -19439,7 +21340,7 @@
               </a:spcAft>
               <a:buNone/>
             </a:pPr>
-            <a:endParaRPr sz="1800">
+            <a:endParaRPr sz="1800" dirty="0">
               <a:solidFill>
                 <a:schemeClr val="dk1"/>
               </a:solidFill>
@@ -19460,14 +21361,14 @@
               <a:buChar char="•"/>
             </a:pPr>
             <a:r>
-              <a:rPr lang="hu-HU" sz="1800">
+              <a:rPr lang="hu-HU" sz="1800" dirty="0" err="1">
                 <a:solidFill>
                   <a:schemeClr val="dk1"/>
                 </a:solidFill>
               </a:rPr>
               <a:t>Admin</a:t>
             </a:r>
-            <a:endParaRPr sz="1800" b="1">
+            <a:endParaRPr sz="1800" b="1" dirty="0">
               <a:solidFill>
                 <a:schemeClr val="dk1"/>
               </a:solidFill>
@@ -19504,419 +21405,12 @@
           </a:prstGeom>
         </p:spPr>
       </p:pic>
-    </p:spTree>
-  </p:cSld>
-  <p:clrMapOvr>
-    <a:masterClrMapping/>
-  </p:clrMapOvr>
-  <mc:AlternateContent xmlns:mc="http://schemas.openxmlformats.org/markup-compatibility/2006" xmlns:p159="http://schemas.microsoft.com/office/powerpoint/2015/09/main">
-    <mc:Choice Requires="p159">
-      <p:transition xmlns:p14="http://schemas.microsoft.com/office/powerpoint/2010/main" spd="slow" p14:dur="2000">
-        <p159:morph option="byObject"/>
-      </p:transition>
-    </mc:Choice>
-    <mc:Fallback xmlns="">
-      <p:transition spd="slow">
-        <p:fade/>
-      </p:transition>
-    </mc:Fallback>
-  </mc:AlternateContent>
-</p:sld>
-</file>
-
-<file path=ppt/slides/slide8.xml><?xml version="1.0" encoding="utf-8"?>
-<p:sld xmlns:a="http://schemas.openxmlformats.org/drawingml/2006/main" xmlns:r="http://schemas.openxmlformats.org/officeDocument/2006/relationships" xmlns:p="http://schemas.openxmlformats.org/presentationml/2006/main">
-  <p:cSld>
-    <p:bg>
-      <p:bgPr>
-        <a:gradFill>
-          <a:gsLst>
-            <a:gs pos="0">
-              <a:srgbClr val="A3C5ED"/>
-            </a:gs>
-            <a:gs pos="74000">
-              <a:srgbClr val="72C4E9"/>
-            </a:gs>
-            <a:gs pos="83000">
-              <a:srgbClr val="72C4E9"/>
-            </a:gs>
-            <a:gs pos="100000">
-              <a:srgbClr val="A1D6F0"/>
-            </a:gs>
-          </a:gsLst>
-          <a:lin ang="5400000" scaled="0"/>
-        </a:gradFill>
-        <a:effectLst/>
-      </p:bgPr>
-    </p:bg>
-    <p:spTree>
-      <p:nvGrpSpPr>
-        <p:cNvPr id="1" name="Shape 155"/>
-        <p:cNvGrpSpPr/>
-        <p:nvPr/>
-      </p:nvGrpSpPr>
-      <p:grpSpPr>
-        <a:xfrm>
-          <a:off x="0" y="0"/>
-          <a:ext cx="0" cy="0"/>
-          <a:chOff x="0" y="0"/>
-          <a:chExt cx="0" cy="0"/>
-        </a:xfrm>
-      </p:grpSpPr>
-      <p:sp>
-        <p:nvSpPr>
-          <p:cNvPr id="156" name="Google Shape;156;p8"/>
-          <p:cNvSpPr/>
-          <p:nvPr/>
-        </p:nvSpPr>
-        <p:spPr>
-          <a:xfrm>
-            <a:off x="356025" y="1698075"/>
-            <a:ext cx="8708700" cy="4687800"/>
-          </a:xfrm>
-          <a:prstGeom prst="ellipse">
-            <a:avLst/>
-          </a:prstGeom>
-          <a:solidFill>
-            <a:srgbClr val="4A86E8"/>
-          </a:solidFill>
-          <a:ln w="9525" cap="flat" cmpd="sng">
-            <a:solidFill>
-              <a:srgbClr val="CFE2F3"/>
-            </a:solidFill>
-            <a:prstDash val="solid"/>
-            <a:round/>
-            <a:headEnd type="none" w="sm" len="sm"/>
-            <a:tailEnd type="none" w="sm" len="sm"/>
-          </a:ln>
-        </p:spPr>
-        <p:txBody>
-          <a:bodyPr spcFirstLastPara="1" wrap="square" lIns="91425" tIns="91425" rIns="91425" bIns="91425" anchor="ctr" anchorCtr="0">
-            <a:noAutofit/>
-          </a:bodyPr>
-          <a:lstStyle/>
-          <a:p>
-            <a:pPr marL="0" lvl="0" indent="0" algn="ctr" rtl="0">
-              <a:spcBef>
-                <a:spcPts val="0"/>
-              </a:spcBef>
-              <a:spcAft>
-                <a:spcPts val="0"/>
-              </a:spcAft>
-              <a:buNone/>
-            </a:pPr>
-            <a:endParaRPr/>
-          </a:p>
-        </p:txBody>
-      </p:sp>
-      <p:sp>
-        <p:nvSpPr>
-          <p:cNvPr id="157" name="Google Shape;157;p8"/>
-          <p:cNvSpPr txBox="1">
-            <a:spLocks noGrp="1"/>
-          </p:cNvSpPr>
-          <p:nvPr>
-            <p:ph type="ctrTitle"/>
-          </p:nvPr>
-        </p:nvSpPr>
-        <p:spPr>
-          <a:xfrm>
-            <a:off x="872762" y="524926"/>
-            <a:ext cx="10446473" cy="810807"/>
-          </a:xfrm>
-          <a:prstGeom prst="rect">
-            <a:avLst/>
-          </a:prstGeom>
-          <a:noFill/>
-          <a:ln>
-            <a:noFill/>
-          </a:ln>
-        </p:spPr>
-        <p:txBody>
-          <a:bodyPr spcFirstLastPara="1" wrap="square" lIns="91425" tIns="45700" rIns="91425" bIns="45700" anchor="b" anchorCtr="0">
-            <a:normAutofit/>
-          </a:bodyPr>
-          <a:lstStyle/>
-          <a:p>
-            <a:pPr marL="0" lvl="0" indent="0" algn="ctr" rtl="0">
-              <a:lnSpc>
-                <a:spcPct val="90000"/>
-              </a:lnSpc>
-              <a:spcBef>
-                <a:spcPts val="0"/>
-              </a:spcBef>
-              <a:spcAft>
-                <a:spcPts val="0"/>
-              </a:spcAft>
-              <a:buClr>
-                <a:schemeClr val="dk1"/>
-              </a:buClr>
-              <a:buSzPts val="4400"/>
-              <a:buFont typeface="Cambria"/>
-              <a:buNone/>
-            </a:pPr>
-            <a:r>
-              <a:rPr lang="hu-HU" sz="4400">
-                <a:latin typeface="Cambria"/>
-                <a:ea typeface="Cambria"/>
-                <a:cs typeface="Cambria"/>
-                <a:sym typeface="Cambria"/>
-              </a:rPr>
-              <a:t>Felhasználói élmény és érték</a:t>
-            </a:r>
-            <a:endParaRPr/>
-          </a:p>
-        </p:txBody>
-      </p:sp>
-      <p:sp>
-        <p:nvSpPr>
-          <p:cNvPr id="159" name="Google Shape;159;p8"/>
-          <p:cNvSpPr txBox="1"/>
-          <p:nvPr/>
-        </p:nvSpPr>
-        <p:spPr>
-          <a:xfrm>
-            <a:off x="1291484" y="2748985"/>
-            <a:ext cx="6453600" cy="2586000"/>
-          </a:xfrm>
-          <a:prstGeom prst="rect">
-            <a:avLst/>
-          </a:prstGeom>
-          <a:noFill/>
-          <a:ln>
-            <a:noFill/>
-          </a:ln>
-        </p:spPr>
-        <p:txBody>
-          <a:bodyPr spcFirstLastPara="1" wrap="square" lIns="91425" tIns="45700" rIns="91425" bIns="45700" anchor="t" anchorCtr="0">
-            <a:spAutoFit/>
-          </a:bodyPr>
-          <a:lstStyle/>
-          <a:p>
-            <a:pPr marL="285750" marR="0" lvl="0" indent="-285750" algn="l" rtl="0">
-              <a:spcBef>
-                <a:spcPts val="0"/>
-              </a:spcBef>
-              <a:spcAft>
-                <a:spcPts val="0"/>
-              </a:spcAft>
-              <a:buClr>
-                <a:schemeClr val="dk1"/>
-              </a:buClr>
-              <a:buSzPts val="1800"/>
-              <a:buFont typeface="Arial"/>
-              <a:buChar char="•"/>
-            </a:pPr>
-            <a:r>
-              <a:rPr lang="hu-HU" sz="1800">
-                <a:solidFill>
-                  <a:schemeClr val="dk1"/>
-                </a:solidFill>
-                <a:latin typeface="Arial"/>
-                <a:ea typeface="Arial"/>
-                <a:cs typeface="Arial"/>
-                <a:sym typeface="Arial"/>
-              </a:rPr>
-              <a:t>Egységes, könnyen tanulható felület minden szerepkörnek</a:t>
-            </a:r>
-            <a:endParaRPr sz="1800">
-              <a:solidFill>
-                <a:schemeClr val="dk1"/>
-              </a:solidFill>
-              <a:latin typeface="Arial"/>
-              <a:ea typeface="Arial"/>
-              <a:cs typeface="Arial"/>
-              <a:sym typeface="Arial"/>
-            </a:endParaRPr>
-          </a:p>
-          <a:p>
-            <a:pPr marL="457200" marR="0" lvl="0" indent="0" algn="l" rtl="0">
-              <a:spcBef>
-                <a:spcPts val="0"/>
-              </a:spcBef>
-              <a:spcAft>
-                <a:spcPts val="0"/>
-              </a:spcAft>
-              <a:buNone/>
-            </a:pPr>
-            <a:endParaRPr sz="1800">
-              <a:solidFill>
-                <a:schemeClr val="dk1"/>
-              </a:solidFill>
-            </a:endParaRPr>
-          </a:p>
-          <a:p>
-            <a:pPr marL="285750" marR="0" lvl="0" indent="-285750" algn="l" rtl="0">
-              <a:spcBef>
-                <a:spcPts val="0"/>
-              </a:spcBef>
-              <a:spcAft>
-                <a:spcPts val="0"/>
-              </a:spcAft>
-              <a:buClr>
-                <a:schemeClr val="dk1"/>
-              </a:buClr>
-              <a:buSzPts val="1800"/>
-              <a:buFont typeface="Arial"/>
-              <a:buChar char="•"/>
-            </a:pPr>
-            <a:r>
-              <a:rPr lang="hu-HU" sz="1800">
-                <a:solidFill>
-                  <a:schemeClr val="dk1"/>
-                </a:solidFill>
-                <a:latin typeface="Arial"/>
-                <a:ea typeface="Arial"/>
-                <a:cs typeface="Arial"/>
-                <a:sym typeface="Arial"/>
-              </a:rPr>
-              <a:t>Gyors és logikus navigáció a fő funkciók között</a:t>
-            </a:r>
-            <a:endParaRPr/>
-          </a:p>
-          <a:p>
-            <a:pPr marL="457200" marR="0" lvl="0" indent="0" algn="l" rtl="0">
-              <a:spcBef>
-                <a:spcPts val="0"/>
-              </a:spcBef>
-              <a:spcAft>
-                <a:spcPts val="0"/>
-              </a:spcAft>
-              <a:buNone/>
-            </a:pPr>
-            <a:endParaRPr sz="1800">
-              <a:solidFill>
-                <a:schemeClr val="dk1"/>
-              </a:solidFill>
-            </a:endParaRPr>
-          </a:p>
-          <a:p>
-            <a:pPr marL="285750" marR="0" lvl="0" indent="-285750" algn="l" rtl="0">
-              <a:spcBef>
-                <a:spcPts val="0"/>
-              </a:spcBef>
-              <a:spcAft>
-                <a:spcPts val="0"/>
-              </a:spcAft>
-              <a:buClr>
-                <a:schemeClr val="dk1"/>
-              </a:buClr>
-              <a:buSzPts val="1800"/>
-              <a:buFont typeface="Arial"/>
-              <a:buChar char="•"/>
-            </a:pPr>
-            <a:r>
-              <a:rPr lang="hu-HU" sz="1800">
-                <a:solidFill>
-                  <a:schemeClr val="dk1"/>
-                </a:solidFill>
-                <a:latin typeface="Arial"/>
-                <a:ea typeface="Arial"/>
-                <a:cs typeface="Arial"/>
-                <a:sym typeface="Arial"/>
-              </a:rPr>
-              <a:t>Átlátható visszajelzések a folyamatok állapotáról</a:t>
-            </a:r>
-            <a:endParaRPr/>
-          </a:p>
-          <a:p>
-            <a:pPr marL="457200" marR="0" lvl="0" indent="0" algn="l" rtl="0">
-              <a:spcBef>
-                <a:spcPts val="0"/>
-              </a:spcBef>
-              <a:spcAft>
-                <a:spcPts val="0"/>
-              </a:spcAft>
-              <a:buNone/>
-            </a:pPr>
-            <a:endParaRPr sz="1800">
-              <a:solidFill>
-                <a:schemeClr val="dk1"/>
-              </a:solidFill>
-            </a:endParaRPr>
-          </a:p>
-          <a:p>
-            <a:pPr marL="285750" marR="0" lvl="0" indent="-285750" algn="l" rtl="0">
-              <a:spcBef>
-                <a:spcPts val="0"/>
-              </a:spcBef>
-              <a:spcAft>
-                <a:spcPts val="0"/>
-              </a:spcAft>
-              <a:buClr>
-                <a:schemeClr val="dk1"/>
-              </a:buClr>
-              <a:buSzPts val="1800"/>
-              <a:buFont typeface="Arial"/>
-              <a:buChar char="•"/>
-            </a:pPr>
-            <a:r>
-              <a:rPr lang="hu-HU" sz="1800">
-                <a:solidFill>
-                  <a:schemeClr val="dk1"/>
-                </a:solidFill>
-                <a:latin typeface="Arial"/>
-                <a:ea typeface="Arial"/>
-                <a:cs typeface="Arial"/>
-                <a:sym typeface="Arial"/>
-              </a:rPr>
-              <a:t>Reszponzív működés asztali és mobil nézetben</a:t>
-            </a:r>
-            <a:endParaRPr/>
-          </a:p>
-          <a:p>
-            <a:pPr marL="457200" marR="0" lvl="0" indent="0" algn="l" rtl="0">
-              <a:spcBef>
-                <a:spcPts val="0"/>
-              </a:spcBef>
-              <a:spcAft>
-                <a:spcPts val="0"/>
-              </a:spcAft>
-              <a:buNone/>
-            </a:pPr>
-            <a:endParaRPr sz="1800">
-              <a:solidFill>
-                <a:schemeClr val="dk1"/>
-              </a:solidFill>
-            </a:endParaRPr>
-          </a:p>
-          <a:p>
-            <a:pPr marL="285750" marR="0" lvl="0" indent="-285750" algn="l" rtl="0">
-              <a:spcBef>
-                <a:spcPts val="0"/>
-              </a:spcBef>
-              <a:spcAft>
-                <a:spcPts val="0"/>
-              </a:spcAft>
-              <a:buClr>
-                <a:schemeClr val="dk1"/>
-              </a:buClr>
-              <a:buSzPts val="1800"/>
-              <a:buFont typeface="Arial"/>
-              <a:buChar char="•"/>
-            </a:pPr>
-            <a:r>
-              <a:rPr lang="hu-HU" sz="1800">
-                <a:solidFill>
-                  <a:schemeClr val="dk1"/>
-                </a:solidFill>
-                <a:latin typeface="Arial"/>
-                <a:ea typeface="Arial"/>
-                <a:cs typeface="Arial"/>
-                <a:sym typeface="Arial"/>
-              </a:rPr>
-              <a:t>Cél: minél kevesebb lépésből elvégezhető folyamatok</a:t>
-            </a:r>
-            <a:endParaRPr/>
-          </a:p>
-        </p:txBody>
-      </p:sp>
       <p:pic>
         <p:nvPicPr>
-          <p:cNvPr id="2" name="Kép 1">
+          <p:cNvPr id="5" name="Kép 4">
             <a:extLst>
               <a:ext uri="{FF2B5EF4-FFF2-40B4-BE49-F238E27FC236}">
-                <a16:creationId xmlns:a16="http://schemas.microsoft.com/office/drawing/2014/main" id="{C8115FEC-D477-C7C5-2EF0-1670B6153158}"/>
+                <a16:creationId xmlns:a16="http://schemas.microsoft.com/office/drawing/2014/main" id="{4D0611A6-D8E8-24E8-923A-EAFFF7F0951B}"/>
               </a:ext>
             </a:extLst>
           </p:cNvPr>
@@ -19926,14 +21420,15 @@
           <p:nvPr/>
         </p:nvPicPr>
         <p:blipFill>
-          <a:blip r:embed="rId3"/>
-          <a:srcRect t="55" b="55"/>
-          <a:stretch/>
+          <a:blip r:embed="rId4"/>
+          <a:stretch>
+            <a:fillRect/>
+          </a:stretch>
         </p:blipFill>
         <p:spPr>
           <a:xfrm>
-            <a:off x="-317902" y="-137425"/>
-            <a:ext cx="2852432" cy="2621626"/>
+            <a:off x="5673110" y="4694774"/>
+            <a:ext cx="6079512" cy="1638300"/>
           </a:xfrm>
           <a:prstGeom prst="rect">
             <a:avLst/>

--- a/dokumentumok/Prezentáció_NagyLevedSamuel_TothTamas.pptx
+++ b/dokumentumok/Prezentáció_NagyLevedSamuel_TothTamas.pptx
@@ -274,7 +274,7 @@
       <p15:sldGuideLst xmlns:p15="http://schemas.microsoft.com/office/powerpoint/2012/main"/>
     </p:ext>
     <p:ext uri="GoogleSlidesCustomDataVersion2">
-      <go:slidesCustomData xmlns:go="http://customooxmlschemas.google.com/" xmlns:ahyp="http://schemas.microsoft.com/office/drawing/2018/hyperlinkcolor" xmlns:p15="http://schemas.microsoft.com/office/powerpoint/2012/main" xmlns:p14="http://schemas.microsoft.com/office/powerpoint/2010/main" xmlns:com="http://schemas.openxmlformats.org/drawingml/2006/compatibility" xmlns:pvml="urn:schemas-microsoft-com:office:powerpoint" xmlns:v="urn:schemas-microsoft-com:vml" xmlns:o="urn:schemas-microsoft-com:office:office" xmlns:dgm="http://schemas.openxmlformats.org/drawingml/2006/diagram" xmlns:c="http://schemas.openxmlformats.org/drawingml/2006/chart" xmlns:mv="urn:schemas-microsoft-com:mac:vml" xmlns:mc="http://schemas.openxmlformats.org/markup-compatibility/2006" xmlns="" r:id="rId24" roundtripDataSignature="AMtx7mj67VHAuCHlscAUacmt/Mbt/wFFlA=="/>
+      <go:slidesCustomData xmlns="" xmlns:mc="http://schemas.openxmlformats.org/markup-compatibility/2006" xmlns:mv="urn:schemas-microsoft-com:mac:vml" xmlns:c="http://schemas.openxmlformats.org/drawingml/2006/chart" xmlns:dgm="http://schemas.openxmlformats.org/drawingml/2006/diagram" xmlns:o="urn:schemas-microsoft-com:office:office" xmlns:v="urn:schemas-microsoft-com:vml" xmlns:pvml="urn:schemas-microsoft-com:office:powerpoint" xmlns:com="http://schemas.openxmlformats.org/drawingml/2006/compatibility" xmlns:p14="http://schemas.microsoft.com/office/powerpoint/2010/main" xmlns:p15="http://schemas.microsoft.com/office/powerpoint/2012/main" xmlns:ahyp="http://schemas.microsoft.com/office/drawing/2018/hyperlinkcolor" xmlns:go="http://customooxmlschemas.google.com/" r:id="rId24" roundtripDataSignature="AMtx7mj67VHAuCHlscAUacmt/Mbt/wFFlA=="/>
     </p:ext>
   </p:extLst>
 </p:presentation>
@@ -15635,7 +15635,7 @@
                 <a:latin typeface="Cambria" panose="02040503050406030204" pitchFamily="18" charset="0"/>
                 <a:ea typeface="Cambria" panose="02040503050406030204" pitchFamily="18" charset="0"/>
               </a:rPr>
-              <a:t>Reszponzivitás</a:t>
+              <a:t>Reszponzívitás</a:t>
             </a:r>
             <a:endParaRPr dirty="0">
               <a:latin typeface="Cambria" panose="02040503050406030204" pitchFamily="18" charset="0"/>
@@ -17455,13 +17455,20 @@
           <p:nvPr/>
         </p:nvSpPr>
         <p:spPr>
-          <a:xfrm rot="16200000">
-            <a:off x="485515" y="-674370"/>
-            <a:ext cx="4227151" cy="2832691"/>
+          <a:xfrm>
+            <a:off x="1" y="2012654"/>
+            <a:ext cx="12191999" cy="2832691"/>
           </a:xfrm>
           <a:prstGeom prst="rect">
             <a:avLst/>
           </a:prstGeom>
+          <a:effectLst>
+            <a:outerShdw blurRad="139700" dist="50800" dir="5400000" algn="ctr" rotWithShape="0">
+              <a:srgbClr val="000000">
+                <a:alpha val="43137"/>
+              </a:srgbClr>
+            </a:outerShdw>
+          </a:effectLst>
         </p:spPr>
         <p:style>
           <a:lnRef idx="2">
@@ -17500,7 +17507,7 @@
         </p:nvSpPr>
         <p:spPr>
           <a:xfrm>
-            <a:off x="430974" y="504378"/>
+            <a:off x="3927882" y="3023595"/>
             <a:ext cx="4336235" cy="810807"/>
           </a:xfrm>
           <a:prstGeom prst="rect">
@@ -17513,7 +17520,7 @@
         </p:spPr>
         <p:txBody>
           <a:bodyPr spcFirstLastPara="1" wrap="square" lIns="91425" tIns="45700" rIns="91425" bIns="45700" anchor="b" anchorCtr="0">
-            <a:normAutofit/>
+            <a:normAutofit fontScale="90000"/>
           </a:bodyPr>
           <a:lstStyle/>
           <a:p>
@@ -17535,15 +17542,34 @@
               <a:buNone/>
             </a:pPr>
             <a:r>
-              <a:rPr lang="hu-HU" sz="4400" dirty="0">
+              <a:rPr lang="hu-HU" sz="4400" dirty="0" err="1">
+                <a:solidFill>
+                  <a:schemeClr val="bg1"/>
+                </a:solidFill>
                 <a:latin typeface="Cambria"/>
                 <a:ea typeface="Cambria"/>
                 <a:cs typeface="Cambria"/>
                 <a:sym typeface="Cambria"/>
               </a:rPr>
-              <a:t>Demó</a:t>
-            </a:r>
-            <a:endParaRPr dirty="0"/>
+              <a:t>EseményTér</a:t>
+            </a:r>
+            <a:r>
+              <a:rPr lang="hu-HU" sz="4400" dirty="0">
+                <a:solidFill>
+                  <a:schemeClr val="bg1"/>
+                </a:solidFill>
+                <a:latin typeface="Cambria"/>
+                <a:ea typeface="Cambria"/>
+                <a:cs typeface="Cambria"/>
+                <a:sym typeface="Cambria"/>
+              </a:rPr>
+              <a:t> demó</a:t>
+            </a:r>
+            <a:endParaRPr dirty="0">
+              <a:solidFill>
+                <a:schemeClr val="bg1"/>
+              </a:solidFill>
+            </a:endParaRPr>
           </a:p>
         </p:txBody>
       </p:sp>
@@ -19628,7 +19654,7 @@
                 <a:cs typeface="Cambria"/>
                 <a:sym typeface="Cambria"/>
               </a:rPr>
-              <a:t>Frontend</a:t>
+              <a:t>Frontend felépítése</a:t>
             </a:r>
             <a:endParaRPr dirty="0"/>
           </a:p>
@@ -20724,13 +20750,13 @@
   <p:clrMapOvr>
     <a:masterClrMapping/>
   </p:clrMapOvr>
-  <mc:AlternateContent xmlns:mc="http://schemas.openxmlformats.org/markup-compatibility/2006">
-    <mc:Choice xmlns:p159="http://schemas.microsoft.com/office/powerpoint/2015/09/main" Requires="p159">
+  <mc:AlternateContent xmlns:mc="http://schemas.openxmlformats.org/markup-compatibility/2006" xmlns:p159="http://schemas.microsoft.com/office/powerpoint/2015/09/main">
+    <mc:Choice Requires="p159">
       <p:transition xmlns:p14="http://schemas.microsoft.com/office/powerpoint/2010/main" spd="slow" p14:dur="2000">
         <p159:morph option="byObject"/>
       </p:transition>
     </mc:Choice>
-    <mc:Fallback>
+    <mc:Fallback xmlns="">
       <p:transition spd="slow">
         <p:fade/>
       </p:transition>

--- a/dokumentumok/Prezentáció_NagyLevedSamuel_TothTamas.pptx
+++ b/dokumentumok/Prezentáció_NagyLevedSamuel_TothTamas.pptx
@@ -274,7 +274,7 @@
       <p15:sldGuideLst xmlns:p15="http://schemas.microsoft.com/office/powerpoint/2012/main"/>
     </p:ext>
     <p:ext uri="GoogleSlidesCustomDataVersion2">
-      <go:slidesCustomData xmlns="" xmlns:mc="http://schemas.openxmlformats.org/markup-compatibility/2006" xmlns:mv="urn:schemas-microsoft-com:mac:vml" xmlns:c="http://schemas.openxmlformats.org/drawingml/2006/chart" xmlns:dgm="http://schemas.openxmlformats.org/drawingml/2006/diagram" xmlns:o="urn:schemas-microsoft-com:office:office" xmlns:v="urn:schemas-microsoft-com:vml" xmlns:pvml="urn:schemas-microsoft-com:office:powerpoint" xmlns:com="http://schemas.openxmlformats.org/drawingml/2006/compatibility" xmlns:p14="http://schemas.microsoft.com/office/powerpoint/2010/main" xmlns:p15="http://schemas.microsoft.com/office/powerpoint/2012/main" xmlns:ahyp="http://schemas.microsoft.com/office/drawing/2018/hyperlinkcolor" xmlns:go="http://customooxmlschemas.google.com/" r:id="rId24" roundtripDataSignature="AMtx7mj67VHAuCHlscAUacmt/Mbt/wFFlA=="/>
+      <go:slidesCustomData xmlns:go="http://customooxmlschemas.google.com/" xmlns:ahyp="http://schemas.microsoft.com/office/drawing/2018/hyperlinkcolor" xmlns:p15="http://schemas.microsoft.com/office/powerpoint/2012/main" xmlns:p14="http://schemas.microsoft.com/office/powerpoint/2010/main" xmlns:com="http://schemas.openxmlformats.org/drawingml/2006/compatibility" xmlns:pvml="urn:schemas-microsoft-com:office:powerpoint" xmlns:v="urn:schemas-microsoft-com:vml" xmlns:o="urn:schemas-microsoft-com:office:office" xmlns:dgm="http://schemas.openxmlformats.org/drawingml/2006/diagram" xmlns:c="http://schemas.openxmlformats.org/drawingml/2006/chart" xmlns:mv="urn:schemas-microsoft-com:mac:vml" xmlns:mc="http://schemas.openxmlformats.org/markup-compatibility/2006" xmlns="" r:id="rId24" roundtripDataSignature="AMtx7mj67VHAuCHlscAUacmt/Mbt/wFFlA=="/>
     </p:ext>
   </p:extLst>
 </p:presentation>
@@ -3744,7 +3744,7 @@
                 <a:cs typeface="Arial"/>
                 <a:sym typeface="Arial"/>
               </a:rPr>
-              <a:t>A frontendünk </a:t>
+              <a:t>A frontendünk, mint említettem </a:t>
             </a:r>
             <a:r>
               <a:rPr lang="hu-HU" sz="1100" b="0" i="0" u="none" strike="noStrike" cap="none" dirty="0" err="1">
@@ -3844,33 +3844,7 @@
                 <a:cs typeface="Arial"/>
                 <a:sym typeface="Arial"/>
               </a:rPr>
-              <a:t>A </a:t>
-            </a:r>
-            <a:r>
-              <a:rPr lang="hu-HU" sz="1100" b="0" i="0" u="none" strike="noStrike" cap="none" dirty="0" err="1">
-                <a:solidFill>
-                  <a:srgbClr val="000000"/>
-                </a:solidFill>
-                <a:effectLst/>
-                <a:latin typeface="Arial"/>
-                <a:ea typeface="Arial"/>
-                <a:cs typeface="Arial"/>
-                <a:sym typeface="Arial"/>
-              </a:rPr>
-              <a:t>dashboard</a:t>
-            </a:r>
-            <a:r>
-              <a:rPr lang="hu-HU" sz="1100" b="0" i="0" u="none" strike="noStrike" cap="none" dirty="0">
-                <a:solidFill>
-                  <a:srgbClr val="000000"/>
-                </a:solidFill>
-                <a:effectLst/>
-                <a:latin typeface="Arial"/>
-                <a:ea typeface="Arial"/>
-                <a:cs typeface="Arial"/>
-                <a:sym typeface="Arial"/>
-              </a:rPr>
-              <a:t> szerepkör szerint jelenik meg, így a diák, tanár és </a:t>
+              <a:t>Az Irányítópult szerepkör szerint jelenik meg, így a diák, tanár és </a:t>
             </a:r>
             <a:r>
               <a:rPr lang="hu-HU" sz="1100" b="0" i="0" u="none" strike="noStrike" cap="none" dirty="0" err="1">
@@ -19563,7 +19537,7 @@
         </p:nvSpPr>
         <p:spPr>
           <a:xfrm rot="5400000">
-            <a:off x="-1468870" y="1124578"/>
+            <a:off x="-1978955" y="1097934"/>
             <a:ext cx="3492600" cy="5292900"/>
           </a:xfrm>
           <a:prstGeom prst="ellipse">
@@ -19668,7 +19642,7 @@
         </p:nvSpPr>
         <p:spPr>
           <a:xfrm>
-            <a:off x="872762" y="2472571"/>
+            <a:off x="2413795" y="2660051"/>
             <a:ext cx="6509700" cy="2585283"/>
           </a:xfrm>
           <a:prstGeom prst="rect">
@@ -20004,7 +19978,7 @@
         </p:blipFill>
         <p:spPr>
           <a:xfrm>
-            <a:off x="8716345" y="262104"/>
+            <a:off x="9182058" y="169611"/>
             <a:ext cx="2852432" cy="6518778"/>
           </a:xfrm>
           <a:prstGeom prst="rect">

--- a/dokumentumok/Prezentáció_NagyLevedSamuel_TothTamas.pptx
+++ b/dokumentumok/Prezentáció_NagyLevedSamuel_TothTamas.pptx
@@ -274,7 +274,7 @@
       <p15:sldGuideLst xmlns:p15="http://schemas.microsoft.com/office/powerpoint/2012/main"/>
     </p:ext>
     <p:ext uri="GoogleSlidesCustomDataVersion2">
-      <go:slidesCustomData xmlns:go="http://customooxmlschemas.google.com/" xmlns:ahyp="http://schemas.microsoft.com/office/drawing/2018/hyperlinkcolor" xmlns:p15="http://schemas.microsoft.com/office/powerpoint/2012/main" xmlns:p14="http://schemas.microsoft.com/office/powerpoint/2010/main" xmlns:com="http://schemas.openxmlformats.org/drawingml/2006/compatibility" xmlns:pvml="urn:schemas-microsoft-com:office:powerpoint" xmlns:v="urn:schemas-microsoft-com:vml" xmlns:o="urn:schemas-microsoft-com:office:office" xmlns:dgm="http://schemas.openxmlformats.org/drawingml/2006/diagram" xmlns:c="http://schemas.openxmlformats.org/drawingml/2006/chart" xmlns:mv="urn:schemas-microsoft-com:mac:vml" xmlns:mc="http://schemas.openxmlformats.org/markup-compatibility/2006" xmlns="" r:id="rId24" roundtripDataSignature="AMtx7mj67VHAuCHlscAUacmt/Mbt/wFFlA=="/>
+      <go:slidesCustomData xmlns="" xmlns:mc="http://schemas.openxmlformats.org/markup-compatibility/2006" xmlns:mv="urn:schemas-microsoft-com:mac:vml" xmlns:c="http://schemas.openxmlformats.org/drawingml/2006/chart" xmlns:dgm="http://schemas.openxmlformats.org/drawingml/2006/diagram" xmlns:o="urn:schemas-microsoft-com:office:office" xmlns:v="urn:schemas-microsoft-com:vml" xmlns:pvml="urn:schemas-microsoft-com:office:powerpoint" xmlns:com="http://schemas.openxmlformats.org/drawingml/2006/compatibility" xmlns:p14="http://schemas.microsoft.com/office/powerpoint/2010/main" xmlns:p15="http://schemas.microsoft.com/office/powerpoint/2012/main" xmlns:ahyp="http://schemas.microsoft.com/office/drawing/2018/hyperlinkcolor" xmlns:go="http://customooxmlschemas.google.com/" r:id="rId24" roundtripDataSignature="AMtx7mj67VHAuCHlscAUacmt/Mbt/wFFlA=="/>
     </p:ext>
   </p:extLst>
 </p:presentation>
@@ -4933,7 +4933,67 @@
               </a:spcAft>
               <a:buNone/>
             </a:pPr>
-            <a:endParaRPr/>
+            <a:r>
+              <a:rPr lang="hu-HU" dirty="0"/>
+              <a:t>Tomi:</a:t>
+            </a:r>
+          </a:p>
+          <a:p>
+            <a:pPr marL="0" lvl="0" indent="0" algn="l" rtl="0">
+              <a:spcBef>
+                <a:spcPts val="0"/>
+              </a:spcBef>
+              <a:spcAft>
+                <a:spcPts val="0"/>
+              </a:spcAft>
+              <a:buNone/>
+            </a:pPr>
+            <a:r>
+              <a:rPr lang="hu-HU" sz="1100" b="0" i="0" u="none" strike="noStrike" cap="none" dirty="0">
+                <a:solidFill>
+                  <a:srgbClr val="000000"/>
+                </a:solidFill>
+                <a:effectLst/>
+                <a:latin typeface="Arial"/>
+                <a:ea typeface="Arial"/>
+                <a:cs typeface="Arial"/>
+                <a:sym typeface="Arial"/>
+              </a:rPr>
+              <a:t>Ez a rendszer relációs adatmodellje.</a:t>
+            </a:r>
+            <a:br>
+              <a:rPr lang="hu-HU" dirty="0"/>
+            </a:br>
+            <a:r>
+              <a:rPr lang="hu-HU" sz="1100" b="0" i="0" u="none" strike="noStrike" cap="none" dirty="0">
+                <a:solidFill>
+                  <a:srgbClr val="000000"/>
+                </a:solidFill>
+                <a:effectLst/>
+                <a:latin typeface="Arial"/>
+                <a:ea typeface="Arial"/>
+                <a:cs typeface="Arial"/>
+                <a:sym typeface="Arial"/>
+              </a:rPr>
+              <a:t>A fő adatok külön táblákban vannak, és ezek kapcsolatban állnak egymással idegen kulcsokon keresztül.</a:t>
+            </a:r>
+            <a:br>
+              <a:rPr lang="hu-HU" dirty="0"/>
+            </a:br>
+            <a:r>
+              <a:rPr lang="hu-HU" sz="1100" b="0" i="0" u="none" strike="noStrike" cap="none" dirty="0">
+                <a:solidFill>
+                  <a:srgbClr val="000000"/>
+                </a:solidFill>
+                <a:effectLst/>
+                <a:latin typeface="Arial"/>
+                <a:ea typeface="Arial"/>
+                <a:cs typeface="Arial"/>
+                <a:sym typeface="Arial"/>
+              </a:rPr>
+              <a:t>Így az adatbázis jól szervezett, bővíthető és megbízható.</a:t>
+            </a:r>
+            <a:endParaRPr dirty="0"/>
           </a:p>
         </p:txBody>
       </p:sp>
@@ -20591,15 +20651,7 @@
             </a:pPr>
             <a:r>
               <a:rPr lang="hu-HU" sz="1800" dirty="0"/>
-              <a:t>A </a:t>
-            </a:r>
-            <a:r>
-              <a:rPr lang="hu-HU" sz="1800" dirty="0" err="1"/>
-              <a:t>kontreollerek</a:t>
-            </a:r>
-            <a:r>
-              <a:rPr lang="hu-HU" sz="1800" dirty="0"/>
-              <a:t> fogadják az API kéréseket</a:t>
+              <a:t>A kontrollerek fogadják az API kéréseket</a:t>
             </a:r>
           </a:p>
           <a:p>
@@ -21502,7 +21554,7 @@
         </p:nvSpPr>
         <p:spPr>
           <a:xfrm>
-            <a:off x="9993075" y="-339150"/>
+            <a:off x="10763599" y="-339150"/>
             <a:ext cx="3492600" cy="7536300"/>
           </a:xfrm>
           <a:prstGeom prst="ellipse">
@@ -21599,275 +21651,6 @@
           </a:p>
         </p:txBody>
       </p:sp>
-      <p:sp>
-        <p:nvSpPr>
-          <p:cNvPr id="166" name="Google Shape;166;p9"/>
-          <p:cNvSpPr txBox="1"/>
-          <p:nvPr/>
-        </p:nvSpPr>
-        <p:spPr>
-          <a:xfrm>
-            <a:off x="1558873" y="1720491"/>
-            <a:ext cx="7767600" cy="3417000"/>
-          </a:xfrm>
-          <a:prstGeom prst="rect">
-            <a:avLst/>
-          </a:prstGeom>
-          <a:noFill/>
-          <a:ln>
-            <a:noFill/>
-          </a:ln>
-        </p:spPr>
-        <p:txBody>
-          <a:bodyPr spcFirstLastPara="1" wrap="square" lIns="91425" tIns="45700" rIns="91425" bIns="45700" anchor="t" anchorCtr="0">
-            <a:spAutoFit/>
-          </a:bodyPr>
-          <a:lstStyle/>
-          <a:p>
-            <a:pPr marL="0" marR="0" lvl="0" indent="0" algn="l" rtl="0">
-              <a:spcBef>
-                <a:spcPts val="0"/>
-              </a:spcBef>
-              <a:spcAft>
-                <a:spcPts val="0"/>
-              </a:spcAft>
-              <a:buNone/>
-            </a:pPr>
-            <a:r>
-              <a:rPr lang="hu-HU" sz="1800">
-                <a:solidFill>
-                  <a:schemeClr val="dk1"/>
-                </a:solidFill>
-                <a:latin typeface="Arial"/>
-                <a:ea typeface="Arial"/>
-                <a:cs typeface="Arial"/>
-                <a:sym typeface="Arial"/>
-              </a:rPr>
-              <a:t>Fő entitások: felhasználók, intézmények, osztályok, események</a:t>
-            </a:r>
-            <a:endParaRPr sz="1800">
-              <a:solidFill>
-                <a:schemeClr val="dk1"/>
-              </a:solidFill>
-              <a:latin typeface="Arial"/>
-              <a:ea typeface="Arial"/>
-              <a:cs typeface="Arial"/>
-              <a:sym typeface="Arial"/>
-            </a:endParaRPr>
-          </a:p>
-          <a:p>
-            <a:pPr marL="0" marR="0" lvl="0" indent="0" algn="l" rtl="0">
-              <a:spcBef>
-                <a:spcPts val="0"/>
-              </a:spcBef>
-              <a:spcAft>
-                <a:spcPts val="0"/>
-              </a:spcAft>
-              <a:buNone/>
-            </a:pPr>
-            <a:endParaRPr sz="1800">
-              <a:solidFill>
-                <a:schemeClr val="dk1"/>
-              </a:solidFill>
-            </a:endParaRPr>
-          </a:p>
-          <a:p>
-            <a:pPr marL="0" marR="0" lvl="0" indent="0" algn="l" rtl="0">
-              <a:spcBef>
-                <a:spcPts val="0"/>
-              </a:spcBef>
-              <a:spcAft>
-                <a:spcPts val="0"/>
-              </a:spcAft>
-              <a:buNone/>
-            </a:pPr>
-            <a:r>
-              <a:rPr lang="hu-HU" sz="1800">
-                <a:solidFill>
-                  <a:schemeClr val="dk1"/>
-                </a:solidFill>
-                <a:latin typeface="Arial"/>
-                <a:ea typeface="Arial"/>
-                <a:cs typeface="Arial"/>
-                <a:sym typeface="Arial"/>
-              </a:rPr>
-              <a:t>Kapcsolatok: tagságok, kérelmek, esemény-interakciók</a:t>
-            </a:r>
-            <a:endParaRPr/>
-          </a:p>
-          <a:p>
-            <a:pPr marL="0" marR="0" lvl="0" indent="0" algn="l" rtl="0">
-              <a:spcBef>
-                <a:spcPts val="0"/>
-              </a:spcBef>
-              <a:spcAft>
-                <a:spcPts val="0"/>
-              </a:spcAft>
-              <a:buNone/>
-            </a:pPr>
-            <a:endParaRPr sz="1800">
-              <a:solidFill>
-                <a:schemeClr val="dk1"/>
-              </a:solidFill>
-            </a:endParaRPr>
-          </a:p>
-          <a:p>
-            <a:pPr marL="0" marR="0" lvl="0" indent="0" algn="l" rtl="0">
-              <a:spcBef>
-                <a:spcPts val="0"/>
-              </a:spcBef>
-              <a:spcAft>
-                <a:spcPts val="0"/>
-              </a:spcAft>
-              <a:buNone/>
-            </a:pPr>
-            <a:r>
-              <a:rPr lang="hu-HU" sz="1800">
-                <a:solidFill>
-                  <a:schemeClr val="dk1"/>
-                </a:solidFill>
-                <a:latin typeface="Arial"/>
-                <a:ea typeface="Arial"/>
-                <a:cs typeface="Arial"/>
-                <a:sym typeface="Arial"/>
-              </a:rPr>
-              <a:t>Relációs modell biztosítja az adatok konzisztenciáját</a:t>
-            </a:r>
-            <a:endParaRPr/>
-          </a:p>
-          <a:p>
-            <a:pPr marL="0" marR="0" lvl="0" indent="0" algn="l" rtl="0">
-              <a:spcBef>
-                <a:spcPts val="0"/>
-              </a:spcBef>
-              <a:spcAft>
-                <a:spcPts val="0"/>
-              </a:spcAft>
-              <a:buNone/>
-            </a:pPr>
-            <a:endParaRPr sz="1800">
-              <a:solidFill>
-                <a:schemeClr val="dk1"/>
-              </a:solidFill>
-            </a:endParaRPr>
-          </a:p>
-          <a:p>
-            <a:pPr marL="0" marR="0" lvl="0" indent="0" algn="l" rtl="0">
-              <a:spcBef>
-                <a:spcPts val="0"/>
-              </a:spcBef>
-              <a:spcAft>
-                <a:spcPts val="0"/>
-              </a:spcAft>
-              <a:buNone/>
-            </a:pPr>
-            <a:r>
-              <a:rPr lang="hu-HU" sz="1800">
-                <a:solidFill>
-                  <a:schemeClr val="dk1"/>
-                </a:solidFill>
-                <a:latin typeface="Arial"/>
-                <a:ea typeface="Arial"/>
-                <a:cs typeface="Arial"/>
-                <a:sym typeface="Arial"/>
-              </a:rPr>
-              <a:t>Kulcsfontosságú cél: adatintegritás és visszakövethetőség</a:t>
-            </a:r>
-            <a:endParaRPr/>
-          </a:p>
-          <a:p>
-            <a:pPr marL="0" marR="0" lvl="0" indent="0" algn="l" rtl="0">
-              <a:spcBef>
-                <a:spcPts val="0"/>
-              </a:spcBef>
-              <a:spcAft>
-                <a:spcPts val="0"/>
-              </a:spcAft>
-              <a:buNone/>
-            </a:pPr>
-            <a:endParaRPr sz="1800">
-              <a:solidFill>
-                <a:schemeClr val="dk1"/>
-              </a:solidFill>
-            </a:endParaRPr>
-          </a:p>
-          <a:p>
-            <a:pPr marL="0" marR="0" lvl="0" indent="0" algn="l" rtl="0">
-              <a:spcBef>
-                <a:spcPts val="0"/>
-              </a:spcBef>
-              <a:spcAft>
-                <a:spcPts val="0"/>
-              </a:spcAft>
-              <a:buNone/>
-            </a:pPr>
-            <a:r>
-              <a:rPr lang="hu-HU" sz="1800">
-                <a:solidFill>
-                  <a:schemeClr val="dk1"/>
-                </a:solidFill>
-                <a:latin typeface="Arial"/>
-                <a:ea typeface="Arial"/>
-                <a:cs typeface="Arial"/>
-                <a:sym typeface="Arial"/>
-              </a:rPr>
-              <a:t>Bővíthető struktúra új funkciókhoz</a:t>
-            </a:r>
-            <a:endParaRPr/>
-          </a:p>
-          <a:p>
-            <a:pPr marL="0" marR="0" lvl="0" indent="0" algn="l" rtl="0">
-              <a:spcBef>
-                <a:spcPts val="0"/>
-              </a:spcBef>
-              <a:spcAft>
-                <a:spcPts val="0"/>
-              </a:spcAft>
-              <a:buNone/>
-            </a:pPr>
-            <a:endParaRPr sz="1800">
-              <a:solidFill>
-                <a:schemeClr val="dk1"/>
-              </a:solidFill>
-              <a:latin typeface="Arial"/>
-              <a:ea typeface="Arial"/>
-              <a:cs typeface="Arial"/>
-              <a:sym typeface="Arial"/>
-            </a:endParaRPr>
-          </a:p>
-          <a:p>
-            <a:pPr marL="0" marR="0" lvl="0" indent="0" algn="l" rtl="0">
-              <a:spcBef>
-                <a:spcPts val="0"/>
-              </a:spcBef>
-              <a:spcAft>
-                <a:spcPts val="0"/>
-              </a:spcAft>
-              <a:buNone/>
-            </a:pPr>
-            <a:br>
-              <a:rPr lang="hu-HU" sz="1800">
-                <a:solidFill>
-                  <a:schemeClr val="dk1"/>
-                </a:solidFill>
-                <a:latin typeface="Arial"/>
-                <a:ea typeface="Arial"/>
-                <a:cs typeface="Arial"/>
-                <a:sym typeface="Arial"/>
-              </a:rPr>
-            </a:br>
-            <a:endParaRPr sz="1800">
-              <a:solidFill>
-                <a:schemeClr val="dk1"/>
-              </a:solidFill>
-              <a:latin typeface="Arial"/>
-              <a:ea typeface="Arial"/>
-              <a:cs typeface="Arial"/>
-              <a:sym typeface="Arial"/>
-            </a:endParaRPr>
-          </a:p>
-        </p:txBody>
-      </p:sp>
       <p:pic>
         <p:nvPicPr>
           <p:cNvPr id="2" name="Kép 1">
@@ -21891,6 +21674,36 @@
           <a:xfrm>
             <a:off x="-317902" y="-137425"/>
             <a:ext cx="2852432" cy="2621626"/>
+          </a:xfrm>
+          <a:prstGeom prst="rect">
+            <a:avLst/>
+          </a:prstGeom>
+        </p:spPr>
+      </p:pic>
+      <p:pic>
+        <p:nvPicPr>
+          <p:cNvPr id="5" name="Kép 4">
+            <a:extLst>
+              <a:ext uri="{FF2B5EF4-FFF2-40B4-BE49-F238E27FC236}">
+                <a16:creationId xmlns:a16="http://schemas.microsoft.com/office/drawing/2014/main" id="{B61B75C4-CCCA-3A10-7130-5CB867CFDFF1}"/>
+              </a:ext>
+            </a:extLst>
+          </p:cNvPr>
+          <p:cNvPicPr>
+            <a:picLocks noChangeAspect="1"/>
+          </p:cNvPicPr>
+          <p:nvPr/>
+        </p:nvPicPr>
+        <p:blipFill>
+          <a:blip r:embed="rId4"/>
+          <a:stretch>
+            <a:fillRect/>
+          </a:stretch>
+        </p:blipFill>
+        <p:spPr>
+          <a:xfrm>
+            <a:off x="2401105" y="1610802"/>
+            <a:ext cx="7610183" cy="4913789"/>
           </a:xfrm>
           <a:prstGeom prst="rect">
             <a:avLst/>

--- a/dokumentumok/Prezentáció_NagyLevedSamuel_TothTamas.pptx
+++ b/dokumentumok/Prezentáció_NagyLevedSamuel_TothTamas.pptx
@@ -274,7 +274,7 @@
       <p15:sldGuideLst xmlns:p15="http://schemas.microsoft.com/office/powerpoint/2012/main"/>
     </p:ext>
     <p:ext uri="GoogleSlidesCustomDataVersion2">
-      <go:slidesCustomData xmlns="" xmlns:mc="http://schemas.openxmlformats.org/markup-compatibility/2006" xmlns:mv="urn:schemas-microsoft-com:mac:vml" xmlns:c="http://schemas.openxmlformats.org/drawingml/2006/chart" xmlns:dgm="http://schemas.openxmlformats.org/drawingml/2006/diagram" xmlns:o="urn:schemas-microsoft-com:office:office" xmlns:v="urn:schemas-microsoft-com:vml" xmlns:pvml="urn:schemas-microsoft-com:office:powerpoint" xmlns:com="http://schemas.openxmlformats.org/drawingml/2006/compatibility" xmlns:p14="http://schemas.microsoft.com/office/powerpoint/2010/main" xmlns:p15="http://schemas.microsoft.com/office/powerpoint/2012/main" xmlns:ahyp="http://schemas.microsoft.com/office/drawing/2018/hyperlinkcolor" xmlns:go="http://customooxmlschemas.google.com/" r:id="rId24" roundtripDataSignature="AMtx7mj67VHAuCHlscAUacmt/Mbt/wFFlA=="/>
+      <go:slidesCustomData xmlns:go="http://customooxmlschemas.google.com/" xmlns:ahyp="http://schemas.microsoft.com/office/drawing/2018/hyperlinkcolor" xmlns:p15="http://schemas.microsoft.com/office/powerpoint/2012/main" xmlns:p14="http://schemas.microsoft.com/office/powerpoint/2010/main" xmlns:com="http://schemas.openxmlformats.org/drawingml/2006/compatibility" xmlns:pvml="urn:schemas-microsoft-com:office:powerpoint" xmlns:v="urn:schemas-microsoft-com:vml" xmlns:o="urn:schemas-microsoft-com:office:office" xmlns:dgm="http://schemas.openxmlformats.org/drawingml/2006/diagram" xmlns:c="http://schemas.openxmlformats.org/drawingml/2006/chart" xmlns:mv="urn:schemas-microsoft-com:mac:vml" xmlns:mc="http://schemas.openxmlformats.org/markup-compatibility/2006" xmlns="" r:id="rId24" roundtripDataSignature="AMtx7mj67VHAuCHlscAUacmt/Mbt/wFFlA=="/>
     </p:ext>
   </p:extLst>
 </p:presentation>
@@ -2022,20 +2022,18 @@
           </a:bodyPr>
           <a:lstStyle/>
           <a:p>
-            <a:pPr marL="158750" indent="0">
+            <a:pPr marL="158750" indent="0" rtl="0">
               <a:buNone/>
             </a:pPr>
             <a:r>
               <a:rPr lang="hu-HU" dirty="0"/>
-              <a:t>Tomi:</a:t>
-            </a:r>
-          </a:p>
-          <a:p>
-            <a:pPr marL="158750" indent="0">
-              <a:buNone/>
-            </a:pPr>
-            <a:r>
-              <a:rPr lang="en-US" sz="1100" b="0" i="0" u="none" strike="noStrike" cap="none" dirty="0">
+              <a:t>Samu:</a:t>
+            </a:r>
+            <a:br>
+              <a:rPr lang="hu-HU" dirty="0"/>
+            </a:br>
+            <a:r>
+              <a:rPr lang="en-US" sz="1100" b="1" i="0" u="none" strike="noStrike" cap="none" dirty="0">
                 <a:solidFill>
                   <a:srgbClr val="000000"/>
                 </a:solidFill>
@@ -2045,7 +2043,53 @@
                 <a:cs typeface="Arial"/>
                 <a:sym typeface="Arial"/>
               </a:rPr>
-              <a:t>This is our home page. From here, users can either register or log in.</a:t>
+              <a:t>This is our home page.</a:t>
+            </a:r>
+            <a:br>
+              <a:rPr lang="en-US" sz="1100" b="1" i="0" u="none" strike="noStrike" cap="none" dirty="0">
+                <a:solidFill>
+                  <a:srgbClr val="000000"/>
+                </a:solidFill>
+                <a:effectLst/>
+                <a:latin typeface="Arial"/>
+                <a:ea typeface="Arial"/>
+                <a:cs typeface="Arial"/>
+                <a:sym typeface="Arial"/>
+              </a:rPr>
+            </a:br>
+            <a:r>
+              <a:rPr lang="en-US" sz="1100" b="0" i="0" u="none" strike="noStrike" cap="none" dirty="0">
+                <a:solidFill>
+                  <a:srgbClr val="000000"/>
+                </a:solidFill>
+                <a:effectLst/>
+                <a:latin typeface="Arial"/>
+                <a:ea typeface="Arial"/>
+                <a:cs typeface="Arial"/>
+                <a:sym typeface="Arial"/>
+              </a:rPr>
+              <a:t>From here, users can navigate to the registration or login pages.</a:t>
+            </a:r>
+            <a:endParaRPr lang="en-US" b="0" dirty="0">
+              <a:effectLst/>
+            </a:endParaRPr>
+          </a:p>
+          <a:p>
+            <a:pPr marL="158750" indent="0" rtl="0">
+              <a:buNone/>
+            </a:pPr>
+            <a:r>
+              <a:rPr lang="en-US" sz="1100" b="0" i="0" u="none" strike="noStrike" cap="none" dirty="0">
+                <a:solidFill>
+                  <a:srgbClr val="000000"/>
+                </a:solidFill>
+                <a:effectLst/>
+                <a:latin typeface="Arial"/>
+                <a:ea typeface="Arial"/>
+                <a:cs typeface="Arial"/>
+                <a:sym typeface="Arial"/>
+              </a:rPr>
+              <a:t>To create an account, users are required to enter their name, email address, and password. After confirming their email address, they must log in to proceed to the dashboard.</a:t>
             </a:r>
             <a:endParaRPr lang="hu-HU" sz="1100" b="0" i="0" u="none" strike="noStrike" cap="none" dirty="0">
               <a:solidFill>
@@ -2059,22 +2103,15 @@
             </a:endParaRPr>
           </a:p>
           <a:p>
-            <a:pPr marL="158750" indent="0">
+            <a:pPr marL="158750" indent="0" rtl="0">
               <a:buNone/>
             </a:pPr>
-            <a:endParaRPr lang="en-US" sz="1100" b="0" i="0" u="none" strike="noStrike" cap="none" dirty="0">
-              <a:solidFill>
-                <a:srgbClr val="000000"/>
-              </a:solidFill>
+            <a:endParaRPr lang="en-US" b="0" dirty="0">
               <a:effectLst/>
-              <a:latin typeface="Arial"/>
-              <a:ea typeface="Arial"/>
-              <a:cs typeface="Arial"/>
-              <a:sym typeface="Arial"/>
             </a:endParaRPr>
           </a:p>
           <a:p>
-            <a:pPr marL="158750" indent="0">
+            <a:pPr marL="158750" indent="0" rtl="0">
               <a:buNone/>
             </a:pPr>
             <a:r>
@@ -2088,7 +2125,109 @@
                 <a:cs typeface="Arial"/>
                 <a:sym typeface="Arial"/>
               </a:rPr>
-              <a:t>To create an account, users enter their name, email address, and password. After registration, the system sends a verification code by email. Once the account is confirmed, the user is redirected to the dashboard.</a:t>
+              <a:t>On the dashboard, users select their role (student, teacher, or administrator), then choose their location and school.</a:t>
+            </a:r>
+            <a:endParaRPr lang="en-US" b="0" dirty="0">
+              <a:effectLst/>
+            </a:endParaRPr>
+          </a:p>
+          <a:p>
+            <a:pPr marL="158750" indent="0" rtl="0">
+              <a:buNone/>
+            </a:pPr>
+            <a:r>
+              <a:rPr lang="en-US" sz="1100" b="0" i="0" u="none" strike="noStrike" cap="none" dirty="0">
+                <a:solidFill>
+                  <a:srgbClr val="000000"/>
+                </a:solidFill>
+                <a:effectLst/>
+                <a:latin typeface="Arial"/>
+                <a:ea typeface="Arial"/>
+                <a:cs typeface="Arial"/>
+                <a:sym typeface="Arial"/>
+              </a:rPr>
+              <a:t>Students and teachers can apply to an existing institution, while administrators also have the option to register a new one.</a:t>
+            </a:r>
+            <a:br>
+              <a:rPr lang="en-US" b="0" dirty="0">
+                <a:effectLst/>
+              </a:rPr>
+            </a:br>
+            <a:endParaRPr lang="en-US" b="0" dirty="0">
+              <a:effectLst/>
+            </a:endParaRPr>
+          </a:p>
+          <a:p>
+            <a:pPr marL="158750" indent="0" rtl="0">
+              <a:buNone/>
+            </a:pPr>
+            <a:r>
+              <a:rPr lang="hu-HU" sz="1100" b="0" i="0" u="none" strike="noStrike" cap="none" dirty="0">
+                <a:solidFill>
+                  <a:srgbClr val="000000"/>
+                </a:solidFill>
+                <a:effectLst/>
+                <a:latin typeface="Arial"/>
+                <a:ea typeface="Arial"/>
+                <a:cs typeface="Arial"/>
+                <a:sym typeface="Arial"/>
+              </a:rPr>
+              <a:t>F</a:t>
+            </a:r>
+            <a:r>
+              <a:rPr lang="en-US" sz="1100" b="0" i="0" u="none" strike="noStrike" cap="none" dirty="0">
+                <a:solidFill>
+                  <a:srgbClr val="000000"/>
+                </a:solidFill>
+                <a:effectLst/>
+                <a:latin typeface="Arial"/>
+                <a:ea typeface="Arial"/>
+                <a:cs typeface="Arial"/>
+                <a:sym typeface="Arial"/>
+              </a:rPr>
+              <a:t>or today’s demo, we continue with a pre-created sample administrator account to demonstrate the workflow.</a:t>
+            </a:r>
+            <a:endParaRPr lang="en-US" b="0" dirty="0">
+              <a:effectLst/>
+            </a:endParaRPr>
+          </a:p>
+          <a:p>
+            <a:pPr marL="158750" indent="0" rtl="0">
+              <a:buNone/>
+            </a:pPr>
+            <a:r>
+              <a:rPr lang="en-US" sz="1100" b="0" i="0" u="none" strike="noStrike" cap="none" dirty="0">
+                <a:solidFill>
+                  <a:srgbClr val="000000"/>
+                </a:solidFill>
+                <a:effectLst/>
+                <a:latin typeface="Arial"/>
+                <a:ea typeface="Arial"/>
+                <a:cs typeface="Arial"/>
+                <a:sym typeface="Arial"/>
+              </a:rPr>
+              <a:t>After logging in, we can see how the administrator manages incoming requests and assigns users to classes.</a:t>
+            </a:r>
+            <a:endParaRPr lang="en-US" b="0" dirty="0">
+              <a:effectLst/>
+            </a:endParaRPr>
+          </a:p>
+          <a:p>
+            <a:pPr marL="158750" indent="0" rtl="0">
+              <a:buNone/>
+            </a:pPr>
+            <a:r>
+              <a:rPr lang="en-US" sz="1100" b="0" i="0" u="none" strike="noStrike" cap="none" dirty="0">
+                <a:solidFill>
+                  <a:srgbClr val="000000"/>
+                </a:solidFill>
+                <a:effectLst/>
+                <a:latin typeface="Arial"/>
+                <a:ea typeface="Arial"/>
+                <a:cs typeface="Arial"/>
+                <a:sym typeface="Arial"/>
+              </a:rPr>
+              <a:t>Once the requests are approved, the platform’s main features become accessible.</a:t>
             </a:r>
             <a:endParaRPr lang="hu-HU" sz="1100" b="0" i="0" u="none" strike="noStrike" cap="none" dirty="0">
               <a:solidFill>
@@ -2102,279 +2241,7 @@
             </a:endParaRPr>
           </a:p>
           <a:p>
-            <a:pPr marL="158750" indent="0">
-              <a:buNone/>
-            </a:pPr>
-            <a:endParaRPr lang="en-US" sz="1100" b="0" i="0" u="none" strike="noStrike" cap="none" dirty="0">
-              <a:solidFill>
-                <a:srgbClr val="000000"/>
-              </a:solidFill>
-              <a:effectLst/>
-              <a:latin typeface="Arial"/>
-              <a:ea typeface="Arial"/>
-              <a:cs typeface="Arial"/>
-              <a:sym typeface="Arial"/>
-            </a:endParaRPr>
-          </a:p>
-          <a:p>
-            <a:pPr marL="158750" indent="0">
-              <a:buNone/>
-            </a:pPr>
-            <a:r>
-              <a:rPr lang="en-US" sz="1100" b="0" i="0" u="none" strike="noStrike" cap="none" dirty="0">
-                <a:solidFill>
-                  <a:srgbClr val="000000"/>
-                </a:solidFill>
-                <a:effectLst/>
-                <a:latin typeface="Arial"/>
-                <a:ea typeface="Arial"/>
-                <a:cs typeface="Arial"/>
-                <a:sym typeface="Arial"/>
-              </a:rPr>
-              <a:t>In today’s presentation, we log in with a pre-created demo account.</a:t>
-            </a:r>
-            <a:br>
-              <a:rPr lang="en-US" sz="1100" b="0" i="0" u="none" strike="noStrike" cap="none" dirty="0">
-                <a:solidFill>
-                  <a:srgbClr val="000000"/>
-                </a:solidFill>
-                <a:effectLst/>
-                <a:latin typeface="Arial"/>
-                <a:ea typeface="Arial"/>
-                <a:cs typeface="Arial"/>
-                <a:sym typeface="Arial"/>
-              </a:rPr>
-            </a:br>
-            <a:r>
-              <a:rPr lang="en-US" sz="1100" b="0" i="0" u="none" strike="noStrike" cap="none" dirty="0">
-                <a:solidFill>
-                  <a:srgbClr val="000000"/>
-                </a:solidFill>
-                <a:effectLst/>
-                <a:latin typeface="Arial"/>
-                <a:ea typeface="Arial"/>
-                <a:cs typeface="Arial"/>
-                <a:sym typeface="Arial"/>
-              </a:rPr>
-              <a:t>After logging in, the user is also redirected to the dashboard.</a:t>
-            </a:r>
-            <a:endParaRPr lang="hu-HU" sz="1100" b="0" i="0" u="none" strike="noStrike" cap="none" dirty="0">
-              <a:solidFill>
-                <a:srgbClr val="000000"/>
-              </a:solidFill>
-              <a:effectLst/>
-              <a:latin typeface="Arial"/>
-              <a:ea typeface="Arial"/>
-              <a:cs typeface="Arial"/>
-              <a:sym typeface="Arial"/>
-            </a:endParaRPr>
-          </a:p>
-          <a:p>
-            <a:pPr marL="158750" indent="0">
-              <a:buNone/>
-            </a:pPr>
-            <a:endParaRPr lang="en-US" sz="1100" b="0" i="0" u="none" strike="noStrike" cap="none" dirty="0">
-              <a:solidFill>
-                <a:srgbClr val="000000"/>
-              </a:solidFill>
-              <a:effectLst/>
-              <a:latin typeface="Arial"/>
-              <a:ea typeface="Arial"/>
-              <a:cs typeface="Arial"/>
-              <a:sym typeface="Arial"/>
-            </a:endParaRPr>
-          </a:p>
-          <a:p>
-            <a:pPr marL="158750" indent="0">
-              <a:buNone/>
-            </a:pPr>
-            <a:r>
-              <a:rPr lang="en-US" sz="1100" b="0" i="0" u="none" strike="noStrike" cap="none" dirty="0">
-                <a:solidFill>
-                  <a:srgbClr val="000000"/>
-                </a:solidFill>
-                <a:effectLst/>
-                <a:latin typeface="Arial"/>
-                <a:ea typeface="Arial"/>
-                <a:cs typeface="Arial"/>
-                <a:sym typeface="Arial"/>
-              </a:rPr>
-              <a:t>On the dashboard, users choose a role: student, teacher, or administrator.</a:t>
-            </a:r>
-            <a:br>
-              <a:rPr lang="en-US" sz="1100" b="0" i="0" u="none" strike="noStrike" cap="none" dirty="0">
-                <a:solidFill>
-                  <a:srgbClr val="000000"/>
-                </a:solidFill>
-                <a:effectLst/>
-                <a:latin typeface="Arial"/>
-                <a:ea typeface="Arial"/>
-                <a:cs typeface="Arial"/>
-                <a:sym typeface="Arial"/>
-              </a:rPr>
-            </a:br>
-            <a:r>
-              <a:rPr lang="en-US" sz="1100" b="0" i="0" u="none" strike="noStrike" cap="none" dirty="0">
-                <a:solidFill>
-                  <a:srgbClr val="000000"/>
-                </a:solidFill>
-                <a:effectLst/>
-                <a:latin typeface="Arial"/>
-                <a:ea typeface="Arial"/>
-                <a:cs typeface="Arial"/>
-                <a:sym typeface="Arial"/>
-              </a:rPr>
-              <a:t>For this demo, we continue with the administrator role.</a:t>
-            </a:r>
-            <a:br>
-              <a:rPr lang="en-US" sz="1100" b="0" i="0" u="none" strike="noStrike" cap="none" dirty="0">
-                <a:solidFill>
-                  <a:srgbClr val="000000"/>
-                </a:solidFill>
-                <a:effectLst/>
-                <a:latin typeface="Arial"/>
-                <a:ea typeface="Arial"/>
-                <a:cs typeface="Arial"/>
-                <a:sym typeface="Arial"/>
-              </a:rPr>
-            </a:br>
-            <a:r>
-              <a:rPr lang="en-US" sz="1100" b="0" i="0" u="none" strike="noStrike" cap="none" dirty="0">
-                <a:solidFill>
-                  <a:srgbClr val="000000"/>
-                </a:solidFill>
-                <a:effectLst/>
-                <a:latin typeface="Arial"/>
-                <a:ea typeface="Arial"/>
-                <a:cs typeface="Arial"/>
-                <a:sym typeface="Arial"/>
-              </a:rPr>
-              <a:t>After that, users select their location step by step, and the system displays the schools available in the selected city.</a:t>
-            </a:r>
-            <a:endParaRPr lang="hu-HU" sz="1100" b="0" i="0" u="none" strike="noStrike" cap="none" dirty="0">
-              <a:solidFill>
-                <a:srgbClr val="000000"/>
-              </a:solidFill>
-              <a:effectLst/>
-              <a:latin typeface="Arial"/>
-              <a:ea typeface="Arial"/>
-              <a:cs typeface="Arial"/>
-              <a:sym typeface="Arial"/>
-            </a:endParaRPr>
-          </a:p>
-          <a:p>
-            <a:pPr marL="158750" indent="0">
-              <a:buNone/>
-            </a:pPr>
-            <a:endParaRPr lang="en-US" sz="1100" b="0" i="0" u="none" strike="noStrike" cap="none" dirty="0">
-              <a:solidFill>
-                <a:srgbClr val="000000"/>
-              </a:solidFill>
-              <a:effectLst/>
-              <a:latin typeface="Arial"/>
-              <a:ea typeface="Arial"/>
-              <a:cs typeface="Arial"/>
-              <a:sym typeface="Arial"/>
-            </a:endParaRPr>
-          </a:p>
-          <a:p>
-            <a:pPr marL="158750" indent="0">
-              <a:buNone/>
-            </a:pPr>
-            <a:r>
-              <a:rPr lang="en-US" sz="1100" b="0" i="0" u="none" strike="noStrike" cap="none" dirty="0">
-                <a:solidFill>
-                  <a:srgbClr val="000000"/>
-                </a:solidFill>
-                <a:effectLst/>
-                <a:latin typeface="Arial"/>
-                <a:ea typeface="Arial"/>
-                <a:cs typeface="Arial"/>
-                <a:sym typeface="Arial"/>
-              </a:rPr>
-              <a:t>Students and teachers can apply to join a school. Their request remains pending until an administrator approves it.</a:t>
-            </a:r>
-            <a:br>
-              <a:rPr lang="en-US" sz="1100" b="0" i="0" u="none" strike="noStrike" cap="none" dirty="0">
-                <a:solidFill>
-                  <a:srgbClr val="000000"/>
-                </a:solidFill>
-                <a:effectLst/>
-                <a:latin typeface="Arial"/>
-                <a:ea typeface="Arial"/>
-                <a:cs typeface="Arial"/>
-                <a:sym typeface="Arial"/>
-              </a:rPr>
-            </a:br>
-            <a:r>
-              <a:rPr lang="en-US" sz="1100" b="0" i="0" u="none" strike="noStrike" cap="none" dirty="0">
-                <a:solidFill>
-                  <a:srgbClr val="000000"/>
-                </a:solidFill>
-                <a:effectLst/>
-                <a:latin typeface="Arial"/>
-                <a:ea typeface="Arial"/>
-                <a:cs typeface="Arial"/>
-                <a:sym typeface="Arial"/>
-              </a:rPr>
-              <a:t>The administrator flow is slightly different: administrators can register a new institution by entering the basic details, then handle incoming requests and assign users to classes.</a:t>
-            </a:r>
-            <a:endParaRPr lang="hu-HU" sz="1100" b="0" i="0" u="none" strike="noStrike" cap="none" dirty="0">
-              <a:solidFill>
-                <a:srgbClr val="000000"/>
-              </a:solidFill>
-              <a:effectLst/>
-              <a:latin typeface="Arial"/>
-              <a:ea typeface="Arial"/>
-              <a:cs typeface="Arial"/>
-              <a:sym typeface="Arial"/>
-            </a:endParaRPr>
-          </a:p>
-          <a:p>
-            <a:pPr marL="158750" indent="0">
-              <a:buNone/>
-            </a:pPr>
-            <a:endParaRPr lang="en-US" sz="1100" b="0" i="0" u="none" strike="noStrike" cap="none" dirty="0">
-              <a:solidFill>
-                <a:srgbClr val="000000"/>
-              </a:solidFill>
-              <a:effectLst/>
-              <a:latin typeface="Arial"/>
-              <a:ea typeface="Arial"/>
-              <a:cs typeface="Arial"/>
-              <a:sym typeface="Arial"/>
-            </a:endParaRPr>
-          </a:p>
-          <a:p>
-            <a:pPr marL="158750" indent="0">
-              <a:buNone/>
-            </a:pPr>
-            <a:r>
-              <a:rPr lang="en-US" sz="1100" b="0" i="0" u="none" strike="noStrike" cap="none" dirty="0">
-                <a:solidFill>
-                  <a:srgbClr val="000000"/>
-                </a:solidFill>
-                <a:effectLst/>
-                <a:latin typeface="Arial"/>
-                <a:ea typeface="Arial"/>
-                <a:cs typeface="Arial"/>
-                <a:sym typeface="Arial"/>
-              </a:rPr>
-              <a:t>After approval, users can access the main platform features.</a:t>
-            </a:r>
-            <a:endParaRPr lang="hu-HU" sz="1100" b="0" i="0" u="none" strike="noStrike" cap="none" dirty="0">
-              <a:solidFill>
-                <a:srgbClr val="000000"/>
-              </a:solidFill>
-              <a:effectLst/>
-              <a:latin typeface="Arial"/>
-              <a:ea typeface="Arial"/>
-              <a:cs typeface="Arial"/>
-              <a:sym typeface="Arial"/>
-            </a:endParaRPr>
-          </a:p>
-          <a:p>
-            <a:pPr marL="158750" indent="0">
+            <a:pPr marL="158750" indent="0" rtl="0">
               <a:buNone/>
             </a:pPr>
             <a:endParaRPr lang="hu-HU" sz="1100" b="0" i="0" u="none" strike="noStrike" cap="none" dirty="0">
@@ -2388,106 +2255,38 @@
             </a:endParaRPr>
           </a:p>
           <a:p>
-            <a:pPr marL="158750" indent="0">
+            <a:pPr marL="158750" indent="0" rtl="0">
               <a:buNone/>
             </a:pPr>
-            <a:r>
-              <a:rPr lang="hu-HU" dirty="0"/>
-              <a:t>Samu:</a:t>
-            </a:r>
-          </a:p>
-          <a:p>
-            <a:pPr marL="158750" indent="0">
-              <a:buNone/>
-            </a:pPr>
-            <a:r>
-              <a:rPr lang="en-US" sz="1100" b="0" i="0" u="none" strike="noStrike" cap="none" dirty="0">
-                <a:solidFill>
-                  <a:srgbClr val="000000"/>
-                </a:solidFill>
-                <a:effectLst/>
-                <a:latin typeface="Arial"/>
-                <a:ea typeface="Arial"/>
-                <a:cs typeface="Arial"/>
-                <a:sym typeface="Arial"/>
-              </a:rPr>
-              <a:t>In the Events section, users can view the events relevant to them.</a:t>
-            </a:r>
-            <a:br>
-              <a:rPr lang="en-US" sz="1100" b="0" i="0" u="none" strike="noStrike" cap="none" dirty="0">
-                <a:solidFill>
-                  <a:srgbClr val="000000"/>
-                </a:solidFill>
-                <a:effectLst/>
-                <a:latin typeface="Arial"/>
-                <a:ea typeface="Arial"/>
-                <a:cs typeface="Arial"/>
-                <a:sym typeface="Arial"/>
-              </a:rPr>
-            </a:br>
-            <a:r>
-              <a:rPr lang="en-US" sz="1100" b="0" i="0" u="none" strike="noStrike" cap="none" dirty="0">
-                <a:solidFill>
-                  <a:srgbClr val="000000"/>
-                </a:solidFill>
-                <a:effectLst/>
-                <a:latin typeface="Arial"/>
-                <a:ea typeface="Arial"/>
-                <a:cs typeface="Arial"/>
-                <a:sym typeface="Arial"/>
-              </a:rPr>
-              <a:t>They can filter by type, for example local or global, and by status, for example active or closed events.</a:t>
-            </a:r>
-            <a:br>
-              <a:rPr lang="en-US" sz="1100" b="0" i="0" u="none" strike="noStrike" cap="none" dirty="0">
-                <a:solidFill>
-                  <a:srgbClr val="000000"/>
-                </a:solidFill>
-                <a:effectLst/>
-                <a:latin typeface="Arial"/>
-                <a:ea typeface="Arial"/>
-                <a:cs typeface="Arial"/>
-                <a:sym typeface="Arial"/>
-              </a:rPr>
-            </a:br>
-            <a:r>
-              <a:rPr lang="en-US" sz="1100" b="0" i="0" u="none" strike="noStrike" cap="none" dirty="0">
-                <a:solidFill>
-                  <a:srgbClr val="000000"/>
-                </a:solidFill>
-                <a:effectLst/>
-                <a:latin typeface="Arial"/>
-                <a:ea typeface="Arial"/>
-                <a:cs typeface="Arial"/>
-                <a:sym typeface="Arial"/>
-              </a:rPr>
-              <a:t>They can also sort the list and switch to calendar view.</a:t>
-            </a:r>
             <a:endParaRPr lang="hu-HU" sz="1100" b="0" i="0" u="none" strike="noStrike" cap="none" dirty="0">
               <a:solidFill>
                 <a:srgbClr val="000000"/>
               </a:solidFill>
               <a:effectLst/>
               <a:latin typeface="Arial"/>
-              <a:ea typeface="Arial"/>
               <a:cs typeface="Arial"/>
               <a:sym typeface="Arial"/>
             </a:endParaRPr>
           </a:p>
           <a:p>
-            <a:endParaRPr lang="en-US" sz="1100" b="0" i="0" u="none" strike="noStrike" cap="none" dirty="0">
-              <a:solidFill>
-                <a:srgbClr val="000000"/>
-              </a:solidFill>
-              <a:effectLst/>
-              <a:latin typeface="Arial"/>
-              <a:ea typeface="Arial"/>
-              <a:cs typeface="Arial"/>
-              <a:sym typeface="Arial"/>
-            </a:endParaRPr>
-          </a:p>
-          <a:p>
-            <a:pPr marL="158750" indent="0">
+            <a:pPr marL="158750" indent="0" rtl="0">
+              <a:buNone/>
+            </a:pPr>
+            <a:r>
+              <a:rPr lang="hu-HU" sz="1100" b="0" i="0" u="none" strike="noStrike" cap="none" dirty="0">
+                <a:solidFill>
+                  <a:srgbClr val="000000"/>
+                </a:solidFill>
+                <a:effectLst/>
+                <a:latin typeface="Arial"/>
+                <a:cs typeface="Arial"/>
+                <a:sym typeface="Arial"/>
+              </a:rPr>
+              <a:t>Tomi:</a:t>
+            </a:r>
+          </a:p>
+          <a:p>
+            <a:pPr marL="158750" indent="0" rtl="0">
               <a:buNone/>
             </a:pPr>
             <a:r>
@@ -2501,10 +2300,10 @@
                 <a:cs typeface="Arial"/>
                 <a:sym typeface="Arial"/>
               </a:rPr>
-              <a:t>When opening an event, users can see all key details and decide whether to participate.</a:t>
-            </a:r>
-            <a:br>
-              <a:rPr lang="en-US" sz="1100" b="0" i="0" u="none" strike="noStrike" cap="none" dirty="0">
+              <a:t>In the </a:t>
+            </a:r>
+            <a:r>
+              <a:rPr lang="en-US" sz="1100" b="1" i="0" u="none" strike="noStrike" cap="none" dirty="0">
                 <a:solidFill>
                   <a:srgbClr val="000000"/>
                 </a:solidFill>
@@ -2514,7 +2313,8 @@
                 <a:cs typeface="Arial"/>
                 <a:sym typeface="Arial"/>
               </a:rPr>
-            </a:br>
+              <a:t>Events</a:t>
+            </a:r>
             <a:r>
               <a:rPr lang="en-US" sz="1100" b="0" i="0" u="none" strike="noStrike" cap="none" dirty="0">
                 <a:solidFill>
@@ -2526,9 +2326,17 @@
                 <a:cs typeface="Arial"/>
                 <a:sym typeface="Arial"/>
               </a:rPr>
-              <a:t>They can also vote, comment, and save events as favorites.</a:t>
-            </a:r>
-            <a:br>
+              <a:t> section, users can filter events by type and status or switch to a calendar view.</a:t>
+            </a:r>
+            <a:endParaRPr lang="en-US" b="0" dirty="0">
+              <a:effectLst/>
+            </a:endParaRPr>
+          </a:p>
+          <a:p>
+            <a:pPr marL="158750" indent="0" rtl="0">
+              <a:buNone/>
+            </a:pPr>
+            <a:r>
               <a:rPr lang="en-US" sz="1100" b="0" i="0" u="none" strike="noStrike" cap="none" dirty="0">
                 <a:solidFill>
                   <a:srgbClr val="000000"/>
@@ -2539,7 +2347,16 @@
                 <a:cs typeface="Arial"/>
                 <a:sym typeface="Arial"/>
               </a:rPr>
-            </a:br>
+              <a:t>When opening an event, users can decide whether to participate, leave comments, mark events as favorites, and take part in interactive polls.</a:t>
+            </a:r>
+            <a:endParaRPr lang="en-US" b="0" dirty="0">
+              <a:effectLst/>
+            </a:endParaRPr>
+          </a:p>
+          <a:p>
+            <a:pPr marL="158750" indent="0" rtl="0">
+              <a:buNone/>
+            </a:pPr>
             <a:r>
               <a:rPr lang="en-US" sz="1100" b="0" i="0" u="none" strike="noStrike" cap="none" dirty="0">
                 <a:solidFill>
@@ -2551,33 +2368,19 @@
                 <a:cs typeface="Arial"/>
                 <a:sym typeface="Arial"/>
               </a:rPr>
-              <a:t>In the student view, this part looks almost the same, but with fewer administrative actions.</a:t>
-            </a:r>
-            <a:endParaRPr lang="hu-HU" sz="1100" b="0" i="0" u="none" strike="noStrike" cap="none" dirty="0">
-              <a:solidFill>
-                <a:srgbClr val="000000"/>
-              </a:solidFill>
+              <a:t>Event creators can also launch polls directly from here, including options such as scheduled closing times or hidden partial results.</a:t>
+            </a:r>
+            <a:br>
+              <a:rPr lang="en-US" b="0" dirty="0">
+                <a:effectLst/>
+              </a:rPr>
+            </a:br>
+            <a:endParaRPr lang="en-US" b="0" dirty="0">
               <a:effectLst/>
-              <a:latin typeface="Arial"/>
-              <a:ea typeface="Arial"/>
-              <a:cs typeface="Arial"/>
-              <a:sym typeface="Arial"/>
             </a:endParaRPr>
           </a:p>
           <a:p>
-            <a:endParaRPr lang="en-US" sz="1100" b="0" i="0" u="none" strike="noStrike" cap="none" dirty="0">
-              <a:solidFill>
-                <a:srgbClr val="000000"/>
-              </a:solidFill>
-              <a:effectLst/>
-              <a:latin typeface="Arial"/>
-              <a:ea typeface="Arial"/>
-              <a:cs typeface="Arial"/>
-              <a:sym typeface="Arial"/>
-            </a:endParaRPr>
-          </a:p>
-          <a:p>
-            <a:pPr marL="158750" indent="0">
+            <a:pPr marL="158750" indent="0" rtl="0">
               <a:buNone/>
             </a:pPr>
             <a:r>
@@ -2591,9 +2394,17 @@
                 <a:cs typeface="Arial"/>
                 <a:sym typeface="Arial"/>
               </a:rPr>
-              <a:t>For event creation, teachers and administrators can create school-level events.</a:t>
-            </a:r>
-            <a:br>
+              <a:t>When creating an event, the target group can be defined precisely (a specific class, grade level, or the entire school).</a:t>
+            </a:r>
+            <a:endParaRPr lang="en-US" b="0" dirty="0">
+              <a:effectLst/>
+            </a:endParaRPr>
+          </a:p>
+          <a:p>
+            <a:pPr marL="158750" indent="0" rtl="0">
+              <a:buNone/>
+            </a:pPr>
+            <a:r>
               <a:rPr lang="en-US" sz="1100" b="0" i="0" u="none" strike="noStrike" cap="none" dirty="0">
                 <a:solidFill>
                   <a:srgbClr val="000000"/>
@@ -2604,7 +2415,21 @@
                 <a:cs typeface="Arial"/>
                 <a:sym typeface="Arial"/>
               </a:rPr>
+              <a:t>The platform also supports weekly recurring events, where all instances are automatically generated by the system.</a:t>
+            </a:r>
+            <a:br>
+              <a:rPr lang="en-US" b="0" dirty="0">
+                <a:effectLst/>
+              </a:rPr>
             </a:br>
+            <a:endParaRPr lang="en-US" b="0" dirty="0">
+              <a:effectLst/>
+            </a:endParaRPr>
+          </a:p>
+          <a:p>
+            <a:pPr marL="158750" indent="0" rtl="0">
+              <a:buNone/>
+            </a:pPr>
             <a:r>
               <a:rPr lang="en-US" sz="1100" b="0" i="0" u="none" strike="noStrike" cap="none" dirty="0">
                 <a:solidFill>
@@ -2616,37 +2441,10 @@
                 <a:cs typeface="Arial"/>
                 <a:sym typeface="Arial"/>
               </a:rPr>
-              <a:t>However, global events that affect multiple schools can only be created by administrators.</a:t>
-            </a:r>
-            <a:endParaRPr lang="hu-HU" sz="1100" b="0" i="0" u="none" strike="noStrike" cap="none" dirty="0">
-              <a:solidFill>
-                <a:srgbClr val="000000"/>
-              </a:solidFill>
-              <a:effectLst/>
-              <a:latin typeface="Arial"/>
-              <a:ea typeface="Arial"/>
-              <a:cs typeface="Arial"/>
-              <a:sym typeface="Arial"/>
-            </a:endParaRPr>
-          </a:p>
-          <a:p>
-            <a:endParaRPr lang="en-US" sz="1100" b="0" i="0" u="none" strike="noStrike" cap="none" dirty="0">
-              <a:solidFill>
-                <a:srgbClr val="000000"/>
-              </a:solidFill>
-              <a:effectLst/>
-              <a:latin typeface="Arial"/>
-              <a:ea typeface="Arial"/>
-              <a:cs typeface="Arial"/>
-              <a:sym typeface="Arial"/>
-            </a:endParaRPr>
-          </a:p>
-          <a:p>
-            <a:pPr marL="158750" indent="0">
-              <a:buNone/>
-            </a:pPr>
-            <a:r>
-              <a:rPr lang="en-US" sz="1100" b="0" i="0" u="none" strike="noStrike" cap="none" dirty="0">
+              <a:t>Finally, on the </a:t>
+            </a:r>
+            <a:r>
+              <a:rPr lang="en-US" sz="1100" b="1" i="0" u="none" strike="noStrike" cap="none" dirty="0">
                 <a:solidFill>
                   <a:srgbClr val="000000"/>
                 </a:solidFill>
@@ -2656,9 +2454,9 @@
                 <a:cs typeface="Arial"/>
                 <a:sym typeface="Arial"/>
               </a:rPr>
-              <a:t>For global events, the administrator selects the target areas or schools, fills in the details, and submits the event.</a:t>
-            </a:r>
-            <a:br>
+              <a:t>Profile</a:t>
+            </a:r>
+            <a:r>
               <a:rPr lang="en-US" sz="1100" b="0" i="0" u="none" strike="noStrike" cap="none" dirty="0">
                 <a:solidFill>
                   <a:srgbClr val="000000"/>
@@ -2669,7 +2467,16 @@
                 <a:cs typeface="Arial"/>
                 <a:sym typeface="Arial"/>
               </a:rPr>
-            </a:br>
+              <a:t> page, users can view and update their personal information, including their displayed name, which can be changed once every 15 days.</a:t>
+            </a:r>
+            <a:endParaRPr lang="en-US" b="0" dirty="0">
+              <a:effectLst/>
+            </a:endParaRPr>
+          </a:p>
+          <a:p>
+            <a:pPr marL="158750" indent="0" rtl="0">
+              <a:buNone/>
+            </a:pPr>
             <a:r>
               <a:rPr lang="en-US" sz="1100" b="0" i="0" u="none" strike="noStrike" cap="none" dirty="0">
                 <a:solidFill>
@@ -2681,37 +2488,10 @@
                 <a:cs typeface="Arial"/>
                 <a:sym typeface="Arial"/>
               </a:rPr>
-              <a:t>After that, local school administrators can accept or reject it.</a:t>
-            </a:r>
-            <a:endParaRPr lang="hu-HU" sz="1100" b="0" i="0" u="none" strike="noStrike" cap="none" dirty="0">
-              <a:solidFill>
-                <a:srgbClr val="000000"/>
-              </a:solidFill>
-              <a:effectLst/>
-              <a:latin typeface="Arial"/>
-              <a:ea typeface="Arial"/>
-              <a:cs typeface="Arial"/>
-              <a:sym typeface="Arial"/>
-            </a:endParaRPr>
-          </a:p>
-          <a:p>
-            <a:endParaRPr lang="en-US" sz="1100" b="0" i="0" u="none" strike="noStrike" cap="none" dirty="0">
-              <a:solidFill>
-                <a:srgbClr val="000000"/>
-              </a:solidFill>
-              <a:effectLst/>
-              <a:latin typeface="Arial"/>
-              <a:ea typeface="Arial"/>
-              <a:cs typeface="Arial"/>
-              <a:sym typeface="Arial"/>
-            </a:endParaRPr>
-          </a:p>
-          <a:p>
-            <a:pPr marL="158750" indent="0">
-              <a:buNone/>
-            </a:pPr>
-            <a:r>
-              <a:rPr lang="en-US" sz="1100" b="0" i="0" u="none" strike="noStrike" cap="none" dirty="0">
+              <a:t>This page also includes the institution switcher, allowing administrators to quickly switch between the schools they </a:t>
+            </a:r>
+            <a:r>
+              <a:rPr lang="en-US" sz="1100" b="0" i="0" u="none" strike="noStrike" cap="none">
                 <a:solidFill>
                   <a:srgbClr val="000000"/>
                 </a:solidFill>
@@ -2721,118 +2501,14 @@
                 <a:cs typeface="Arial"/>
                 <a:sym typeface="Arial"/>
               </a:rPr>
-              <a:t>For school-level events, the target group can be defined precisely: for example a specific class, a full grade level, or the entire school.</a:t>
-            </a:r>
-            <a:endParaRPr lang="hu-HU" sz="1100" b="0" i="0" u="none" strike="noStrike" cap="none" dirty="0">
-              <a:solidFill>
-                <a:srgbClr val="000000"/>
-              </a:solidFill>
-              <a:effectLst/>
-              <a:latin typeface="Arial"/>
-              <a:ea typeface="Arial"/>
-              <a:cs typeface="Arial"/>
-              <a:sym typeface="Arial"/>
-            </a:endParaRPr>
-          </a:p>
-          <a:p>
-            <a:endParaRPr lang="en-US" sz="1100" b="0" i="0" u="none" strike="noStrike" cap="none" dirty="0">
-              <a:solidFill>
-                <a:srgbClr val="000000"/>
-              </a:solidFill>
-              <a:effectLst/>
-              <a:latin typeface="Arial"/>
-              <a:ea typeface="Arial"/>
-              <a:cs typeface="Arial"/>
-              <a:sym typeface="Arial"/>
-            </a:endParaRPr>
-          </a:p>
-          <a:p>
-            <a:pPr marL="158750" indent="0">
-              <a:buNone/>
-            </a:pPr>
-            <a:r>
-              <a:rPr lang="en-US" sz="1100" b="0" i="0" u="none" strike="noStrike" cap="none" dirty="0">
-                <a:solidFill>
-                  <a:srgbClr val="000000"/>
-                </a:solidFill>
-                <a:effectLst/>
-                <a:latin typeface="Arial"/>
-                <a:ea typeface="Arial"/>
-                <a:cs typeface="Arial"/>
-                <a:sym typeface="Arial"/>
-              </a:rPr>
-              <a:t>The platform also supports recurring weekly events.</a:t>
+              <a:t>manage.</a:t>
             </a:r>
             <a:br>
-              <a:rPr lang="en-US" sz="1100" b="0" i="0" u="none" strike="noStrike" cap="none" dirty="0">
-                <a:solidFill>
-                  <a:srgbClr val="000000"/>
-                </a:solidFill>
-                <a:effectLst/>
-                <a:latin typeface="Arial"/>
-                <a:ea typeface="Arial"/>
-                <a:cs typeface="Arial"/>
-                <a:sym typeface="Arial"/>
-              </a:rPr>
+              <a:rPr lang="en-US" dirty="0"/>
             </a:br>
-            <a:r>
-              <a:rPr lang="en-US" sz="1100" b="0" i="0" u="none" strike="noStrike" cap="none" dirty="0">
-                <a:solidFill>
-                  <a:srgbClr val="000000"/>
-                </a:solidFill>
-                <a:effectLst/>
-                <a:latin typeface="Arial"/>
-                <a:ea typeface="Arial"/>
-                <a:cs typeface="Arial"/>
-                <a:sym typeface="Arial"/>
-              </a:rPr>
-              <a:t>In this case, users set the day, start time, duration, and date range, and the system automatically creates all sessions.</a:t>
-            </a:r>
-            <a:endParaRPr lang="hu-HU" sz="1100" b="0" i="0" u="none" strike="noStrike" cap="none" dirty="0">
-              <a:solidFill>
-                <a:srgbClr val="000000"/>
-              </a:solidFill>
-              <a:effectLst/>
-              <a:latin typeface="Arial"/>
-              <a:ea typeface="Arial"/>
-              <a:cs typeface="Arial"/>
-              <a:sym typeface="Arial"/>
-            </a:endParaRPr>
-          </a:p>
-          <a:p>
-            <a:endParaRPr lang="en-US" sz="1100" b="0" i="0" u="none" strike="noStrike" cap="none" dirty="0">
-              <a:solidFill>
-                <a:srgbClr val="000000"/>
-              </a:solidFill>
-              <a:effectLst/>
-              <a:latin typeface="Arial"/>
-              <a:ea typeface="Arial"/>
-              <a:cs typeface="Arial"/>
-              <a:sym typeface="Arial"/>
-            </a:endParaRPr>
-          </a:p>
-          <a:p>
-            <a:pPr marL="158750" indent="0">
-              <a:buNone/>
-            </a:pPr>
-            <a:r>
-              <a:rPr lang="en-US" sz="1100" b="0" i="0" u="none" strike="noStrike" cap="none" dirty="0">
-                <a:solidFill>
-                  <a:srgbClr val="000000"/>
-                </a:solidFill>
-                <a:effectLst/>
-                <a:latin typeface="Arial"/>
-                <a:ea typeface="Arial"/>
-                <a:cs typeface="Arial"/>
-                <a:sym typeface="Arial"/>
-              </a:rPr>
-              <a:t>Finally, on the Profile page, users can view their personal information.</a:t>
-            </a:r>
-          </a:p>
-          <a:p>
-            <a:pPr marL="158750" indent="0">
-              <a:buNone/>
-            </a:pPr>
+            <a:br>
+              <a:rPr lang="en-US" dirty="0"/>
+            </a:br>
             <a:endParaRPr lang="hu-HU" dirty="0"/>
           </a:p>
         </p:txBody>

--- a/dokumentumok/Prezentáció_NagyLevedSamuel_TothTamas.pptx
+++ b/dokumentumok/Prezentáció_NagyLevedSamuel_TothTamas.pptx
@@ -274,7 +274,7 @@
       <p15:sldGuideLst xmlns:p15="http://schemas.microsoft.com/office/powerpoint/2012/main"/>
     </p:ext>
     <p:ext uri="GoogleSlidesCustomDataVersion2">
-      <go:slidesCustomData xmlns:go="http://customooxmlschemas.google.com/" xmlns:ahyp="http://schemas.microsoft.com/office/drawing/2018/hyperlinkcolor" xmlns:p15="http://schemas.microsoft.com/office/powerpoint/2012/main" xmlns:p14="http://schemas.microsoft.com/office/powerpoint/2010/main" xmlns:com="http://schemas.openxmlformats.org/drawingml/2006/compatibility" xmlns:pvml="urn:schemas-microsoft-com:office:powerpoint" xmlns:v="urn:schemas-microsoft-com:vml" xmlns:o="urn:schemas-microsoft-com:office:office" xmlns:dgm="http://schemas.openxmlformats.org/drawingml/2006/diagram" xmlns:c="http://schemas.openxmlformats.org/drawingml/2006/chart" xmlns:mv="urn:schemas-microsoft-com:mac:vml" xmlns:mc="http://schemas.openxmlformats.org/markup-compatibility/2006" xmlns="" r:id="rId24" roundtripDataSignature="AMtx7mj67VHAuCHlscAUacmt/Mbt/wFFlA=="/>
+      <go:slidesCustomData xmlns="" xmlns:mc="http://schemas.openxmlformats.org/markup-compatibility/2006" xmlns:mv="urn:schemas-microsoft-com:mac:vml" xmlns:c="http://schemas.openxmlformats.org/drawingml/2006/chart" xmlns:dgm="http://schemas.openxmlformats.org/drawingml/2006/diagram" xmlns:o="urn:schemas-microsoft-com:office:office" xmlns:v="urn:schemas-microsoft-com:vml" xmlns:pvml="urn:schemas-microsoft-com:office:powerpoint" xmlns:com="http://schemas.openxmlformats.org/drawingml/2006/compatibility" xmlns:p14="http://schemas.microsoft.com/office/powerpoint/2010/main" xmlns:p15="http://schemas.microsoft.com/office/powerpoint/2012/main" xmlns:ahyp="http://schemas.microsoft.com/office/drawing/2018/hyperlinkcolor" xmlns:go="http://customooxmlschemas.google.com/" r:id="rId24" roundtripDataSignature="AMtx7mj67VHAuCHlscAUacmt/Mbt/wFFlA=="/>
     </p:ext>
   </p:extLst>
 </p:presentation>
@@ -1012,7 +1012,7 @@
             </a:pPr>
             <a:r>
               <a:rPr lang="hu-HU" dirty="0"/>
-              <a:t>Ezáltal a felület kezelése nincsen asztali számítógéphez kötve, bármikor kitudjuk használni bármely funkcióját az oldalnak.</a:t>
+              <a:t>Ezáltal a rendszer használata nem korlátozódik asztali számítógépekre, bármilyen eszközről kényelmesen elérhető.</a:t>
             </a:r>
             <a:endParaRPr dirty="0"/>
           </a:p>
@@ -2902,7 +2902,7 @@
             </a:br>
             <a:r>
               <a:rPr lang="hu-HU" dirty="0"/>
-              <a:t>A rendszer alapját a felhasználói belépési és profilfunkciók adják, vagyis a regisztráció, a bejelentkezés és a szerepkör kezelés.</a:t>
+              <a:t>A rendszer alapját a felhasználói belépési és profilfunkciók adják, vagyis a regisztráció, a bejelentkezés és a jogosultságkezelés.</a:t>
             </a:r>
           </a:p>
           <a:p>
@@ -3520,7 +3520,7 @@
                 <a:cs typeface="Arial"/>
                 <a:sym typeface="Arial"/>
               </a:rPr>
-              <a:t>Az Irányítópult szerepkör szerint jelenik meg, így a diák, tanár és </a:t>
+              <a:t>A </a:t>
             </a:r>
             <a:r>
               <a:rPr lang="hu-HU" sz="1100" b="0" i="0" u="none" strike="noStrike" cap="none" dirty="0" err="1">
@@ -3533,7 +3533,7 @@
                 <a:cs typeface="Arial"/>
                 <a:sym typeface="Arial"/>
               </a:rPr>
-              <a:t>admin</a:t>
+              <a:t>Dashboardok</a:t>
             </a:r>
             <a:r>
               <a:rPr lang="hu-HU" sz="1100" b="0" i="0" u="none" strike="noStrike" cap="none" dirty="0">
@@ -3546,21 +3546,10 @@
                 <a:cs typeface="Arial"/>
                 <a:sym typeface="Arial"/>
               </a:rPr>
-              <a:t> eltérő nézetet kap. </a:t>
-            </a:r>
-          </a:p>
-          <a:p>
-            <a:pPr marL="0" lvl="0" indent="0" algn="l" rtl="0">
-              <a:spcBef>
-                <a:spcPts val="0"/>
-              </a:spcBef>
-              <a:spcAft>
-                <a:spcPts val="0"/>
-              </a:spcAft>
-              <a:buNone/>
-            </a:pPr>
-            <a:r>
-              <a:rPr lang="hu-HU" sz="1100" b="0" i="0" u="none" strike="noStrike" cap="none" dirty="0">
+              <a:t> szerepkör szerint jelenik meg, így a diák, tanár és </a:t>
+            </a:r>
+            <a:r>
+              <a:rPr lang="hu-HU" sz="1100" b="0" i="0" u="none" strike="noStrike" cap="none" dirty="0" err="1">
                 <a:solidFill>
                   <a:srgbClr val="000000"/>
                 </a:solidFill>
@@ -3570,10 +3559,10 @@
                 <a:cs typeface="Arial"/>
                 <a:sym typeface="Arial"/>
               </a:rPr>
-              <a:t>Az állapotkezelés böngésző-tárolóval és </a:t>
-            </a:r>
-            <a:r>
-              <a:rPr lang="hu-HU" sz="1100" b="0" i="0" u="none" strike="noStrike" cap="none" dirty="0" err="1">
+              <a:t>admin</a:t>
+            </a:r>
+            <a:r>
+              <a:rPr lang="hu-HU" sz="1100" b="0" i="0" u="none" strike="noStrike" cap="none" dirty="0">
                 <a:solidFill>
                   <a:srgbClr val="000000"/>
                 </a:solidFill>
@@ -3583,8 +3572,19 @@
                 <a:cs typeface="Arial"/>
                 <a:sym typeface="Arial"/>
               </a:rPr>
-              <a:t>tokenes</a:t>
-            </a:r>
+              <a:t> eltérő nézetet kap. </a:t>
+            </a:r>
+          </a:p>
+          <a:p>
+            <a:pPr marL="0" lvl="0" indent="0" algn="l" rtl="0">
+              <a:spcBef>
+                <a:spcPts val="0"/>
+              </a:spcBef>
+              <a:spcAft>
+                <a:spcPts val="0"/>
+              </a:spcAft>
+              <a:buNone/>
+            </a:pPr>
             <a:r>
               <a:rPr lang="hu-HU" sz="1100" b="0" i="0" u="none" strike="noStrike" cap="none" dirty="0">
                 <a:solidFill>
@@ -3596,7 +3596,7 @@
                 <a:cs typeface="Arial"/>
                 <a:sym typeface="Arial"/>
               </a:rPr>
-              <a:t> hitelesítéssel történik, a felhasználói visszajelzéseket pedig egységes </a:t>
+              <a:t>Az állapotkezelés böngésző-tárolóval és </a:t>
             </a:r>
             <a:r>
               <a:rPr lang="hu-HU" sz="1100" b="0" i="0" u="none" strike="noStrike" cap="none" dirty="0" err="1">
@@ -3609,7 +3609,7 @@
                 <a:cs typeface="Arial"/>
                 <a:sym typeface="Arial"/>
               </a:rPr>
-              <a:t>toast</a:t>
+              <a:t>tokenes</a:t>
             </a:r>
             <a:r>
               <a:rPr lang="hu-HU" sz="1100" b="0" i="0" u="none" strike="noStrike" cap="none" dirty="0">
@@ -3622,7 +3622,33 @@
                 <a:cs typeface="Arial"/>
                 <a:sym typeface="Arial"/>
               </a:rPr>
-              <a:t> értesítési rendszer biztosítja..</a:t>
+              <a:t> hitelesítéssel történik, a felhasználói visszajelzéseket pedig egységes </a:t>
+            </a:r>
+            <a:r>
+              <a:rPr lang="hu-HU" sz="1100" b="0" i="0" u="none" strike="noStrike" cap="none" dirty="0" err="1">
+                <a:solidFill>
+                  <a:srgbClr val="000000"/>
+                </a:solidFill>
+                <a:effectLst/>
+                <a:latin typeface="Arial"/>
+                <a:ea typeface="Arial"/>
+                <a:cs typeface="Arial"/>
+                <a:sym typeface="Arial"/>
+              </a:rPr>
+              <a:t>toast</a:t>
+            </a:r>
+            <a:r>
+              <a:rPr lang="hu-HU" sz="1100" b="0" i="0" u="none" strike="noStrike" cap="none" dirty="0">
+                <a:solidFill>
+                  <a:srgbClr val="000000"/>
+                </a:solidFill>
+                <a:effectLst/>
+                <a:latin typeface="Arial"/>
+                <a:ea typeface="Arial"/>
+                <a:cs typeface="Arial"/>
+                <a:sym typeface="Arial"/>
+              </a:rPr>
+              <a:t> értesítési rendszer biztosítja.</a:t>
             </a:r>
             <a:endParaRPr dirty="0"/>
           </a:p>
@@ -3802,43 +3828,32 @@
               <a:rPr lang="hu-HU" dirty="0"/>
             </a:br>
             <a:r>
-              <a:rPr lang="hu-HU" sz="1100" b="0" i="0" u="none" strike="noStrike" cap="none" dirty="0">
-                <a:solidFill>
-                  <a:srgbClr val="000000"/>
-                </a:solidFill>
-                <a:effectLst/>
-                <a:latin typeface="Arial"/>
-                <a:ea typeface="Arial"/>
-                <a:cs typeface="Arial"/>
-                <a:sym typeface="Arial"/>
-              </a:rPr>
-              <a:t>A kontrollerek kezelik a </a:t>
-            </a:r>
-            <a:r>
-              <a:rPr lang="hu-HU" sz="1100" b="0" i="0" u="none" strike="noStrike" cap="none" dirty="0" err="1">
-                <a:solidFill>
-                  <a:srgbClr val="000000"/>
-                </a:solidFill>
-                <a:effectLst/>
-                <a:latin typeface="Arial"/>
-                <a:ea typeface="Arial"/>
-                <a:cs typeface="Arial"/>
-                <a:sym typeface="Arial"/>
-              </a:rPr>
-              <a:t>requesteket</a:t>
-            </a:r>
-            <a:r>
-              <a:rPr lang="hu-HU" sz="1100" b="0" i="0" u="none" strike="noStrike" cap="none" dirty="0">
-                <a:solidFill>
-                  <a:srgbClr val="000000"/>
-                </a:solidFill>
-                <a:effectLst/>
-                <a:latin typeface="Arial"/>
-                <a:ea typeface="Arial"/>
-                <a:cs typeface="Arial"/>
-                <a:sym typeface="Arial"/>
-              </a:rPr>
-              <a:t>, majd a service rétegben fut az üzleti logika.</a:t>
+              <a:rPr lang="hu-HU" dirty="0"/>
+              <a:t>A </a:t>
+            </a:r>
+            <a:r>
+              <a:rPr lang="hu-HU" b="0" dirty="0"/>
+              <a:t>kontrollerek</a:t>
+            </a:r>
+            <a:r>
+              <a:rPr lang="hu-HU" dirty="0"/>
+              <a:t> feladata a kérések </a:t>
+            </a:r>
+            <a:r>
+              <a:rPr lang="hu-HU" dirty="0" err="1"/>
+              <a:t>validálása</a:t>
+            </a:r>
+            <a:r>
+              <a:rPr lang="hu-HU" dirty="0"/>
+              <a:t>, majd az adatok továbbítása a </a:t>
+            </a:r>
+            <a:r>
+              <a:rPr lang="hu-HU" b="0" dirty="0"/>
+              <a:t>service rétegnek</a:t>
+            </a:r>
+            <a:r>
+              <a:rPr lang="hu-HU" dirty="0"/>
+              <a:t>, ahol az üzleti logika fut.</a:t>
             </a:r>
             <a:br>
               <a:rPr lang="hu-HU" dirty="0"/>
@@ -15857,15 +15872,7 @@
             </a:endParaRPr>
           </a:p>
           <a:p>
-            <a:pPr marL="0" marR="0" lvl="0" indent="0" algn="l" rtl="0">
-              <a:spcBef>
-                <a:spcPts val="0"/>
-              </a:spcBef>
-              <a:spcAft>
-                <a:spcPts val="0"/>
-              </a:spcAft>
-              <a:buNone/>
-            </a:pPr>
+            <a:pPr lvl="0"/>
             <a:r>
               <a:rPr lang="hu-HU" sz="1800" b="1" dirty="0">
                 <a:solidFill>
@@ -15888,7 +15895,11 @@
                 <a:cs typeface="Arial"/>
                 <a:sym typeface="Arial"/>
               </a:rPr>
-              <a:t>API tesztelés Postmannel</a:t>
+              <a:t>API tesztelés </a:t>
+            </a:r>
+            <a:r>
+              <a:rPr lang="hu-HU" sz="1800" dirty="0"/>
+              <a:t>Postmannal</a:t>
             </a:r>
             <a:endParaRPr dirty="0"/>
           </a:p>
@@ -18313,7 +18324,7 @@
         </p:nvSpPr>
         <p:spPr>
           <a:xfrm>
-            <a:off x="690452" y="2434975"/>
+            <a:off x="715720" y="2536617"/>
             <a:ext cx="3059615" cy="1623317"/>
           </a:xfrm>
           <a:prstGeom prst="rect">
@@ -18426,8 +18437,8 @@
         </p:nvSpPr>
         <p:spPr>
           <a:xfrm>
-            <a:off x="1498862" y="2794571"/>
-            <a:ext cx="1573111" cy="923330"/>
+            <a:off x="1354138" y="2862044"/>
+            <a:ext cx="2049911" cy="923289"/>
           </a:xfrm>
           <a:prstGeom prst="rect">
             <a:avLst/>
@@ -18443,17 +18454,18 @@
           </a:bodyPr>
           <a:lstStyle/>
           <a:p>
-            <a:pPr marL="0" marR="0" lvl="0" indent="0" algn="l" rtl="0">
-              <a:spcBef>
-                <a:spcPts val="0"/>
-              </a:spcBef>
-              <a:spcAft>
-                <a:spcPts val="0"/>
-              </a:spcAft>
-              <a:buNone/>
+            <a:pPr marL="285750" marR="0" lvl="0" indent="-285750" algn="l" rtl="0">
+              <a:spcBef>
+                <a:spcPts val="0"/>
+              </a:spcBef>
+              <a:spcAft>
+                <a:spcPts val="0"/>
+              </a:spcAft>
+              <a:buFont typeface="Arial" panose="020B0604020202020204" pitchFamily="34" charset="0"/>
+              <a:buChar char="•"/>
             </a:pPr>
             <a:r>
-              <a:rPr lang="hu-HU" sz="1800">
+              <a:rPr lang="hu-HU" sz="1800" dirty="0">
                 <a:solidFill>
                   <a:schemeClr val="dk1"/>
                 </a:solidFill>
@@ -18464,20 +18476,21 @@
               </a:rPr>
               <a:t>Regisztráció</a:t>
             </a:r>
-            <a:endParaRPr/>
-          </a:p>
-          <a:p>
-            <a:pPr marL="0" marR="0" lvl="0" indent="0" algn="l" rtl="0">
-              <a:spcBef>
-                <a:spcPts val="0"/>
-              </a:spcBef>
-              <a:spcAft>
-                <a:spcPts val="0"/>
-              </a:spcAft>
-              <a:buNone/>
+            <a:endParaRPr dirty="0"/>
+          </a:p>
+          <a:p>
+            <a:pPr marL="285750" marR="0" lvl="0" indent="-285750" algn="l" rtl="0">
+              <a:spcBef>
+                <a:spcPts val="0"/>
+              </a:spcBef>
+              <a:spcAft>
+                <a:spcPts val="0"/>
+              </a:spcAft>
+              <a:buFont typeface="Arial" panose="020B0604020202020204" pitchFamily="34" charset="0"/>
+              <a:buChar char="•"/>
             </a:pPr>
             <a:r>
-              <a:rPr lang="hu-HU" sz="1800">
+              <a:rPr lang="hu-HU" sz="1800" dirty="0">
                 <a:solidFill>
                   <a:schemeClr val="dk1"/>
                 </a:solidFill>
@@ -18488,20 +18501,21 @@
               </a:rPr>
               <a:t>Bejelentkezés</a:t>
             </a:r>
-            <a:endParaRPr/>
-          </a:p>
-          <a:p>
-            <a:pPr marL="0" marR="0" lvl="0" indent="0" algn="l" rtl="0">
-              <a:spcBef>
-                <a:spcPts val="0"/>
-              </a:spcBef>
-              <a:spcAft>
-                <a:spcPts val="0"/>
-              </a:spcAft>
-              <a:buNone/>
+            <a:endParaRPr dirty="0"/>
+          </a:p>
+          <a:p>
+            <a:pPr marL="285750" marR="0" lvl="0" indent="-285750" algn="l" rtl="0">
+              <a:spcBef>
+                <a:spcPts val="0"/>
+              </a:spcBef>
+              <a:spcAft>
+                <a:spcPts val="0"/>
+              </a:spcAft>
+              <a:buFont typeface="Arial" panose="020B0604020202020204" pitchFamily="34" charset="0"/>
+              <a:buChar char="•"/>
             </a:pPr>
             <a:r>
-              <a:rPr lang="hu-HU" sz="1800">
+              <a:rPr lang="hu-HU" sz="1800" dirty="0">
                 <a:solidFill>
                   <a:schemeClr val="dk1"/>
                 </a:solidFill>
@@ -18512,7 +18526,7 @@
               </a:rPr>
               <a:t>Profilkezelés</a:t>
             </a:r>
-            <a:endParaRPr/>
+            <a:endParaRPr dirty="0"/>
           </a:p>
         </p:txBody>
       </p:sp>
@@ -18524,8 +18538,8 @@
         </p:nvSpPr>
         <p:spPr>
           <a:xfrm>
-            <a:off x="7947643" y="2724225"/>
-            <a:ext cx="3553905" cy="1200329"/>
+            <a:off x="7799310" y="2723545"/>
+            <a:ext cx="3882407" cy="1200288"/>
           </a:xfrm>
           <a:prstGeom prst="rect">
             <a:avLst/>
@@ -18541,17 +18555,18 @@
           </a:bodyPr>
           <a:lstStyle/>
           <a:p>
-            <a:pPr marL="0" marR="0" lvl="0" indent="0" algn="l" rtl="0">
-              <a:spcBef>
-                <a:spcPts val="0"/>
-              </a:spcBef>
-              <a:spcAft>
-                <a:spcPts val="0"/>
-              </a:spcAft>
-              <a:buNone/>
+            <a:pPr marL="285750" marR="0" lvl="0" indent="-285750" algn="l" rtl="0">
+              <a:spcBef>
+                <a:spcPts val="0"/>
+              </a:spcBef>
+              <a:spcAft>
+                <a:spcPts val="0"/>
+              </a:spcAft>
+              <a:buFont typeface="Arial" panose="020B0604020202020204" pitchFamily="34" charset="0"/>
+              <a:buChar char="•"/>
             </a:pPr>
             <a:r>
-              <a:rPr lang="hu-HU" sz="1800">
+              <a:rPr lang="hu-HU" sz="1800" dirty="0">
                 <a:solidFill>
                   <a:schemeClr val="dk1"/>
                 </a:solidFill>
@@ -18562,20 +18577,21 @@
               </a:rPr>
               <a:t>Események böngészése</a:t>
             </a:r>
-            <a:endParaRPr/>
-          </a:p>
-          <a:p>
-            <a:pPr marL="0" marR="0" lvl="0" indent="0" algn="l" rtl="0">
-              <a:spcBef>
-                <a:spcPts val="0"/>
-              </a:spcBef>
-              <a:spcAft>
-                <a:spcPts val="0"/>
-              </a:spcAft>
-              <a:buNone/>
+            <a:endParaRPr dirty="0"/>
+          </a:p>
+          <a:p>
+            <a:pPr marL="285750" marR="0" lvl="0" indent="-285750" algn="l" rtl="0">
+              <a:spcBef>
+                <a:spcPts val="0"/>
+              </a:spcBef>
+              <a:spcAft>
+                <a:spcPts val="0"/>
+              </a:spcAft>
+              <a:buFont typeface="Arial" panose="020B0604020202020204" pitchFamily="34" charset="0"/>
+              <a:buChar char="•"/>
             </a:pPr>
             <a:r>
-              <a:rPr lang="hu-HU" sz="1800">
+              <a:rPr lang="hu-HU" sz="1800" dirty="0">
                 <a:solidFill>
                   <a:schemeClr val="dk1"/>
                 </a:solidFill>
@@ -18586,20 +18602,21 @@
               </a:rPr>
               <a:t>Események létrehozása és kezelése</a:t>
             </a:r>
-            <a:endParaRPr/>
-          </a:p>
-          <a:p>
-            <a:pPr marL="0" marR="0" lvl="0" indent="0" algn="l" rtl="0">
-              <a:spcBef>
-                <a:spcPts val="0"/>
-              </a:spcBef>
-              <a:spcAft>
-                <a:spcPts val="0"/>
-              </a:spcAft>
-              <a:buNone/>
+            <a:endParaRPr dirty="0"/>
+          </a:p>
+          <a:p>
+            <a:pPr marL="285750" marR="0" lvl="0" indent="-285750" algn="l" rtl="0">
+              <a:spcBef>
+                <a:spcPts val="0"/>
+              </a:spcBef>
+              <a:spcAft>
+                <a:spcPts val="0"/>
+              </a:spcAft>
+              <a:buFont typeface="Arial" panose="020B0604020202020204" pitchFamily="34" charset="0"/>
+              <a:buChar char="•"/>
             </a:pPr>
             <a:r>
-              <a:rPr lang="hu-HU" sz="1800">
+              <a:rPr lang="hu-HU" sz="1800" dirty="0">
                 <a:solidFill>
                   <a:schemeClr val="dk1"/>
                 </a:solidFill>
@@ -18610,20 +18627,21 @@
               </a:rPr>
               <a:t>Intézmények és osztályok kezelése</a:t>
             </a:r>
-            <a:endParaRPr/>
-          </a:p>
-          <a:p>
-            <a:pPr marL="0" marR="0" lvl="0" indent="0" algn="l" rtl="0">
-              <a:spcBef>
-                <a:spcPts val="0"/>
-              </a:spcBef>
-              <a:spcAft>
-                <a:spcPts val="0"/>
-              </a:spcAft>
-              <a:buNone/>
+            <a:endParaRPr dirty="0"/>
+          </a:p>
+          <a:p>
+            <a:pPr marL="285750" marR="0" lvl="0" indent="-285750" algn="l" rtl="0">
+              <a:spcBef>
+                <a:spcPts val="0"/>
+              </a:spcBef>
+              <a:spcAft>
+                <a:spcPts val="0"/>
+              </a:spcAft>
+              <a:buFont typeface="Arial" panose="020B0604020202020204" pitchFamily="34" charset="0"/>
+              <a:buChar char="•"/>
             </a:pPr>
             <a:r>
-              <a:rPr lang="hu-HU" sz="1800">
+              <a:rPr lang="hu-HU" sz="1800" dirty="0">
                 <a:solidFill>
                   <a:schemeClr val="dk1"/>
                 </a:solidFill>
@@ -18634,7 +18652,7 @@
               </a:rPr>
               <a:t>Jelentkezési kérelmek kezelése</a:t>
             </a:r>
-            <a:endParaRPr sz="1800">
+            <a:endParaRPr sz="1800" dirty="0">
               <a:solidFill>
                 <a:schemeClr val="dk1"/>
               </a:solidFill>

--- a/dokumentumok/Prezentáció_NagyLevedSamuel_TothTamas.pptx
+++ b/dokumentumok/Prezentáció_NagyLevedSamuel_TothTamas.pptx
@@ -274,7 +274,7 @@
       <p15:sldGuideLst xmlns:p15="http://schemas.microsoft.com/office/powerpoint/2012/main"/>
     </p:ext>
     <p:ext uri="GoogleSlidesCustomDataVersion2">
-      <go:slidesCustomData xmlns="" xmlns:mc="http://schemas.openxmlformats.org/markup-compatibility/2006" xmlns:mv="urn:schemas-microsoft-com:mac:vml" xmlns:c="http://schemas.openxmlformats.org/drawingml/2006/chart" xmlns:dgm="http://schemas.openxmlformats.org/drawingml/2006/diagram" xmlns:o="urn:schemas-microsoft-com:office:office" xmlns:v="urn:schemas-microsoft-com:vml" xmlns:pvml="urn:schemas-microsoft-com:office:powerpoint" xmlns:com="http://schemas.openxmlformats.org/drawingml/2006/compatibility" xmlns:p14="http://schemas.microsoft.com/office/powerpoint/2010/main" xmlns:p15="http://schemas.microsoft.com/office/powerpoint/2012/main" xmlns:ahyp="http://schemas.microsoft.com/office/drawing/2018/hyperlinkcolor" xmlns:go="http://customooxmlschemas.google.com/" r:id="rId24" roundtripDataSignature="AMtx7mj67VHAuCHlscAUacmt/Mbt/wFFlA=="/>
+      <go:slidesCustomData xmlns:go="http://customooxmlschemas.google.com/" xmlns:ahyp="http://schemas.microsoft.com/office/drawing/2018/hyperlinkcolor" xmlns:p15="http://schemas.microsoft.com/office/powerpoint/2012/main" xmlns:p14="http://schemas.microsoft.com/office/powerpoint/2010/main" xmlns:com="http://schemas.openxmlformats.org/drawingml/2006/compatibility" xmlns:pvml="urn:schemas-microsoft-com:office:powerpoint" xmlns:v="urn:schemas-microsoft-com:vml" xmlns:o="urn:schemas-microsoft-com:office:office" xmlns:dgm="http://schemas.openxmlformats.org/drawingml/2006/diagram" xmlns:c="http://schemas.openxmlformats.org/drawingml/2006/chart" xmlns:mv="urn:schemas-microsoft-com:mac:vml" xmlns:mc="http://schemas.openxmlformats.org/markup-compatibility/2006" xmlns="" r:id="rId24" roundtripDataSignature="AMtx7mj67VHAuCHlscAUacmt/Mbt/wFFlA=="/>
     </p:ext>
   </p:extLst>
 </p:presentation>
@@ -2488,20 +2488,7 @@
                 <a:cs typeface="Arial"/>
                 <a:sym typeface="Arial"/>
               </a:rPr>
-              <a:t>This page also includes the institution switcher, allowing administrators to quickly switch between the schools they </a:t>
-            </a:r>
-            <a:r>
-              <a:rPr lang="en-US" sz="1100" b="0" i="0" u="none" strike="noStrike" cap="none">
-                <a:solidFill>
-                  <a:srgbClr val="000000"/>
-                </a:solidFill>
-                <a:effectLst/>
-                <a:latin typeface="Arial"/>
-                <a:ea typeface="Arial"/>
-                <a:cs typeface="Arial"/>
-                <a:sym typeface="Arial"/>
-              </a:rPr>
-              <a:t>manage.</a:t>
+              <a:t>This page also includes the institution switcher, allowing administrators to quickly switch between the schools they manage.</a:t>
             </a:r>
             <a:br>
               <a:rPr lang="en-US" dirty="0"/>
@@ -3103,33 +3090,7 @@
                 <a:cs typeface="Arial"/>
                 <a:sym typeface="Arial"/>
               </a:rPr>
-              <a:t>A frontend egy </a:t>
-            </a:r>
-            <a:r>
-              <a:rPr lang="hu-HU" sz="1100" b="0" i="0" u="none" strike="noStrike" cap="none" dirty="0" err="1">
-                <a:solidFill>
-                  <a:srgbClr val="000000"/>
-                </a:solidFill>
-                <a:effectLst/>
-                <a:latin typeface="Arial"/>
-                <a:ea typeface="Arial"/>
-                <a:cs typeface="Arial"/>
-                <a:sym typeface="Arial"/>
-              </a:rPr>
-              <a:t>Vue</a:t>
-            </a:r>
-            <a:r>
-              <a:rPr lang="hu-HU" sz="1100" b="0" i="0" u="none" strike="noStrike" cap="none" dirty="0">
-                <a:solidFill>
-                  <a:srgbClr val="000000"/>
-                </a:solidFill>
-                <a:effectLst/>
-                <a:latin typeface="Arial"/>
-                <a:ea typeface="Arial"/>
-                <a:cs typeface="Arial"/>
-                <a:sym typeface="Arial"/>
-              </a:rPr>
-              <a:t> 3 alapú kliensalkalmazás, ezen keresztül éri el és használja a felhasználó a funkciókat.</a:t>
+              <a:t>A frontend Vue.js keretrendszerre épül, ezen keresztül éri el és használja a felhasználó a funkciókat.</a:t>
             </a:r>
             <a:br>
               <a:rPr lang="hu-HU" dirty="0"/>
@@ -3420,7 +3381,7 @@
                 <a:cs typeface="Arial"/>
                 <a:sym typeface="Arial"/>
               </a:rPr>
-              <a:t>A frontendünk, mint említettem </a:t>
+              <a:t>A frontendünk egy </a:t>
             </a:r>
             <a:r>
               <a:rPr lang="hu-HU" sz="1100" b="0" i="0" u="none" strike="noStrike" cap="none" dirty="0" err="1">
@@ -3446,7 +3407,7 @@
                 <a:cs typeface="Arial"/>
                 <a:sym typeface="Arial"/>
               </a:rPr>
-              <a:t> 3 alapú SPA, ahol </a:t>
+              <a:t> 3 alapú kliensalkalmazás, ahol </a:t>
             </a:r>
             <a:r>
               <a:rPr lang="hu-HU" sz="1100" b="0" i="0" u="none" strike="noStrike" cap="none" dirty="0" err="1">
@@ -3510,69 +3471,24 @@
               <a:buNone/>
             </a:pPr>
             <a:r>
-              <a:rPr lang="hu-HU" sz="1100" b="0" i="0" u="none" strike="noStrike" cap="none" dirty="0">
-                <a:solidFill>
-                  <a:srgbClr val="000000"/>
-                </a:solidFill>
-                <a:effectLst/>
-                <a:latin typeface="Arial"/>
-                <a:ea typeface="Arial"/>
-                <a:cs typeface="Arial"/>
-                <a:sym typeface="Arial"/>
-              </a:rPr>
+              <a:rPr lang="hu-HU" dirty="0"/>
               <a:t>A </a:t>
             </a:r>
             <a:r>
-              <a:rPr lang="hu-HU" sz="1100" b="0" i="0" u="none" strike="noStrike" cap="none" dirty="0" err="1">
-                <a:solidFill>
-                  <a:srgbClr val="000000"/>
-                </a:solidFill>
-                <a:effectLst/>
-                <a:latin typeface="Arial"/>
-                <a:ea typeface="Arial"/>
-                <a:cs typeface="Arial"/>
-                <a:sym typeface="Arial"/>
-              </a:rPr>
+              <a:rPr lang="hu-HU" b="0" dirty="0" err="1"/>
               <a:t>Dashboardok</a:t>
             </a:r>
             <a:r>
-              <a:rPr lang="hu-HU" sz="1100" b="0" i="0" u="none" strike="noStrike" cap="none" dirty="0">
-                <a:solidFill>
-                  <a:srgbClr val="000000"/>
-                </a:solidFill>
-                <a:effectLst/>
-                <a:latin typeface="Arial"/>
-                <a:ea typeface="Arial"/>
-                <a:cs typeface="Arial"/>
-                <a:sym typeface="Arial"/>
-              </a:rPr>
-              <a:t> szerepkör szerint jelenik meg, így a diák, tanár és </a:t>
-            </a:r>
-            <a:r>
-              <a:rPr lang="hu-HU" sz="1100" b="0" i="0" u="none" strike="noStrike" cap="none" dirty="0" err="1">
-                <a:solidFill>
-                  <a:srgbClr val="000000"/>
-                </a:solidFill>
-                <a:effectLst/>
-                <a:latin typeface="Arial"/>
-                <a:ea typeface="Arial"/>
-                <a:cs typeface="Arial"/>
-                <a:sym typeface="Arial"/>
-              </a:rPr>
-              <a:t>admin</a:t>
-            </a:r>
-            <a:r>
-              <a:rPr lang="hu-HU" sz="1100" b="0" i="0" u="none" strike="noStrike" cap="none" dirty="0">
-                <a:solidFill>
-                  <a:srgbClr val="000000"/>
-                </a:solidFill>
-                <a:effectLst/>
-                <a:latin typeface="Arial"/>
-                <a:ea typeface="Arial"/>
-                <a:cs typeface="Arial"/>
-                <a:sym typeface="Arial"/>
-              </a:rPr>
-              <a:t> eltérő nézetet kap. </a:t>
+              <a:rPr lang="hu-HU" dirty="0"/>
+              <a:t> szerepkör szerint változnak, így a diákok, tanárok és </a:t>
+            </a:r>
+            <a:r>
+              <a:rPr lang="hu-HU" dirty="0" err="1"/>
+              <a:t>adminok</a:t>
+            </a:r>
+            <a:r>
+              <a:rPr lang="hu-HU" dirty="0"/>
+              <a:t> eltérő nézetet látnak. </a:t>
             </a:r>
           </a:p>
           <a:p>
@@ -3586,69 +3502,32 @@
               <a:buNone/>
             </a:pPr>
             <a:r>
-              <a:rPr lang="hu-HU" sz="1100" b="0" i="0" u="none" strike="noStrike" cap="none" dirty="0">
-                <a:solidFill>
-                  <a:srgbClr val="000000"/>
-                </a:solidFill>
-                <a:effectLst/>
-                <a:latin typeface="Arial"/>
-                <a:ea typeface="Arial"/>
-                <a:cs typeface="Arial"/>
-                <a:sym typeface="Arial"/>
-              </a:rPr>
-              <a:t>Az állapotkezelés böngésző-tárolóval és </a:t>
-            </a:r>
-            <a:r>
-              <a:rPr lang="hu-HU" sz="1100" b="0" i="0" u="none" strike="noStrike" cap="none" dirty="0" err="1">
-                <a:solidFill>
-                  <a:srgbClr val="000000"/>
-                </a:solidFill>
-                <a:effectLst/>
-                <a:latin typeface="Arial"/>
-                <a:ea typeface="Arial"/>
-                <a:cs typeface="Arial"/>
-                <a:sym typeface="Arial"/>
-              </a:rPr>
+              <a:rPr lang="hu-HU" dirty="0"/>
+              <a:t>A hitelesítés </a:t>
+            </a:r>
+            <a:r>
+              <a:rPr lang="hu-HU" b="0" dirty="0" err="1"/>
               <a:t>tokenes</a:t>
             </a:r>
             <a:r>
-              <a:rPr lang="hu-HU" sz="1100" b="0" i="0" u="none" strike="noStrike" cap="none" dirty="0">
-                <a:solidFill>
-                  <a:srgbClr val="000000"/>
-                </a:solidFill>
-                <a:effectLst/>
-                <a:latin typeface="Arial"/>
-                <a:ea typeface="Arial"/>
-                <a:cs typeface="Arial"/>
-                <a:sym typeface="Arial"/>
-              </a:rPr>
-              <a:t> hitelesítéssel történik, a felhasználói visszajelzéseket pedig egységes </a:t>
-            </a:r>
-            <a:r>
-              <a:rPr lang="hu-HU" sz="1100" b="0" i="0" u="none" strike="noStrike" cap="none" dirty="0" err="1">
-                <a:solidFill>
-                  <a:srgbClr val="000000"/>
-                </a:solidFill>
-                <a:effectLst/>
-                <a:latin typeface="Arial"/>
-                <a:ea typeface="Arial"/>
-                <a:cs typeface="Arial"/>
-                <a:sym typeface="Arial"/>
-              </a:rPr>
+              <a:rPr lang="hu-HU" dirty="0"/>
+              <a:t> megoldással működik, a visszajelzésekről pedig egy egységes </a:t>
+            </a:r>
+            <a:r>
+              <a:rPr lang="hu-HU" b="0" dirty="0" err="1"/>
               <a:t>toast</a:t>
             </a:r>
             <a:r>
-              <a:rPr lang="hu-HU" sz="1100" b="0" i="0" u="none" strike="noStrike" cap="none" dirty="0">
-                <a:solidFill>
-                  <a:srgbClr val="000000"/>
-                </a:solidFill>
-                <a:effectLst/>
-                <a:latin typeface="Arial"/>
-                <a:ea typeface="Arial"/>
-                <a:cs typeface="Arial"/>
-                <a:sym typeface="Arial"/>
-              </a:rPr>
-              <a:t> értesítési rendszer biztosítja.</a:t>
+              <a:rPr lang="hu-HU" b="1" dirty="0"/>
+              <a:t> </a:t>
+            </a:r>
+            <a:r>
+              <a:rPr lang="hu-HU" b="0" dirty="0"/>
+              <a:t>rendszer</a:t>
+            </a:r>
+            <a:r>
+              <a:rPr lang="hu-HU" dirty="0"/>
+              <a:t> gondoskodik.</a:t>
             </a:r>
             <a:endParaRPr dirty="0"/>
           </a:p>

--- a/dokumentumok/Prezentáció_NagyLevedSamuel_TothTamas.pptx
+++ b/dokumentumok/Prezentáció_NagyLevedSamuel_TothTamas.pptx
@@ -274,7 +274,7 @@
       <p15:sldGuideLst xmlns:p15="http://schemas.microsoft.com/office/powerpoint/2012/main"/>
     </p:ext>
     <p:ext uri="GoogleSlidesCustomDataVersion2">
-      <go:slidesCustomData xmlns:go="http://customooxmlschemas.google.com/" xmlns:ahyp="http://schemas.microsoft.com/office/drawing/2018/hyperlinkcolor" xmlns:p15="http://schemas.microsoft.com/office/powerpoint/2012/main" xmlns:p14="http://schemas.microsoft.com/office/powerpoint/2010/main" xmlns:com="http://schemas.openxmlformats.org/drawingml/2006/compatibility" xmlns:pvml="urn:schemas-microsoft-com:office:powerpoint" xmlns:v="urn:schemas-microsoft-com:vml" xmlns:o="urn:schemas-microsoft-com:office:office" xmlns:dgm="http://schemas.openxmlformats.org/drawingml/2006/diagram" xmlns:c="http://schemas.openxmlformats.org/drawingml/2006/chart" xmlns:mv="urn:schemas-microsoft-com:mac:vml" xmlns:mc="http://schemas.openxmlformats.org/markup-compatibility/2006" xmlns="" r:id="rId24" roundtripDataSignature="AMtx7mj67VHAuCHlscAUacmt/Mbt/wFFlA=="/>
+      <go:slidesCustomData xmlns="" xmlns:mc="http://schemas.openxmlformats.org/markup-compatibility/2006" xmlns:mv="urn:schemas-microsoft-com:mac:vml" xmlns:c="http://schemas.openxmlformats.org/drawingml/2006/chart" xmlns:dgm="http://schemas.openxmlformats.org/drawingml/2006/diagram" xmlns:o="urn:schemas-microsoft-com:office:office" xmlns:v="urn:schemas-microsoft-com:vml" xmlns:pvml="urn:schemas-microsoft-com:office:powerpoint" xmlns:com="http://schemas.openxmlformats.org/drawingml/2006/compatibility" xmlns:p14="http://schemas.microsoft.com/office/powerpoint/2010/main" xmlns:p15="http://schemas.microsoft.com/office/powerpoint/2012/main" xmlns:ahyp="http://schemas.microsoft.com/office/drawing/2018/hyperlinkcolor" xmlns:go="http://customooxmlschemas.google.com/" r:id="rId24" roundtripDataSignature="AMtx7mj67VHAuCHlscAUacmt/Mbt/wFFlA=="/>
     </p:ext>
   </p:extLst>
 </p:presentation>
@@ -19591,10 +19591,10 @@
       </p:pic>
       <p:pic>
         <p:nvPicPr>
-          <p:cNvPr id="4" name="Kép 3">
+          <p:cNvPr id="5" name="Kép 4">
             <a:extLst>
               <a:ext uri="{FF2B5EF4-FFF2-40B4-BE49-F238E27FC236}">
-                <a16:creationId xmlns:a16="http://schemas.microsoft.com/office/drawing/2014/main" id="{369E2F3D-E7E9-5259-2122-96AE26EF1D5B}"/>
+                <a16:creationId xmlns:a16="http://schemas.microsoft.com/office/drawing/2014/main" id="{CE001F27-DDCE-7249-BF39-9D703C6C076E}"/>
               </a:ext>
             </a:extLst>
           </p:cNvPr>
@@ -19611,8 +19611,8 @@
         </p:blipFill>
         <p:spPr>
           <a:xfrm>
-            <a:off x="9182058" y="169611"/>
-            <a:ext cx="2852432" cy="6518778"/>
+            <a:off x="9044006" y="169610"/>
+            <a:ext cx="2919869" cy="6518779"/>
           </a:xfrm>
           <a:prstGeom prst="rect">
             <a:avLst/>

--- a/dokumentumok/Prezentáció_NagyLevedSamuel_TothTamas.pptx
+++ b/dokumentumok/Prezentáció_NagyLevedSamuel_TothTamas.pptx
@@ -274,7 +274,7 @@
       <p15:sldGuideLst xmlns:p15="http://schemas.microsoft.com/office/powerpoint/2012/main"/>
     </p:ext>
     <p:ext uri="GoogleSlidesCustomDataVersion2">
-      <go:slidesCustomData xmlns:go="http://customooxmlschemas.google.com/" xmlns:ahyp="http://schemas.microsoft.com/office/drawing/2018/hyperlinkcolor" xmlns:p15="http://schemas.microsoft.com/office/powerpoint/2012/main" xmlns:p14="http://schemas.microsoft.com/office/powerpoint/2010/main" xmlns:com="http://schemas.openxmlformats.org/drawingml/2006/compatibility" xmlns:pvml="urn:schemas-microsoft-com:office:powerpoint" xmlns:v="urn:schemas-microsoft-com:vml" xmlns:o="urn:schemas-microsoft-com:office:office" xmlns:dgm="http://schemas.openxmlformats.org/drawingml/2006/diagram" xmlns:c="http://schemas.openxmlformats.org/drawingml/2006/chart" xmlns:mv="urn:schemas-microsoft-com:mac:vml" xmlns:mc="http://schemas.openxmlformats.org/markup-compatibility/2006" xmlns="" r:id="rId24" roundtripDataSignature="AMtx7mj67VHAuCHlscAUacmt/Mbt/wFFlA=="/>
+      <go:slidesCustomData xmlns="" xmlns:mc="http://schemas.openxmlformats.org/markup-compatibility/2006" xmlns:mv="urn:schemas-microsoft-com:mac:vml" xmlns:c="http://schemas.openxmlformats.org/drawingml/2006/chart" xmlns:dgm="http://schemas.openxmlformats.org/drawingml/2006/diagram" xmlns:o="urn:schemas-microsoft-com:office:office" xmlns:v="urn:schemas-microsoft-com:vml" xmlns:pvml="urn:schemas-microsoft-com:office:powerpoint" xmlns:com="http://schemas.openxmlformats.org/drawingml/2006/compatibility" xmlns:p14="http://schemas.microsoft.com/office/powerpoint/2010/main" xmlns:p15="http://schemas.microsoft.com/office/powerpoint/2012/main" xmlns:ahyp="http://schemas.microsoft.com/office/drawing/2018/hyperlinkcolor" xmlns:go="http://customooxmlschemas.google.com/" r:id="rId24" roundtripDataSignature="AMtx7mj67VHAuCHlscAUacmt/Mbt/wFFlA=="/>
     </p:ext>
   </p:extLst>
 </p:presentation>
@@ -3659,7 +3659,7 @@
                 <a:cs typeface="Arial"/>
                 <a:sym typeface="Arial"/>
               </a:rPr>
-              <a:t>Itt a backendünk réteges felépítése látható.</a:t>
+              <a:t>A backendünk réteges felépítésű, ami átláthatóvá és jól bővíthetővé teszi a rendszert.</a:t>
             </a:r>
             <a:br>
               <a:rPr lang="hu-HU" dirty="0"/>
@@ -3675,7 +3675,7 @@
                 <a:cs typeface="Arial"/>
                 <a:sym typeface="Arial"/>
               </a:rPr>
-              <a:t>Az API/</a:t>
+              <a:t>A </a:t>
             </a:r>
             <a:r>
               <a:rPr lang="hu-HU" sz="1100" b="0" i="0" u="none" strike="noStrike" cap="none" dirty="0" err="1">
@@ -3701,44 +3701,10 @@
                 <a:cs typeface="Arial"/>
                 <a:sym typeface="Arial"/>
               </a:rPr>
-              <a:t> réteg fogadja és irányítja a kéréseket.</a:t>
-            </a:r>
-            <a:br>
-              <a:rPr lang="hu-HU" dirty="0"/>
-            </a:br>
-            <a:r>
-              <a:rPr lang="hu-HU" dirty="0"/>
-              <a:t>A </a:t>
-            </a:r>
-            <a:r>
-              <a:rPr lang="hu-HU" b="0" dirty="0"/>
-              <a:t>kontrollerek</a:t>
-            </a:r>
-            <a:r>
-              <a:rPr lang="hu-HU" dirty="0"/>
-              <a:t> feladata a kérések </a:t>
-            </a:r>
-            <a:r>
-              <a:rPr lang="hu-HU" dirty="0" err="1"/>
-              <a:t>validálása</a:t>
-            </a:r>
-            <a:r>
-              <a:rPr lang="hu-HU" dirty="0"/>
-              <a:t>, majd az adatok továbbítása a </a:t>
-            </a:r>
-            <a:r>
-              <a:rPr lang="hu-HU" b="0" dirty="0"/>
-              <a:t>service rétegnek</a:t>
-            </a:r>
-            <a:r>
-              <a:rPr lang="hu-HU" dirty="0"/>
-              <a:t>, ahol az üzleti logika fut.</a:t>
-            </a:r>
-            <a:br>
-              <a:rPr lang="hu-HU" dirty="0"/>
-            </a:br>
-            <a:r>
-              <a:rPr lang="hu-HU" sz="1100" b="0" i="0" u="none" strike="noStrike" cap="none" dirty="0">
+              <a:t> réteg a kéréseket a megfelelő </a:t>
+            </a:r>
+            <a:r>
+              <a:rPr lang="hu-HU" sz="1100" b="0" i="0" u="none" strike="noStrike" cap="none" dirty="0" err="1">
                 <a:solidFill>
                   <a:srgbClr val="000000"/>
                 </a:solidFill>
@@ -3748,11 +3714,8 @@
                 <a:cs typeface="Arial"/>
                 <a:sym typeface="Arial"/>
               </a:rPr>
-              <a:t>A modellek és az adatkezelés az adatbázis-műveletekért és relációkért felelnek.</a:t>
-            </a:r>
-            <a:br>
-              <a:rPr lang="hu-HU" dirty="0"/>
-            </a:br>
+              <a:t>controllerhez</a:t>
+            </a:r>
             <a:r>
               <a:rPr lang="hu-HU" sz="1100" b="0" i="0" u="none" strike="noStrike" cap="none" dirty="0">
                 <a:solidFill>
@@ -3764,10 +3727,13 @@
                 <a:cs typeface="Arial"/>
                 <a:sym typeface="Arial"/>
               </a:rPr>
-              <a:t>Az infrastruktúra réteg pedig a </a:t>
-            </a:r>
-            <a:r>
-              <a:rPr lang="hu-HU" sz="1100" b="0" i="0" u="none" strike="noStrike" cap="none" dirty="0" err="1">
+              <a:t> irányítja.</a:t>
+            </a:r>
+            <a:br>
+              <a:rPr lang="hu-HU" dirty="0"/>
+            </a:br>
+            <a:r>
+              <a:rPr lang="hu-HU" sz="1100" b="0" i="0" u="none" strike="noStrike" cap="none" dirty="0">
                 <a:solidFill>
                   <a:srgbClr val="000000"/>
                 </a:solidFill>
@@ -3777,10 +3743,10 @@
                 <a:cs typeface="Arial"/>
                 <a:sym typeface="Arial"/>
               </a:rPr>
-              <a:t>middleware</a:t>
-            </a:r>
-            <a:r>
-              <a:rPr lang="hu-HU" sz="1100" b="0" i="0" u="none" strike="noStrike" cap="none" dirty="0">
+              <a:t>A </a:t>
+            </a:r>
+            <a:r>
+              <a:rPr lang="hu-HU" sz="1100" b="0" i="0" u="none" strike="noStrike" cap="none" dirty="0" err="1">
                 <a:solidFill>
                   <a:srgbClr val="000000"/>
                 </a:solidFill>
@@ -3790,10 +3756,10 @@
                 <a:cs typeface="Arial"/>
                 <a:sym typeface="Arial"/>
               </a:rPr>
-              <a:t>-t, </a:t>
-            </a:r>
-            <a:r>
-              <a:rPr lang="hu-HU" sz="1100" b="0" i="0" u="none" strike="noStrike" cap="none" dirty="0" err="1">
+              <a:t>controllerek</a:t>
+            </a:r>
+            <a:r>
+              <a:rPr lang="hu-HU" sz="1100" b="0" i="0" u="none" strike="noStrike" cap="none" dirty="0">
                 <a:solidFill>
                   <a:srgbClr val="000000"/>
                 </a:solidFill>
@@ -3803,8 +3769,11 @@
                 <a:cs typeface="Arial"/>
                 <a:sym typeface="Arial"/>
               </a:rPr>
-              <a:t>autentikációt</a:t>
-            </a:r>
+              <a:t> végzik a validációt, jogosultság-ellenőrzést, majd kezelik az üzleti folyamatokat.</a:t>
+            </a:r>
+            <a:br>
+              <a:rPr lang="hu-HU" dirty="0"/>
+            </a:br>
             <a:r>
               <a:rPr lang="hu-HU" sz="1100" b="0" i="0" u="none" strike="noStrike" cap="none" dirty="0">
                 <a:solidFill>
@@ -3816,7 +3785,7 @@
                 <a:cs typeface="Arial"/>
                 <a:sym typeface="Arial"/>
               </a:rPr>
-              <a:t> és rendszer szintű működést biztosítja.</a:t>
+              <a:t>A modellek és az ORM az adatbázis-műveleteket és relációkat biztosítják.</a:t>
             </a:r>
             <a:br>
               <a:rPr lang="hu-HU" dirty="0"/>
@@ -3832,7 +3801,75 @@
                 <a:cs typeface="Arial"/>
                 <a:sym typeface="Arial"/>
               </a:rPr>
-              <a:t>Ez a struktúra átlátható, jól bővíthető és stabil működést ad.</a:t>
+              <a:t>A </a:t>
+            </a:r>
+            <a:r>
+              <a:rPr lang="hu-HU" sz="1100" b="0" i="0" u="none" strike="noStrike" cap="none" dirty="0" err="1">
+                <a:solidFill>
+                  <a:srgbClr val="000000"/>
+                </a:solidFill>
+                <a:effectLst/>
+                <a:latin typeface="Arial"/>
+                <a:ea typeface="Arial"/>
+                <a:cs typeface="Arial"/>
+                <a:sym typeface="Arial"/>
+              </a:rPr>
+              <a:t>middleware</a:t>
+            </a:r>
+            <a:r>
+              <a:rPr lang="hu-HU" sz="1100" b="0" i="0" u="none" strike="noStrike" cap="none" dirty="0">
+                <a:solidFill>
+                  <a:srgbClr val="000000"/>
+                </a:solidFill>
+                <a:effectLst/>
+                <a:latin typeface="Arial"/>
+                <a:ea typeface="Arial"/>
+                <a:cs typeface="Arial"/>
+                <a:sym typeface="Arial"/>
+              </a:rPr>
+              <a:t> és az </a:t>
+            </a:r>
+            <a:r>
+              <a:rPr lang="hu-HU" sz="1100" b="0" i="0" u="none" strike="noStrike" cap="none" dirty="0" err="1">
+                <a:solidFill>
+                  <a:srgbClr val="000000"/>
+                </a:solidFill>
+                <a:effectLst/>
+                <a:latin typeface="Arial"/>
+                <a:ea typeface="Arial"/>
+                <a:cs typeface="Arial"/>
+                <a:sym typeface="Arial"/>
+              </a:rPr>
+              <a:t>autentikációs</a:t>
+            </a:r>
+            <a:r>
+              <a:rPr lang="hu-HU" sz="1100" b="0" i="0" u="none" strike="noStrike" cap="none" dirty="0">
+                <a:solidFill>
+                  <a:srgbClr val="000000"/>
+                </a:solidFill>
+                <a:effectLst/>
+                <a:latin typeface="Arial"/>
+                <a:ea typeface="Arial"/>
+                <a:cs typeface="Arial"/>
+                <a:sym typeface="Arial"/>
+              </a:rPr>
+              <a:t> réteg a biztonságos, szerepköralapú hozzáférést adja.</a:t>
+            </a:r>
+            <a:br>
+              <a:rPr lang="hu-HU" dirty="0"/>
+            </a:br>
+            <a:r>
+              <a:rPr lang="hu-HU" sz="1100" b="0" i="0" u="none" strike="noStrike" cap="none" dirty="0">
+                <a:solidFill>
+                  <a:srgbClr val="000000"/>
+                </a:solidFill>
+                <a:effectLst/>
+                <a:latin typeface="Arial"/>
+                <a:ea typeface="Arial"/>
+                <a:cs typeface="Arial"/>
+                <a:sym typeface="Arial"/>
+              </a:rPr>
+              <a:t>Ez a struktúra jól skálázható, átlátható és könnyen tesztelhető.</a:t>
             </a:r>
             <a:endParaRPr dirty="0"/>
           </a:p>
@@ -3976,7 +4013,7 @@
                 <a:cs typeface="Arial"/>
                 <a:sym typeface="Arial"/>
               </a:rPr>
-              <a:t>A kontrollerek a backend belépési pontjai.</a:t>
+              <a:t>A rendszerünkben a kontrollerek az API végpontok belépési pontjai.</a:t>
             </a:r>
             <a:br>
               <a:rPr lang="hu-HU" dirty="0"/>
@@ -3992,13 +4029,10 @@
                 <a:cs typeface="Arial"/>
                 <a:sym typeface="Arial"/>
               </a:rPr>
-              <a:t>Itt érkeznek be az API kérések, itt történik az adatok ellenőrzése, majd a kérés továbbadása az üzleti logikának.</a:t>
-            </a:r>
-            <a:br>
-              <a:rPr lang="hu-HU" dirty="0"/>
-            </a:br>
-            <a:r>
-              <a:rPr lang="hu-HU" sz="1100" b="0" i="0" u="none" strike="noStrike" cap="none" dirty="0">
+              <a:t>Itt történik a bejövő kérések fogadása, az adatok </a:t>
+            </a:r>
+            <a:r>
+              <a:rPr lang="hu-HU" sz="1100" b="0" i="0" u="none" strike="noStrike" cap="none" dirty="0" err="1">
                 <a:solidFill>
                   <a:srgbClr val="000000"/>
                 </a:solidFill>
@@ -4008,11 +4042,8 @@
                 <a:cs typeface="Arial"/>
                 <a:sym typeface="Arial"/>
               </a:rPr>
-              <a:t>A kontrollerek feladata az is, hogy egységes, jól kezelhető JSON válaszokat adjanak a frontendnek.</a:t>
-            </a:r>
-            <a:br>
-              <a:rPr lang="hu-HU" dirty="0"/>
-            </a:br>
+              <a:t>validálása</a:t>
+            </a:r>
             <a:r>
               <a:rPr lang="hu-HU" sz="1100" b="0" i="0" u="none" strike="noStrike" cap="none" dirty="0">
                 <a:solidFill>
@@ -4024,7 +4055,107 @@
                 <a:cs typeface="Arial"/>
                 <a:sym typeface="Arial"/>
               </a:rPr>
-              <a:t>Mivel a rendszer szerepkör-alapú, a kontrollerek figyelembe veszik, hogy diák, tanár vagy adminisztrátor használja a funkciót.</a:t>
+              <a:t>, valamint a jogosultság ellenőrzése.</a:t>
+            </a:r>
+            <a:br>
+              <a:rPr lang="hu-HU" dirty="0"/>
+            </a:br>
+            <a:r>
+              <a:rPr lang="hu-HU" sz="1100" b="0" i="0" u="none" strike="noStrike" cap="none" dirty="0">
+                <a:solidFill>
+                  <a:srgbClr val="000000"/>
+                </a:solidFill>
+                <a:effectLst/>
+                <a:latin typeface="Arial"/>
+                <a:ea typeface="Arial"/>
+                <a:cs typeface="Arial"/>
+                <a:sym typeface="Arial"/>
+              </a:rPr>
+              <a:t>A kontrollerek ezután a megfelelő üzleti logikát hívják meg, és egységes JSON válaszstruktúrát adnak vissza a frontendnek.</a:t>
+            </a:r>
+            <a:br>
+              <a:rPr lang="hu-HU" dirty="0"/>
+            </a:br>
+            <a:r>
+              <a:rPr lang="hu-HU" sz="1100" b="0" i="0" u="none" strike="noStrike" cap="none" dirty="0">
+                <a:solidFill>
+                  <a:srgbClr val="000000"/>
+                </a:solidFill>
+                <a:effectLst/>
+                <a:latin typeface="Arial"/>
+                <a:ea typeface="Arial"/>
+                <a:cs typeface="Arial"/>
+                <a:sym typeface="Arial"/>
+              </a:rPr>
+              <a:t>Mivel a rendszer szerepköralapú, ugyanaz a végpont eltérően viselkedhet </a:t>
+            </a:r>
+            <a:r>
+              <a:rPr lang="hu-HU" sz="1100" b="0" i="0" u="none" strike="noStrike" cap="none" dirty="0" err="1">
+                <a:solidFill>
+                  <a:srgbClr val="000000"/>
+                </a:solidFill>
+                <a:effectLst/>
+                <a:latin typeface="Arial"/>
+                <a:ea typeface="Arial"/>
+                <a:cs typeface="Arial"/>
+                <a:sym typeface="Arial"/>
+              </a:rPr>
+              <a:t>admin</a:t>
+            </a:r>
+            <a:r>
+              <a:rPr lang="hu-HU" sz="1100" b="0" i="0" u="none" strike="noStrike" cap="none" dirty="0">
+                <a:solidFill>
+                  <a:srgbClr val="000000"/>
+                </a:solidFill>
+                <a:effectLst/>
+                <a:latin typeface="Arial"/>
+                <a:ea typeface="Arial"/>
+                <a:cs typeface="Arial"/>
+                <a:sym typeface="Arial"/>
+              </a:rPr>
+              <a:t>, tanár vagy diák felhasználó esetén.</a:t>
+            </a:r>
+            <a:br>
+              <a:rPr lang="hu-HU" dirty="0"/>
+            </a:br>
+            <a:r>
+              <a:rPr lang="hu-HU" sz="1100" b="0" i="0" u="none" strike="noStrike" cap="none" dirty="0">
+                <a:solidFill>
+                  <a:srgbClr val="000000"/>
+                </a:solidFill>
+                <a:effectLst/>
+                <a:latin typeface="Arial"/>
+                <a:ea typeface="Arial"/>
+                <a:cs typeface="Arial"/>
+                <a:sym typeface="Arial"/>
+              </a:rPr>
+              <a:t>A </a:t>
+            </a:r>
+            <a:r>
+              <a:rPr lang="hu-HU" sz="1100" b="0" i="0" u="none" strike="noStrike" cap="none" dirty="0" err="1">
+                <a:solidFill>
+                  <a:srgbClr val="000000"/>
+                </a:solidFill>
+                <a:effectLst/>
+                <a:latin typeface="Arial"/>
+                <a:ea typeface="Arial"/>
+                <a:cs typeface="Arial"/>
+                <a:sym typeface="Arial"/>
+              </a:rPr>
+              <a:t>controller</a:t>
+            </a:r>
+            <a:r>
+              <a:rPr lang="hu-HU" sz="1100" b="0" i="0" u="none" strike="noStrike" cap="none" dirty="0">
+                <a:solidFill>
+                  <a:srgbClr val="000000"/>
+                </a:solidFill>
+                <a:effectLst/>
+                <a:latin typeface="Arial"/>
+                <a:ea typeface="Arial"/>
+                <a:cs typeface="Arial"/>
+                <a:sym typeface="Arial"/>
+              </a:rPr>
+              <a:t> réteg így egyszerre biztosít átláthatóságot, biztonságot és jól szervezett kéréskezelést.</a:t>
             </a:r>
             <a:endParaRPr dirty="0"/>
           </a:p>
@@ -4545,7 +4676,7 @@
                 <a:cs typeface="Arial"/>
                 <a:sym typeface="Arial"/>
               </a:rPr>
-              <a:t>A fő adatok külön táblákban vannak, és ezek kapcsolatban állnak egymással idegen kulcsokon keresztül.</a:t>
+              <a:t>A fő entitásokat külön táblákban kezeljük, például felhasználók, intézmények, osztályok, események, kommentek és szavazások.</a:t>
             </a:r>
             <a:br>
               <a:rPr lang="hu-HU" dirty="0"/>
@@ -4561,7 +4692,81 @@
                 <a:cs typeface="Arial"/>
                 <a:sym typeface="Arial"/>
               </a:rPr>
-              <a:t>Így az adatbázis jól szervezett, bővíthető és megbízható.</a:t>
+              <a:t>A táblák idegen kulcsokkal kapcsolódnak egymáshoz, így biztosított az adatok közötti konzisztens kapcsolat.</a:t>
+            </a:r>
+            <a:br>
+              <a:rPr lang="hu-HU" dirty="0"/>
+            </a:br>
+            <a:r>
+              <a:rPr lang="hu-HU" sz="1100" b="0" i="0" u="none" strike="noStrike" cap="none" dirty="0">
+                <a:solidFill>
+                  <a:srgbClr val="000000"/>
+                </a:solidFill>
+                <a:effectLst/>
+                <a:latin typeface="Arial"/>
+                <a:ea typeface="Arial"/>
+                <a:cs typeface="Arial"/>
+                <a:sym typeface="Arial"/>
+              </a:rPr>
+              <a:t>Ez azért fontos, mert így pontosan lekövethető, hogy egy felhasználó melyik intézményhez tartozik, egy eseményhez kik kapcsolódnak, és egy szavazáshoz milyen opciók és válaszok tartoznak.</a:t>
+            </a:r>
+            <a:br>
+              <a:rPr lang="hu-HU" dirty="0"/>
+            </a:br>
+            <a:r>
+              <a:rPr lang="hu-HU" sz="1100" b="0" i="0" u="none" strike="noStrike" cap="none" dirty="0">
+                <a:solidFill>
+                  <a:srgbClr val="000000"/>
+                </a:solidFill>
+                <a:effectLst/>
+                <a:latin typeface="Arial"/>
+                <a:ea typeface="Arial"/>
+                <a:cs typeface="Arial"/>
+                <a:sym typeface="Arial"/>
+              </a:rPr>
+              <a:t>A normalizált szerkezet csökkenti az </a:t>
+            </a:r>
+            <a:r>
+              <a:rPr lang="hu-HU" sz="1100" b="0" i="0" u="none" strike="noStrike" cap="none" dirty="0" err="1">
+                <a:solidFill>
+                  <a:srgbClr val="000000"/>
+                </a:solidFill>
+                <a:effectLst/>
+                <a:latin typeface="Arial"/>
+                <a:ea typeface="Arial"/>
+                <a:cs typeface="Arial"/>
+                <a:sym typeface="Arial"/>
+              </a:rPr>
+              <a:t>adatduplikációt</a:t>
+            </a:r>
+            <a:r>
+              <a:rPr lang="hu-HU" sz="1100" b="0" i="0" u="none" strike="noStrike" cap="none" dirty="0">
+                <a:solidFill>
+                  <a:srgbClr val="000000"/>
+                </a:solidFill>
+                <a:effectLst/>
+                <a:latin typeface="Arial"/>
+                <a:ea typeface="Arial"/>
+                <a:cs typeface="Arial"/>
+                <a:sym typeface="Arial"/>
+              </a:rPr>
+              <a:t>, és megkönnyíti a bővítést, például új szerepkörök vagy új eseménytípusok bevezetését.</a:t>
+            </a:r>
+            <a:br>
+              <a:rPr lang="hu-HU" dirty="0"/>
+            </a:br>
+            <a:r>
+              <a:rPr lang="hu-HU" sz="1100" b="0" i="0" u="none" strike="noStrike" cap="none" dirty="0">
+                <a:solidFill>
+                  <a:srgbClr val="000000"/>
+                </a:solidFill>
+                <a:effectLst/>
+                <a:latin typeface="Arial"/>
+                <a:ea typeface="Arial"/>
+                <a:cs typeface="Arial"/>
+                <a:sym typeface="Arial"/>
+              </a:rPr>
+              <a:t>Összességében ez az adatmodell stabil alapot ad a backend logikának és a megbízható API működésnek.</a:t>
             </a:r>
             <a:endParaRPr dirty="0"/>
           </a:p>

--- a/dokumentumok/Prezentáció_NagyLevedSamuel_TothTamas.pptx
+++ b/dokumentumok/Prezentáció_NagyLevedSamuel_TothTamas.pptx
@@ -274,7 +274,7 @@
       <p15:sldGuideLst xmlns:p15="http://schemas.microsoft.com/office/powerpoint/2012/main"/>
     </p:ext>
     <p:ext uri="GoogleSlidesCustomDataVersion2">
-      <go:slidesCustomData xmlns:go="http://customooxmlschemas.google.com/" xmlns:ahyp="http://schemas.microsoft.com/office/drawing/2018/hyperlinkcolor" xmlns:p15="http://schemas.microsoft.com/office/powerpoint/2012/main" xmlns:p14="http://schemas.microsoft.com/office/powerpoint/2010/main" xmlns:com="http://schemas.openxmlformats.org/drawingml/2006/compatibility" xmlns:pvml="urn:schemas-microsoft-com:office:powerpoint" xmlns:v="urn:schemas-microsoft-com:vml" xmlns:o="urn:schemas-microsoft-com:office:office" xmlns:dgm="http://schemas.openxmlformats.org/drawingml/2006/diagram" xmlns:c="http://schemas.openxmlformats.org/drawingml/2006/chart" xmlns:mv="urn:schemas-microsoft-com:mac:vml" xmlns:mc="http://schemas.openxmlformats.org/markup-compatibility/2006" xmlns="" r:id="rId24" roundtripDataSignature="AMtx7mj67VHAuCHlscAUacmt/Mbt/wFFlA=="/>
+      <go:slidesCustomData xmlns="" xmlns:mc="http://schemas.openxmlformats.org/markup-compatibility/2006" xmlns:mv="urn:schemas-microsoft-com:mac:vml" xmlns:c="http://schemas.openxmlformats.org/drawingml/2006/chart" xmlns:dgm="http://schemas.openxmlformats.org/drawingml/2006/diagram" xmlns:o="urn:schemas-microsoft-com:office:office" xmlns:v="urn:schemas-microsoft-com:vml" xmlns:pvml="urn:schemas-microsoft-com:office:powerpoint" xmlns:com="http://schemas.openxmlformats.org/drawingml/2006/compatibility" xmlns:p14="http://schemas.microsoft.com/office/powerpoint/2010/main" xmlns:p15="http://schemas.microsoft.com/office/powerpoint/2012/main" xmlns:ahyp="http://schemas.microsoft.com/office/drawing/2018/hyperlinkcolor" xmlns:go="http://customooxmlschemas.google.com/" r:id="rId24" roundtripDataSignature="AMtx7mj67VHAuCHlscAUacmt/Mbt/wFFlA=="/>
     </p:ext>
   </p:extLst>
 </p:presentation>
@@ -3785,7 +3785,60 @@
                 <a:cs typeface="Arial"/>
                 <a:sym typeface="Arial"/>
               </a:rPr>
-              <a:t>A modellek és az ORM az adatbázis-műveleteket és relációkat biztosítják.</a:t>
+              <a:t>A modellek és az </a:t>
+            </a:r>
+            <a:r>
+              <a:rPr lang="hu-HU" sz="1100" b="0" i="0" u="none" strike="noStrike" cap="none">
+                <a:solidFill>
+                  <a:srgbClr val="000000"/>
+                </a:solidFill>
+                <a:effectLst/>
+                <a:latin typeface="Arial"/>
+                <a:ea typeface="Arial"/>
+                <a:cs typeface="Arial"/>
+                <a:sym typeface="Arial"/>
+              </a:rPr>
+              <a:t>ORM (azaz </a:t>
+            </a:r>
+            <a:r>
+              <a:rPr lang="hu-HU" sz="1100" b="0" i="0" u="sng" strike="noStrike" cap="none">
+                <a:solidFill>
+                  <a:srgbClr val="000000"/>
+                </a:solidFill>
+                <a:effectLst/>
+                <a:latin typeface="Arial"/>
+                <a:ea typeface="Arial"/>
+                <a:cs typeface="Arial"/>
+                <a:sym typeface="Arial"/>
+                <a:hlinkClick r:id="rId3"/>
+              </a:rPr>
+              <a:t>objektum-relációs leképezés</a:t>
+            </a:r>
+            <a:r>
+              <a:rPr lang="hu-HU" sz="1100" b="0" i="0" u="none" strike="noStrike" cap="none">
+                <a:solidFill>
+                  <a:srgbClr val="000000"/>
+                </a:solidFill>
+                <a:effectLst/>
+                <a:latin typeface="Arial"/>
+                <a:ea typeface="Arial"/>
+                <a:cs typeface="Arial"/>
+                <a:sym typeface="Arial"/>
+              </a:rPr>
+              <a:t> egy olyan programozási technika, amely lehetővé teszi a fejlesztők számára, hogy az objektumorientált kódban használt objektumokat közvetlenül relációs adatbázisokba) az </a:t>
+            </a:r>
+            <a:r>
+              <a:rPr lang="hu-HU" sz="1100" b="0" i="0" u="none" strike="noStrike" cap="none" dirty="0">
+                <a:solidFill>
+                  <a:srgbClr val="000000"/>
+                </a:solidFill>
+                <a:effectLst/>
+                <a:latin typeface="Arial"/>
+                <a:ea typeface="Arial"/>
+                <a:cs typeface="Arial"/>
+                <a:sym typeface="Arial"/>
+              </a:rPr>
+              <a:t>adatbázis-műveleteket és relációkat biztosítják.</a:t>
             </a:r>
             <a:br>
               <a:rPr lang="hu-HU" dirty="0"/>

--- a/dokumentumok/Prezentáció_NagyLevedSamuel_TothTamas.pptx
+++ b/dokumentumok/Prezentáció_NagyLevedSamuel_TothTamas.pptx
@@ -274,7 +274,7 @@
       <p15:sldGuideLst xmlns:p15="http://schemas.microsoft.com/office/powerpoint/2012/main"/>
     </p:ext>
     <p:ext uri="GoogleSlidesCustomDataVersion2">
-      <go:slidesCustomData xmlns="" xmlns:mc="http://schemas.openxmlformats.org/markup-compatibility/2006" xmlns:mv="urn:schemas-microsoft-com:mac:vml" xmlns:c="http://schemas.openxmlformats.org/drawingml/2006/chart" xmlns:dgm="http://schemas.openxmlformats.org/drawingml/2006/diagram" xmlns:o="urn:schemas-microsoft-com:office:office" xmlns:v="urn:schemas-microsoft-com:vml" xmlns:pvml="urn:schemas-microsoft-com:office:powerpoint" xmlns:com="http://schemas.openxmlformats.org/drawingml/2006/compatibility" xmlns:p14="http://schemas.microsoft.com/office/powerpoint/2010/main" xmlns:p15="http://schemas.microsoft.com/office/powerpoint/2012/main" xmlns:ahyp="http://schemas.microsoft.com/office/drawing/2018/hyperlinkcolor" xmlns:go="http://customooxmlschemas.google.com/" r:id="rId24" roundtripDataSignature="AMtx7mj67VHAuCHlscAUacmt/Mbt/wFFlA=="/>
+      <go:slidesCustomData xmlns:go="http://customooxmlschemas.google.com/" xmlns:ahyp="http://schemas.microsoft.com/office/drawing/2018/hyperlinkcolor" xmlns:p15="http://schemas.microsoft.com/office/powerpoint/2012/main" xmlns:p14="http://schemas.microsoft.com/office/powerpoint/2010/main" xmlns:com="http://schemas.openxmlformats.org/drawingml/2006/compatibility" xmlns:pvml="urn:schemas-microsoft-com:office:powerpoint" xmlns:v="urn:schemas-microsoft-com:vml" xmlns:o="urn:schemas-microsoft-com:office:office" xmlns:dgm="http://schemas.openxmlformats.org/drawingml/2006/diagram" xmlns:c="http://schemas.openxmlformats.org/drawingml/2006/chart" xmlns:mv="urn:schemas-microsoft-com:mac:vml" xmlns:mc="http://schemas.openxmlformats.org/markup-compatibility/2006" xmlns="" r:id="rId24" roundtripDataSignature="AMtx7mj67VHAuCHlscAUacmt/Mbt/wFFlA=="/>
     </p:ext>
   </p:extLst>
 </p:presentation>
@@ -1680,6 +1680,83 @@
               </a:rPr>
               <a:t>Ennek köszönhetően mindkettőnk pontosan látta a saját feladatait, és a munka jól szervezetten, párhuzamosan tudott haladni.</a:t>
             </a:r>
+          </a:p>
+          <a:p>
+            <a:pPr marL="0" lvl="0" indent="0" algn="l" rtl="0">
+              <a:spcBef>
+                <a:spcPts val="0"/>
+              </a:spcBef>
+              <a:spcAft>
+                <a:spcPts val="0"/>
+              </a:spcAft>
+              <a:buNone/>
+            </a:pPr>
+            <a:r>
+              <a:rPr lang="hu-HU" sz="1100" b="0" i="0" u="none" strike="noStrike" cap="none" dirty="0">
+                <a:solidFill>
+                  <a:srgbClr val="000000"/>
+                </a:solidFill>
+                <a:effectLst/>
+                <a:latin typeface="Arial"/>
+                <a:cs typeface="Arial"/>
+                <a:sym typeface="Arial"/>
+              </a:rPr>
+              <a:t>Ugyebár ketten dolgoztunk a projekten </a:t>
+            </a:r>
+            <a:r>
+              <a:rPr lang="hu-HU" sz="1100" b="0" i="0" u="none" strike="noStrike" cap="none" dirty="0" err="1">
+                <a:solidFill>
+                  <a:srgbClr val="000000"/>
+                </a:solidFill>
+                <a:effectLst/>
+                <a:latin typeface="Arial"/>
+                <a:cs typeface="Arial"/>
+                <a:sym typeface="Arial"/>
+              </a:rPr>
+              <a:t>Githubon</a:t>
+            </a:r>
+            <a:r>
+              <a:rPr lang="hu-HU" sz="1100" b="0" i="0" u="none" strike="noStrike" cap="none" dirty="0">
+                <a:solidFill>
+                  <a:srgbClr val="000000"/>
+                </a:solidFill>
+                <a:effectLst/>
+                <a:latin typeface="Arial"/>
+                <a:cs typeface="Arial"/>
+                <a:sym typeface="Arial"/>
+              </a:rPr>
+              <a:t> keresztül együttműködve. Míg Tomi a backendet fejlesztette, én a frontendet fejlesztettem.</a:t>
+            </a:r>
+          </a:p>
+          <a:p>
+            <a:pPr marL="0" lvl="0" indent="0" algn="l" rtl="0">
+              <a:spcBef>
+                <a:spcPts val="0"/>
+              </a:spcBef>
+              <a:spcAft>
+                <a:spcPts val="0"/>
+              </a:spcAft>
+              <a:buNone/>
+            </a:pPr>
+            <a:r>
+              <a:rPr lang="hu-HU" dirty="0"/>
+              <a:t>A projekt során arra törekedtünk, hogy a feladatokat egyenlő részekre osszuk, biztosítva ezzel az igazságos munkamegosztást.</a:t>
+            </a:r>
+          </a:p>
+          <a:p>
+            <a:pPr marL="0" lvl="0" indent="0" algn="l" rtl="0">
+              <a:spcBef>
+                <a:spcPts val="0"/>
+              </a:spcBef>
+              <a:spcAft>
+                <a:spcPts val="0"/>
+              </a:spcAft>
+              <a:buNone/>
+            </a:pPr>
+            <a:r>
+              <a:rPr lang="hu-HU" dirty="0"/>
+              <a:t>Úgy érezzük, hogy ezt végig sikerült tartanunk, és a munka az egész folyamat alatt jó hangulatban és összhangban zajlott.</a:t>
+            </a:r>
             <a:endParaRPr dirty="0"/>
           </a:p>
         </p:txBody>
@@ -2029,6 +2106,23 @@
               <a:rPr lang="hu-HU" dirty="0"/>
               <a:t>Samu:</a:t>
             </a:r>
+          </a:p>
+          <a:p>
+            <a:pPr marL="158750" indent="0" rtl="0">
+              <a:buNone/>
+            </a:pPr>
+            <a:r>
+              <a:rPr lang="hu-HU" dirty="0"/>
+              <a:t>--</a:t>
+            </a:r>
+            <a:r>
+              <a:rPr lang="hu-HU" dirty="0" err="1"/>
+              <a:t>MainPage</a:t>
+            </a:r>
+            <a:r>
+              <a:rPr lang="hu-HU" dirty="0"/>
+              <a:t>--</a:t>
+            </a:r>
             <a:br>
               <a:rPr lang="hu-HU" dirty="0"/>
             </a:br>
@@ -2069,27 +2163,6 @@
                 <a:sym typeface="Arial"/>
               </a:rPr>
               <a:t>From here, users can navigate to the registration or login pages.</a:t>
-            </a:r>
-            <a:endParaRPr lang="en-US" b="0" dirty="0">
-              <a:effectLst/>
-            </a:endParaRPr>
-          </a:p>
-          <a:p>
-            <a:pPr marL="158750" indent="0" rtl="0">
-              <a:buNone/>
-            </a:pPr>
-            <a:r>
-              <a:rPr lang="en-US" sz="1100" b="0" i="0" u="none" strike="noStrike" cap="none" dirty="0">
-                <a:solidFill>
-                  <a:srgbClr val="000000"/>
-                </a:solidFill>
-                <a:effectLst/>
-                <a:latin typeface="Arial"/>
-                <a:ea typeface="Arial"/>
-                <a:cs typeface="Arial"/>
-                <a:sym typeface="Arial"/>
-              </a:rPr>
-              <a:t>To create an account, users are required to enter their name, email address, and password. After confirming their email address, they must log in to proceed to the dashboard.</a:t>
             </a:r>
             <a:endParaRPr lang="hu-HU" sz="1100" b="0" i="0" u="none" strike="noStrike" cap="none" dirty="0">
               <a:solidFill>
@@ -2106,129 +2179,6 @@
             <a:pPr marL="158750" indent="0" rtl="0">
               <a:buNone/>
             </a:pPr>
-            <a:endParaRPr lang="en-US" b="0" dirty="0">
-              <a:effectLst/>
-            </a:endParaRPr>
-          </a:p>
-          <a:p>
-            <a:pPr marL="158750" indent="0" rtl="0">
-              <a:buNone/>
-            </a:pPr>
-            <a:r>
-              <a:rPr lang="en-US" sz="1100" b="0" i="0" u="none" strike="noStrike" cap="none" dirty="0">
-                <a:solidFill>
-                  <a:srgbClr val="000000"/>
-                </a:solidFill>
-                <a:effectLst/>
-                <a:latin typeface="Arial"/>
-                <a:ea typeface="Arial"/>
-                <a:cs typeface="Arial"/>
-                <a:sym typeface="Arial"/>
-              </a:rPr>
-              <a:t>On the dashboard, users select their role (student, teacher, or administrator), then choose their location and school.</a:t>
-            </a:r>
-            <a:endParaRPr lang="en-US" b="0" dirty="0">
-              <a:effectLst/>
-            </a:endParaRPr>
-          </a:p>
-          <a:p>
-            <a:pPr marL="158750" indent="0" rtl="0">
-              <a:buNone/>
-            </a:pPr>
-            <a:r>
-              <a:rPr lang="en-US" sz="1100" b="0" i="0" u="none" strike="noStrike" cap="none" dirty="0">
-                <a:solidFill>
-                  <a:srgbClr val="000000"/>
-                </a:solidFill>
-                <a:effectLst/>
-                <a:latin typeface="Arial"/>
-                <a:ea typeface="Arial"/>
-                <a:cs typeface="Arial"/>
-                <a:sym typeface="Arial"/>
-              </a:rPr>
-              <a:t>Students and teachers can apply to an existing institution, while administrators also have the option to register a new one.</a:t>
-            </a:r>
-            <a:br>
-              <a:rPr lang="en-US" b="0" dirty="0">
-                <a:effectLst/>
-              </a:rPr>
-            </a:br>
-            <a:endParaRPr lang="en-US" b="0" dirty="0">
-              <a:effectLst/>
-            </a:endParaRPr>
-          </a:p>
-          <a:p>
-            <a:pPr marL="158750" indent="0" rtl="0">
-              <a:buNone/>
-            </a:pPr>
-            <a:r>
-              <a:rPr lang="hu-HU" sz="1100" b="0" i="0" u="none" strike="noStrike" cap="none" dirty="0">
-                <a:solidFill>
-                  <a:srgbClr val="000000"/>
-                </a:solidFill>
-                <a:effectLst/>
-                <a:latin typeface="Arial"/>
-                <a:ea typeface="Arial"/>
-                <a:cs typeface="Arial"/>
-                <a:sym typeface="Arial"/>
-              </a:rPr>
-              <a:t>F</a:t>
-            </a:r>
-            <a:r>
-              <a:rPr lang="en-US" sz="1100" b="0" i="0" u="none" strike="noStrike" cap="none" dirty="0">
-                <a:solidFill>
-                  <a:srgbClr val="000000"/>
-                </a:solidFill>
-                <a:effectLst/>
-                <a:latin typeface="Arial"/>
-                <a:ea typeface="Arial"/>
-                <a:cs typeface="Arial"/>
-                <a:sym typeface="Arial"/>
-              </a:rPr>
-              <a:t>or today’s demo, we continue with a pre-created sample administrator account to demonstrate the workflow.</a:t>
-            </a:r>
-            <a:endParaRPr lang="en-US" b="0" dirty="0">
-              <a:effectLst/>
-            </a:endParaRPr>
-          </a:p>
-          <a:p>
-            <a:pPr marL="158750" indent="0" rtl="0">
-              <a:buNone/>
-            </a:pPr>
-            <a:r>
-              <a:rPr lang="en-US" sz="1100" b="0" i="0" u="none" strike="noStrike" cap="none" dirty="0">
-                <a:solidFill>
-                  <a:srgbClr val="000000"/>
-                </a:solidFill>
-                <a:effectLst/>
-                <a:latin typeface="Arial"/>
-                <a:ea typeface="Arial"/>
-                <a:cs typeface="Arial"/>
-                <a:sym typeface="Arial"/>
-              </a:rPr>
-              <a:t>After logging in, we can see how the administrator manages incoming requests and assigns users to classes.</a:t>
-            </a:r>
-            <a:endParaRPr lang="en-US" b="0" dirty="0">
-              <a:effectLst/>
-            </a:endParaRPr>
-          </a:p>
-          <a:p>
-            <a:pPr marL="158750" indent="0" rtl="0">
-              <a:buNone/>
-            </a:pPr>
-            <a:r>
-              <a:rPr lang="en-US" sz="1100" b="0" i="0" u="none" strike="noStrike" cap="none" dirty="0">
-                <a:solidFill>
-                  <a:srgbClr val="000000"/>
-                </a:solidFill>
-                <a:effectLst/>
-                <a:latin typeface="Arial"/>
-                <a:ea typeface="Arial"/>
-                <a:cs typeface="Arial"/>
-                <a:sym typeface="Arial"/>
-              </a:rPr>
-              <a:t>Once the requests are approved, the platform’s main features become accessible.</a:t>
-            </a:r>
             <a:endParaRPr lang="hu-HU" sz="1100" b="0" i="0" u="none" strike="noStrike" cap="none" dirty="0">
               <a:solidFill>
                 <a:srgbClr val="000000"/>
@@ -2244,12 +2194,495 @@
             <a:pPr marL="158750" indent="0" rtl="0">
               <a:buNone/>
             </a:pPr>
+            <a:r>
+              <a:rPr lang="hu-HU" sz="1100" b="0" i="0" u="none" strike="noStrike" cap="none" dirty="0">
+                <a:solidFill>
+                  <a:srgbClr val="000000"/>
+                </a:solidFill>
+                <a:effectLst/>
+                <a:latin typeface="Arial"/>
+                <a:cs typeface="Arial"/>
+                <a:sym typeface="Arial"/>
+              </a:rPr>
+              <a:t>--</a:t>
+            </a:r>
+            <a:r>
+              <a:rPr lang="hu-HU" sz="1100" b="0" i="0" u="none" strike="noStrike" cap="none" dirty="0" err="1">
+                <a:solidFill>
+                  <a:srgbClr val="000000"/>
+                </a:solidFill>
+                <a:effectLst/>
+                <a:latin typeface="Arial"/>
+                <a:cs typeface="Arial"/>
+                <a:sym typeface="Arial"/>
+              </a:rPr>
+              <a:t>Registrate</a:t>
+            </a:r>
+            <a:r>
+              <a:rPr lang="hu-HU" sz="1100" b="0" i="0" u="none" strike="noStrike" cap="none" dirty="0">
+                <a:solidFill>
+                  <a:srgbClr val="000000"/>
+                </a:solidFill>
+                <a:effectLst/>
+                <a:latin typeface="Arial"/>
+                <a:cs typeface="Arial"/>
+                <a:sym typeface="Arial"/>
+              </a:rPr>
+              <a:t>--</a:t>
+            </a:r>
+            <a:endParaRPr lang="en-US" b="0" dirty="0">
+              <a:effectLst/>
+            </a:endParaRPr>
+          </a:p>
+          <a:p>
+            <a:pPr marL="158750" indent="0" rtl="0">
+              <a:buNone/>
+            </a:pPr>
+            <a:r>
+              <a:rPr lang="en-US" sz="1100" b="0" i="0" u="none" strike="noStrike" cap="none" dirty="0">
+                <a:solidFill>
+                  <a:srgbClr val="000000"/>
+                </a:solidFill>
+                <a:effectLst/>
+                <a:latin typeface="Arial"/>
+                <a:ea typeface="Arial"/>
+                <a:cs typeface="Arial"/>
+                <a:sym typeface="Arial"/>
+              </a:rPr>
+              <a:t>To create an account, users are required to enter their name, email address, and password. </a:t>
+            </a:r>
             <a:endParaRPr lang="hu-HU" sz="1100" b="0" i="0" u="none" strike="noStrike" cap="none" dirty="0">
               <a:solidFill>
                 <a:srgbClr val="000000"/>
               </a:solidFill>
               <a:effectLst/>
               <a:latin typeface="Arial"/>
+              <a:ea typeface="Arial"/>
+              <a:cs typeface="Arial"/>
+              <a:sym typeface="Arial"/>
+            </a:endParaRPr>
+          </a:p>
+          <a:p>
+            <a:pPr marL="158750" indent="0" rtl="0">
+              <a:buNone/>
+            </a:pPr>
+            <a:endParaRPr lang="hu-HU" sz="1100" b="0" i="0" u="none" strike="noStrike" cap="none" dirty="0">
+              <a:solidFill>
+                <a:srgbClr val="000000"/>
+              </a:solidFill>
+              <a:effectLst/>
+              <a:latin typeface="Arial"/>
+              <a:ea typeface="Arial"/>
+              <a:cs typeface="Arial"/>
+              <a:sym typeface="Arial"/>
+            </a:endParaRPr>
+          </a:p>
+          <a:p>
+            <a:pPr marL="158750" indent="0" rtl="0">
+              <a:buNone/>
+            </a:pPr>
+            <a:r>
+              <a:rPr lang="hu-HU" sz="1100" b="0" i="0" u="none" strike="noStrike" cap="none" dirty="0">
+                <a:solidFill>
+                  <a:srgbClr val="000000"/>
+                </a:solidFill>
+                <a:effectLst/>
+                <a:latin typeface="Arial"/>
+                <a:ea typeface="Arial"/>
+                <a:cs typeface="Arial"/>
+                <a:sym typeface="Arial"/>
+              </a:rPr>
+              <a:t>--Login--</a:t>
+            </a:r>
+          </a:p>
+          <a:p>
+            <a:pPr marL="158750" indent="0" rtl="0">
+              <a:buNone/>
+            </a:pPr>
+            <a:r>
+              <a:rPr lang="en-US" sz="1100" b="0" i="0" u="none" strike="noStrike" cap="none" dirty="0">
+                <a:solidFill>
+                  <a:srgbClr val="000000"/>
+                </a:solidFill>
+                <a:effectLst/>
+                <a:latin typeface="Arial"/>
+                <a:ea typeface="Arial"/>
+                <a:cs typeface="Arial"/>
+                <a:sym typeface="Arial"/>
+              </a:rPr>
+              <a:t>After confirming their email address, they must log in to proceed to the dashboard.</a:t>
+            </a:r>
+            <a:endParaRPr lang="hu-HU" sz="1100" b="0" i="0" u="none" strike="noStrike" cap="none" dirty="0">
+              <a:solidFill>
+                <a:srgbClr val="000000"/>
+              </a:solidFill>
+              <a:effectLst/>
+              <a:latin typeface="Arial"/>
+              <a:ea typeface="Arial"/>
+              <a:cs typeface="Arial"/>
+              <a:sym typeface="Arial"/>
+            </a:endParaRPr>
+          </a:p>
+          <a:p>
+            <a:pPr marL="158750" indent="0" rtl="0">
+              <a:buNone/>
+            </a:pPr>
+            <a:endParaRPr lang="hu-HU" b="0" dirty="0">
+              <a:effectLst/>
+            </a:endParaRPr>
+          </a:p>
+          <a:p>
+            <a:pPr marL="158750" indent="0" rtl="0">
+              <a:buNone/>
+            </a:pPr>
+            <a:r>
+              <a:rPr lang="hu-HU" b="0" dirty="0">
+                <a:effectLst/>
+              </a:rPr>
+              <a:t>--</a:t>
+            </a:r>
+            <a:r>
+              <a:rPr lang="hu-HU" b="0" dirty="0" err="1">
+                <a:effectLst/>
+              </a:rPr>
+              <a:t>Dashboard</a:t>
+            </a:r>
+            <a:r>
+              <a:rPr lang="hu-HU" b="0" dirty="0">
+                <a:effectLst/>
+              </a:rPr>
+              <a:t>--</a:t>
+            </a:r>
+            <a:endParaRPr lang="en-US" b="0" dirty="0">
+              <a:effectLst/>
+            </a:endParaRPr>
+          </a:p>
+          <a:p>
+            <a:pPr marL="158750" indent="0" rtl="0">
+              <a:buNone/>
+            </a:pPr>
+            <a:r>
+              <a:rPr lang="en-US" sz="1100" b="0" i="0" u="none" strike="noStrike" cap="none" dirty="0">
+                <a:solidFill>
+                  <a:srgbClr val="000000"/>
+                </a:solidFill>
+                <a:effectLst/>
+                <a:latin typeface="Arial"/>
+                <a:ea typeface="Arial"/>
+                <a:cs typeface="Arial"/>
+                <a:sym typeface="Arial"/>
+              </a:rPr>
+              <a:t>On the dashboard, users select their role (student, teacher, or administrator), then choose their location and school.</a:t>
+            </a:r>
+            <a:endParaRPr lang="hu-HU" sz="1100" b="0" i="0" u="none" strike="noStrike" cap="none" dirty="0">
+              <a:solidFill>
+                <a:srgbClr val="000000"/>
+              </a:solidFill>
+              <a:effectLst/>
+              <a:latin typeface="Arial"/>
+              <a:ea typeface="Arial"/>
+              <a:cs typeface="Arial"/>
+              <a:sym typeface="Arial"/>
+            </a:endParaRPr>
+          </a:p>
+          <a:p>
+            <a:pPr marL="158750" indent="0" rtl="0">
+              <a:buNone/>
+            </a:pPr>
+            <a:endParaRPr lang="hu-HU" sz="1100" b="0" i="0" u="none" strike="noStrike" cap="none" dirty="0">
+              <a:solidFill>
+                <a:srgbClr val="000000"/>
+              </a:solidFill>
+              <a:effectLst/>
+              <a:latin typeface="Arial"/>
+              <a:ea typeface="Arial"/>
+              <a:cs typeface="Arial"/>
+              <a:sym typeface="Arial"/>
+            </a:endParaRPr>
+          </a:p>
+          <a:p>
+            <a:pPr marL="158750" indent="0" rtl="0">
+              <a:buNone/>
+            </a:pPr>
+            <a:r>
+              <a:rPr lang="hu-HU" sz="1100" b="0" i="0" u="none" strike="noStrike" cap="none" dirty="0">
+                <a:solidFill>
+                  <a:srgbClr val="000000"/>
+                </a:solidFill>
+                <a:effectLst/>
+                <a:latin typeface="Arial"/>
+                <a:cs typeface="Arial"/>
+                <a:sym typeface="Arial"/>
+              </a:rPr>
+              <a:t>--Kártyák bemutatása</a:t>
+            </a:r>
+            <a:endParaRPr lang="en-US" b="0" dirty="0">
+              <a:effectLst/>
+            </a:endParaRPr>
+          </a:p>
+          <a:p>
+            <a:pPr marL="158750" indent="0" rtl="0">
+              <a:buNone/>
+            </a:pPr>
+            <a:r>
+              <a:rPr lang="en-US" sz="1100" b="0" i="0" u="none" strike="noStrike" cap="none" dirty="0">
+                <a:solidFill>
+                  <a:srgbClr val="000000"/>
+                </a:solidFill>
+                <a:effectLst/>
+                <a:latin typeface="Arial"/>
+                <a:ea typeface="Arial"/>
+                <a:cs typeface="Arial"/>
+                <a:sym typeface="Arial"/>
+              </a:rPr>
+              <a:t>Students and teachers can apply to an existing institution, while administrators also have the option to register a new one.</a:t>
+            </a:r>
+            <a:br>
+              <a:rPr lang="en-US" b="0" dirty="0">
+                <a:effectLst/>
+              </a:rPr>
+            </a:br>
+            <a:endParaRPr lang="hu-HU" b="0" dirty="0">
+              <a:effectLst/>
+            </a:endParaRPr>
+          </a:p>
+          <a:p>
+            <a:pPr marL="158750" indent="0" rtl="0">
+              <a:buNone/>
+            </a:pPr>
+            <a:r>
+              <a:rPr lang="hu-HU" b="0" dirty="0">
+                <a:effectLst/>
+              </a:rPr>
+              <a:t>--Login: </a:t>
+            </a:r>
+            <a:r>
+              <a:rPr lang="hu-HU" b="0" dirty="0" err="1">
+                <a:effectLst/>
+              </a:rPr>
+              <a:t>Admin</a:t>
+            </a:r>
+            <a:r>
+              <a:rPr lang="hu-HU" b="0" dirty="0">
+                <a:effectLst/>
+              </a:rPr>
+              <a:t> fiók--</a:t>
+            </a:r>
+            <a:endParaRPr lang="en-US" b="0" dirty="0">
+              <a:effectLst/>
+            </a:endParaRPr>
+          </a:p>
+          <a:p>
+            <a:pPr marL="158750" indent="0" rtl="0">
+              <a:buNone/>
+            </a:pPr>
+            <a:r>
+              <a:rPr lang="hu-HU" sz="1100" b="0" i="0" u="none" strike="noStrike" cap="none" dirty="0">
+                <a:solidFill>
+                  <a:srgbClr val="000000"/>
+                </a:solidFill>
+                <a:effectLst/>
+                <a:latin typeface="Arial"/>
+                <a:ea typeface="Arial"/>
+                <a:cs typeface="Arial"/>
+                <a:sym typeface="Arial"/>
+              </a:rPr>
+              <a:t>F</a:t>
+            </a:r>
+            <a:r>
+              <a:rPr lang="en-US" sz="1100" b="0" i="0" u="none" strike="noStrike" cap="none" dirty="0">
+                <a:solidFill>
+                  <a:srgbClr val="000000"/>
+                </a:solidFill>
+                <a:effectLst/>
+                <a:latin typeface="Arial"/>
+                <a:ea typeface="Arial"/>
+                <a:cs typeface="Arial"/>
+                <a:sym typeface="Arial"/>
+              </a:rPr>
+              <a:t>or today’s demo, we continue with a pre-created sample administrator account to demonstrate the workflow.</a:t>
+            </a:r>
+            <a:endParaRPr lang="hu-HU" sz="1100" b="0" i="0" u="none" strike="noStrike" cap="none" dirty="0">
+              <a:solidFill>
+                <a:srgbClr val="000000"/>
+              </a:solidFill>
+              <a:effectLst/>
+              <a:latin typeface="Arial"/>
+              <a:ea typeface="Arial"/>
+              <a:cs typeface="Arial"/>
+              <a:sym typeface="Arial"/>
+            </a:endParaRPr>
+          </a:p>
+          <a:p>
+            <a:pPr marL="158750" indent="0" rtl="0">
+              <a:buNone/>
+            </a:pPr>
+            <a:endParaRPr lang="hu-HU" sz="1100" b="0" i="0" u="none" strike="noStrike" cap="none" dirty="0">
+              <a:solidFill>
+                <a:srgbClr val="000000"/>
+              </a:solidFill>
+              <a:effectLst/>
+              <a:latin typeface="Arial"/>
+              <a:ea typeface="Arial"/>
+              <a:cs typeface="Arial"/>
+              <a:sym typeface="Arial"/>
+            </a:endParaRPr>
+          </a:p>
+          <a:p>
+            <a:pPr marL="158750" indent="0" rtl="0">
+              <a:buNone/>
+            </a:pPr>
+            <a:r>
+              <a:rPr lang="hu-HU" sz="1100" b="0" i="0" u="none" strike="noStrike" cap="none" dirty="0">
+                <a:solidFill>
+                  <a:srgbClr val="000000"/>
+                </a:solidFill>
+                <a:effectLst/>
+                <a:latin typeface="Arial"/>
+                <a:cs typeface="Arial"/>
+                <a:sym typeface="Arial"/>
+              </a:rPr>
+              <a:t>--</a:t>
+            </a:r>
+            <a:r>
+              <a:rPr lang="hu-HU" sz="1100" b="0" i="0" u="none" strike="noStrike" cap="none" dirty="0" err="1">
+                <a:solidFill>
+                  <a:srgbClr val="000000"/>
+                </a:solidFill>
+                <a:effectLst/>
+                <a:latin typeface="Arial"/>
+                <a:cs typeface="Arial"/>
+                <a:sym typeface="Arial"/>
+              </a:rPr>
+              <a:t>Admin</a:t>
+            </a:r>
+            <a:r>
+              <a:rPr lang="hu-HU" sz="1100" b="0" i="0" u="none" strike="noStrike" cap="none" dirty="0">
+                <a:solidFill>
+                  <a:srgbClr val="000000"/>
+                </a:solidFill>
+                <a:effectLst/>
+                <a:latin typeface="Arial"/>
+                <a:cs typeface="Arial"/>
+                <a:sym typeface="Arial"/>
+              </a:rPr>
+              <a:t> felület--</a:t>
+            </a:r>
+            <a:endParaRPr lang="en-US" b="0" dirty="0">
+              <a:effectLst/>
+            </a:endParaRPr>
+          </a:p>
+          <a:p>
+            <a:pPr marL="158750" indent="0" rtl="0">
+              <a:buNone/>
+            </a:pPr>
+            <a:r>
+              <a:rPr lang="en-US" sz="1100" b="0" i="0" u="none" strike="noStrike" cap="none" dirty="0">
+                <a:solidFill>
+                  <a:srgbClr val="000000"/>
+                </a:solidFill>
+                <a:effectLst/>
+                <a:latin typeface="Arial"/>
+                <a:ea typeface="Arial"/>
+                <a:cs typeface="Arial"/>
+                <a:sym typeface="Arial"/>
+              </a:rPr>
+              <a:t>After logging in, we can see how the administrator manages incoming requests and assigns users to classes.</a:t>
+            </a:r>
+            <a:endParaRPr lang="hu-HU" sz="1100" b="0" i="0" u="none" strike="noStrike" cap="none" dirty="0">
+              <a:solidFill>
+                <a:srgbClr val="000000"/>
+              </a:solidFill>
+              <a:effectLst/>
+              <a:latin typeface="Arial"/>
+              <a:ea typeface="Arial"/>
+              <a:cs typeface="Arial"/>
+              <a:sym typeface="Arial"/>
+            </a:endParaRPr>
+          </a:p>
+          <a:p>
+            <a:pPr marL="158750" indent="0" rtl="0">
+              <a:buNone/>
+            </a:pPr>
+            <a:endParaRPr lang="hu-HU" sz="1100" b="0" i="0" u="none" strike="noStrike" cap="none" dirty="0">
+              <a:solidFill>
+                <a:srgbClr val="000000"/>
+              </a:solidFill>
+              <a:effectLst/>
+              <a:latin typeface="Arial"/>
+              <a:ea typeface="Arial"/>
+              <a:cs typeface="Arial"/>
+              <a:sym typeface="Arial"/>
+            </a:endParaRPr>
+          </a:p>
+          <a:p>
+            <a:pPr marL="158750" indent="0" rtl="0">
+              <a:buNone/>
+            </a:pPr>
+            <a:r>
+              <a:rPr lang="hu-HU" sz="1100" b="0" i="0" u="none" strike="noStrike" cap="none" dirty="0">
+                <a:solidFill>
+                  <a:srgbClr val="000000"/>
+                </a:solidFill>
+                <a:effectLst/>
+                <a:latin typeface="Arial"/>
+                <a:cs typeface="Arial"/>
+                <a:sym typeface="Arial"/>
+              </a:rPr>
+              <a:t>--</a:t>
+            </a:r>
+            <a:r>
+              <a:rPr lang="hu-HU" sz="1100" b="0" i="0" u="none" strike="noStrike" cap="none" dirty="0" err="1">
+                <a:solidFill>
+                  <a:srgbClr val="000000"/>
+                </a:solidFill>
+                <a:effectLst/>
+                <a:latin typeface="Arial"/>
+                <a:cs typeface="Arial"/>
+                <a:sym typeface="Arial"/>
+              </a:rPr>
+              <a:t>User-dashboard</a:t>
+            </a:r>
+            <a:r>
+              <a:rPr lang="hu-HU" sz="1100" b="0" i="0" u="none" strike="noStrike" cap="none" dirty="0">
+                <a:solidFill>
+                  <a:srgbClr val="000000"/>
+                </a:solidFill>
+                <a:effectLst/>
+                <a:latin typeface="Arial"/>
+                <a:cs typeface="Arial"/>
+                <a:sym typeface="Arial"/>
+              </a:rPr>
+              <a:t>--</a:t>
+            </a:r>
+            <a:endParaRPr lang="en-US" b="0" dirty="0">
+              <a:effectLst/>
+            </a:endParaRPr>
+          </a:p>
+          <a:p>
+            <a:pPr marL="158750" indent="0" rtl="0">
+              <a:buNone/>
+            </a:pPr>
+            <a:r>
+              <a:rPr lang="en-US" sz="1100" b="0" i="0" u="none" strike="noStrike" cap="none" dirty="0">
+                <a:solidFill>
+                  <a:srgbClr val="000000"/>
+                </a:solidFill>
+                <a:effectLst/>
+                <a:latin typeface="Arial"/>
+                <a:ea typeface="Arial"/>
+                <a:cs typeface="Arial"/>
+                <a:sym typeface="Arial"/>
+              </a:rPr>
+              <a:t>Once the requests are approved, the platform’s main features become accessible.</a:t>
+            </a:r>
+            <a:endParaRPr lang="hu-HU" sz="1100" b="0" i="0" u="none" strike="noStrike" cap="none" dirty="0">
+              <a:solidFill>
+                <a:srgbClr val="000000"/>
+              </a:solidFill>
+              <a:effectLst/>
+              <a:latin typeface="Arial"/>
+              <a:ea typeface="Arial"/>
               <a:cs typeface="Arial"/>
               <a:sym typeface="Arial"/>
             </a:endParaRPr>
@@ -2272,6 +2705,20 @@
             <a:pPr marL="158750" indent="0" rtl="0">
               <a:buNone/>
             </a:pPr>
+            <a:endParaRPr lang="hu-HU" sz="1100" b="0" i="0" u="none" strike="noStrike" cap="none" dirty="0">
+              <a:solidFill>
+                <a:srgbClr val="000000"/>
+              </a:solidFill>
+              <a:effectLst/>
+              <a:latin typeface="Arial"/>
+              <a:cs typeface="Arial"/>
+              <a:sym typeface="Arial"/>
+            </a:endParaRPr>
+          </a:p>
+          <a:p>
+            <a:pPr marL="158750" indent="0" rtl="0">
+              <a:buNone/>
+            </a:pPr>
             <a:r>
               <a:rPr lang="hu-HU" sz="1100" b="0" i="0" u="none" strike="noStrike" cap="none" dirty="0">
                 <a:solidFill>
@@ -2328,8 +2775,15 @@
               </a:rPr>
               <a:t> section, users can filter events by type and status or switch to a calendar view.</a:t>
             </a:r>
-            <a:endParaRPr lang="en-US" b="0" dirty="0">
+            <a:endParaRPr lang="hu-HU" sz="1100" b="0" i="0" u="none" strike="noStrike" cap="none" dirty="0">
+              <a:solidFill>
+                <a:srgbClr val="000000"/>
+              </a:solidFill>
               <a:effectLst/>
+              <a:latin typeface="Arial"/>
+              <a:ea typeface="Arial"/>
+              <a:cs typeface="Arial"/>
+              <a:sym typeface="Arial"/>
             </a:endParaRPr>
           </a:p>
           <a:p>
@@ -2493,6 +2947,23 @@
             <a:br>
               <a:rPr lang="en-US" dirty="0"/>
             </a:br>
+            <a:endParaRPr lang="hu-HU" dirty="0"/>
+          </a:p>
+          <a:p>
+            <a:pPr marL="158750" indent="0" rtl="0">
+              <a:buNone/>
+            </a:pPr>
+            <a:r>
+              <a:rPr lang="hu-HU" dirty="0"/>
+              <a:t>Samu:</a:t>
+            </a:r>
+            <a:br>
+              <a:rPr lang="hu-HU" dirty="0"/>
+            </a:br>
+            <a:r>
+              <a:rPr lang="hu-HU" dirty="0"/>
+              <a:t>Ennyit tudtunk most megmutatni a munkákból, az esetleges kérdéseket szívesen fogadjuk.</a:t>
+            </a:r>
             <a:br>
               <a:rPr lang="en-US" dirty="0"/>
             </a:br>
@@ -2720,61 +3191,123 @@
               <a:buNone/>
             </a:pPr>
             <a:r>
+              <a:rPr lang="hu-HU" sz="1100" b="0" i="0" u="none" strike="noStrike" cap="none" dirty="0">
+                <a:solidFill>
+                  <a:srgbClr val="000000"/>
+                </a:solidFill>
+                <a:effectLst/>
+                <a:latin typeface="Arial"/>
+                <a:ea typeface="Arial"/>
+                <a:cs typeface="Arial"/>
+                <a:sym typeface="Arial"/>
+              </a:rPr>
+              <a:t>A projekt témaválasztásának oka egy valós, mindennapi probléma volt az iskolai működésben.</a:t>
+            </a:r>
+            <a:br>
               <a:rPr lang="hu-HU" dirty="0"/>
-              <a:t>A projekt témaválasztásának oka egy valós, mindennapi probléma volt az iskolai működésben.</a:t>
-            </a:r>
-          </a:p>
-          <a:p>
-            <a:pPr marL="0" lvl="0" indent="0" algn="l" rtl="0">
-              <a:spcBef>
-                <a:spcPts val="0"/>
-              </a:spcBef>
-              <a:spcAft>
-                <a:spcPts val="0"/>
-              </a:spcAft>
-              <a:buNone/>
-            </a:pPr>
-            <a:r>
+            </a:br>
+            <a:r>
+              <a:rPr lang="hu-HU" sz="1100" b="0" i="0" u="none" strike="noStrike" cap="none" dirty="0">
+                <a:solidFill>
+                  <a:srgbClr val="000000"/>
+                </a:solidFill>
+                <a:effectLst/>
+                <a:latin typeface="Arial"/>
+                <a:ea typeface="Arial"/>
+                <a:cs typeface="Arial"/>
+                <a:sym typeface="Arial"/>
+              </a:rPr>
+              <a:t>A tájékoztatás és az események szervezése több külön felületen történt, ezért a folyamatok nehezen voltak átláthatók.</a:t>
+            </a:r>
+            <a:br>
               <a:rPr lang="hu-HU" dirty="0"/>
-              <a:t>A kommunikáció és az események kezelése több külön felületen történt, ami nehezen átláthatóvá tette a folyamatokat.</a:t>
-            </a:r>
-          </a:p>
-          <a:p>
-            <a:pPr marL="0" lvl="0" indent="0" algn="l" rtl="0">
-              <a:spcBef>
-                <a:spcPts val="0"/>
-              </a:spcBef>
-              <a:spcAft>
-                <a:spcPts val="0"/>
-              </a:spcAft>
-              <a:buNone/>
-            </a:pPr>
-            <a:r>
+            </a:br>
+            <a:r>
+              <a:rPr lang="hu-HU" sz="1100" b="0" i="0" u="none" strike="noStrike" cap="none" dirty="0">
+                <a:solidFill>
+                  <a:srgbClr val="000000"/>
+                </a:solidFill>
+                <a:effectLst/>
+                <a:latin typeface="Arial"/>
+                <a:ea typeface="Arial"/>
+                <a:cs typeface="Arial"/>
+                <a:sym typeface="Arial"/>
+              </a:rPr>
+              <a:t>Erre ad választ az </a:t>
+            </a:r>
+            <a:r>
+              <a:rPr lang="hu-HU" sz="1100" b="0" i="0" u="none" strike="noStrike" cap="none" dirty="0" err="1">
+                <a:solidFill>
+                  <a:srgbClr val="000000"/>
+                </a:solidFill>
+                <a:effectLst/>
+                <a:latin typeface="Arial"/>
+                <a:ea typeface="Arial"/>
+                <a:cs typeface="Arial"/>
+                <a:sym typeface="Arial"/>
+              </a:rPr>
+              <a:t>EseményTér</a:t>
+            </a:r>
+            <a:r>
+              <a:rPr lang="hu-HU" sz="1100" b="0" i="0" u="none" strike="noStrike" cap="none" dirty="0">
+                <a:solidFill>
+                  <a:srgbClr val="000000"/>
+                </a:solidFill>
+                <a:effectLst/>
+                <a:latin typeface="Arial"/>
+                <a:ea typeface="Arial"/>
+                <a:cs typeface="Arial"/>
+                <a:sym typeface="Arial"/>
+              </a:rPr>
+              <a:t>, egy iskolai eseménykezelő webalkalmazás.</a:t>
+            </a:r>
+            <a:br>
               <a:rPr lang="hu-HU" dirty="0"/>
-              <a:t>Erre ad választ az </a:t>
-            </a:r>
-            <a:r>
-              <a:rPr lang="hu-HU" dirty="0" err="1"/>
-              <a:t>EseményTér</a:t>
-            </a:r>
-            <a:r>
+            </a:br>
+            <a:r>
+              <a:rPr lang="hu-HU" sz="1100" b="0" i="0" u="none" strike="noStrike" cap="none" dirty="0">
+                <a:solidFill>
+                  <a:srgbClr val="000000"/>
+                </a:solidFill>
+                <a:effectLst/>
+                <a:latin typeface="Arial"/>
+                <a:ea typeface="Arial"/>
+                <a:cs typeface="Arial"/>
+                <a:sym typeface="Arial"/>
+              </a:rPr>
+              <a:t>A célja, hogy egy közös rendszerben legyen kezelhető minden fontos program és kapcsolódó információ az iskola szereplői számára.</a:t>
+            </a:r>
+            <a:br>
               <a:rPr lang="hu-HU" dirty="0"/>
-              <a:t>: egy egységes webes rendszer, ahol központilag kezelhetők az események és a kapcsolódó információk.</a:t>
-            </a:r>
-          </a:p>
-          <a:p>
-            <a:pPr marL="0" lvl="0" indent="0" algn="l" rtl="0">
-              <a:spcBef>
-                <a:spcPts val="0"/>
-              </a:spcBef>
-              <a:spcAft>
-                <a:spcPts val="0"/>
-              </a:spcAft>
-              <a:buNone/>
-            </a:pPr>
-            <a:r>
+            </a:br>
+            <a:r>
+              <a:rPr lang="hu-HU" sz="1100" b="0" i="0" u="none" strike="noStrike" cap="none" dirty="0">
+                <a:solidFill>
+                  <a:srgbClr val="000000"/>
+                </a:solidFill>
+                <a:effectLst/>
+                <a:latin typeface="Arial"/>
+                <a:ea typeface="Arial"/>
+                <a:cs typeface="Arial"/>
+                <a:sym typeface="Arial"/>
+              </a:rPr>
+              <a:t>A projekt lényege, hogy az eseményszervezés gyorsabbá, egységesebbé és központilag követhetővé váljon, akár egyetlen iskola, akár több intézmény esetén.</a:t>
+            </a:r>
+            <a:br>
               <a:rPr lang="hu-HU" dirty="0"/>
-              <a:t>Így a kommunikáció gyorsabb, a folyamatok követhetőbbek, és minden szereplő ugyanazon rendszerben dolgozik.</a:t>
+            </a:br>
+            <a:r>
+              <a:rPr lang="hu-HU" sz="1100" b="0" i="0" u="none" strike="noStrike" cap="none" dirty="0">
+                <a:solidFill>
+                  <a:srgbClr val="000000"/>
+                </a:solidFill>
+                <a:effectLst/>
+                <a:latin typeface="Arial"/>
+                <a:ea typeface="Arial"/>
+                <a:cs typeface="Arial"/>
+                <a:sym typeface="Arial"/>
+              </a:rPr>
+              <a:t>Ennek eredményeként a folyamatok jól nyomon követhetők, és minden szereplő ugyanabban a rendszerben dolgozik.</a:t>
             </a:r>
             <a:endParaRPr dirty="0"/>
           </a:p>
@@ -19849,10 +20382,10 @@
       </p:pic>
       <p:pic>
         <p:nvPicPr>
-          <p:cNvPr id="5" name="Kép 4">
+          <p:cNvPr id="4" name="Kép 3">
             <a:extLst>
               <a:ext uri="{FF2B5EF4-FFF2-40B4-BE49-F238E27FC236}">
-                <a16:creationId xmlns:a16="http://schemas.microsoft.com/office/drawing/2014/main" id="{A7331664-2776-8924-FDA4-4FED695B88D2}"/>
+                <a16:creationId xmlns:a16="http://schemas.microsoft.com/office/drawing/2014/main" id="{B5932166-5D0C-0537-DD6D-F2EF3840186F}"/>
               </a:ext>
             </a:extLst>
           </p:cNvPr>
@@ -19869,8 +20402,8 @@
         </p:blipFill>
         <p:spPr>
           <a:xfrm>
-            <a:off x="9096967" y="169611"/>
-            <a:ext cx="2889768" cy="6518778"/>
+            <a:off x="9077039" y="169610"/>
+            <a:ext cx="2872430" cy="6518779"/>
           </a:xfrm>
           <a:prstGeom prst="rect">
             <a:avLst/>

--- a/dokumentumok/Prezentáció_NagyLevedSamuel_TothTamas.pptx
+++ b/dokumentumok/Prezentáció_NagyLevedSamuel_TothTamas.pptx
@@ -274,7 +274,7 @@
       <p15:sldGuideLst xmlns:p15="http://schemas.microsoft.com/office/powerpoint/2012/main"/>
     </p:ext>
     <p:ext uri="GoogleSlidesCustomDataVersion2">
-      <go:slidesCustomData xmlns:go="http://customooxmlschemas.google.com/" xmlns:ahyp="http://schemas.microsoft.com/office/drawing/2018/hyperlinkcolor" xmlns:p15="http://schemas.microsoft.com/office/powerpoint/2012/main" xmlns:p14="http://schemas.microsoft.com/office/powerpoint/2010/main" xmlns:com="http://schemas.openxmlformats.org/drawingml/2006/compatibility" xmlns:pvml="urn:schemas-microsoft-com:office:powerpoint" xmlns:v="urn:schemas-microsoft-com:vml" xmlns:o="urn:schemas-microsoft-com:office:office" xmlns:dgm="http://schemas.openxmlformats.org/drawingml/2006/diagram" xmlns:c="http://schemas.openxmlformats.org/drawingml/2006/chart" xmlns:mv="urn:schemas-microsoft-com:mac:vml" xmlns:mc="http://schemas.openxmlformats.org/markup-compatibility/2006" xmlns="" r:id="rId24" roundtripDataSignature="AMtx7mj67VHAuCHlscAUacmt/Mbt/wFFlA=="/>
+      <go:slidesCustomData xmlns="" xmlns:mc="http://schemas.openxmlformats.org/markup-compatibility/2006" xmlns:mv="urn:schemas-microsoft-com:mac:vml" xmlns:c="http://schemas.openxmlformats.org/drawingml/2006/chart" xmlns:dgm="http://schemas.openxmlformats.org/drawingml/2006/diagram" xmlns:o="urn:schemas-microsoft-com:office:office" xmlns:v="urn:schemas-microsoft-com:vml" xmlns:pvml="urn:schemas-microsoft-com:office:powerpoint" xmlns:com="http://schemas.openxmlformats.org/drawingml/2006/compatibility" xmlns:p14="http://schemas.microsoft.com/office/powerpoint/2010/main" xmlns:p15="http://schemas.microsoft.com/office/powerpoint/2012/main" xmlns:ahyp="http://schemas.microsoft.com/office/drawing/2018/hyperlinkcolor" xmlns:go="http://customooxmlschemas.google.com/" r:id="rId24" roundtripDataSignature="AMtx7mj67VHAuCHlscAUacmt/Mbt/wFFlA=="/>
     </p:ext>
   </p:extLst>
 </p:presentation>
@@ -4318,23 +4318,10 @@
                 <a:cs typeface="Arial"/>
                 <a:sym typeface="Arial"/>
               </a:rPr>
-              <a:t>A modellek és az </a:t>
-            </a:r>
-            <a:r>
-              <a:rPr lang="hu-HU" sz="1100" b="0" i="0" u="none" strike="noStrike" cap="none">
-                <a:solidFill>
-                  <a:srgbClr val="000000"/>
-                </a:solidFill>
-                <a:effectLst/>
-                <a:latin typeface="Arial"/>
-                <a:ea typeface="Arial"/>
-                <a:cs typeface="Arial"/>
-                <a:sym typeface="Arial"/>
-              </a:rPr>
-              <a:t>ORM (azaz </a:t>
-            </a:r>
-            <a:r>
-              <a:rPr lang="hu-HU" sz="1100" b="0" i="0" u="sng" strike="noStrike" cap="none">
+              <a:t>A modellek és az ORM (azaz </a:t>
+            </a:r>
+            <a:r>
+              <a:rPr lang="hu-HU" sz="1100" b="0" i="0" u="sng" strike="noStrike" cap="none" dirty="0">
                 <a:solidFill>
                   <a:srgbClr val="000000"/>
                 </a:solidFill>
@@ -4348,7 +4335,7 @@
               <a:t>objektum-relációs leképezés</a:t>
             </a:r>
             <a:r>
-              <a:rPr lang="hu-HU" sz="1100" b="0" i="0" u="none" strike="noStrike" cap="none">
+              <a:rPr lang="hu-HU" sz="1100" b="0" i="0" u="none" strike="noStrike" cap="none" dirty="0">
                 <a:solidFill>
                   <a:srgbClr val="000000"/>
                 </a:solidFill>
@@ -4358,8 +4345,11 @@
                 <a:cs typeface="Arial"/>
                 <a:sym typeface="Arial"/>
               </a:rPr>
-              <a:t> egy olyan programozási technika, amely lehetővé teszi a fejlesztők számára, hogy az objektumorientált kódban használt objektumokat közvetlenül relációs adatbázisokba) az </a:t>
-            </a:r>
+              <a:t> egy olyan programozási technika, amely lehetővé teszi a fejlesztők számára), az adatbázis-műveleteket és relációkat biztosítják.</a:t>
+            </a:r>
+            <a:br>
+              <a:rPr lang="hu-HU" dirty="0"/>
+            </a:br>
             <a:r>
               <a:rPr lang="hu-HU" sz="1100" b="0" i="0" u="none" strike="noStrike" cap="none" dirty="0">
                 <a:solidFill>
@@ -4371,13 +4361,10 @@
                 <a:cs typeface="Arial"/>
                 <a:sym typeface="Arial"/>
               </a:rPr>
-              <a:t>adatbázis-műveleteket és relációkat biztosítják.</a:t>
-            </a:r>
-            <a:br>
-              <a:rPr lang="hu-HU" dirty="0"/>
-            </a:br>
-            <a:r>
-              <a:rPr lang="hu-HU" sz="1100" b="0" i="0" u="none" strike="noStrike" cap="none" dirty="0">
+              <a:t>A </a:t>
+            </a:r>
+            <a:r>
+              <a:rPr lang="hu-HU" sz="1100" b="0" i="0" u="none" strike="noStrike" cap="none" dirty="0" err="1">
                 <a:solidFill>
                   <a:srgbClr val="000000"/>
                 </a:solidFill>
@@ -4387,10 +4374,10 @@
                 <a:cs typeface="Arial"/>
                 <a:sym typeface="Arial"/>
               </a:rPr>
-              <a:t>A </a:t>
-            </a:r>
-            <a:r>
-              <a:rPr lang="hu-HU" sz="1100" b="0" i="0" u="none" strike="noStrike" cap="none" dirty="0" err="1">
+              <a:t>middleware</a:t>
+            </a:r>
+            <a:r>
+              <a:rPr lang="hu-HU" sz="1100" b="0" i="0" u="none" strike="noStrike" cap="none" dirty="0">
                 <a:solidFill>
                   <a:srgbClr val="000000"/>
                 </a:solidFill>
@@ -4400,10 +4387,10 @@
                 <a:cs typeface="Arial"/>
                 <a:sym typeface="Arial"/>
               </a:rPr>
-              <a:t>middleware</a:t>
-            </a:r>
-            <a:r>
-              <a:rPr lang="hu-HU" sz="1100" b="0" i="0" u="none" strike="noStrike" cap="none" dirty="0">
+              <a:t> és az </a:t>
+            </a:r>
+            <a:r>
+              <a:rPr lang="hu-HU" sz="1100" b="0" i="0" u="none" strike="noStrike" cap="none" dirty="0" err="1">
                 <a:solidFill>
                   <a:srgbClr val="000000"/>
                 </a:solidFill>
@@ -4413,10 +4400,10 @@
                 <a:cs typeface="Arial"/>
                 <a:sym typeface="Arial"/>
               </a:rPr>
-              <a:t> és az </a:t>
-            </a:r>
-            <a:r>
-              <a:rPr lang="hu-HU" sz="1100" b="0" i="0" u="none" strike="noStrike" cap="none" dirty="0" err="1">
+              <a:t>autentikációs</a:t>
+            </a:r>
+            <a:r>
+              <a:rPr lang="hu-HU" sz="1100" b="0" i="0" u="none" strike="noStrike" cap="none" dirty="0">
                 <a:solidFill>
                   <a:srgbClr val="000000"/>
                 </a:solidFill>
@@ -4426,8 +4413,11 @@
                 <a:cs typeface="Arial"/>
                 <a:sym typeface="Arial"/>
               </a:rPr>
-              <a:t>autentikációs</a:t>
-            </a:r>
+              <a:t> réteg a biztonságos, szerepköralapú hozzáférést adja.</a:t>
+            </a:r>
+            <a:br>
+              <a:rPr lang="hu-HU" dirty="0"/>
+            </a:br>
             <a:r>
               <a:rPr lang="hu-HU" sz="1100" b="0" i="0" u="none" strike="noStrike" cap="none" dirty="0">
                 <a:solidFill>
@@ -4439,11 +4429,88 @@
                 <a:cs typeface="Arial"/>
                 <a:sym typeface="Arial"/>
               </a:rPr>
-              <a:t> réteg a biztonságos, szerepköralapú hozzáférést adja.</a:t>
-            </a:r>
-            <a:br>
+              <a:t>Ez a struktúra jól skálázható, átlátható és könnyen tesztelhető.</a:t>
+            </a:r>
+          </a:p>
+          <a:p>
+            <a:pPr marL="0" lvl="0" indent="0" algn="l" rtl="0">
+              <a:spcBef>
+                <a:spcPts val="0"/>
+              </a:spcBef>
+              <a:spcAft>
+                <a:spcPts val="0"/>
+              </a:spcAft>
+              <a:buNone/>
+            </a:pPr>
+            <a:r>
+              <a:rPr lang="hu-HU" sz="1100" b="0" i="0" u="none" strike="noStrike" cap="none" dirty="0">
+                <a:solidFill>
+                  <a:srgbClr val="000000"/>
+                </a:solidFill>
+                <a:effectLst/>
+                <a:latin typeface="Arial"/>
+                <a:cs typeface="Arial"/>
+                <a:sym typeface="Arial"/>
+              </a:rPr>
+              <a:t>#######</a:t>
+            </a:r>
+          </a:p>
+          <a:p>
+            <a:pPr marL="0" lvl="0" indent="0" algn="l" rtl="0">
+              <a:spcBef>
+                <a:spcPts val="0"/>
+              </a:spcBef>
+              <a:spcAft>
+                <a:spcPts val="0"/>
+              </a:spcAft>
+              <a:buNone/>
+            </a:pPr>
+            <a:r>
               <a:rPr lang="hu-HU" dirty="0"/>
-            </a:br>
+              <a:t>A backendünk réteges felépítésű, ezért átlátható, jól bővíthető és könnyen karbantartható.</a:t>
+            </a:r>
+          </a:p>
+          <a:p>
+            <a:pPr marL="0" lvl="0" indent="0" algn="l" rtl="0">
+              <a:spcBef>
+                <a:spcPts val="0"/>
+              </a:spcBef>
+              <a:spcAft>
+                <a:spcPts val="0"/>
+              </a:spcAft>
+              <a:buNone/>
+            </a:pPr>
+            <a:r>
+              <a:rPr lang="hu-HU" dirty="0"/>
+              <a:t>A </a:t>
+            </a:r>
+            <a:r>
+              <a:rPr lang="hu-HU" dirty="0" err="1"/>
+              <a:t>routing</a:t>
+            </a:r>
+            <a:r>
+              <a:rPr lang="hu-HU" dirty="0"/>
+              <a:t> réteg a beérkező kéréseket a megfelelő </a:t>
+            </a:r>
+            <a:r>
+              <a:rPr lang="hu-HU" dirty="0" err="1"/>
+              <a:t>controllerhez</a:t>
+            </a:r>
+            <a:r>
+              <a:rPr lang="hu-HU" dirty="0"/>
+              <a:t> irányítja.</a:t>
+            </a:r>
+          </a:p>
+          <a:p>
+            <a:pPr marL="0" lvl="0" indent="0" algn="l" rtl="0">
+              <a:spcBef>
+                <a:spcPts val="0"/>
+              </a:spcBef>
+              <a:spcAft>
+                <a:spcPts val="0"/>
+              </a:spcAft>
+              <a:buNone/>
+            </a:pPr>
             <a:r>
               <a:rPr lang="hu-HU" sz="1100" b="0" i="0" u="none" strike="noStrike" cap="none" dirty="0">
                 <a:solidFill>
@@ -4455,7 +4522,94 @@
                 <a:cs typeface="Arial"/>
                 <a:sym typeface="Arial"/>
               </a:rPr>
-              <a:t>Ez a struktúra jól skálázható, átlátható és könnyen tesztelhető.</a:t>
+              <a:t>A </a:t>
+            </a:r>
+            <a:r>
+              <a:rPr lang="hu-HU" sz="1100" b="0" i="0" u="none" strike="noStrike" cap="none" dirty="0" err="1">
+                <a:solidFill>
+                  <a:srgbClr val="000000"/>
+                </a:solidFill>
+                <a:effectLst/>
+                <a:latin typeface="Arial"/>
+                <a:ea typeface="Arial"/>
+                <a:cs typeface="Arial"/>
+                <a:sym typeface="Arial"/>
+              </a:rPr>
+              <a:t>controllerek</a:t>
+            </a:r>
+            <a:r>
+              <a:rPr lang="hu-HU" sz="1100" b="0" i="0" u="none" strike="noStrike" cap="none" dirty="0">
+                <a:solidFill>
+                  <a:srgbClr val="000000"/>
+                </a:solidFill>
+                <a:effectLst/>
+                <a:latin typeface="Arial"/>
+                <a:ea typeface="Arial"/>
+                <a:cs typeface="Arial"/>
+                <a:sym typeface="Arial"/>
+              </a:rPr>
+              <a:t> végzik a validációt és a jogosultság-ellenőrzést, majd a rendszer működési szabályai szerint feldolgozzák a kéréseket.</a:t>
+            </a:r>
+          </a:p>
+          <a:p>
+            <a:pPr marL="0" lvl="0" indent="0" algn="l" rtl="0">
+              <a:spcBef>
+                <a:spcPts val="0"/>
+              </a:spcBef>
+              <a:spcAft>
+                <a:spcPts val="0"/>
+              </a:spcAft>
+              <a:buNone/>
+            </a:pPr>
+            <a:r>
+              <a:rPr lang="hu-HU" dirty="0"/>
+              <a:t>Az adatkezelést a modellek és az ORM biztosítja, ami egyszerűbbé teszi az adatbázis-műveletek és kapcsolatok kezelését.</a:t>
+            </a:r>
+          </a:p>
+          <a:p>
+            <a:pPr marL="0" lvl="0" indent="0" algn="l" rtl="0">
+              <a:spcBef>
+                <a:spcPts val="0"/>
+              </a:spcBef>
+              <a:spcAft>
+                <a:spcPts val="0"/>
+              </a:spcAft>
+              <a:buNone/>
+            </a:pPr>
+            <a:r>
+              <a:rPr lang="hu-HU" dirty="0"/>
+              <a:t>A </a:t>
+            </a:r>
+            <a:r>
+              <a:rPr lang="hu-HU" dirty="0" err="1"/>
+              <a:t>middleware</a:t>
+            </a:r>
+            <a:r>
+              <a:rPr lang="hu-HU" dirty="0"/>
+              <a:t> és az </a:t>
+            </a:r>
+            <a:r>
+              <a:rPr lang="hu-HU" dirty="0" err="1"/>
+              <a:t>autentikációs</a:t>
+            </a:r>
+            <a:r>
+              <a:rPr lang="hu-HU" dirty="0"/>
+              <a:t> réteg a kérések védelméről és a biztonságos hozzáférésről gondoskodik.</a:t>
+            </a:r>
+          </a:p>
+          <a:p>
+            <a:pPr marL="0" lvl="0" indent="0" algn="l" rtl="0">
+              <a:spcBef>
+                <a:spcPts val="0"/>
+              </a:spcBef>
+              <a:spcAft>
+                <a:spcPts val="0"/>
+              </a:spcAft>
+              <a:buNone/>
+            </a:pPr>
+            <a:r>
+              <a:rPr lang="hu-HU" dirty="0"/>
+              <a:t>Ez az architektúra jól skálázható, stabil alapot ad a fejlesztéshez, és támogatja a hatékony tesztelést is.</a:t>
             </a:r>
             <a:endParaRPr dirty="0"/>
           </a:p>
@@ -5116,6 +5270,152 @@
                 <a:sym typeface="Arial"/>
               </a:rPr>
               <a:t> jogosultsághoz kötöttek, a regisztrációt pedig email-verifikáció védi.</a:t>
+            </a:r>
+          </a:p>
+          <a:p>
+            <a:pPr marL="0" lvl="0" indent="0" algn="l" rtl="0">
+              <a:spcBef>
+                <a:spcPts val="0"/>
+              </a:spcBef>
+              <a:spcAft>
+                <a:spcPts val="0"/>
+              </a:spcAft>
+              <a:buNone/>
+            </a:pPr>
+            <a:r>
+              <a:rPr lang="hu-HU" sz="1100" b="0" i="0" u="none" strike="noStrike" cap="none" dirty="0">
+                <a:solidFill>
+                  <a:srgbClr val="000000"/>
+                </a:solidFill>
+                <a:effectLst/>
+                <a:latin typeface="Arial"/>
+                <a:ea typeface="Arial"/>
+                <a:cs typeface="Arial"/>
+                <a:sym typeface="Arial"/>
+              </a:rPr>
+              <a:t>###########</a:t>
+            </a:r>
+          </a:p>
+          <a:p>
+            <a:pPr marL="0" lvl="0" indent="0" algn="l" rtl="0">
+              <a:spcBef>
+                <a:spcPts val="0"/>
+              </a:spcBef>
+              <a:spcAft>
+                <a:spcPts val="0"/>
+              </a:spcAft>
+              <a:buNone/>
+            </a:pPr>
+            <a:r>
+              <a:rPr lang="hu-HU" sz="1100" b="0" i="0" u="none" strike="noStrike" cap="none" dirty="0">
+                <a:solidFill>
+                  <a:srgbClr val="000000"/>
+                </a:solidFill>
+                <a:effectLst/>
+                <a:latin typeface="Arial"/>
+                <a:ea typeface="Arial"/>
+                <a:cs typeface="Arial"/>
+                <a:sym typeface="Arial"/>
+              </a:rPr>
+              <a:t>A diákok az eseményekben vesznek részt: jelentkezhetnek, visszajelzést adhatnak, szavazhatnak és hozzászólhatnak.</a:t>
+            </a:r>
+          </a:p>
+          <a:p>
+            <a:pPr marL="0" lvl="0" indent="0" algn="l" rtl="0">
+              <a:spcBef>
+                <a:spcPts val="0"/>
+              </a:spcBef>
+              <a:spcAft>
+                <a:spcPts val="0"/>
+              </a:spcAft>
+              <a:buNone/>
+            </a:pPr>
+            <a:r>
+              <a:rPr lang="hu-HU" sz="1100" b="0" i="0" u="none" strike="noStrike" cap="none" dirty="0">
+                <a:solidFill>
+                  <a:srgbClr val="000000"/>
+                </a:solidFill>
+                <a:effectLst/>
+                <a:latin typeface="Arial"/>
+                <a:ea typeface="Arial"/>
+                <a:cs typeface="Arial"/>
+                <a:sym typeface="Arial"/>
+              </a:rPr>
+              <a:t>A tanárok szervezői jogosultságot kapnak: eseményeket hoznak létre, kezelik a szavazásokat és irányítják az osztályszintű folyamatokat.</a:t>
+            </a:r>
+          </a:p>
+          <a:p>
+            <a:pPr marL="0" lvl="0" indent="0" algn="l" rtl="0">
+              <a:spcBef>
+                <a:spcPts val="0"/>
+              </a:spcBef>
+              <a:spcAft>
+                <a:spcPts val="0"/>
+              </a:spcAft>
+              <a:buNone/>
+            </a:pPr>
+            <a:r>
+              <a:rPr lang="hu-HU" sz="1100" b="0" i="0" u="none" strike="noStrike" cap="none" dirty="0">
+                <a:solidFill>
+                  <a:srgbClr val="000000"/>
+                </a:solidFill>
+                <a:effectLst/>
+                <a:latin typeface="Arial"/>
+                <a:ea typeface="Arial"/>
+                <a:cs typeface="Arial"/>
+                <a:sym typeface="Arial"/>
+              </a:rPr>
+              <a:t>Az </a:t>
+            </a:r>
+            <a:r>
+              <a:rPr lang="hu-HU" sz="1100" b="0" i="0" u="none" strike="noStrike" cap="none" dirty="0" err="1">
+                <a:solidFill>
+                  <a:srgbClr val="000000"/>
+                </a:solidFill>
+                <a:effectLst/>
+                <a:latin typeface="Arial"/>
+                <a:ea typeface="Arial"/>
+                <a:cs typeface="Arial"/>
+                <a:sym typeface="Arial"/>
+              </a:rPr>
+              <a:t>adminok</a:t>
+            </a:r>
+            <a:r>
+              <a:rPr lang="hu-HU" sz="1100" b="0" i="0" u="none" strike="noStrike" cap="none" dirty="0">
+                <a:solidFill>
+                  <a:srgbClr val="000000"/>
+                </a:solidFill>
+                <a:effectLst/>
+                <a:latin typeface="Arial"/>
+                <a:ea typeface="Arial"/>
+                <a:cs typeface="Arial"/>
+                <a:sym typeface="Arial"/>
+              </a:rPr>
+              <a:t> a legmagasabb szintű hozzáféréssel rendelkeznek: intézményi beállításokat, felhasználói szerepköröket és kritikus műveleteket kezelnek.</a:t>
+            </a:r>
+          </a:p>
+          <a:p>
+            <a:pPr marL="0" lvl="0" indent="0" algn="l" rtl="0">
+              <a:spcBef>
+                <a:spcPts val="0"/>
+              </a:spcBef>
+              <a:spcAft>
+                <a:spcPts val="0"/>
+              </a:spcAft>
+              <a:buNone/>
+            </a:pPr>
+            <a:r>
+              <a:rPr lang="hu-HU" sz="1100" b="0" i="0" u="none" strike="noStrike" cap="none" dirty="0">
+                <a:solidFill>
+                  <a:srgbClr val="000000"/>
+                </a:solidFill>
+                <a:effectLst/>
+                <a:latin typeface="Arial"/>
+                <a:ea typeface="Arial"/>
+                <a:cs typeface="Arial"/>
+                <a:sym typeface="Arial"/>
+              </a:rPr>
+              <a:t>A regisztráció és az email-verifikáció biztosítja, hogy minden felhasználó a neki megfelelő szerepkörben, ellenőrzött módon használja a rendszert</a:t>
             </a:r>
           </a:p>
         </p:txBody>
